--- a/kubernetes/03_labels_and_deployments.pptx
+++ b/kubernetes/03_labels_and_deployments.pptx
@@ -6,10 +6,10 @@
     <p:sldMasterId id="2147483777" r:id="rId2"/>
   </p:sldMasterIdLst>
   <p:notesMasterIdLst>
-    <p:notesMasterId r:id="rId21"/>
+    <p:notesMasterId r:id="rId19"/>
   </p:notesMasterIdLst>
   <p:handoutMasterIdLst>
-    <p:handoutMasterId r:id="rId22"/>
+    <p:handoutMasterId r:id="rId20"/>
   </p:handoutMasterIdLst>
   <p:sldIdLst>
     <p:sldId id="433" r:id="rId3"/>
@@ -17,19 +17,17 @@
     <p:sldId id="446" r:id="rId5"/>
     <p:sldId id="443" r:id="rId6"/>
     <p:sldId id="448" r:id="rId7"/>
-    <p:sldId id="451" r:id="rId8"/>
-    <p:sldId id="963" r:id="rId9"/>
-    <p:sldId id="450" r:id="rId10"/>
-    <p:sldId id="964" r:id="rId11"/>
-    <p:sldId id="440" r:id="rId12"/>
-    <p:sldId id="436" r:id="rId13"/>
-    <p:sldId id="449" r:id="rId14"/>
-    <p:sldId id="447" r:id="rId15"/>
-    <p:sldId id="961" r:id="rId16"/>
-    <p:sldId id="882" r:id="rId17"/>
-    <p:sldId id="904" r:id="rId18"/>
-    <p:sldId id="960" r:id="rId19"/>
-    <p:sldId id="265" r:id="rId20"/>
+    <p:sldId id="963" r:id="rId8"/>
+    <p:sldId id="964" r:id="rId9"/>
+    <p:sldId id="440" r:id="rId10"/>
+    <p:sldId id="436" r:id="rId11"/>
+    <p:sldId id="449" r:id="rId12"/>
+    <p:sldId id="447" r:id="rId13"/>
+    <p:sldId id="961" r:id="rId14"/>
+    <p:sldId id="882" r:id="rId15"/>
+    <p:sldId id="904" r:id="rId16"/>
+    <p:sldId id="960" r:id="rId17"/>
+    <p:sldId id="265" r:id="rId18"/>
   </p:sldIdLst>
   <p:sldSz cx="12195175" cy="6858000"/>
   <p:notesSz cx="6858000" cy="9144000"/>
@@ -660,13 +658,17 @@
         <p:spPr/>
         <p:txBody>
           <a:bodyPr>
-            <a:normAutofit lnSpcReduction="10000"/>
+            <a:normAutofit fontScale="77500" lnSpcReduction="20000"/>
           </a:bodyPr>
           <a:lstStyle/>
           <a:p>
-            <a:r>
-              <a:rPr lang="en-US" dirty="0"/>
-              <a:t>How labels &amp; selectors work here:</a:t>
+            <a:pPr marL="0" indent="0">
+              <a:buFontTx/>
+              <a:buNone/>
+            </a:pPr>
+            <a:r>
+              <a:rPr lang="en-US" dirty="0"/>
+              <a:t>Explain deployments in a demo</a:t>
             </a:r>
           </a:p>
           <a:p>
@@ -676,7 +678,15 @@
             </a:pPr>
             <a:r>
               <a:rPr lang="en-US" dirty="0"/>
-              <a:t>Names of pods can change</a:t>
+              <a:t>Use the “</a:t>
+            </a:r>
+            <a:r>
+              <a:rPr lang="en-US" dirty="0" err="1"/>
+              <a:t>kubectl</a:t>
+            </a:r>
+            <a:r>
+              <a:rPr lang="en-US" dirty="0"/>
+              <a:t> create deployment &lt;name&gt; --image=&lt;image&gt;” command to create a deployment (note that “run” generators are deprecated for everything but pods)</a:t>
             </a:r>
           </a:p>
           <a:p>
@@ -686,11 +696,7 @@
             </a:pPr>
             <a:r>
               <a:rPr lang="en-US" dirty="0"/>
-              <a:t>Labels stay</a:t>
-            </a:r>
-            <a:r>
-              <a:rPr lang="en-US" baseline="0" dirty="0"/>
-              <a:t> the same</a:t>
+              <a:t>Show the replica set with labels</a:t>
             </a:r>
           </a:p>
           <a:p>
@@ -699,16 +705,82 @@
               <a:buChar char="-"/>
             </a:pPr>
             <a:r>
-              <a:rPr lang="en-US" baseline="0" dirty="0"/>
-              <a:t>Only with labels pods related to </a:t>
-            </a:r>
-            <a:r>
-              <a:rPr lang="en-US" baseline="0" dirty="0" err="1"/>
-              <a:t>rs</a:t>
-            </a:r>
-            <a:r>
-              <a:rPr lang="en-US" baseline="0" dirty="0"/>
-              <a:t>/deployment can be determined reliably</a:t>
+              <a:rPr lang="en-US" dirty="0"/>
+              <a:t>Point out that the replica set is a “hidden” component used to manage pods &amp; generations. A user should not interact directly with a replica set</a:t>
+            </a:r>
+          </a:p>
+          <a:p>
+            <a:pPr marL="285750" indent="-285750">
+              <a:buFontTx/>
+              <a:buChar char="-"/>
+            </a:pPr>
+            <a:r>
+              <a:rPr lang="en-US" dirty="0"/>
+              <a:t>Scale up (</a:t>
+            </a:r>
+            <a:r>
+              <a:rPr lang="en-US" dirty="0" err="1"/>
+              <a:t>kubectl</a:t>
+            </a:r>
+            <a:r>
+              <a:rPr lang="en-US" dirty="0"/>
+              <a:t> scale </a:t>
+            </a:r>
+            <a:r>
+              <a:rPr lang="en-US" dirty="0" err="1"/>
+              <a:t>deployment|replicaset</a:t>
+            </a:r>
+            <a:r>
+              <a:rPr lang="en-US" dirty="0"/>
+              <a:t> &lt;name&gt; --replicas=5)</a:t>
+            </a:r>
+          </a:p>
+          <a:p>
+            <a:pPr marL="465750" lvl="1" indent="-285750">
+              <a:buFontTx/>
+              <a:buChar char="-"/>
+            </a:pPr>
+            <a:r>
+              <a:rPr lang="en-US" dirty="0"/>
+              <a:t>Scale up the replica set &amp; show pods -&gt; replica set is managed by deployment and thus overruled. </a:t>
+            </a:r>
+          </a:p>
+          <a:p>
+            <a:pPr marL="465750" lvl="1" indent="-285750">
+              <a:buFontTx/>
+              <a:buChar char="-"/>
+            </a:pPr>
+            <a:r>
+              <a:rPr lang="en-US" dirty="0"/>
+              <a:t>Scale up the deployment</a:t>
+            </a:r>
+          </a:p>
+          <a:p>
+            <a:pPr marL="285750" indent="-285750">
+              <a:buFontTx/>
+              <a:buChar char="-"/>
+            </a:pPr>
+            <a:r>
+              <a:rPr lang="en-US" dirty="0"/>
+              <a:t>Show the pods with labels</a:t>
+            </a:r>
+          </a:p>
+          <a:p>
+            <a:pPr marL="285750" indent="-285750">
+              <a:buFontTx/>
+              <a:buChar char="-"/>
+            </a:pPr>
+            <a:r>
+              <a:rPr lang="en-US" dirty="0"/>
+              <a:t>Delete a pod &amp; in parallel “watch </a:t>
+            </a:r>
+            <a:r>
+              <a:rPr lang="en-US" dirty="0" err="1"/>
+              <a:t>kubectl</a:t>
+            </a:r>
+            <a:r>
+              <a:rPr lang="en-US" dirty="0"/>
+              <a:t> get pods” to monitor the creation/deletion of pods</a:t>
             </a:r>
           </a:p>
           <a:p>
@@ -719,24 +791,13 @@
             <a:endParaRPr lang="en-US" dirty="0"/>
           </a:p>
           <a:p>
-            <a:r>
-              <a:rPr lang="en-US" dirty="0"/>
-              <a:t>Why deployments?</a:t>
-            </a:r>
-          </a:p>
-          <a:p>
-            <a:r>
-              <a:rPr lang="en-US" dirty="0"/>
-              <a:t>You don’t want to know and manage individual pods. You would like to specify a template and instantiate it as often as you wish. Also you want to manage the group of pods e.g. in terms of docker image used.</a:t>
-            </a:r>
-          </a:p>
-          <a:p>
-            <a:endParaRPr lang="en-US" dirty="0"/>
-          </a:p>
-          <a:p>
-            <a:r>
-              <a:rPr lang="en-US" dirty="0"/>
-              <a:t>The deployment gives you these management capabilities. In it’s resource description (</a:t>
+            <a:pPr marL="0" indent="0">
+              <a:buFontTx/>
+              <a:buNone/>
+            </a:pPr>
+            <a:r>
+              <a:rPr lang="en-US" dirty="0"/>
+              <a:t>Don’t forget to mention that a deployment can be created also from </a:t>
             </a:r>
             <a:r>
               <a:rPr lang="en-US" dirty="0" err="1"/>
@@ -744,58 +805,445 @@
             </a:r>
             <a:r>
               <a:rPr lang="en-US" dirty="0"/>
-              <a:t> file) you specify a pod template, how pods should be labeled and of course a corresponding selector to identify your pods.</a:t>
-            </a:r>
-          </a:p>
-          <a:p>
-            <a:r>
-              <a:rPr lang="en-US" dirty="0"/>
-              <a:t>On cluster level the deployment creates &amp; manages a replica set which then manages the pods. </a:t>
-            </a:r>
-          </a:p>
-          <a:p>
-            <a:r>
-              <a:rPr lang="en-US" dirty="0"/>
-              <a:t>If you update the number of replicas, this will be sent to the </a:t>
+              <a:t> file (with way more options to customize -&gt; like the labels).</a:t>
+            </a:r>
+          </a:p>
+          <a:p>
+            <a:pPr marL="0" indent="0">
+              <a:buFontTx/>
+              <a:buNone/>
+            </a:pPr>
+            <a:endParaRPr lang="en-US" dirty="0"/>
+          </a:p>
+          <a:p>
+            <a:pPr marL="0" indent="0">
+              <a:buFontTx/>
+              <a:buNone/>
+            </a:pPr>
+            <a:r>
+              <a:rPr lang="en-US" dirty="0"/>
+              <a:t>Optional: do a demo for updating (assuming your deployment is called “</a:t>
             </a:r>
             <a:r>
               <a:rPr lang="en-US" dirty="0" err="1"/>
-              <a:t>replicaSet</a:t>
-            </a:r>
-            <a:r>
-              <a:rPr lang="en-US" dirty="0"/>
-              <a:t> and the desired state is enforced via the </a:t>
+              <a:t>nginx</a:t>
+            </a:r>
+            <a:r>
+              <a:rPr lang="en-US" dirty="0"/>
+              <a:t>”)</a:t>
+            </a:r>
+          </a:p>
+          <a:p>
+            <a:pPr marL="285750" marR="0" lvl="0" indent="-285750" algn="l" defTabSz="1088776" rtl="0" eaLnBrk="1" fontAlgn="auto" latinLnBrk="0" hangingPunct="1">
+              <a:lnSpc>
+                <a:spcPct val="100000"/>
+              </a:lnSpc>
+              <a:spcBef>
+                <a:spcPts val="0"/>
+              </a:spcBef>
+              <a:spcAft>
+                <a:spcPts val="0"/>
+              </a:spcAft>
+              <a:buClrTx/>
+              <a:buSzTx/>
+              <a:buFontTx/>
+              <a:buChar char="-"/>
+              <a:tabLst/>
+              <a:defRPr/>
+            </a:pPr>
+            <a:r>
+              <a:rPr lang="en-US" dirty="0">
+                <a:sym typeface="Wingdings" panose="05000000000000000000" pitchFamily="2" charset="2"/>
+              </a:rPr>
+              <a:t>Run “</a:t>
+            </a:r>
+            <a:r>
+              <a:rPr lang="en-US" dirty="0" err="1">
+                <a:sym typeface="Wingdings" panose="05000000000000000000" pitchFamily="2" charset="2"/>
+              </a:rPr>
+              <a:t>kubectl</a:t>
+            </a:r>
+            <a:r>
+              <a:rPr lang="en-US" dirty="0">
+                <a:sym typeface="Wingdings" panose="05000000000000000000" pitchFamily="2" charset="2"/>
+              </a:rPr>
+              <a:t> rollout status deployment </a:t>
+            </a:r>
+            <a:r>
+              <a:rPr lang="en-US" dirty="0" err="1">
+                <a:sym typeface="Wingdings" panose="05000000000000000000" pitchFamily="2" charset="2"/>
+              </a:rPr>
+              <a:t>nginx</a:t>
+            </a:r>
+            <a:r>
+              <a:rPr lang="en-US" dirty="0">
+                <a:sym typeface="Wingdings" panose="05000000000000000000" pitchFamily="2" charset="2"/>
+              </a:rPr>
+              <a:t>” in a separate shell </a:t>
+            </a:r>
+          </a:p>
+          <a:p>
+            <a:pPr marL="285750" marR="0" lvl="0" indent="-285750" algn="l" defTabSz="1088776" rtl="0" eaLnBrk="1" fontAlgn="auto" latinLnBrk="0" hangingPunct="1">
+              <a:lnSpc>
+                <a:spcPct val="100000"/>
+              </a:lnSpc>
+              <a:spcBef>
+                <a:spcPts val="0"/>
+              </a:spcBef>
+              <a:spcAft>
+                <a:spcPts val="0"/>
+              </a:spcAft>
+              <a:buClrTx/>
+              <a:buSzTx/>
+              <a:buFontTx/>
+              <a:buChar char="-"/>
+              <a:tabLst/>
+              <a:defRPr/>
+            </a:pPr>
+            <a:r>
+              <a:rPr lang="en-US" dirty="0">
+                <a:sym typeface="Wingdings" panose="05000000000000000000" pitchFamily="2" charset="2"/>
+              </a:rPr>
+              <a:t>In parallel: </a:t>
+            </a:r>
+            <a:r>
+              <a:rPr lang="en-US" dirty="0"/>
+              <a:t>“</a:t>
             </a:r>
             <a:r>
               <a:rPr lang="en-US" dirty="0" err="1"/>
-              <a:t>replicaSet</a:t>
-            </a:r>
-            <a:r>
-              <a:rPr lang="en-US" dirty="0"/>
-              <a:t>. </a:t>
-            </a:r>
-          </a:p>
-          <a:p>
-            <a:r>
-              <a:rPr lang="en-US" dirty="0"/>
-              <a:t>Upon update of the image, a new </a:t>
+              <a:t>kubectl</a:t>
+            </a:r>
+            <a:r>
+              <a:rPr lang="en-US" dirty="0"/>
+              <a:t> set image deployment/</a:t>
             </a:r>
             <a:r>
               <a:rPr lang="en-US" dirty="0" err="1"/>
-              <a:t>replicaSet</a:t>
-            </a:r>
-            <a:r>
-              <a:rPr lang="en-US" dirty="0"/>
-              <a:t> will be created and the old one will be set to replica=0. This way you can roll-back to your old </a:t>
+              <a:t>nginx</a:t>
+            </a:r>
+            <a:r>
+              <a:rPr lang="en-US" dirty="0"/>
+              <a:t> </a:t>
             </a:r>
             <a:r>
               <a:rPr lang="en-US" dirty="0" err="1"/>
-              <a:t>replicaSet</a:t>
-            </a:r>
-            <a:r>
-              <a:rPr lang="en-US" dirty="0"/>
-              <a:t> (by scaling it up again). </a:t>
-            </a:r>
+              <a:t>nginx</a:t>
+            </a:r>
+            <a:r>
+              <a:rPr lang="en-US" dirty="0"/>
+              <a:t>=</a:t>
+            </a:r>
+            <a:r>
+              <a:rPr lang="en-US" dirty="0" err="1"/>
+              <a:t>nginx:mainline</a:t>
+            </a:r>
+            <a:r>
+              <a:rPr lang="en-US" dirty="0"/>
+              <a:t> --record” </a:t>
+            </a:r>
+            <a:r>
+              <a:rPr lang="en-US" dirty="0">
+                <a:sym typeface="Wingdings" panose="05000000000000000000" pitchFamily="2" charset="2"/>
+              </a:rPr>
+              <a:t> make sure to set an image tag that differs from your first revision</a:t>
+            </a:r>
+          </a:p>
+          <a:p>
+            <a:pPr marL="285750" indent="-285750">
+              <a:buFontTx/>
+              <a:buChar char="-"/>
+            </a:pPr>
+            <a:r>
+              <a:rPr lang="en-US" dirty="0">
+                <a:sym typeface="Wingdings" panose="05000000000000000000" pitchFamily="2" charset="2"/>
+              </a:rPr>
+              <a:t>Point out, that the “--record“ parameter will “ log” the command and write it to the deployment’s annotations</a:t>
+            </a:r>
+          </a:p>
+          <a:p>
+            <a:pPr marL="285750" marR="0" lvl="0" indent="-285750" algn="l" defTabSz="1088776" rtl="0" eaLnBrk="1" fontAlgn="auto" latinLnBrk="0" hangingPunct="1">
+              <a:lnSpc>
+                <a:spcPct val="100000"/>
+              </a:lnSpc>
+              <a:spcBef>
+                <a:spcPts val="0"/>
+              </a:spcBef>
+              <a:spcAft>
+                <a:spcPts val="0"/>
+              </a:spcAft>
+              <a:buClrTx/>
+              <a:buSzTx/>
+              <a:buFontTx/>
+              <a:buChar char="-"/>
+              <a:tabLst/>
+              <a:defRPr/>
+            </a:pPr>
+            <a:r>
+              <a:rPr lang="en-US" dirty="0">
+                <a:sym typeface="Wingdings" panose="05000000000000000000" pitchFamily="2" charset="2"/>
+              </a:rPr>
+              <a:t>“</a:t>
+            </a:r>
+            <a:r>
+              <a:rPr lang="en-US" dirty="0" err="1">
+                <a:sym typeface="Wingdings" panose="05000000000000000000" pitchFamily="2" charset="2"/>
+              </a:rPr>
+              <a:t>kubectl</a:t>
+            </a:r>
+            <a:r>
+              <a:rPr lang="en-US" dirty="0">
+                <a:sym typeface="Wingdings" panose="05000000000000000000" pitchFamily="2" charset="2"/>
+              </a:rPr>
+              <a:t> rollout history deployment </a:t>
+            </a:r>
+            <a:r>
+              <a:rPr lang="en-US" dirty="0" err="1">
+                <a:sym typeface="Wingdings" panose="05000000000000000000" pitchFamily="2" charset="2"/>
+              </a:rPr>
+              <a:t>nginx</a:t>
+            </a:r>
+            <a:r>
+              <a:rPr lang="en-US" dirty="0">
+                <a:sym typeface="Wingdings" panose="05000000000000000000" pitchFamily="2" charset="2"/>
+              </a:rPr>
+              <a:t>”  you should see 2 revisions incl. the “change-cause”</a:t>
+            </a:r>
+          </a:p>
+          <a:p>
+            <a:pPr marL="0" marR="0" lvl="0" indent="0" algn="l" defTabSz="1088776" rtl="0" eaLnBrk="1" fontAlgn="auto" latinLnBrk="0" hangingPunct="1">
+              <a:lnSpc>
+                <a:spcPct val="100000"/>
+              </a:lnSpc>
+              <a:spcBef>
+                <a:spcPts val="0"/>
+              </a:spcBef>
+              <a:spcAft>
+                <a:spcPts val="0"/>
+              </a:spcAft>
+              <a:buClrTx/>
+              <a:buSzTx/>
+              <a:buFontTx/>
+              <a:buNone/>
+              <a:tabLst/>
+              <a:defRPr/>
+            </a:pPr>
+            <a:r>
+              <a:rPr lang="en-US" dirty="0"/>
+              <a:t>Optional: do a demo for a rollback</a:t>
+            </a:r>
+            <a:endParaRPr lang="en-US" dirty="0">
+              <a:sym typeface="Wingdings" panose="05000000000000000000" pitchFamily="2" charset="2"/>
+            </a:endParaRPr>
+          </a:p>
+          <a:p>
+            <a:pPr marL="285750" marR="0" lvl="0" indent="-285750" algn="l" defTabSz="1088776" rtl="0" eaLnBrk="1" fontAlgn="auto" latinLnBrk="0" hangingPunct="1">
+              <a:lnSpc>
+                <a:spcPct val="100000"/>
+              </a:lnSpc>
+              <a:spcBef>
+                <a:spcPts val="0"/>
+              </a:spcBef>
+              <a:spcAft>
+                <a:spcPts val="0"/>
+              </a:spcAft>
+              <a:buClrTx/>
+              <a:buSzTx/>
+              <a:buFontTx/>
+              <a:buChar char="-"/>
+              <a:tabLst/>
+              <a:defRPr/>
+            </a:pPr>
+            <a:r>
+              <a:rPr lang="en-US" dirty="0"/>
+              <a:t>Re-run the “set image” command while using an invalid version tag (like “invalid” or something with a typo)</a:t>
+            </a:r>
+          </a:p>
+          <a:p>
+            <a:pPr marL="285750" marR="0" lvl="0" indent="-285750" algn="l" defTabSz="1088776" rtl="0" eaLnBrk="1" fontAlgn="auto" latinLnBrk="0" hangingPunct="1">
+              <a:lnSpc>
+                <a:spcPct val="100000"/>
+              </a:lnSpc>
+              <a:spcBef>
+                <a:spcPts val="0"/>
+              </a:spcBef>
+              <a:spcAft>
+                <a:spcPts val="0"/>
+              </a:spcAft>
+              <a:buClrTx/>
+              <a:buSzTx/>
+              <a:buFontTx/>
+              <a:buChar char="-"/>
+              <a:tabLst/>
+              <a:defRPr/>
+            </a:pPr>
+            <a:r>
+              <a:rPr lang="en-US" dirty="0"/>
+              <a:t>Check the rollout status </a:t>
+            </a:r>
+            <a:r>
+              <a:rPr lang="en-US" dirty="0">
+                <a:sym typeface="Wingdings" panose="05000000000000000000" pitchFamily="2" charset="2"/>
+              </a:rPr>
+              <a:t> there should be one pod with the new image version in an error status &amp; at least 2 pods of the previous revision up and running.</a:t>
+            </a:r>
+            <a:endParaRPr lang="en-US" dirty="0"/>
+          </a:p>
+          <a:p>
+            <a:pPr marL="285750" marR="0" lvl="0" indent="-285750" algn="l" defTabSz="1088776" rtl="0" eaLnBrk="1" fontAlgn="auto" latinLnBrk="0" hangingPunct="1">
+              <a:lnSpc>
+                <a:spcPct val="100000"/>
+              </a:lnSpc>
+              <a:spcBef>
+                <a:spcPts val="0"/>
+              </a:spcBef>
+              <a:spcAft>
+                <a:spcPts val="0"/>
+              </a:spcAft>
+              <a:buClrTx/>
+              <a:buSzTx/>
+              <a:buFontTx/>
+              <a:buChar char="-"/>
+              <a:tabLst/>
+              <a:defRPr/>
+            </a:pPr>
+            <a:r>
+              <a:rPr lang="en-US" dirty="0"/>
+              <a:t>Explain the rolling update strategy and why there is only one pod in status error </a:t>
+            </a:r>
+            <a:r>
+              <a:rPr lang="en-US" dirty="0">
+                <a:sym typeface="Wingdings" panose="05000000000000000000" pitchFamily="2" charset="2"/>
+              </a:rPr>
+              <a:t> </a:t>
+            </a:r>
+            <a:r>
+              <a:rPr lang="en-US" dirty="0" err="1">
+                <a:sym typeface="Wingdings" panose="05000000000000000000" pitchFamily="2" charset="2"/>
+              </a:rPr>
+              <a:t>maxUnavailable</a:t>
+            </a:r>
+            <a:r>
+              <a:rPr lang="en-US" dirty="0">
+                <a:sym typeface="Wingdings" panose="05000000000000000000" pitchFamily="2" charset="2"/>
+              </a:rPr>
+              <a:t> (</a:t>
+            </a:r>
+            <a:r>
+              <a:rPr lang="de-DE" sz="1400" b="0" kern="1200" dirty="0" err="1">
+                <a:solidFill>
+                  <a:schemeClr val="tx1"/>
+                </a:solidFill>
+                <a:effectLst/>
+                <a:latin typeface="+mn-lt"/>
+                <a:ea typeface="+mn-ea"/>
+                <a:cs typeface="+mn-cs"/>
+              </a:rPr>
+              <a:t>kubectl</a:t>
+            </a:r>
+            <a:r>
+              <a:rPr lang="de-DE" sz="1400" b="0" kern="1200" dirty="0">
+                <a:solidFill>
+                  <a:schemeClr val="tx1"/>
+                </a:solidFill>
+                <a:effectLst/>
+                <a:latin typeface="+mn-lt"/>
+                <a:ea typeface="+mn-ea"/>
+                <a:cs typeface="+mn-cs"/>
+              </a:rPr>
+              <a:t> </a:t>
+            </a:r>
+            <a:r>
+              <a:rPr lang="de-DE" sz="1400" b="0" kern="1200" dirty="0" err="1">
+                <a:solidFill>
+                  <a:schemeClr val="tx1"/>
+                </a:solidFill>
+                <a:effectLst/>
+                <a:latin typeface="+mn-lt"/>
+                <a:ea typeface="+mn-ea"/>
+                <a:cs typeface="+mn-cs"/>
+              </a:rPr>
+              <a:t>explain</a:t>
+            </a:r>
+            <a:r>
+              <a:rPr lang="de-DE" sz="1400" b="0" kern="1200" dirty="0">
+                <a:solidFill>
+                  <a:schemeClr val="tx1"/>
+                </a:solidFill>
+                <a:effectLst/>
+                <a:latin typeface="+mn-lt"/>
+                <a:ea typeface="+mn-ea"/>
+                <a:cs typeface="+mn-cs"/>
+              </a:rPr>
+              <a:t> </a:t>
+            </a:r>
+            <a:r>
+              <a:rPr lang="de-DE" sz="1400" b="0" kern="1200" dirty="0" err="1">
+                <a:solidFill>
+                  <a:schemeClr val="tx1"/>
+                </a:solidFill>
+                <a:effectLst/>
+                <a:latin typeface="+mn-lt"/>
+                <a:ea typeface="+mn-ea"/>
+                <a:cs typeface="+mn-cs"/>
+              </a:rPr>
+              <a:t>deployment.spec.strategy.rollingUpdate</a:t>
+            </a:r>
+            <a:r>
+              <a:rPr lang="de-DE" sz="1400" b="0" kern="1200" dirty="0">
+                <a:solidFill>
+                  <a:schemeClr val="tx1"/>
+                </a:solidFill>
+                <a:effectLst/>
+                <a:latin typeface="+mn-lt"/>
+                <a:ea typeface="+mn-ea"/>
+                <a:cs typeface="+mn-cs"/>
+              </a:rPr>
+              <a:t>)</a:t>
+            </a:r>
+          </a:p>
+          <a:p>
+            <a:pPr marL="285750" marR="0" lvl="0" indent="-285750" algn="l" defTabSz="1088776" rtl="0" eaLnBrk="1" fontAlgn="auto" latinLnBrk="0" hangingPunct="1">
+              <a:lnSpc>
+                <a:spcPct val="100000"/>
+              </a:lnSpc>
+              <a:spcBef>
+                <a:spcPts val="0"/>
+              </a:spcBef>
+              <a:spcAft>
+                <a:spcPts val="0"/>
+              </a:spcAft>
+              <a:buClrTx/>
+              <a:buSzTx/>
+              <a:buFontTx/>
+              <a:buChar char="-"/>
+              <a:tabLst/>
+              <a:defRPr/>
+            </a:pPr>
+            <a:r>
+              <a:rPr lang="en-US" dirty="0"/>
+              <a:t> Do the rollback: </a:t>
+            </a:r>
+            <a:r>
+              <a:rPr lang="en-US" dirty="0" err="1"/>
+              <a:t>kubectl</a:t>
+            </a:r>
+            <a:r>
+              <a:rPr lang="en-US" dirty="0"/>
+              <a:t> rollout undo deployment </a:t>
+            </a:r>
+            <a:r>
+              <a:rPr lang="en-US" dirty="0" err="1"/>
+              <a:t>nginx</a:t>
+            </a:r>
+            <a:endParaRPr lang="en-US" dirty="0"/>
+          </a:p>
+          <a:p>
+            <a:pPr marL="285750" indent="-285750">
+              <a:buFontTx/>
+              <a:buChar char="-"/>
+            </a:pPr>
+            <a:endParaRPr lang="en-US" dirty="0"/>
           </a:p>
         </p:txBody>
       </p:sp>
@@ -826,7 +1274,7 @@
     </p:spTree>
     <p:extLst>
       <p:ext uri="{BB962C8B-B14F-4D97-AF65-F5344CB8AC3E}">
-        <p14:creationId xmlns:p14="http://schemas.microsoft.com/office/powerpoint/2010/main" val="2647646029"/>
+        <p14:creationId xmlns:p14="http://schemas.microsoft.com/office/powerpoint/2010/main" val="3805946316"/>
       </p:ext>
     </p:extLst>
   </p:cSld>
@@ -855,6 +1303,37 @@
       </p:grpSpPr>
       <p:sp>
         <p:nvSpPr>
+          <p:cNvPr id="2" name="Slide Image Placeholder 1"/>
+          <p:cNvSpPr>
+            <a:spLocks noGrp="1" noRot="1" noChangeAspect="1"/>
+          </p:cNvSpPr>
+          <p:nvPr>
+            <p:ph type="sldImg"/>
+          </p:nvPr>
+        </p:nvSpPr>
+        <p:spPr/>
+      </p:sp>
+      <p:sp>
+        <p:nvSpPr>
+          <p:cNvPr id="3" name="Notes Placeholder 2"/>
+          <p:cNvSpPr>
+            <a:spLocks noGrp="1"/>
+          </p:cNvSpPr>
+          <p:nvPr>
+            <p:ph type="body" idx="1"/>
+          </p:nvPr>
+        </p:nvSpPr>
+        <p:spPr/>
+        <p:txBody>
+          <a:bodyPr/>
+          <a:lstStyle/>
+          <a:p>
+            <a:endParaRPr lang="en-US" dirty="0"/>
+          </a:p>
+        </p:txBody>
+      </p:sp>
+      <p:sp>
+        <p:nvSpPr>
           <p:cNvPr id="4" name="Slide Number Placeholder 3"/>
           <p:cNvSpPr>
             <a:spLocks noGrp="1"/>
@@ -868,60 +1347,78 @@
           <a:bodyPr/>
           <a:lstStyle/>
           <a:p>
+            <a:pPr marL="0" marR="0" lvl="0" indent="0" algn="ctr" defTabSz="3255485" rtl="0" eaLnBrk="1" fontAlgn="auto" latinLnBrk="0" hangingPunct="1">
+              <a:lnSpc>
+                <a:spcPct val="100000"/>
+              </a:lnSpc>
+              <a:spcBef>
+                <a:spcPts val="0"/>
+              </a:spcBef>
+              <a:spcAft>
+                <a:spcPts val="0"/>
+              </a:spcAft>
+              <a:buClrTx/>
+              <a:buSzTx/>
+              <a:buFontTx/>
+              <a:buNone/>
+              <a:tabLst/>
+              <a:defRPr/>
+            </a:pPr>
             <a:fld id="{7D8C2C35-2B8A-446E-BEC0-FD36716C29AC}" type="slidenum">
-              <a:rPr lang="de-DE" smtClean="0"/>
-              <a:pPr/>
-              <a:t>11</a:t>
+              <a:rPr kumimoji="0" lang="de-DE" sz="2400" b="0" i="0" u="none" strike="noStrike" kern="1200" cap="none" spc="0" normalizeH="0" baseline="0" noProof="0">
+                <a:ln>
+                  <a:noFill/>
+                </a:ln>
+                <a:solidFill>
+                  <a:srgbClr val="000000"/>
+                </a:solidFill>
+                <a:effectLst/>
+                <a:uLnTx/>
+                <a:uFillTx/>
+                <a:latin typeface="Arial"/>
+                <a:ea typeface="+mn-ea"/>
+                <a:cs typeface="+mn-cs"/>
+              </a:rPr>
+              <a:pPr marL="0" marR="0" lvl="0" indent="0" algn="ctr" defTabSz="3255485" rtl="0" eaLnBrk="1" fontAlgn="auto" latinLnBrk="0" hangingPunct="1">
+                <a:lnSpc>
+                  <a:spcPct val="100000"/>
+                </a:lnSpc>
+                <a:spcBef>
+                  <a:spcPts val="0"/>
+                </a:spcBef>
+                <a:spcAft>
+                  <a:spcPts val="0"/>
+                </a:spcAft>
+                <a:buClrTx/>
+                <a:buSzTx/>
+                <a:buFontTx/>
+                <a:buNone/>
+                <a:tabLst/>
+                <a:defRPr/>
+              </a:pPr>
+              <a:t>13</a:t>
             </a:fld>
-            <a:endParaRPr lang="de-DE" dirty="0"/>
-          </a:p>
-        </p:txBody>
-      </p:sp>
-      <p:sp>
-        <p:nvSpPr>
-          <p:cNvPr id="9" name="Slide Image Placeholder 8"/>
-          <p:cNvSpPr>
-            <a:spLocks noGrp="1" noRot="1" noChangeAspect="1"/>
-          </p:cNvSpPr>
-          <p:nvPr>
-            <p:ph type="sldImg"/>
-          </p:nvPr>
-        </p:nvSpPr>
-        <p:spPr>
-          <a:xfrm>
-            <a:off x="547688" y="612775"/>
-            <a:ext cx="5762625" cy="3241675"/>
-          </a:xfrm>
-        </p:spPr>
-      </p:sp>
-      <p:sp>
-        <p:nvSpPr>
-          <p:cNvPr id="10" name="Notes Placeholder 9"/>
-          <p:cNvSpPr>
-            <a:spLocks noGrp="1"/>
-          </p:cNvSpPr>
-          <p:nvPr>
-            <p:ph type="body" idx="1"/>
-          </p:nvPr>
-        </p:nvSpPr>
-        <p:spPr/>
-        <p:txBody>
-          <a:bodyPr>
-            <a:normAutofit/>
-          </a:bodyPr>
-          <a:lstStyle/>
-          <a:p>
-            <a:r>
-              <a:rPr lang="en-US" dirty="0"/>
-              <a:t>Labels with red arrows pointing to have to match</a:t>
-            </a:r>
+            <a:endParaRPr kumimoji="0" lang="de-DE" sz="2400" b="0" i="0" u="none" strike="noStrike" kern="1200" cap="none" spc="0" normalizeH="0" baseline="0" noProof="0" dirty="0">
+              <a:ln>
+                <a:noFill/>
+              </a:ln>
+              <a:solidFill>
+                <a:srgbClr val="000000"/>
+              </a:solidFill>
+              <a:effectLst/>
+              <a:uLnTx/>
+              <a:uFillTx/>
+              <a:latin typeface="Arial"/>
+              <a:ea typeface="+mn-ea"/>
+              <a:cs typeface="+mn-cs"/>
+            </a:endParaRPr>
           </a:p>
         </p:txBody>
       </p:sp>
     </p:spTree>
     <p:extLst>
       <p:ext uri="{BB962C8B-B14F-4D97-AF65-F5344CB8AC3E}">
-        <p14:creationId xmlns:p14="http://schemas.microsoft.com/office/powerpoint/2010/main" val="3094605481"/>
+        <p14:creationId xmlns:p14="http://schemas.microsoft.com/office/powerpoint/2010/main" val="1269890851"/>
       </p:ext>
     </p:extLst>
   </p:cSld>
@@ -972,361 +1469,29 @@
         </p:nvSpPr>
         <p:spPr/>
         <p:txBody>
-          <a:bodyPr>
-            <a:normAutofit fontScale="77500" lnSpcReduction="20000"/>
-          </a:bodyPr>
+          <a:bodyPr/>
           <a:lstStyle/>
           <a:p>
-            <a:pPr marL="0" indent="0">
-              <a:buFontTx/>
-              <a:buNone/>
-            </a:pPr>
-            <a:r>
-              <a:rPr lang="en-US" dirty="0"/>
-              <a:t>Explain deployments in a demo</a:t>
-            </a:r>
-          </a:p>
-          <a:p>
-            <a:pPr marL="285750" indent="-285750">
-              <a:buFontTx/>
-              <a:buChar char="-"/>
-            </a:pPr>
-            <a:r>
-              <a:rPr lang="en-US" dirty="0"/>
-              <a:t>Use the “</a:t>
-            </a:r>
-            <a:r>
-              <a:rPr lang="en-US" dirty="0" err="1"/>
-              <a:t>kubectl</a:t>
-            </a:r>
-            <a:r>
-              <a:rPr lang="en-US" dirty="0"/>
-              <a:t> create deployment &lt;name&gt; --image=&lt;image&gt;” command to create a deployment (note that “run” generators are deprecated for everything but pods)</a:t>
-            </a:r>
-          </a:p>
-          <a:p>
-            <a:pPr marL="285750" indent="-285750">
-              <a:buFontTx/>
-              <a:buChar char="-"/>
-            </a:pPr>
-            <a:r>
-              <a:rPr lang="en-US" dirty="0"/>
-              <a:t>Show the replica set with labels</a:t>
-            </a:r>
-          </a:p>
-          <a:p>
-            <a:pPr marL="285750" indent="-285750">
-              <a:buFontTx/>
-              <a:buChar char="-"/>
-            </a:pPr>
-            <a:r>
-              <a:rPr lang="en-US" dirty="0"/>
-              <a:t>Point out that the replica set is a “hidden” component used to manage pods &amp; generations. A user should not interact directly with a replica set</a:t>
-            </a:r>
-          </a:p>
-          <a:p>
-            <a:pPr marL="285750" indent="-285750">
-              <a:buFontTx/>
-              <a:buChar char="-"/>
-            </a:pPr>
-            <a:r>
-              <a:rPr lang="en-US" dirty="0"/>
-              <a:t>Scale up (</a:t>
-            </a:r>
-            <a:r>
-              <a:rPr lang="en-US" dirty="0" err="1"/>
-              <a:t>kubectl</a:t>
-            </a:r>
-            <a:r>
-              <a:rPr lang="en-US" dirty="0"/>
-              <a:t> scale </a:t>
-            </a:r>
-            <a:r>
-              <a:rPr lang="en-US" dirty="0" err="1"/>
-              <a:t>deployment|replicaset</a:t>
-            </a:r>
-            <a:r>
-              <a:rPr lang="en-US" dirty="0"/>
-              <a:t> &lt;name&gt; --replicas=5)</a:t>
-            </a:r>
-          </a:p>
-          <a:p>
-            <a:pPr marL="465750" lvl="1" indent="-285750">
-              <a:buFontTx/>
-              <a:buChar char="-"/>
-            </a:pPr>
-            <a:r>
-              <a:rPr lang="en-US" dirty="0"/>
-              <a:t>Scale up the replica set &amp; show pods -&gt; replica set is managed by deployment and thus overruled. </a:t>
-            </a:r>
-          </a:p>
-          <a:p>
-            <a:pPr marL="465750" lvl="1" indent="-285750">
-              <a:buFontTx/>
-              <a:buChar char="-"/>
-            </a:pPr>
-            <a:r>
-              <a:rPr lang="en-US" dirty="0"/>
-              <a:t>Scale up the deployment</a:t>
-            </a:r>
-          </a:p>
-          <a:p>
-            <a:pPr marL="285750" indent="-285750">
-              <a:buFontTx/>
-              <a:buChar char="-"/>
-            </a:pPr>
-            <a:r>
-              <a:rPr lang="en-US" dirty="0"/>
-              <a:t>Show the pods with labels</a:t>
-            </a:r>
-          </a:p>
-          <a:p>
-            <a:pPr marL="285750" indent="-285750">
-              <a:buFontTx/>
-              <a:buChar char="-"/>
-            </a:pPr>
-            <a:r>
-              <a:rPr lang="en-US" dirty="0"/>
-              <a:t>Delete a pod &amp; in parallel “watch </a:t>
-            </a:r>
-            <a:r>
-              <a:rPr lang="en-US" dirty="0" err="1"/>
-              <a:t>kubectl</a:t>
-            </a:r>
-            <a:r>
-              <a:rPr lang="en-US" dirty="0"/>
-              <a:t> get pods” to monitor the creation/deletion of pods</a:t>
-            </a:r>
-          </a:p>
-          <a:p>
-            <a:pPr marL="285750" indent="-285750">
-              <a:buFontTx/>
-              <a:buChar char="-"/>
-            </a:pPr>
             <a:endParaRPr lang="en-US" dirty="0"/>
           </a:p>
-          <a:p>
-            <a:pPr marL="0" indent="0">
-              <a:buFontTx/>
-              <a:buNone/>
-            </a:pPr>
-            <a:r>
-              <a:rPr lang="en-US" dirty="0"/>
-              <a:t>Don’t forget to mention that a deployment can be created also from </a:t>
-            </a:r>
-            <a:r>
-              <a:rPr lang="en-US" dirty="0" err="1"/>
-              <a:t>yaml</a:t>
-            </a:r>
-            <a:r>
-              <a:rPr lang="en-US" dirty="0"/>
-              <a:t> file (with way more options to customize -&gt; like the labels).</a:t>
-            </a:r>
-          </a:p>
-          <a:p>
-            <a:pPr marL="0" indent="0">
-              <a:buFontTx/>
-              <a:buNone/>
-            </a:pPr>
-            <a:endParaRPr lang="en-US" dirty="0"/>
-          </a:p>
-          <a:p>
-            <a:pPr marL="0" indent="0">
-              <a:buFontTx/>
-              <a:buNone/>
-            </a:pPr>
-            <a:r>
-              <a:rPr lang="en-US" dirty="0"/>
-              <a:t>Optional: do a demo for updating (assuming your deployment is called “</a:t>
-            </a:r>
-            <a:r>
-              <a:rPr lang="en-US" dirty="0" err="1"/>
-              <a:t>nginx</a:t>
-            </a:r>
-            <a:r>
-              <a:rPr lang="en-US" dirty="0"/>
-              <a:t>”)</a:t>
-            </a:r>
-          </a:p>
-          <a:p>
-            <a:pPr marL="285750" marR="0" lvl="0" indent="-285750" algn="l" defTabSz="1088776" rtl="0" eaLnBrk="1" fontAlgn="auto" latinLnBrk="0" hangingPunct="1">
-              <a:lnSpc>
-                <a:spcPct val="100000"/>
-              </a:lnSpc>
-              <a:spcBef>
-                <a:spcPts val="0"/>
-              </a:spcBef>
-              <a:spcAft>
-                <a:spcPts val="0"/>
-              </a:spcAft>
-              <a:buClrTx/>
-              <a:buSzTx/>
-              <a:buFontTx/>
-              <a:buChar char="-"/>
-              <a:tabLst/>
-              <a:defRPr/>
-            </a:pPr>
-            <a:r>
-              <a:rPr lang="en-US" dirty="0">
-                <a:sym typeface="Wingdings" panose="05000000000000000000" pitchFamily="2" charset="2"/>
-              </a:rPr>
-              <a:t>Run “</a:t>
-            </a:r>
-            <a:r>
-              <a:rPr lang="en-US" dirty="0" err="1">
-                <a:sym typeface="Wingdings" panose="05000000000000000000" pitchFamily="2" charset="2"/>
-              </a:rPr>
-              <a:t>kubectl</a:t>
-            </a:r>
-            <a:r>
-              <a:rPr lang="en-US" dirty="0">
-                <a:sym typeface="Wingdings" panose="05000000000000000000" pitchFamily="2" charset="2"/>
-              </a:rPr>
-              <a:t> rollout status deployment </a:t>
-            </a:r>
-            <a:r>
-              <a:rPr lang="en-US" dirty="0" err="1">
-                <a:sym typeface="Wingdings" panose="05000000000000000000" pitchFamily="2" charset="2"/>
-              </a:rPr>
-              <a:t>nginx</a:t>
-            </a:r>
-            <a:r>
-              <a:rPr lang="en-US" dirty="0">
-                <a:sym typeface="Wingdings" panose="05000000000000000000" pitchFamily="2" charset="2"/>
-              </a:rPr>
-              <a:t>” in a separate shell </a:t>
-            </a:r>
-          </a:p>
-          <a:p>
-            <a:pPr marL="285750" marR="0" lvl="0" indent="-285750" algn="l" defTabSz="1088776" rtl="0" eaLnBrk="1" fontAlgn="auto" latinLnBrk="0" hangingPunct="1">
-              <a:lnSpc>
-                <a:spcPct val="100000"/>
-              </a:lnSpc>
-              <a:spcBef>
-                <a:spcPts val="0"/>
-              </a:spcBef>
-              <a:spcAft>
-                <a:spcPts val="0"/>
-              </a:spcAft>
-              <a:buClrTx/>
-              <a:buSzTx/>
-              <a:buFontTx/>
-              <a:buChar char="-"/>
-              <a:tabLst/>
-              <a:defRPr/>
-            </a:pPr>
-            <a:r>
-              <a:rPr lang="en-US" dirty="0">
-                <a:sym typeface="Wingdings" panose="05000000000000000000" pitchFamily="2" charset="2"/>
-              </a:rPr>
-              <a:t>In parallel: </a:t>
-            </a:r>
-            <a:r>
-              <a:rPr lang="en-US" dirty="0"/>
-              <a:t>“</a:t>
-            </a:r>
-            <a:r>
-              <a:rPr lang="en-US" dirty="0" err="1"/>
-              <a:t>kubectl</a:t>
-            </a:r>
-            <a:r>
-              <a:rPr lang="en-US" dirty="0"/>
-              <a:t> set image deployment/</a:t>
-            </a:r>
-            <a:r>
-              <a:rPr lang="en-US" dirty="0" err="1"/>
-              <a:t>nginx</a:t>
-            </a:r>
-            <a:r>
-              <a:rPr lang="en-US" dirty="0"/>
-              <a:t> </a:t>
-            </a:r>
-            <a:r>
-              <a:rPr lang="en-US" dirty="0" err="1"/>
-              <a:t>nginx</a:t>
-            </a:r>
-            <a:r>
-              <a:rPr lang="en-US" dirty="0"/>
-              <a:t>=</a:t>
-            </a:r>
-            <a:r>
-              <a:rPr lang="en-US" dirty="0" err="1"/>
-              <a:t>nginx:mainline</a:t>
-            </a:r>
-            <a:r>
-              <a:rPr lang="en-US" dirty="0"/>
-              <a:t> --record” </a:t>
-            </a:r>
-            <a:r>
-              <a:rPr lang="en-US" dirty="0">
-                <a:sym typeface="Wingdings" panose="05000000000000000000" pitchFamily="2" charset="2"/>
-              </a:rPr>
-              <a:t> make sure to set an image tag that differs from your first revision</a:t>
-            </a:r>
-          </a:p>
-          <a:p>
-            <a:pPr marL="285750" indent="-285750">
-              <a:buFontTx/>
-              <a:buChar char="-"/>
-            </a:pPr>
-            <a:r>
-              <a:rPr lang="en-US" dirty="0">
-                <a:sym typeface="Wingdings" panose="05000000000000000000" pitchFamily="2" charset="2"/>
-              </a:rPr>
-              <a:t>Point out, that the “--record“ parameter will “ log” the command and write it to the deployment’s annotations</a:t>
-            </a:r>
-          </a:p>
-          <a:p>
-            <a:pPr marL="285750" marR="0" lvl="0" indent="-285750" algn="l" defTabSz="1088776" rtl="0" eaLnBrk="1" fontAlgn="auto" latinLnBrk="0" hangingPunct="1">
-              <a:lnSpc>
-                <a:spcPct val="100000"/>
-              </a:lnSpc>
-              <a:spcBef>
-                <a:spcPts val="0"/>
-              </a:spcBef>
-              <a:spcAft>
-                <a:spcPts val="0"/>
-              </a:spcAft>
-              <a:buClrTx/>
-              <a:buSzTx/>
-              <a:buFontTx/>
-              <a:buChar char="-"/>
-              <a:tabLst/>
-              <a:defRPr/>
-            </a:pPr>
-            <a:r>
-              <a:rPr lang="en-US" dirty="0">
-                <a:sym typeface="Wingdings" panose="05000000000000000000" pitchFamily="2" charset="2"/>
-              </a:rPr>
-              <a:t>“</a:t>
-            </a:r>
-            <a:r>
-              <a:rPr lang="en-US" dirty="0" err="1">
-                <a:sym typeface="Wingdings" panose="05000000000000000000" pitchFamily="2" charset="2"/>
-              </a:rPr>
-              <a:t>kubectl</a:t>
-            </a:r>
-            <a:r>
-              <a:rPr lang="en-US" dirty="0">
-                <a:sym typeface="Wingdings" panose="05000000000000000000" pitchFamily="2" charset="2"/>
-              </a:rPr>
-              <a:t> rollout history deployment </a:t>
-            </a:r>
-            <a:r>
-              <a:rPr lang="en-US" dirty="0" err="1">
-                <a:sym typeface="Wingdings" panose="05000000000000000000" pitchFamily="2" charset="2"/>
-              </a:rPr>
-              <a:t>nginx</a:t>
-            </a:r>
-            <a:r>
-              <a:rPr lang="en-US" dirty="0">
-                <a:sym typeface="Wingdings" panose="05000000000000000000" pitchFamily="2" charset="2"/>
-              </a:rPr>
-              <a:t>”  you should see 2 revisions incl. the “change-cause”</a:t>
-            </a:r>
-          </a:p>
-          <a:p>
-            <a:pPr marL="0" marR="0" lvl="0" indent="0" algn="l" defTabSz="1088776" rtl="0" eaLnBrk="1" fontAlgn="auto" latinLnBrk="0" hangingPunct="1">
+        </p:txBody>
+      </p:sp>
+      <p:sp>
+        <p:nvSpPr>
+          <p:cNvPr id="4" name="Slide Number Placeholder 3"/>
+          <p:cNvSpPr>
+            <a:spLocks noGrp="1"/>
+          </p:cNvSpPr>
+          <p:nvPr>
+            <p:ph type="sldNum" sz="quarter" idx="10"/>
+          </p:nvPr>
+        </p:nvSpPr>
+        <p:spPr/>
+        <p:txBody>
+          <a:bodyPr/>
+          <a:lstStyle/>
+          <a:p>
+            <a:pPr marL="0" marR="0" lvl="0" indent="0" algn="ctr" defTabSz="3255485" rtl="0" eaLnBrk="1" fontAlgn="auto" latinLnBrk="0" hangingPunct="1">
               <a:lnSpc>
                 <a:spcPct val="100000"/>
               </a:lnSpc>
@@ -1343,253 +1508,61 @@
               <a:tabLst/>
               <a:defRPr/>
             </a:pPr>
-            <a:r>
-              <a:rPr lang="en-US" dirty="0"/>
-              <a:t>Optional: do a demo for a rollback</a:t>
-            </a:r>
-            <a:endParaRPr lang="en-US" dirty="0">
-              <a:sym typeface="Wingdings" panose="05000000000000000000" pitchFamily="2" charset="2"/>
-            </a:endParaRPr>
-          </a:p>
-          <a:p>
-            <a:pPr marL="285750" marR="0" lvl="0" indent="-285750" algn="l" defTabSz="1088776" rtl="0" eaLnBrk="1" fontAlgn="auto" latinLnBrk="0" hangingPunct="1">
-              <a:lnSpc>
-                <a:spcPct val="100000"/>
-              </a:lnSpc>
-              <a:spcBef>
-                <a:spcPts val="0"/>
-              </a:spcBef>
-              <a:spcAft>
-                <a:spcPts val="0"/>
-              </a:spcAft>
-              <a:buClrTx/>
-              <a:buSzTx/>
-              <a:buFontTx/>
-              <a:buChar char="-"/>
-              <a:tabLst/>
-              <a:defRPr/>
-            </a:pPr>
-            <a:r>
-              <a:rPr lang="en-US" dirty="0"/>
-              <a:t>Re-run the “set image” command while using an invalid version tag (like “invalid” or something with a typo)</a:t>
-            </a:r>
-          </a:p>
-          <a:p>
-            <a:pPr marL="285750" marR="0" lvl="0" indent="-285750" algn="l" defTabSz="1088776" rtl="0" eaLnBrk="1" fontAlgn="auto" latinLnBrk="0" hangingPunct="1">
-              <a:lnSpc>
-                <a:spcPct val="100000"/>
-              </a:lnSpc>
-              <a:spcBef>
-                <a:spcPts val="0"/>
-              </a:spcBef>
-              <a:spcAft>
-                <a:spcPts val="0"/>
-              </a:spcAft>
-              <a:buClrTx/>
-              <a:buSzTx/>
-              <a:buFontTx/>
-              <a:buChar char="-"/>
-              <a:tabLst/>
-              <a:defRPr/>
-            </a:pPr>
-            <a:r>
-              <a:rPr lang="en-US" dirty="0"/>
-              <a:t>Check the rollout status </a:t>
-            </a:r>
-            <a:r>
-              <a:rPr lang="en-US" dirty="0">
-                <a:sym typeface="Wingdings" panose="05000000000000000000" pitchFamily="2" charset="2"/>
-              </a:rPr>
-              <a:t> there should be one pod with the new image version in an error status &amp; at least 2 pods of the previous revision up and running.</a:t>
-            </a:r>
-            <a:endParaRPr lang="en-US" dirty="0"/>
-          </a:p>
-          <a:p>
-            <a:pPr marL="285750" marR="0" lvl="0" indent="-285750" algn="l" defTabSz="1088776" rtl="0" eaLnBrk="1" fontAlgn="auto" latinLnBrk="0" hangingPunct="1">
-              <a:lnSpc>
-                <a:spcPct val="100000"/>
-              </a:lnSpc>
-              <a:spcBef>
-                <a:spcPts val="0"/>
-              </a:spcBef>
-              <a:spcAft>
-                <a:spcPts val="0"/>
-              </a:spcAft>
-              <a:buClrTx/>
-              <a:buSzTx/>
-              <a:buFontTx/>
-              <a:buChar char="-"/>
-              <a:tabLst/>
-              <a:defRPr/>
-            </a:pPr>
-            <a:r>
-              <a:rPr lang="en-US" dirty="0"/>
-              <a:t>Explain the rolling update strategy and why there is only one pod in status error </a:t>
-            </a:r>
-            <a:r>
-              <a:rPr lang="en-US" dirty="0">
-                <a:sym typeface="Wingdings" panose="05000000000000000000" pitchFamily="2" charset="2"/>
-              </a:rPr>
-              <a:t> </a:t>
-            </a:r>
-            <a:r>
-              <a:rPr lang="en-US" dirty="0" err="1">
-                <a:sym typeface="Wingdings" panose="05000000000000000000" pitchFamily="2" charset="2"/>
-              </a:rPr>
-              <a:t>maxUnavailable</a:t>
-            </a:r>
-            <a:r>
-              <a:rPr lang="en-US" dirty="0">
-                <a:sym typeface="Wingdings" panose="05000000000000000000" pitchFamily="2" charset="2"/>
-              </a:rPr>
-              <a:t> (</a:t>
-            </a:r>
-            <a:r>
-              <a:rPr lang="de-DE" sz="1400" b="0" kern="1200" dirty="0" err="1">
-                <a:solidFill>
-                  <a:schemeClr val="tx1"/>
+            <a:fld id="{7D8C2C35-2B8A-446E-BEC0-FD36716C29AC}" type="slidenum">
+              <a:rPr kumimoji="0" lang="de-DE" sz="2400" b="0" i="0" u="none" strike="noStrike" kern="1200" cap="none" spc="0" normalizeH="0" baseline="0" noProof="0">
+                <a:ln>
+                  <a:noFill/>
+                </a:ln>
+                <a:solidFill>
+                  <a:srgbClr val="000000"/>
                 </a:solidFill>
                 <a:effectLst/>
-                <a:latin typeface="+mn-lt"/>
+                <a:uLnTx/>
+                <a:uFillTx/>
+                <a:latin typeface="Arial"/>
                 <a:ea typeface="+mn-ea"/>
                 <a:cs typeface="+mn-cs"/>
               </a:rPr>
-              <a:t>kubectl</a:t>
-            </a:r>
-            <a:r>
-              <a:rPr lang="de-DE" sz="1400" b="0" kern="1200" dirty="0">
-                <a:solidFill>
-                  <a:schemeClr val="tx1"/>
-                </a:solidFill>
-                <a:effectLst/>
-                <a:latin typeface="+mn-lt"/>
-                <a:ea typeface="+mn-ea"/>
-                <a:cs typeface="+mn-cs"/>
-              </a:rPr>
-              <a:t> </a:t>
-            </a:r>
-            <a:r>
-              <a:rPr lang="de-DE" sz="1400" b="0" kern="1200" dirty="0" err="1">
-                <a:solidFill>
-                  <a:schemeClr val="tx1"/>
-                </a:solidFill>
-                <a:effectLst/>
-                <a:latin typeface="+mn-lt"/>
-                <a:ea typeface="+mn-ea"/>
-                <a:cs typeface="+mn-cs"/>
-              </a:rPr>
-              <a:t>explain</a:t>
-            </a:r>
-            <a:r>
-              <a:rPr lang="de-DE" sz="1400" b="0" kern="1200" dirty="0">
-                <a:solidFill>
-                  <a:schemeClr val="tx1"/>
-                </a:solidFill>
-                <a:effectLst/>
-                <a:latin typeface="+mn-lt"/>
-                <a:ea typeface="+mn-ea"/>
-                <a:cs typeface="+mn-cs"/>
-              </a:rPr>
-              <a:t> </a:t>
-            </a:r>
-            <a:r>
-              <a:rPr lang="de-DE" sz="1400" b="0" kern="1200" dirty="0" err="1">
-                <a:solidFill>
-                  <a:schemeClr val="tx1"/>
-                </a:solidFill>
-                <a:effectLst/>
-                <a:latin typeface="+mn-lt"/>
-                <a:ea typeface="+mn-ea"/>
-                <a:cs typeface="+mn-cs"/>
-              </a:rPr>
-              <a:t>deployment.spec.strategy.rollingUpdate</a:t>
-            </a:r>
-            <a:r>
-              <a:rPr lang="de-DE" sz="1400" b="0" kern="1200" dirty="0">
-                <a:solidFill>
-                  <a:schemeClr val="tx1"/>
-                </a:solidFill>
-                <a:effectLst/>
-                <a:latin typeface="+mn-lt"/>
-                <a:ea typeface="+mn-ea"/>
-                <a:cs typeface="+mn-cs"/>
-              </a:rPr>
-              <a:t>)</a:t>
-            </a:r>
-          </a:p>
-          <a:p>
-            <a:pPr marL="285750" marR="0" lvl="0" indent="-285750" algn="l" defTabSz="1088776" rtl="0" eaLnBrk="1" fontAlgn="auto" latinLnBrk="0" hangingPunct="1">
-              <a:lnSpc>
-                <a:spcPct val="100000"/>
-              </a:lnSpc>
-              <a:spcBef>
-                <a:spcPts val="0"/>
-              </a:spcBef>
-              <a:spcAft>
-                <a:spcPts val="0"/>
-              </a:spcAft>
-              <a:buClrTx/>
-              <a:buSzTx/>
-              <a:buFontTx/>
-              <a:buChar char="-"/>
-              <a:tabLst/>
-              <a:defRPr/>
-            </a:pPr>
-            <a:r>
-              <a:rPr lang="en-US" dirty="0"/>
-              <a:t> Do the rollback: </a:t>
-            </a:r>
-            <a:r>
-              <a:rPr lang="en-US" dirty="0" err="1"/>
-              <a:t>kubectl</a:t>
-            </a:r>
-            <a:r>
-              <a:rPr lang="en-US" dirty="0"/>
-              <a:t> rollout undo deployment </a:t>
-            </a:r>
-            <a:r>
-              <a:rPr lang="en-US" dirty="0" err="1"/>
-              <a:t>nginx</a:t>
-            </a:r>
-            <a:endParaRPr lang="en-US" dirty="0"/>
-          </a:p>
-          <a:p>
-            <a:pPr marL="285750" indent="-285750">
-              <a:buFontTx/>
-              <a:buChar char="-"/>
-            </a:pPr>
-            <a:endParaRPr lang="en-US" dirty="0"/>
-          </a:p>
-        </p:txBody>
-      </p:sp>
-      <p:sp>
-        <p:nvSpPr>
-          <p:cNvPr id="4" name="Slide Number Placeholder 3"/>
-          <p:cNvSpPr>
-            <a:spLocks noGrp="1"/>
-          </p:cNvSpPr>
-          <p:nvPr>
-            <p:ph type="sldNum" sz="quarter" idx="10"/>
-          </p:nvPr>
-        </p:nvSpPr>
-        <p:spPr/>
-        <p:txBody>
-          <a:bodyPr/>
-          <a:lstStyle/>
-          <a:p>
-            <a:fld id="{7D8C2C35-2B8A-446E-BEC0-FD36716C29AC}" type="slidenum">
-              <a:rPr lang="de-DE" smtClean="0"/>
-              <a:pPr/>
-              <a:t>12</a:t>
+              <a:pPr marL="0" marR="0" lvl="0" indent="0" algn="ctr" defTabSz="3255485" rtl="0" eaLnBrk="1" fontAlgn="auto" latinLnBrk="0" hangingPunct="1">
+                <a:lnSpc>
+                  <a:spcPct val="100000"/>
+                </a:lnSpc>
+                <a:spcBef>
+                  <a:spcPts val="0"/>
+                </a:spcBef>
+                <a:spcAft>
+                  <a:spcPts val="0"/>
+                </a:spcAft>
+                <a:buClrTx/>
+                <a:buSzTx/>
+                <a:buFontTx/>
+                <a:buNone/>
+                <a:tabLst/>
+                <a:defRPr/>
+              </a:pPr>
+              <a:t>14</a:t>
             </a:fld>
-            <a:endParaRPr lang="de-DE" dirty="0"/>
+            <a:endParaRPr kumimoji="0" lang="de-DE" sz="2400" b="0" i="0" u="none" strike="noStrike" kern="1200" cap="none" spc="0" normalizeH="0" baseline="0" noProof="0" dirty="0">
+              <a:ln>
+                <a:noFill/>
+              </a:ln>
+              <a:solidFill>
+                <a:srgbClr val="000000"/>
+              </a:solidFill>
+              <a:effectLst/>
+              <a:uLnTx/>
+              <a:uFillTx/>
+              <a:latin typeface="Arial"/>
+              <a:ea typeface="+mn-ea"/>
+              <a:cs typeface="+mn-cs"/>
+            </a:endParaRPr>
           </a:p>
         </p:txBody>
       </p:sp>
     </p:spTree>
     <p:extLst>
       <p:ext uri="{BB962C8B-B14F-4D97-AF65-F5344CB8AC3E}">
-        <p14:creationId xmlns:p14="http://schemas.microsoft.com/office/powerpoint/2010/main" val="3805946316"/>
+        <p14:creationId xmlns:p14="http://schemas.microsoft.com/office/powerpoint/2010/main" val="1342489642"/>
       </p:ext>
     </p:extLst>
   </p:cSld>
@@ -1733,7 +1706,7 @@
     </p:spTree>
     <p:extLst>
       <p:ext uri="{BB962C8B-B14F-4D97-AF65-F5344CB8AC3E}">
-        <p14:creationId xmlns:p14="http://schemas.microsoft.com/office/powerpoint/2010/main" val="1269890851"/>
+        <p14:creationId xmlns:p14="http://schemas.microsoft.com/office/powerpoint/2010/main" val="861195006"/>
       </p:ext>
     </p:extLst>
   </p:cSld>
@@ -1744,294 +1717,6 @@
 </file>
 
 <file path=ppt/notesSlides/notesSlide14.xml><?xml version="1.0" encoding="utf-8"?>
-<p:notes xmlns:a="http://schemas.openxmlformats.org/drawingml/2006/main" xmlns:r="http://schemas.openxmlformats.org/officeDocument/2006/relationships" xmlns:p="http://schemas.openxmlformats.org/presentationml/2006/main">
-  <p:cSld>
-    <p:spTree>
-      <p:nvGrpSpPr>
-        <p:cNvPr id="1" name=""/>
-        <p:cNvGrpSpPr/>
-        <p:nvPr/>
-      </p:nvGrpSpPr>
-      <p:grpSpPr>
-        <a:xfrm>
-          <a:off x="0" y="0"/>
-          <a:ext cx="0" cy="0"/>
-          <a:chOff x="0" y="0"/>
-          <a:chExt cx="0" cy="0"/>
-        </a:xfrm>
-      </p:grpSpPr>
-      <p:sp>
-        <p:nvSpPr>
-          <p:cNvPr id="2" name="Slide Image Placeholder 1"/>
-          <p:cNvSpPr>
-            <a:spLocks noGrp="1" noRot="1" noChangeAspect="1"/>
-          </p:cNvSpPr>
-          <p:nvPr>
-            <p:ph type="sldImg"/>
-          </p:nvPr>
-        </p:nvSpPr>
-        <p:spPr/>
-      </p:sp>
-      <p:sp>
-        <p:nvSpPr>
-          <p:cNvPr id="3" name="Notes Placeholder 2"/>
-          <p:cNvSpPr>
-            <a:spLocks noGrp="1"/>
-          </p:cNvSpPr>
-          <p:nvPr>
-            <p:ph type="body" idx="1"/>
-          </p:nvPr>
-        </p:nvSpPr>
-        <p:spPr/>
-        <p:txBody>
-          <a:bodyPr/>
-          <a:lstStyle/>
-          <a:p>
-            <a:endParaRPr lang="en-US" dirty="0"/>
-          </a:p>
-        </p:txBody>
-      </p:sp>
-      <p:sp>
-        <p:nvSpPr>
-          <p:cNvPr id="4" name="Slide Number Placeholder 3"/>
-          <p:cNvSpPr>
-            <a:spLocks noGrp="1"/>
-          </p:cNvSpPr>
-          <p:nvPr>
-            <p:ph type="sldNum" sz="quarter" idx="10"/>
-          </p:nvPr>
-        </p:nvSpPr>
-        <p:spPr/>
-        <p:txBody>
-          <a:bodyPr/>
-          <a:lstStyle/>
-          <a:p>
-            <a:pPr marL="0" marR="0" lvl="0" indent="0" algn="ctr" defTabSz="3255485" rtl="0" eaLnBrk="1" fontAlgn="auto" latinLnBrk="0" hangingPunct="1">
-              <a:lnSpc>
-                <a:spcPct val="100000"/>
-              </a:lnSpc>
-              <a:spcBef>
-                <a:spcPts val="0"/>
-              </a:spcBef>
-              <a:spcAft>
-                <a:spcPts val="0"/>
-              </a:spcAft>
-              <a:buClrTx/>
-              <a:buSzTx/>
-              <a:buFontTx/>
-              <a:buNone/>
-              <a:tabLst/>
-              <a:defRPr/>
-            </a:pPr>
-            <a:fld id="{7D8C2C35-2B8A-446E-BEC0-FD36716C29AC}" type="slidenum">
-              <a:rPr kumimoji="0" lang="de-DE" sz="2400" b="0" i="0" u="none" strike="noStrike" kern="1200" cap="none" spc="0" normalizeH="0" baseline="0" noProof="0">
-                <a:ln>
-                  <a:noFill/>
-                </a:ln>
-                <a:solidFill>
-                  <a:srgbClr val="000000"/>
-                </a:solidFill>
-                <a:effectLst/>
-                <a:uLnTx/>
-                <a:uFillTx/>
-                <a:latin typeface="Arial"/>
-                <a:ea typeface="+mn-ea"/>
-                <a:cs typeface="+mn-cs"/>
-              </a:rPr>
-              <a:pPr marL="0" marR="0" lvl="0" indent="0" algn="ctr" defTabSz="3255485" rtl="0" eaLnBrk="1" fontAlgn="auto" latinLnBrk="0" hangingPunct="1">
-                <a:lnSpc>
-                  <a:spcPct val="100000"/>
-                </a:lnSpc>
-                <a:spcBef>
-                  <a:spcPts val="0"/>
-                </a:spcBef>
-                <a:spcAft>
-                  <a:spcPts val="0"/>
-                </a:spcAft>
-                <a:buClrTx/>
-                <a:buSzTx/>
-                <a:buFontTx/>
-                <a:buNone/>
-                <a:tabLst/>
-                <a:defRPr/>
-              </a:pPr>
-              <a:t>16</a:t>
-            </a:fld>
-            <a:endParaRPr kumimoji="0" lang="de-DE" sz="2400" b="0" i="0" u="none" strike="noStrike" kern="1200" cap="none" spc="0" normalizeH="0" baseline="0" noProof="0" dirty="0">
-              <a:ln>
-                <a:noFill/>
-              </a:ln>
-              <a:solidFill>
-                <a:srgbClr val="000000"/>
-              </a:solidFill>
-              <a:effectLst/>
-              <a:uLnTx/>
-              <a:uFillTx/>
-              <a:latin typeface="Arial"/>
-              <a:ea typeface="+mn-ea"/>
-              <a:cs typeface="+mn-cs"/>
-            </a:endParaRPr>
-          </a:p>
-        </p:txBody>
-      </p:sp>
-    </p:spTree>
-    <p:extLst>
-      <p:ext uri="{BB962C8B-B14F-4D97-AF65-F5344CB8AC3E}">
-        <p14:creationId xmlns:p14="http://schemas.microsoft.com/office/powerpoint/2010/main" val="1342489642"/>
-      </p:ext>
-    </p:extLst>
-  </p:cSld>
-  <p:clrMapOvr>
-    <a:masterClrMapping/>
-  </p:clrMapOvr>
-</p:notes>
-</file>
-
-<file path=ppt/notesSlides/notesSlide15.xml><?xml version="1.0" encoding="utf-8"?>
-<p:notes xmlns:a="http://schemas.openxmlformats.org/drawingml/2006/main" xmlns:r="http://schemas.openxmlformats.org/officeDocument/2006/relationships" xmlns:p="http://schemas.openxmlformats.org/presentationml/2006/main">
-  <p:cSld>
-    <p:spTree>
-      <p:nvGrpSpPr>
-        <p:cNvPr id="1" name=""/>
-        <p:cNvGrpSpPr/>
-        <p:nvPr/>
-      </p:nvGrpSpPr>
-      <p:grpSpPr>
-        <a:xfrm>
-          <a:off x="0" y="0"/>
-          <a:ext cx="0" cy="0"/>
-          <a:chOff x="0" y="0"/>
-          <a:chExt cx="0" cy="0"/>
-        </a:xfrm>
-      </p:grpSpPr>
-      <p:sp>
-        <p:nvSpPr>
-          <p:cNvPr id="2" name="Slide Image Placeholder 1"/>
-          <p:cNvSpPr>
-            <a:spLocks noGrp="1" noRot="1" noChangeAspect="1"/>
-          </p:cNvSpPr>
-          <p:nvPr>
-            <p:ph type="sldImg"/>
-          </p:nvPr>
-        </p:nvSpPr>
-        <p:spPr/>
-      </p:sp>
-      <p:sp>
-        <p:nvSpPr>
-          <p:cNvPr id="3" name="Notes Placeholder 2"/>
-          <p:cNvSpPr>
-            <a:spLocks noGrp="1"/>
-          </p:cNvSpPr>
-          <p:nvPr>
-            <p:ph type="body" idx="1"/>
-          </p:nvPr>
-        </p:nvSpPr>
-        <p:spPr/>
-        <p:txBody>
-          <a:bodyPr/>
-          <a:lstStyle/>
-          <a:p>
-            <a:endParaRPr lang="en-US" dirty="0"/>
-          </a:p>
-        </p:txBody>
-      </p:sp>
-      <p:sp>
-        <p:nvSpPr>
-          <p:cNvPr id="4" name="Slide Number Placeholder 3"/>
-          <p:cNvSpPr>
-            <a:spLocks noGrp="1"/>
-          </p:cNvSpPr>
-          <p:nvPr>
-            <p:ph type="sldNum" sz="quarter" idx="10"/>
-          </p:nvPr>
-        </p:nvSpPr>
-        <p:spPr/>
-        <p:txBody>
-          <a:bodyPr/>
-          <a:lstStyle/>
-          <a:p>
-            <a:pPr marL="0" marR="0" lvl="0" indent="0" algn="ctr" defTabSz="3255485" rtl="0" eaLnBrk="1" fontAlgn="auto" latinLnBrk="0" hangingPunct="1">
-              <a:lnSpc>
-                <a:spcPct val="100000"/>
-              </a:lnSpc>
-              <a:spcBef>
-                <a:spcPts val="0"/>
-              </a:spcBef>
-              <a:spcAft>
-                <a:spcPts val="0"/>
-              </a:spcAft>
-              <a:buClrTx/>
-              <a:buSzTx/>
-              <a:buFontTx/>
-              <a:buNone/>
-              <a:tabLst/>
-              <a:defRPr/>
-            </a:pPr>
-            <a:fld id="{7D8C2C35-2B8A-446E-BEC0-FD36716C29AC}" type="slidenum">
-              <a:rPr kumimoji="0" lang="de-DE" sz="2400" b="0" i="0" u="none" strike="noStrike" kern="1200" cap="none" spc="0" normalizeH="0" baseline="0" noProof="0">
-                <a:ln>
-                  <a:noFill/>
-                </a:ln>
-                <a:solidFill>
-                  <a:srgbClr val="000000"/>
-                </a:solidFill>
-                <a:effectLst/>
-                <a:uLnTx/>
-                <a:uFillTx/>
-                <a:latin typeface="Arial"/>
-                <a:ea typeface="+mn-ea"/>
-                <a:cs typeface="+mn-cs"/>
-              </a:rPr>
-              <a:pPr marL="0" marR="0" lvl="0" indent="0" algn="ctr" defTabSz="3255485" rtl="0" eaLnBrk="1" fontAlgn="auto" latinLnBrk="0" hangingPunct="1">
-                <a:lnSpc>
-                  <a:spcPct val="100000"/>
-                </a:lnSpc>
-                <a:spcBef>
-                  <a:spcPts val="0"/>
-                </a:spcBef>
-                <a:spcAft>
-                  <a:spcPts val="0"/>
-                </a:spcAft>
-                <a:buClrTx/>
-                <a:buSzTx/>
-                <a:buFontTx/>
-                <a:buNone/>
-                <a:tabLst/>
-                <a:defRPr/>
-              </a:pPr>
-              <a:t>17</a:t>
-            </a:fld>
-            <a:endParaRPr kumimoji="0" lang="de-DE" sz="2400" b="0" i="0" u="none" strike="noStrike" kern="1200" cap="none" spc="0" normalizeH="0" baseline="0" noProof="0" dirty="0">
-              <a:ln>
-                <a:noFill/>
-              </a:ln>
-              <a:solidFill>
-                <a:srgbClr val="000000"/>
-              </a:solidFill>
-              <a:effectLst/>
-              <a:uLnTx/>
-              <a:uFillTx/>
-              <a:latin typeface="Arial"/>
-              <a:ea typeface="+mn-ea"/>
-              <a:cs typeface="+mn-cs"/>
-            </a:endParaRPr>
-          </a:p>
-        </p:txBody>
-      </p:sp>
-    </p:spTree>
-    <p:extLst>
-      <p:ext uri="{BB962C8B-B14F-4D97-AF65-F5344CB8AC3E}">
-        <p14:creationId xmlns:p14="http://schemas.microsoft.com/office/powerpoint/2010/main" val="861195006"/>
-      </p:ext>
-    </p:extLst>
-  </p:cSld>
-  <p:clrMapOvr>
-    <a:masterClrMapping/>
-  </p:clrMapOvr>
-</p:notes>
-</file>
-
-<file path=ppt/notesSlides/notesSlide16.xml><?xml version="1.0" encoding="utf-8"?>
 <p:notes xmlns:a="http://schemas.openxmlformats.org/drawingml/2006/main" xmlns:r="http://schemas.openxmlformats.org/officeDocument/2006/relationships" xmlns:p="http://schemas.openxmlformats.org/presentationml/2006/main">
   <p:cSld>
     <p:spTree>
@@ -2066,7 +1751,7 @@
             <a:fld id="{7D8C2C35-2B8A-446E-BEC0-FD36716C29AC}" type="slidenum">
               <a:rPr lang="de-DE" smtClean="0"/>
               <a:pPr/>
-              <a:t>18</a:t>
+              <a:t>16</a:t>
             </a:fld>
             <a:endParaRPr lang="de-DE" dirty="0"/>
           </a:p>
@@ -2794,19 +2479,78 @@
           <a:bodyPr/>
           <a:lstStyle/>
           <a:p>
+            <a:pPr marL="0" marR="0" lvl="0" indent="0" algn="ctr" defTabSz="1088776" rtl="0" eaLnBrk="1" fontAlgn="auto" latinLnBrk="0" hangingPunct="1">
+              <a:lnSpc>
+                <a:spcPct val="100000"/>
+              </a:lnSpc>
+              <a:spcBef>
+                <a:spcPts val="0"/>
+              </a:spcBef>
+              <a:spcAft>
+                <a:spcPts val="0"/>
+              </a:spcAft>
+              <a:buClrTx/>
+              <a:buSzTx/>
+              <a:buFontTx/>
+              <a:buNone/>
+              <a:tabLst/>
+              <a:defRPr/>
+            </a:pPr>
             <a:fld id="{7D8C2C35-2B8A-446E-BEC0-FD36716C29AC}" type="slidenum">
-              <a:rPr lang="de-DE" smtClean="0"/>
-              <a:pPr/>
+              <a:rPr kumimoji="0" lang="de-DE" sz="800" b="0" i="0" u="none" strike="noStrike" kern="1200" cap="none" spc="0" normalizeH="0" baseline="0" noProof="0" smtClean="0">
+                <a:ln>
+                  <a:noFill/>
+                </a:ln>
+                <a:solidFill>
+                  <a:srgbClr val="000000"/>
+                </a:solidFill>
+                <a:effectLst/>
+                <a:uLnTx/>
+                <a:uFillTx/>
+                <a:latin typeface="Arial"/>
+                <a:ea typeface="+mn-ea"/>
+                <a:cs typeface="+mn-cs"/>
+              </a:rPr>
+              <a:pPr marL="0" marR="0" lvl="0" indent="0" algn="ctr" defTabSz="1088776" rtl="0" eaLnBrk="1" fontAlgn="auto" latinLnBrk="0" hangingPunct="1">
+                <a:lnSpc>
+                  <a:spcPct val="100000"/>
+                </a:lnSpc>
+                <a:spcBef>
+                  <a:spcPts val="0"/>
+                </a:spcBef>
+                <a:spcAft>
+                  <a:spcPts val="0"/>
+                </a:spcAft>
+                <a:buClrTx/>
+                <a:buSzTx/>
+                <a:buFontTx/>
+                <a:buNone/>
+                <a:tabLst/>
+                <a:defRPr/>
+              </a:pPr>
               <a:t>6</a:t>
             </a:fld>
-            <a:endParaRPr lang="de-DE" dirty="0"/>
+            <a:endParaRPr kumimoji="0" lang="de-DE" sz="800" b="0" i="0" u="none" strike="noStrike" kern="1200" cap="none" spc="0" normalizeH="0" baseline="0" noProof="0" dirty="0">
+              <a:ln>
+                <a:noFill/>
+              </a:ln>
+              <a:solidFill>
+                <a:srgbClr val="000000"/>
+              </a:solidFill>
+              <a:effectLst/>
+              <a:uLnTx/>
+              <a:uFillTx/>
+              <a:latin typeface="Arial"/>
+              <a:ea typeface="+mn-ea"/>
+              <a:cs typeface="+mn-cs"/>
+            </a:endParaRPr>
           </a:p>
         </p:txBody>
       </p:sp>
     </p:spTree>
     <p:extLst>
       <p:ext uri="{BB962C8B-B14F-4D97-AF65-F5344CB8AC3E}">
-        <p14:creationId xmlns:p14="http://schemas.microsoft.com/office/powerpoint/2010/main" val="3699306422"/>
+        <p14:creationId xmlns:p14="http://schemas.microsoft.com/office/powerpoint/2010/main" val="961378869"/>
       </p:ext>
     </p:extLst>
   </p:cSld>
@@ -2860,6 +2604,64 @@
           <a:bodyPr/>
           <a:lstStyle/>
           <a:p>
+            <a:r>
+              <a:rPr lang="en-US" dirty="0"/>
+              <a:t>Set/ change docker image for deployment:</a:t>
+            </a:r>
+          </a:p>
+          <a:p>
+            <a:r>
+              <a:rPr lang="en-US" dirty="0" err="1"/>
+              <a:t>kubectl</a:t>
+            </a:r>
+            <a:r>
+              <a:rPr lang="en-US" dirty="0"/>
+              <a:t> set image deployment/</a:t>
+            </a:r>
+            <a:r>
+              <a:rPr lang="en-US" dirty="0" err="1"/>
+              <a:t>nginx</a:t>
+            </a:r>
+            <a:r>
+              <a:rPr lang="en-US" dirty="0"/>
+              <a:t> </a:t>
+            </a:r>
+            <a:r>
+              <a:rPr lang="en-US" dirty="0" err="1"/>
+              <a:t>nginx</a:t>
+            </a:r>
+            <a:r>
+              <a:rPr lang="en-US" dirty="0"/>
+              <a:t>=</a:t>
+            </a:r>
+            <a:r>
+              <a:rPr lang="en-US" dirty="0" err="1"/>
+              <a:t>nginx:mainline</a:t>
+            </a:r>
+            <a:endParaRPr lang="en-US" dirty="0"/>
+          </a:p>
+          <a:p>
+            <a:endParaRPr lang="en-US" dirty="0"/>
+          </a:p>
+          <a:p>
+            <a:r>
+              <a:rPr lang="en-US" dirty="0"/>
+              <a:t>Rollback rollout:</a:t>
+            </a:r>
+          </a:p>
+          <a:p>
+            <a:r>
+              <a:rPr lang="en-US" dirty="0" err="1"/>
+              <a:t>kubectl</a:t>
+            </a:r>
+            <a:r>
+              <a:rPr lang="en-US" dirty="0"/>
+              <a:t> rollout undo deployment/</a:t>
+            </a:r>
+            <a:r>
+              <a:rPr lang="en-US" dirty="0" err="1"/>
+              <a:t>nginx</a:t>
+            </a:r>
             <a:endParaRPr lang="en-US" dirty="0"/>
           </a:p>
         </p:txBody>
@@ -2950,7 +2752,7 @@
     </p:spTree>
     <p:extLst>
       <p:ext uri="{BB962C8B-B14F-4D97-AF65-F5344CB8AC3E}">
-        <p14:creationId xmlns:p14="http://schemas.microsoft.com/office/powerpoint/2010/main" val="961378869"/>
+        <p14:creationId xmlns:p14="http://schemas.microsoft.com/office/powerpoint/2010/main" val="1880559394"/>
       </p:ext>
     </p:extLst>
   </p:cSld>
@@ -3001,10 +2803,143 @@
         </p:nvSpPr>
         <p:spPr/>
         <p:txBody>
-          <a:bodyPr/>
+          <a:bodyPr>
+            <a:normAutofit lnSpcReduction="10000"/>
+          </a:bodyPr>
           <a:lstStyle/>
           <a:p>
+            <a:r>
+              <a:rPr lang="en-US" dirty="0"/>
+              <a:t>How labels &amp; selectors work here:</a:t>
+            </a:r>
+          </a:p>
+          <a:p>
+            <a:pPr marL="285750" indent="-285750">
+              <a:buFontTx/>
+              <a:buChar char="-"/>
+            </a:pPr>
+            <a:r>
+              <a:rPr lang="en-US" dirty="0"/>
+              <a:t>Names of pods can change</a:t>
+            </a:r>
+          </a:p>
+          <a:p>
+            <a:pPr marL="285750" indent="-285750">
+              <a:buFontTx/>
+              <a:buChar char="-"/>
+            </a:pPr>
+            <a:r>
+              <a:rPr lang="en-US" dirty="0"/>
+              <a:t>Labels stay</a:t>
+            </a:r>
+            <a:r>
+              <a:rPr lang="en-US" baseline="0" dirty="0"/>
+              <a:t> the same</a:t>
+            </a:r>
+          </a:p>
+          <a:p>
+            <a:pPr marL="285750" indent="-285750">
+              <a:buFontTx/>
+              <a:buChar char="-"/>
+            </a:pPr>
+            <a:r>
+              <a:rPr lang="en-US" baseline="0" dirty="0"/>
+              <a:t>Only with labels pods related to </a:t>
+            </a:r>
+            <a:r>
+              <a:rPr lang="en-US" baseline="0" dirty="0" err="1"/>
+              <a:t>rs</a:t>
+            </a:r>
+            <a:r>
+              <a:rPr lang="en-US" baseline="0" dirty="0"/>
+              <a:t>/deployment can be determined reliably</a:t>
+            </a:r>
+          </a:p>
+          <a:p>
+            <a:pPr marL="285750" indent="-285750">
+              <a:buFontTx/>
+              <a:buChar char="-"/>
+            </a:pPr>
             <a:endParaRPr lang="en-US" dirty="0"/>
+          </a:p>
+          <a:p>
+            <a:r>
+              <a:rPr lang="en-US" dirty="0"/>
+              <a:t>Why deployments?</a:t>
+            </a:r>
+          </a:p>
+          <a:p>
+            <a:r>
+              <a:rPr lang="en-US" dirty="0"/>
+              <a:t>You don’t want to know and manage individual pods. You would like to specify a template and instantiate it as often as you wish. Also you want to manage the group of pods e.g. in terms of docker image used.</a:t>
+            </a:r>
+          </a:p>
+          <a:p>
+            <a:endParaRPr lang="en-US" dirty="0"/>
+          </a:p>
+          <a:p>
+            <a:r>
+              <a:rPr lang="en-US" dirty="0"/>
+              <a:t>The deployment gives you these management capabilities. In it’s resource description (</a:t>
+            </a:r>
+            <a:r>
+              <a:rPr lang="en-US" dirty="0" err="1"/>
+              <a:t>yaml</a:t>
+            </a:r>
+            <a:r>
+              <a:rPr lang="en-US" dirty="0"/>
+              <a:t> file) you specify a pod template, how pods should be labeled and of course a corresponding selector to identify your pods.</a:t>
+            </a:r>
+          </a:p>
+          <a:p>
+            <a:r>
+              <a:rPr lang="en-US" dirty="0"/>
+              <a:t>On cluster level the deployment creates &amp; manages a replica set which then manages the pods. </a:t>
+            </a:r>
+          </a:p>
+          <a:p>
+            <a:r>
+              <a:rPr lang="en-US" dirty="0"/>
+              <a:t>If you update the number of replicas, this will be sent to the </a:t>
+            </a:r>
+            <a:r>
+              <a:rPr lang="en-US" dirty="0" err="1"/>
+              <a:t>replicaSet</a:t>
+            </a:r>
+            <a:r>
+              <a:rPr lang="en-US" dirty="0"/>
+              <a:t> and the desired state is enforced via the </a:t>
+            </a:r>
+            <a:r>
+              <a:rPr lang="en-US" dirty="0" err="1"/>
+              <a:t>replicaSet</a:t>
+            </a:r>
+            <a:r>
+              <a:rPr lang="en-US" dirty="0"/>
+              <a:t>. </a:t>
+            </a:r>
+          </a:p>
+          <a:p>
+            <a:r>
+              <a:rPr lang="en-US" dirty="0"/>
+              <a:t>Upon update of the image, a new </a:t>
+            </a:r>
+            <a:r>
+              <a:rPr lang="en-US" dirty="0" err="1"/>
+              <a:t>replicaSet</a:t>
+            </a:r>
+            <a:r>
+              <a:rPr lang="en-US" dirty="0"/>
+              <a:t> will be created and the old one will be set to replica=0. This way you can roll-back to your old </a:t>
+            </a:r>
+            <a:r>
+              <a:rPr lang="en-US" dirty="0" err="1"/>
+              <a:t>replicaSet</a:t>
+            </a:r>
+            <a:r>
+              <a:rPr lang="en-US" dirty="0"/>
+              <a:t> (by scaling it up again). </a:t>
+            </a:r>
           </a:p>
         </p:txBody>
       </p:sp>
@@ -3035,7 +2970,7 @@
     </p:spTree>
     <p:extLst>
       <p:ext uri="{BB962C8B-B14F-4D97-AF65-F5344CB8AC3E}">
-        <p14:creationId xmlns:p14="http://schemas.microsoft.com/office/powerpoint/2010/main" val="301230060"/>
+        <p14:creationId xmlns:p14="http://schemas.microsoft.com/office/powerpoint/2010/main" val="2647646029"/>
       </p:ext>
     </p:extLst>
   </p:cSld>
@@ -3064,95 +2999,6 @@
       </p:grpSpPr>
       <p:sp>
         <p:nvSpPr>
-          <p:cNvPr id="2" name="Slide Image Placeholder 1"/>
-          <p:cNvSpPr>
-            <a:spLocks noGrp="1" noRot="1" noChangeAspect="1"/>
-          </p:cNvSpPr>
-          <p:nvPr>
-            <p:ph type="sldImg"/>
-          </p:nvPr>
-        </p:nvSpPr>
-        <p:spPr/>
-      </p:sp>
-      <p:sp>
-        <p:nvSpPr>
-          <p:cNvPr id="3" name="Notes Placeholder 2"/>
-          <p:cNvSpPr>
-            <a:spLocks noGrp="1"/>
-          </p:cNvSpPr>
-          <p:nvPr>
-            <p:ph type="body" idx="1"/>
-          </p:nvPr>
-        </p:nvSpPr>
-        <p:spPr/>
-        <p:txBody>
-          <a:bodyPr/>
-          <a:lstStyle/>
-          <a:p>
-            <a:r>
-              <a:rPr lang="en-US" dirty="0"/>
-              <a:t>Set/ change docker image for deployment:</a:t>
-            </a:r>
-          </a:p>
-          <a:p>
-            <a:r>
-              <a:rPr lang="en-US" dirty="0" err="1"/>
-              <a:t>kubectl</a:t>
-            </a:r>
-            <a:r>
-              <a:rPr lang="en-US" dirty="0"/>
-              <a:t> set image deployment/</a:t>
-            </a:r>
-            <a:r>
-              <a:rPr lang="en-US" dirty="0" err="1"/>
-              <a:t>nginx</a:t>
-            </a:r>
-            <a:r>
-              <a:rPr lang="en-US" dirty="0"/>
-              <a:t> </a:t>
-            </a:r>
-            <a:r>
-              <a:rPr lang="en-US" dirty="0" err="1"/>
-              <a:t>nginx</a:t>
-            </a:r>
-            <a:r>
-              <a:rPr lang="en-US" dirty="0"/>
-              <a:t>=</a:t>
-            </a:r>
-            <a:r>
-              <a:rPr lang="en-US" dirty="0" err="1"/>
-              <a:t>nginx:mainline</a:t>
-            </a:r>
-            <a:endParaRPr lang="en-US" dirty="0"/>
-          </a:p>
-          <a:p>
-            <a:endParaRPr lang="en-US" dirty="0"/>
-          </a:p>
-          <a:p>
-            <a:r>
-              <a:rPr lang="en-US" dirty="0"/>
-              <a:t>Rollback rollout:</a:t>
-            </a:r>
-          </a:p>
-          <a:p>
-            <a:r>
-              <a:rPr lang="en-US" dirty="0" err="1"/>
-              <a:t>kubectl</a:t>
-            </a:r>
-            <a:r>
-              <a:rPr lang="en-US" dirty="0"/>
-              <a:t> rollout undo deployment/</a:t>
-            </a:r>
-            <a:r>
-              <a:rPr lang="en-US" dirty="0" err="1"/>
-              <a:t>nginx</a:t>
-            </a:r>
-            <a:endParaRPr lang="en-US" dirty="0"/>
-          </a:p>
-        </p:txBody>
-      </p:sp>
-      <p:sp>
-        <p:nvSpPr>
           <p:cNvPr id="4" name="Slide Number Placeholder 3"/>
           <p:cNvSpPr>
             <a:spLocks noGrp="1"/>
@@ -3166,78 +3012,60 @@
           <a:bodyPr/>
           <a:lstStyle/>
           <a:p>
-            <a:pPr marL="0" marR="0" lvl="0" indent="0" algn="ctr" defTabSz="1088776" rtl="0" eaLnBrk="1" fontAlgn="auto" latinLnBrk="0" hangingPunct="1">
-              <a:lnSpc>
-                <a:spcPct val="100000"/>
-              </a:lnSpc>
-              <a:spcBef>
-                <a:spcPts val="0"/>
-              </a:spcBef>
-              <a:spcAft>
-                <a:spcPts val="0"/>
-              </a:spcAft>
-              <a:buClrTx/>
-              <a:buSzTx/>
-              <a:buFontTx/>
-              <a:buNone/>
-              <a:tabLst/>
-              <a:defRPr/>
-            </a:pPr>
             <a:fld id="{7D8C2C35-2B8A-446E-BEC0-FD36716C29AC}" type="slidenum">
-              <a:rPr kumimoji="0" lang="de-DE" sz="800" b="0" i="0" u="none" strike="noStrike" kern="1200" cap="none" spc="0" normalizeH="0" baseline="0" noProof="0" smtClean="0">
-                <a:ln>
-                  <a:noFill/>
-                </a:ln>
-                <a:solidFill>
-                  <a:srgbClr val="000000"/>
-                </a:solidFill>
-                <a:effectLst/>
-                <a:uLnTx/>
-                <a:uFillTx/>
-                <a:latin typeface="Arial"/>
-                <a:ea typeface="+mn-ea"/>
-                <a:cs typeface="+mn-cs"/>
-              </a:rPr>
-              <a:pPr marL="0" marR="0" lvl="0" indent="0" algn="ctr" defTabSz="1088776" rtl="0" eaLnBrk="1" fontAlgn="auto" latinLnBrk="0" hangingPunct="1">
-                <a:lnSpc>
-                  <a:spcPct val="100000"/>
-                </a:lnSpc>
-                <a:spcBef>
-                  <a:spcPts val="0"/>
-                </a:spcBef>
-                <a:spcAft>
-                  <a:spcPts val="0"/>
-                </a:spcAft>
-                <a:buClrTx/>
-                <a:buSzTx/>
-                <a:buFontTx/>
-                <a:buNone/>
-                <a:tabLst/>
-                <a:defRPr/>
-              </a:pPr>
+              <a:rPr lang="de-DE" smtClean="0"/>
+              <a:pPr/>
               <a:t>9</a:t>
             </a:fld>
-            <a:endParaRPr kumimoji="0" lang="de-DE" sz="800" b="0" i="0" u="none" strike="noStrike" kern="1200" cap="none" spc="0" normalizeH="0" baseline="0" noProof="0" dirty="0">
-              <a:ln>
-                <a:noFill/>
-              </a:ln>
-              <a:solidFill>
-                <a:srgbClr val="000000"/>
-              </a:solidFill>
-              <a:effectLst/>
-              <a:uLnTx/>
-              <a:uFillTx/>
-              <a:latin typeface="Arial"/>
-              <a:ea typeface="+mn-ea"/>
-              <a:cs typeface="+mn-cs"/>
-            </a:endParaRPr>
+            <a:endParaRPr lang="de-DE" dirty="0"/>
+          </a:p>
+        </p:txBody>
+      </p:sp>
+      <p:sp>
+        <p:nvSpPr>
+          <p:cNvPr id="9" name="Slide Image Placeholder 8"/>
+          <p:cNvSpPr>
+            <a:spLocks noGrp="1" noRot="1" noChangeAspect="1"/>
+          </p:cNvSpPr>
+          <p:nvPr>
+            <p:ph type="sldImg"/>
+          </p:nvPr>
+        </p:nvSpPr>
+        <p:spPr>
+          <a:xfrm>
+            <a:off x="547688" y="612775"/>
+            <a:ext cx="5762625" cy="3241675"/>
+          </a:xfrm>
+        </p:spPr>
+      </p:sp>
+      <p:sp>
+        <p:nvSpPr>
+          <p:cNvPr id="10" name="Notes Placeholder 9"/>
+          <p:cNvSpPr>
+            <a:spLocks noGrp="1"/>
+          </p:cNvSpPr>
+          <p:nvPr>
+            <p:ph type="body" idx="1"/>
+          </p:nvPr>
+        </p:nvSpPr>
+        <p:spPr/>
+        <p:txBody>
+          <a:bodyPr>
+            <a:normAutofit/>
+          </a:bodyPr>
+          <a:lstStyle/>
+          <a:p>
+            <a:r>
+              <a:rPr lang="en-US" dirty="0"/>
+              <a:t>Labels with red arrows pointing to have to match</a:t>
+            </a:r>
           </a:p>
         </p:txBody>
       </p:sp>
     </p:spTree>
     <p:extLst>
       <p:ext uri="{BB962C8B-B14F-4D97-AF65-F5344CB8AC3E}">
-        <p14:creationId xmlns:p14="http://schemas.microsoft.com/office/powerpoint/2010/main" val="1880559394"/>
+        <p14:creationId xmlns:p14="http://schemas.microsoft.com/office/powerpoint/2010/main" val="3094605481"/>
       </p:ext>
     </p:extLst>
   </p:cSld>
@@ -3871,7 +3699,7 @@
   <p:clrMapOvr>
     <a:masterClrMapping/>
   </p:clrMapOvr>
-  <p:extLst mod="1">
+  <p:extLst>
     <p:ext uri="{DCECCB84-F9BA-43D5-87BE-67443E8EF086}">
       <p15:sldGuideLst xmlns:p15="http://schemas.microsoft.com/office/powerpoint/2012/main"/>
     </p:ext>
@@ -6778,7 +6606,7 @@
   <p:clrMapOvr>
     <a:masterClrMapping/>
   </p:clrMapOvr>
-  <p:extLst mod="1">
+  <p:extLst>
     <p:ext uri="{DCECCB84-F9BA-43D5-87BE-67443E8EF086}">
       <p15:sldGuideLst xmlns:p15="http://schemas.microsoft.com/office/powerpoint/2012/main"/>
     </p:ext>
@@ -6956,7 +6784,7 @@
   <p:clrMapOvr>
     <a:masterClrMapping/>
   </p:clrMapOvr>
-  <p:extLst mod="1">
+  <p:extLst>
     <p:ext uri="{DCECCB84-F9BA-43D5-87BE-67443E8EF086}">
       <p15:sldGuideLst xmlns:p15="http://schemas.microsoft.com/office/powerpoint/2012/main"/>
     </p:ext>
@@ -8979,7 +8807,7 @@
   <p:clrMapOvr>
     <a:masterClrMapping/>
   </p:clrMapOvr>
-  <p:extLst mod="1">
+  <p:extLst>
     <p:ext uri="{DCECCB84-F9BA-43D5-87BE-67443E8EF086}">
       <p15:sldGuideLst xmlns:p15="http://schemas.microsoft.com/office/powerpoint/2012/main"/>
     </p:ext>
@@ -9417,7 +9245,7 @@
   <p:clrMapOvr>
     <a:masterClrMapping/>
   </p:clrMapOvr>
-  <p:extLst mod="1">
+  <p:extLst>
     <p:ext uri="{DCECCB84-F9BA-43D5-87BE-67443E8EF086}">
       <p15:sldGuideLst xmlns:p15="http://schemas.microsoft.com/office/powerpoint/2012/main"/>
     </p:ext>
@@ -10009,7 +9837,7 @@
   <p:clrMapOvr>
     <a:masterClrMapping/>
   </p:clrMapOvr>
-  <p:extLst mod="1">
+  <p:extLst>
     <p:ext uri="{DCECCB84-F9BA-43D5-87BE-67443E8EF086}">
       <p15:sldGuideLst xmlns:p15="http://schemas.microsoft.com/office/powerpoint/2012/main"/>
     </p:ext>
@@ -10601,7 +10429,7 @@
   <p:clrMapOvr>
     <a:masterClrMapping/>
   </p:clrMapOvr>
-  <p:extLst mod="1">
+  <p:extLst>
     <p:ext uri="{DCECCB84-F9BA-43D5-87BE-67443E8EF086}">
       <p15:sldGuideLst xmlns:p15="http://schemas.microsoft.com/office/powerpoint/2012/main"/>
     </p:ext>
@@ -11027,7 +10855,7 @@
   <p:clrMapOvr>
     <a:masterClrMapping/>
   </p:clrMapOvr>
-  <p:extLst mod="1">
+  <p:extLst>
     <p:ext uri="{DCECCB84-F9BA-43D5-87BE-67443E8EF086}">
       <p15:sldGuideLst xmlns:p15="http://schemas.microsoft.com/office/powerpoint/2012/main"/>
     </p:ext>
@@ -13095,7 +12923,7 @@
   <p:clrMapOvr>
     <a:masterClrMapping/>
   </p:clrMapOvr>
-  <p:extLst mod="1">
+  <p:extLst>
     <p:ext uri="{DCECCB84-F9BA-43D5-87BE-67443E8EF086}">
       <p15:sldGuideLst xmlns:p15="http://schemas.microsoft.com/office/powerpoint/2012/main"/>
     </p:ext>
@@ -14668,7 +14496,7 @@
   <p:clrMapOvr>
     <a:masterClrMapping/>
   </p:clrMapOvr>
-  <p:extLst mod="1">
+  <p:extLst>
     <p:ext uri="{DCECCB84-F9BA-43D5-87BE-67443E8EF086}">
       <p15:sldGuideLst xmlns:p15="http://schemas.microsoft.com/office/powerpoint/2012/main"/>
     </p:ext>
@@ -17417,7 +17245,7 @@
       </a:lvl9pPr>
     </p:otherStyle>
   </p:txStyles>
-  <p:extLst mod="1">
+  <p:extLst>
     <p:ext uri="{27BBF7A9-308A-43DC-89C8-2F10F3537804}">
       <p15:sldGuideLst xmlns:p15="http://schemas.microsoft.com/office/powerpoint/2012/main"/>
     </p:ext>
@@ -18215,7 +18043,7 @@
       </a:lvl9pPr>
     </p:otherStyle>
   </p:txStyles>
-  <p:extLst mod="1">
+  <p:extLst>
     <p:ext uri="{27BBF7A9-308A-43DC-89C8-2F10F3537804}">
       <p15:sldGuideLst xmlns:p15="http://schemas.microsoft.com/office/powerpoint/2012/main"/>
     </p:ext>
@@ -18395,1462 +18223,6 @@
       </p:grpSpPr>
       <p:sp>
         <p:nvSpPr>
-          <p:cNvPr id="24" name="Title 23"/>
-          <p:cNvSpPr>
-            <a:spLocks noGrp="1"/>
-          </p:cNvSpPr>
-          <p:nvPr>
-            <p:ph type="title"/>
-          </p:nvPr>
-        </p:nvSpPr>
-        <p:spPr>
-          <a:xfrm>
-            <a:off x="504001" y="504000"/>
-            <a:ext cx="11186476" cy="369332"/>
-          </a:xfrm>
-        </p:spPr>
-        <p:txBody>
-          <a:bodyPr/>
-          <a:lstStyle/>
-          <a:p>
-            <a:r>
-              <a:rPr lang="en-US" dirty="0"/>
-              <a:t>Architecture overview – deployments</a:t>
-            </a:r>
-          </a:p>
-        </p:txBody>
-      </p:sp>
-      <p:sp>
-        <p:nvSpPr>
-          <p:cNvPr id="41" name="Rectangle 40"/>
-          <p:cNvSpPr/>
-          <p:nvPr/>
-        </p:nvSpPr>
-        <p:spPr bwMode="gray">
-          <a:xfrm>
-            <a:off x="504000" y="1470876"/>
-            <a:ext cx="11246039" cy="4781878"/>
-          </a:xfrm>
-          <a:prstGeom prst="rect">
-            <a:avLst/>
-          </a:prstGeom>
-          <a:solidFill>
-            <a:schemeClr val="accent1">
-              <a:lumMod val="40000"/>
-              <a:lumOff val="60000"/>
-            </a:schemeClr>
-          </a:solidFill>
-          <a:ln>
-            <a:headEnd/>
-            <a:tailEnd/>
-          </a:ln>
-        </p:spPr>
-        <p:style>
-          <a:lnRef idx="1">
-            <a:schemeClr val="accent1"/>
-          </a:lnRef>
-          <a:fillRef idx="2">
-            <a:schemeClr val="accent1"/>
-          </a:fillRef>
-          <a:effectRef idx="1">
-            <a:schemeClr val="accent1"/>
-          </a:effectRef>
-          <a:fontRef idx="minor">
-            <a:schemeClr val="dk1"/>
-          </a:fontRef>
-        </p:style>
-        <p:txBody>
-          <a:bodyPr lIns="90000" tIns="72000" rIns="90000" bIns="72000" rtlCol="0" anchor="b"/>
-          <a:lstStyle/>
-          <a:p>
-            <a:pPr marR="0" defTabSz="914400" eaLnBrk="1" fontAlgn="base" latinLnBrk="0" hangingPunct="1">
-              <a:lnSpc>
-                <a:spcPct val="100000"/>
-              </a:lnSpc>
-              <a:spcBef>
-                <a:spcPct val="50000"/>
-              </a:spcBef>
-              <a:spcAft>
-                <a:spcPct val="0"/>
-              </a:spcAft>
-              <a:buClr>
-                <a:srgbClr val="F0AB00"/>
-              </a:buClr>
-              <a:buSzPct val="80000"/>
-              <a:tabLst/>
-            </a:pPr>
-            <a:r>
-              <a:rPr lang="de-DE" sz="2000" b="1" kern="0" noProof="0" dirty="0">
-                <a:ea typeface="Arial Unicode MS" pitchFamily="34" charset="-128"/>
-                <a:cs typeface="Arial Unicode MS" pitchFamily="34" charset="-128"/>
-              </a:rPr>
-              <a:t>Namespace: </a:t>
-            </a:r>
-            <a:r>
-              <a:rPr lang="de-DE" sz="2000" b="1" kern="0" noProof="0" dirty="0" err="1">
-                <a:ea typeface="Arial Unicode MS" pitchFamily="34" charset="-128"/>
-                <a:cs typeface="Arial Unicode MS" pitchFamily="34" charset="-128"/>
-              </a:rPr>
-              <a:t>your</a:t>
-            </a:r>
-            <a:r>
-              <a:rPr lang="de-DE" sz="2000" b="1" kern="0" noProof="0" dirty="0">
-                <a:ea typeface="Arial Unicode MS" pitchFamily="34" charset="-128"/>
-                <a:cs typeface="Arial Unicode MS" pitchFamily="34" charset="-128"/>
-              </a:rPr>
-              <a:t>-namespace</a:t>
-            </a:r>
-            <a:endParaRPr kumimoji="0" lang="de-DE" sz="2400" b="1" i="0" strike="noStrike" kern="0" cap="none" spc="0" normalizeH="0" baseline="0" noProof="0" dirty="0">
-              <a:ln>
-                <a:noFill/>
-              </a:ln>
-              <a:effectLst/>
-              <a:uLnTx/>
-              <a:uFillTx/>
-              <a:ea typeface="Arial Unicode MS" pitchFamily="34" charset="-128"/>
-              <a:cs typeface="Arial Unicode MS" pitchFamily="34" charset="-128"/>
-            </a:endParaRPr>
-          </a:p>
-        </p:txBody>
-      </p:sp>
-      <p:sp>
-        <p:nvSpPr>
-          <p:cNvPr id="8" name="Rectangle: Rounded Corners 7"/>
-          <p:cNvSpPr/>
-          <p:nvPr/>
-        </p:nvSpPr>
-        <p:spPr bwMode="gray">
-          <a:xfrm>
-            <a:off x="1433799" y="1741715"/>
-            <a:ext cx="9326880" cy="4024766"/>
-          </a:xfrm>
-          <a:prstGeom prst="roundRect">
-            <a:avLst/>
-          </a:prstGeom>
-          <a:ln>
-            <a:headEnd/>
-            <a:tailEnd/>
-          </a:ln>
-        </p:spPr>
-        <p:style>
-          <a:lnRef idx="1">
-            <a:schemeClr val="dk1"/>
-          </a:lnRef>
-          <a:fillRef idx="2">
-            <a:schemeClr val="dk1"/>
-          </a:fillRef>
-          <a:effectRef idx="1">
-            <a:schemeClr val="dk1"/>
-          </a:effectRef>
-          <a:fontRef idx="minor">
-            <a:schemeClr val="dk1"/>
-          </a:fontRef>
-        </p:style>
-        <p:txBody>
-          <a:bodyPr lIns="90000" tIns="72000" rIns="90000" bIns="72000" rtlCol="0" anchor="t"/>
-          <a:lstStyle/>
-          <a:p>
-            <a:pPr marR="0" algn="ctr" defTabSz="914400" eaLnBrk="1" fontAlgn="base" latinLnBrk="0" hangingPunct="1">
-              <a:lnSpc>
-                <a:spcPct val="100000"/>
-              </a:lnSpc>
-              <a:spcBef>
-                <a:spcPct val="50000"/>
-              </a:spcBef>
-              <a:spcAft>
-                <a:spcPct val="0"/>
-              </a:spcAft>
-              <a:buClr>
-                <a:srgbClr val="F0AB00"/>
-              </a:buClr>
-              <a:buSzPct val="80000"/>
-              <a:tabLst/>
-            </a:pPr>
-            <a:r>
-              <a:rPr lang="en-US" sz="1800" b="1" kern="0" dirty="0">
-                <a:ea typeface="Arial Unicode MS" pitchFamily="34" charset="-128"/>
-                <a:cs typeface="Arial Unicode MS" pitchFamily="34" charset="-128"/>
-              </a:rPr>
-              <a:t>Deployment</a:t>
-            </a:r>
-            <a:endParaRPr kumimoji="0" lang="en-US" sz="1800" b="1" i="0" u="none" strike="noStrike" kern="0" cap="none" spc="0" normalizeH="0" baseline="0" noProof="0" dirty="0" err="1">
-              <a:ln>
-                <a:noFill/>
-              </a:ln>
-              <a:effectLst/>
-              <a:uLnTx/>
-              <a:uFillTx/>
-              <a:ea typeface="Arial Unicode MS" pitchFamily="34" charset="-128"/>
-              <a:cs typeface="Arial Unicode MS" pitchFamily="34" charset="-128"/>
-            </a:endParaRPr>
-          </a:p>
-        </p:txBody>
-      </p:sp>
-      <p:grpSp>
-        <p:nvGrpSpPr>
-          <p:cNvPr id="6" name="Group 5"/>
-          <p:cNvGrpSpPr/>
-          <p:nvPr/>
-        </p:nvGrpSpPr>
-        <p:grpSpPr>
-          <a:xfrm>
-            <a:off x="1959967" y="3135082"/>
-            <a:ext cx="8334103" cy="2360024"/>
-            <a:chOff x="1219200" y="3126373"/>
-            <a:chExt cx="8334103" cy="2360024"/>
-          </a:xfrm>
-        </p:grpSpPr>
-        <p:sp>
-          <p:nvSpPr>
-            <p:cNvPr id="3" name="Rectangle 2"/>
-            <p:cNvSpPr/>
-            <p:nvPr/>
-          </p:nvSpPr>
-          <p:spPr bwMode="gray">
-            <a:xfrm>
-              <a:off x="1219200" y="3126373"/>
-              <a:ext cx="8334103" cy="2360024"/>
-            </a:xfrm>
-            <a:prstGeom prst="rect">
-              <a:avLst/>
-            </a:prstGeom>
-            <a:ln>
-              <a:headEnd/>
-              <a:tailEnd/>
-            </a:ln>
-          </p:spPr>
-          <p:style>
-            <a:lnRef idx="2">
-              <a:schemeClr val="accent1"/>
-            </a:lnRef>
-            <a:fillRef idx="1">
-              <a:schemeClr val="lt1"/>
-            </a:fillRef>
-            <a:effectRef idx="0">
-              <a:schemeClr val="accent1"/>
-            </a:effectRef>
-            <a:fontRef idx="minor">
-              <a:schemeClr val="dk1"/>
-            </a:fontRef>
-          </p:style>
-          <p:txBody>
-            <a:bodyPr lIns="90000" tIns="72000" rIns="90000" bIns="72000" rtlCol="0" anchor="t"/>
-            <a:lstStyle/>
-            <a:p>
-              <a:pPr marR="0" algn="ctr" defTabSz="914400" eaLnBrk="1" fontAlgn="base" latinLnBrk="0" hangingPunct="1">
-                <a:lnSpc>
-                  <a:spcPct val="100000"/>
-                </a:lnSpc>
-                <a:spcBef>
-                  <a:spcPct val="50000"/>
-                </a:spcBef>
-                <a:spcAft>
-                  <a:spcPct val="0"/>
-                </a:spcAft>
-                <a:buClr>
-                  <a:srgbClr val="F0AB00"/>
-                </a:buClr>
-                <a:buSzPct val="80000"/>
-                <a:tabLst/>
-              </a:pPr>
-              <a:r>
-                <a:rPr kumimoji="0" lang="en-US" sz="1800" b="1" i="0" u="none" strike="noStrike" kern="0" cap="none" spc="0" normalizeH="0" baseline="0" noProof="0" dirty="0" err="1">
-                  <a:ln>
-                    <a:noFill/>
-                  </a:ln>
-                  <a:effectLst/>
-                  <a:uLnTx/>
-                  <a:uFillTx/>
-                  <a:ea typeface="Arial Unicode MS" pitchFamily="34" charset="-128"/>
-                  <a:cs typeface="Arial Unicode MS" pitchFamily="34" charset="-128"/>
-                </a:rPr>
-                <a:t>ReplicaSet</a:t>
-              </a:r>
-              <a:endParaRPr kumimoji="0" lang="en-US" sz="1800" b="1" i="0" u="none" strike="noStrike" kern="0" cap="none" spc="0" normalizeH="0" baseline="0" noProof="0" dirty="0">
-                <a:ln>
-                  <a:noFill/>
-                </a:ln>
-                <a:effectLst/>
-                <a:uLnTx/>
-                <a:uFillTx/>
-                <a:ea typeface="Arial Unicode MS" pitchFamily="34" charset="-128"/>
-                <a:cs typeface="Arial Unicode MS" pitchFamily="34" charset="-128"/>
-              </a:endParaRPr>
-            </a:p>
-          </p:txBody>
-        </p:sp>
-        <p:grpSp>
-          <p:nvGrpSpPr>
-            <p:cNvPr id="2" name="Group 1"/>
-            <p:cNvGrpSpPr/>
-            <p:nvPr/>
-          </p:nvGrpSpPr>
-          <p:grpSpPr>
-            <a:xfrm>
-              <a:off x="1367932" y="4305495"/>
-              <a:ext cx="2227644" cy="956786"/>
-              <a:chOff x="1367932" y="4305495"/>
-              <a:chExt cx="2227644" cy="956786"/>
-            </a:xfrm>
-          </p:grpSpPr>
-          <p:sp>
-            <p:nvSpPr>
-              <p:cNvPr id="42" name="Rectangle 41"/>
-              <p:cNvSpPr/>
-              <p:nvPr/>
-            </p:nvSpPr>
-            <p:spPr bwMode="gray">
-              <a:xfrm>
-                <a:off x="2386981" y="4488375"/>
-                <a:ext cx="1208595" cy="773906"/>
-              </a:xfrm>
-              <a:prstGeom prst="rect">
-                <a:avLst/>
-              </a:prstGeom>
-              <a:ln>
-                <a:headEnd/>
-                <a:tailEnd/>
-              </a:ln>
-            </p:spPr>
-            <p:style>
-              <a:lnRef idx="2">
-                <a:schemeClr val="accent2">
-                  <a:shade val="50000"/>
-                </a:schemeClr>
-              </a:lnRef>
-              <a:fillRef idx="1">
-                <a:schemeClr val="accent2"/>
-              </a:fillRef>
-              <a:effectRef idx="0">
-                <a:schemeClr val="accent2"/>
-              </a:effectRef>
-              <a:fontRef idx="minor">
-                <a:schemeClr val="lt1"/>
-              </a:fontRef>
-            </p:style>
-            <p:txBody>
-              <a:bodyPr lIns="90000" tIns="72000" rIns="90000" bIns="72000" rtlCol="0" anchor="ctr"/>
-              <a:lstStyle/>
-              <a:p>
-                <a:pPr marR="0" algn="ctr" defTabSz="914400" eaLnBrk="1" fontAlgn="base" latinLnBrk="0" hangingPunct="1">
-                  <a:lnSpc>
-                    <a:spcPct val="100000"/>
-                  </a:lnSpc>
-                  <a:spcBef>
-                    <a:spcPct val="50000"/>
-                  </a:spcBef>
-                  <a:spcAft>
-                    <a:spcPct val="0"/>
-                  </a:spcAft>
-                  <a:buClr>
-                    <a:srgbClr val="F0AB00"/>
-                  </a:buClr>
-                  <a:buSzPct val="80000"/>
-                  <a:tabLst/>
-                </a:pPr>
-                <a:r>
-                  <a:rPr lang="de-DE" sz="1600" b="1" kern="0" noProof="0" dirty="0" err="1">
-                    <a:ea typeface="Arial Unicode MS" pitchFamily="34" charset="-128"/>
-                    <a:cs typeface="Arial Unicode MS" pitchFamily="34" charset="-128"/>
-                  </a:rPr>
-                  <a:t>Pod</a:t>
-                </a:r>
-                <a:endParaRPr kumimoji="0" lang="de-DE" sz="1600" b="1" i="0" u="none" strike="noStrike" kern="0" cap="none" spc="0" normalizeH="0" baseline="0" noProof="0" dirty="0">
-                  <a:ln>
-                    <a:noFill/>
-                  </a:ln>
-                  <a:effectLst/>
-                  <a:uLnTx/>
-                  <a:uFillTx/>
-                  <a:ea typeface="Arial Unicode MS" pitchFamily="34" charset="-128"/>
-                  <a:cs typeface="Arial Unicode MS" pitchFamily="34" charset="-128"/>
-                </a:endParaRPr>
-              </a:p>
-            </p:txBody>
-          </p:sp>
-          <p:sp>
-            <p:nvSpPr>
-              <p:cNvPr id="14" name="Rectangle 13"/>
-              <p:cNvSpPr/>
-              <p:nvPr/>
-            </p:nvSpPr>
-            <p:spPr bwMode="gray">
-              <a:xfrm>
-                <a:off x="1367932" y="4305495"/>
-                <a:ext cx="1645920" cy="365760"/>
-              </a:xfrm>
-              <a:prstGeom prst="rect">
-                <a:avLst/>
-              </a:prstGeom>
-              <a:ln>
-                <a:headEnd/>
-                <a:tailEnd/>
-              </a:ln>
-            </p:spPr>
-            <p:style>
-              <a:lnRef idx="2">
-                <a:schemeClr val="accent2"/>
-              </a:lnRef>
-              <a:fillRef idx="1">
-                <a:schemeClr val="lt1"/>
-              </a:fillRef>
-              <a:effectRef idx="0">
-                <a:schemeClr val="accent2"/>
-              </a:effectRef>
-              <a:fontRef idx="minor">
-                <a:schemeClr val="dk1"/>
-              </a:fontRef>
-            </p:style>
-            <p:txBody>
-              <a:bodyPr lIns="90000" tIns="72000" rIns="90000" bIns="72000" rtlCol="0" anchor="ctr"/>
-              <a:lstStyle/>
-              <a:p>
-                <a:pPr marR="0" algn="ctr" defTabSz="914400" eaLnBrk="1" fontAlgn="base" latinLnBrk="0" hangingPunct="1">
-                  <a:lnSpc>
-                    <a:spcPct val="100000"/>
-                  </a:lnSpc>
-                  <a:spcBef>
-                    <a:spcPct val="50000"/>
-                  </a:spcBef>
-                  <a:spcAft>
-                    <a:spcPct val="0"/>
-                  </a:spcAft>
-                  <a:buClr>
-                    <a:srgbClr val="F0AB00"/>
-                  </a:buClr>
-                  <a:buSzPct val="80000"/>
-                  <a:tabLst/>
-                </a:pPr>
-                <a:r>
-                  <a:rPr lang="de-DE" sz="1800" kern="0" dirty="0" err="1">
-                    <a:ea typeface="Arial Unicode MS" pitchFamily="34" charset="-128"/>
-                    <a:cs typeface="Arial Unicode MS" pitchFamily="34" charset="-128"/>
-                  </a:rPr>
-                  <a:t>app</a:t>
-                </a:r>
-                <a:r>
-                  <a:rPr lang="de-DE" sz="1800" kern="0" dirty="0">
-                    <a:ea typeface="Arial Unicode MS" pitchFamily="34" charset="-128"/>
-                    <a:cs typeface="Arial Unicode MS" pitchFamily="34" charset="-128"/>
-                  </a:rPr>
-                  <a:t>: </a:t>
-                </a:r>
-                <a:r>
-                  <a:rPr lang="de-DE" sz="1800" kern="0" dirty="0" err="1">
-                    <a:ea typeface="Arial Unicode MS" pitchFamily="34" charset="-128"/>
-                    <a:cs typeface="Arial Unicode MS" pitchFamily="34" charset="-128"/>
-                  </a:rPr>
-                  <a:t>nginx</a:t>
-                </a:r>
-                <a:endParaRPr kumimoji="0" lang="de-DE" sz="1800" b="0" i="0" u="none" strike="noStrike" kern="0" cap="none" spc="0" normalizeH="0" baseline="0" noProof="0" dirty="0">
-                  <a:ln>
-                    <a:noFill/>
-                  </a:ln>
-                  <a:effectLst/>
-                  <a:uLnTx/>
-                  <a:uFillTx/>
-                  <a:ea typeface="Arial Unicode MS" pitchFamily="34" charset="-128"/>
-                  <a:cs typeface="Arial Unicode MS" pitchFamily="34" charset="-128"/>
-                </a:endParaRPr>
-              </a:p>
-            </p:txBody>
-          </p:sp>
-        </p:grpSp>
-        <p:grpSp>
-          <p:nvGrpSpPr>
-            <p:cNvPr id="10" name="Group 9"/>
-            <p:cNvGrpSpPr/>
-            <p:nvPr/>
-          </p:nvGrpSpPr>
-          <p:grpSpPr>
-            <a:xfrm>
-              <a:off x="3899375" y="4305495"/>
-              <a:ext cx="2227644" cy="956786"/>
-              <a:chOff x="1367932" y="4305495"/>
-              <a:chExt cx="2227644" cy="956786"/>
-            </a:xfrm>
-          </p:grpSpPr>
-          <p:sp>
-            <p:nvSpPr>
-              <p:cNvPr id="11" name="Rectangle 10"/>
-              <p:cNvSpPr/>
-              <p:nvPr/>
-            </p:nvSpPr>
-            <p:spPr bwMode="gray">
-              <a:xfrm>
-                <a:off x="2386981" y="4488375"/>
-                <a:ext cx="1208595" cy="773906"/>
-              </a:xfrm>
-              <a:prstGeom prst="rect">
-                <a:avLst/>
-              </a:prstGeom>
-              <a:ln>
-                <a:headEnd/>
-                <a:tailEnd/>
-              </a:ln>
-            </p:spPr>
-            <p:style>
-              <a:lnRef idx="2">
-                <a:schemeClr val="accent2">
-                  <a:shade val="50000"/>
-                </a:schemeClr>
-              </a:lnRef>
-              <a:fillRef idx="1">
-                <a:schemeClr val="accent2"/>
-              </a:fillRef>
-              <a:effectRef idx="0">
-                <a:schemeClr val="accent2"/>
-              </a:effectRef>
-              <a:fontRef idx="minor">
-                <a:schemeClr val="lt1"/>
-              </a:fontRef>
-            </p:style>
-            <p:txBody>
-              <a:bodyPr lIns="90000" tIns="72000" rIns="90000" bIns="72000" rtlCol="0" anchor="ctr"/>
-              <a:lstStyle/>
-              <a:p>
-                <a:pPr marR="0" algn="ctr" defTabSz="914400" eaLnBrk="1" fontAlgn="base" latinLnBrk="0" hangingPunct="1">
-                  <a:lnSpc>
-                    <a:spcPct val="100000"/>
-                  </a:lnSpc>
-                  <a:spcBef>
-                    <a:spcPct val="50000"/>
-                  </a:spcBef>
-                  <a:spcAft>
-                    <a:spcPct val="0"/>
-                  </a:spcAft>
-                  <a:buClr>
-                    <a:srgbClr val="F0AB00"/>
-                  </a:buClr>
-                  <a:buSzPct val="80000"/>
-                  <a:tabLst/>
-                </a:pPr>
-                <a:r>
-                  <a:rPr lang="de-DE" sz="1600" b="1" kern="0" noProof="0" dirty="0" err="1">
-                    <a:ea typeface="Arial Unicode MS" pitchFamily="34" charset="-128"/>
-                    <a:cs typeface="Arial Unicode MS" pitchFamily="34" charset="-128"/>
-                  </a:rPr>
-                  <a:t>Pod</a:t>
-                </a:r>
-                <a:endParaRPr kumimoji="0" lang="de-DE" sz="1600" b="1" i="0" u="none" strike="noStrike" kern="0" cap="none" spc="0" normalizeH="0" baseline="0" noProof="0" dirty="0">
-                  <a:ln>
-                    <a:noFill/>
-                  </a:ln>
-                  <a:effectLst/>
-                  <a:uLnTx/>
-                  <a:uFillTx/>
-                  <a:ea typeface="Arial Unicode MS" pitchFamily="34" charset="-128"/>
-                  <a:cs typeface="Arial Unicode MS" pitchFamily="34" charset="-128"/>
-                </a:endParaRPr>
-              </a:p>
-            </p:txBody>
-          </p:sp>
-          <p:sp>
-            <p:nvSpPr>
-              <p:cNvPr id="12" name="Rectangle 11"/>
-              <p:cNvSpPr/>
-              <p:nvPr/>
-            </p:nvSpPr>
-            <p:spPr bwMode="gray">
-              <a:xfrm>
-                <a:off x="1367932" y="4305495"/>
-                <a:ext cx="1645920" cy="365760"/>
-              </a:xfrm>
-              <a:prstGeom prst="rect">
-                <a:avLst/>
-              </a:prstGeom>
-              <a:ln>
-                <a:headEnd/>
-                <a:tailEnd/>
-              </a:ln>
-            </p:spPr>
-            <p:style>
-              <a:lnRef idx="2">
-                <a:schemeClr val="accent2"/>
-              </a:lnRef>
-              <a:fillRef idx="1">
-                <a:schemeClr val="lt1"/>
-              </a:fillRef>
-              <a:effectRef idx="0">
-                <a:schemeClr val="accent2"/>
-              </a:effectRef>
-              <a:fontRef idx="minor">
-                <a:schemeClr val="dk1"/>
-              </a:fontRef>
-            </p:style>
-            <p:txBody>
-              <a:bodyPr lIns="90000" tIns="72000" rIns="90000" bIns="72000" rtlCol="0" anchor="ctr"/>
-              <a:lstStyle/>
-              <a:p>
-                <a:pPr marR="0" algn="ctr" defTabSz="914400" eaLnBrk="1" fontAlgn="base" latinLnBrk="0" hangingPunct="1">
-                  <a:lnSpc>
-                    <a:spcPct val="100000"/>
-                  </a:lnSpc>
-                  <a:spcBef>
-                    <a:spcPct val="50000"/>
-                  </a:spcBef>
-                  <a:spcAft>
-                    <a:spcPct val="0"/>
-                  </a:spcAft>
-                  <a:buClr>
-                    <a:srgbClr val="F0AB00"/>
-                  </a:buClr>
-                  <a:buSzPct val="80000"/>
-                  <a:tabLst/>
-                </a:pPr>
-                <a:r>
-                  <a:rPr lang="de-DE" sz="1800" kern="0" dirty="0" err="1">
-                    <a:ea typeface="Arial Unicode MS" pitchFamily="34" charset="-128"/>
-                    <a:cs typeface="Arial Unicode MS" pitchFamily="34" charset="-128"/>
-                  </a:rPr>
-                  <a:t>app</a:t>
-                </a:r>
-                <a:r>
-                  <a:rPr lang="de-DE" sz="1800" kern="0" dirty="0">
-                    <a:ea typeface="Arial Unicode MS" pitchFamily="34" charset="-128"/>
-                    <a:cs typeface="Arial Unicode MS" pitchFamily="34" charset="-128"/>
-                  </a:rPr>
-                  <a:t>: </a:t>
-                </a:r>
-                <a:r>
-                  <a:rPr lang="de-DE" sz="1800" kern="0" dirty="0" err="1">
-                    <a:ea typeface="Arial Unicode MS" pitchFamily="34" charset="-128"/>
-                    <a:cs typeface="Arial Unicode MS" pitchFamily="34" charset="-128"/>
-                  </a:rPr>
-                  <a:t>nginx</a:t>
-                </a:r>
-                <a:endParaRPr kumimoji="0" lang="de-DE" sz="1800" b="0" i="0" u="none" strike="noStrike" kern="0" cap="none" spc="0" normalizeH="0" baseline="0" noProof="0" dirty="0">
-                  <a:ln>
-                    <a:noFill/>
-                  </a:ln>
-                  <a:effectLst/>
-                  <a:uLnTx/>
-                  <a:uFillTx/>
-                  <a:ea typeface="Arial Unicode MS" pitchFamily="34" charset="-128"/>
-                  <a:cs typeface="Arial Unicode MS" pitchFamily="34" charset="-128"/>
-                </a:endParaRPr>
-              </a:p>
-            </p:txBody>
-          </p:sp>
-        </p:grpSp>
-        <p:grpSp>
-          <p:nvGrpSpPr>
-            <p:cNvPr id="13" name="Group 12"/>
-            <p:cNvGrpSpPr/>
-            <p:nvPr/>
-          </p:nvGrpSpPr>
-          <p:grpSpPr>
-            <a:xfrm>
-              <a:off x="6430818" y="4305495"/>
-              <a:ext cx="2227644" cy="956786"/>
-              <a:chOff x="1367932" y="4305495"/>
-              <a:chExt cx="2227644" cy="956786"/>
-            </a:xfrm>
-          </p:grpSpPr>
-          <p:sp>
-            <p:nvSpPr>
-              <p:cNvPr id="15" name="Rectangle 14"/>
-              <p:cNvSpPr/>
-              <p:nvPr/>
-            </p:nvSpPr>
-            <p:spPr bwMode="gray">
-              <a:xfrm>
-                <a:off x="2386981" y="4488375"/>
-                <a:ext cx="1208595" cy="773906"/>
-              </a:xfrm>
-              <a:prstGeom prst="rect">
-                <a:avLst/>
-              </a:prstGeom>
-              <a:ln>
-                <a:headEnd/>
-                <a:tailEnd/>
-              </a:ln>
-            </p:spPr>
-            <p:style>
-              <a:lnRef idx="2">
-                <a:schemeClr val="accent2">
-                  <a:shade val="50000"/>
-                </a:schemeClr>
-              </a:lnRef>
-              <a:fillRef idx="1">
-                <a:schemeClr val="accent2"/>
-              </a:fillRef>
-              <a:effectRef idx="0">
-                <a:schemeClr val="accent2"/>
-              </a:effectRef>
-              <a:fontRef idx="minor">
-                <a:schemeClr val="lt1"/>
-              </a:fontRef>
-            </p:style>
-            <p:txBody>
-              <a:bodyPr lIns="90000" tIns="72000" rIns="90000" bIns="72000" rtlCol="0" anchor="ctr"/>
-              <a:lstStyle/>
-              <a:p>
-                <a:pPr marR="0" algn="ctr" defTabSz="914400" eaLnBrk="1" fontAlgn="base" latinLnBrk="0" hangingPunct="1">
-                  <a:lnSpc>
-                    <a:spcPct val="100000"/>
-                  </a:lnSpc>
-                  <a:spcBef>
-                    <a:spcPct val="50000"/>
-                  </a:spcBef>
-                  <a:spcAft>
-                    <a:spcPct val="0"/>
-                  </a:spcAft>
-                  <a:buClr>
-                    <a:srgbClr val="F0AB00"/>
-                  </a:buClr>
-                  <a:buSzPct val="80000"/>
-                  <a:tabLst/>
-                </a:pPr>
-                <a:r>
-                  <a:rPr lang="de-DE" sz="1600" b="1" kern="0" noProof="0" dirty="0" err="1">
-                    <a:ea typeface="Arial Unicode MS" pitchFamily="34" charset="-128"/>
-                    <a:cs typeface="Arial Unicode MS" pitchFamily="34" charset="-128"/>
-                  </a:rPr>
-                  <a:t>Pod</a:t>
-                </a:r>
-                <a:endParaRPr kumimoji="0" lang="de-DE" sz="1600" b="1" i="0" u="none" strike="noStrike" kern="0" cap="none" spc="0" normalizeH="0" baseline="0" noProof="0" dirty="0">
-                  <a:ln>
-                    <a:noFill/>
-                  </a:ln>
-                  <a:effectLst/>
-                  <a:uLnTx/>
-                  <a:uFillTx/>
-                  <a:ea typeface="Arial Unicode MS" pitchFamily="34" charset="-128"/>
-                  <a:cs typeface="Arial Unicode MS" pitchFamily="34" charset="-128"/>
-                </a:endParaRPr>
-              </a:p>
-            </p:txBody>
-          </p:sp>
-          <p:sp>
-            <p:nvSpPr>
-              <p:cNvPr id="16" name="Rectangle 15"/>
-              <p:cNvSpPr/>
-              <p:nvPr/>
-            </p:nvSpPr>
-            <p:spPr bwMode="gray">
-              <a:xfrm>
-                <a:off x="1367932" y="4305495"/>
-                <a:ext cx="1645920" cy="365760"/>
-              </a:xfrm>
-              <a:prstGeom prst="rect">
-                <a:avLst/>
-              </a:prstGeom>
-              <a:ln>
-                <a:headEnd/>
-                <a:tailEnd/>
-              </a:ln>
-            </p:spPr>
-            <p:style>
-              <a:lnRef idx="2">
-                <a:schemeClr val="accent2"/>
-              </a:lnRef>
-              <a:fillRef idx="1">
-                <a:schemeClr val="lt1"/>
-              </a:fillRef>
-              <a:effectRef idx="0">
-                <a:schemeClr val="accent2"/>
-              </a:effectRef>
-              <a:fontRef idx="minor">
-                <a:schemeClr val="dk1"/>
-              </a:fontRef>
-            </p:style>
-            <p:txBody>
-              <a:bodyPr lIns="90000" tIns="72000" rIns="90000" bIns="72000" rtlCol="0" anchor="ctr"/>
-              <a:lstStyle/>
-              <a:p>
-                <a:pPr marR="0" algn="ctr" defTabSz="914400" eaLnBrk="1" fontAlgn="base" latinLnBrk="0" hangingPunct="1">
-                  <a:lnSpc>
-                    <a:spcPct val="100000"/>
-                  </a:lnSpc>
-                  <a:spcBef>
-                    <a:spcPct val="50000"/>
-                  </a:spcBef>
-                  <a:spcAft>
-                    <a:spcPct val="0"/>
-                  </a:spcAft>
-                  <a:buClr>
-                    <a:srgbClr val="F0AB00"/>
-                  </a:buClr>
-                  <a:buSzPct val="80000"/>
-                  <a:tabLst/>
-                </a:pPr>
-                <a:r>
-                  <a:rPr lang="de-DE" sz="1800" kern="0" dirty="0" err="1">
-                    <a:ea typeface="Arial Unicode MS" pitchFamily="34" charset="-128"/>
-                    <a:cs typeface="Arial Unicode MS" pitchFamily="34" charset="-128"/>
-                  </a:rPr>
-                  <a:t>app</a:t>
-                </a:r>
-                <a:r>
-                  <a:rPr lang="de-DE" sz="1800" kern="0" dirty="0">
-                    <a:ea typeface="Arial Unicode MS" pitchFamily="34" charset="-128"/>
-                    <a:cs typeface="Arial Unicode MS" pitchFamily="34" charset="-128"/>
-                  </a:rPr>
-                  <a:t>: </a:t>
-                </a:r>
-                <a:r>
-                  <a:rPr lang="de-DE" sz="1800" kern="0" dirty="0" err="1">
-                    <a:ea typeface="Arial Unicode MS" pitchFamily="34" charset="-128"/>
-                    <a:cs typeface="Arial Unicode MS" pitchFamily="34" charset="-128"/>
-                  </a:rPr>
-                  <a:t>nginx</a:t>
-                </a:r>
-                <a:endParaRPr kumimoji="0" lang="de-DE" sz="1800" b="0" i="0" u="none" strike="noStrike" kern="0" cap="none" spc="0" normalizeH="0" baseline="0" noProof="0" dirty="0">
-                  <a:ln>
-                    <a:noFill/>
-                  </a:ln>
-                  <a:effectLst/>
-                  <a:uLnTx/>
-                  <a:uFillTx/>
-                  <a:ea typeface="Arial Unicode MS" pitchFamily="34" charset="-128"/>
-                  <a:cs typeface="Arial Unicode MS" pitchFamily="34" charset="-128"/>
-                </a:endParaRPr>
-              </a:p>
-            </p:txBody>
-          </p:sp>
-        </p:grpSp>
-        <p:sp>
-          <p:nvSpPr>
-            <p:cNvPr id="5" name="Flowchart: Document 4"/>
-            <p:cNvSpPr/>
-            <p:nvPr/>
-          </p:nvSpPr>
-          <p:spPr bwMode="gray">
-            <a:xfrm>
-              <a:off x="1367932" y="3306309"/>
-              <a:ext cx="1506583" cy="766354"/>
-            </a:xfrm>
-            <a:prstGeom prst="flowChartDocument">
-              <a:avLst/>
-            </a:prstGeom>
-            <a:ln>
-              <a:headEnd/>
-              <a:tailEnd/>
-            </a:ln>
-          </p:spPr>
-          <p:style>
-            <a:lnRef idx="2">
-              <a:schemeClr val="accent5"/>
-            </a:lnRef>
-            <a:fillRef idx="1">
-              <a:schemeClr val="lt1"/>
-            </a:fillRef>
-            <a:effectRef idx="0">
-              <a:schemeClr val="accent5"/>
-            </a:effectRef>
-            <a:fontRef idx="minor">
-              <a:schemeClr val="dk1"/>
-            </a:fontRef>
-          </p:style>
-          <p:txBody>
-            <a:bodyPr lIns="90000" tIns="72000" rIns="90000" bIns="72000" rtlCol="0" anchor="ctr"/>
-            <a:lstStyle/>
-            <a:p>
-              <a:pPr algn="ctr" defTabSz="914400" fontAlgn="base">
-                <a:spcBef>
-                  <a:spcPct val="50000"/>
-                </a:spcBef>
-                <a:spcAft>
-                  <a:spcPct val="0"/>
-                </a:spcAft>
-                <a:buClr>
-                  <a:srgbClr val="F0AB00"/>
-                </a:buClr>
-                <a:buSzPct val="80000"/>
-              </a:pPr>
-              <a:r>
-                <a:rPr lang="en-US" sz="1800" kern="0" dirty="0">
-                  <a:ea typeface="Arial Unicode MS" pitchFamily="34" charset="-128"/>
-                  <a:cs typeface="Arial Unicode MS" pitchFamily="34" charset="-128"/>
-                </a:rPr>
-                <a:t>Selector: </a:t>
-              </a:r>
-              <a:r>
-                <a:rPr lang="en-US" sz="1800" kern="0" dirty="0" err="1">
-                  <a:ea typeface="Arial Unicode MS" pitchFamily="34" charset="-128"/>
-                  <a:cs typeface="Arial Unicode MS" pitchFamily="34" charset="-128"/>
-                </a:rPr>
-                <a:t>app:nginx</a:t>
-              </a:r>
-              <a:endParaRPr lang="en-US" sz="1800" kern="0" dirty="0">
-                <a:ea typeface="Arial Unicode MS" pitchFamily="34" charset="-128"/>
-                <a:cs typeface="Arial Unicode MS" pitchFamily="34" charset="-128"/>
-              </a:endParaRPr>
-            </a:p>
-          </p:txBody>
-        </p:sp>
-      </p:grpSp>
-      <p:sp>
-        <p:nvSpPr>
-          <p:cNvPr id="17" name="Rectangle 16"/>
-          <p:cNvSpPr/>
-          <p:nvPr/>
-        </p:nvSpPr>
-        <p:spPr bwMode="gray">
-          <a:xfrm>
-            <a:off x="8479019" y="3311391"/>
-            <a:ext cx="1645920" cy="365760"/>
-          </a:xfrm>
-          <a:prstGeom prst="rect">
-            <a:avLst/>
-          </a:prstGeom>
-          <a:ln>
-            <a:headEnd/>
-            <a:tailEnd/>
-          </a:ln>
-        </p:spPr>
-        <p:style>
-          <a:lnRef idx="2">
-            <a:schemeClr val="accent2"/>
-          </a:lnRef>
-          <a:fillRef idx="1">
-            <a:schemeClr val="lt1"/>
-          </a:fillRef>
-          <a:effectRef idx="0">
-            <a:schemeClr val="accent2"/>
-          </a:effectRef>
-          <a:fontRef idx="minor">
-            <a:schemeClr val="dk1"/>
-          </a:fontRef>
-        </p:style>
-        <p:txBody>
-          <a:bodyPr lIns="90000" tIns="72000" rIns="90000" bIns="72000" rtlCol="0" anchor="ctr"/>
-          <a:lstStyle/>
-          <a:p>
-            <a:pPr marR="0" algn="ctr" defTabSz="914400" eaLnBrk="1" fontAlgn="base" latinLnBrk="0" hangingPunct="1">
-              <a:lnSpc>
-                <a:spcPct val="100000"/>
-              </a:lnSpc>
-              <a:spcBef>
-                <a:spcPct val="50000"/>
-              </a:spcBef>
-              <a:spcAft>
-                <a:spcPct val="0"/>
-              </a:spcAft>
-              <a:buClr>
-                <a:srgbClr val="F0AB00"/>
-              </a:buClr>
-              <a:buSzPct val="80000"/>
-              <a:tabLst/>
-            </a:pPr>
-            <a:r>
-              <a:rPr lang="de-DE" sz="1800" kern="0" dirty="0" err="1">
-                <a:ea typeface="Arial Unicode MS" pitchFamily="34" charset="-128"/>
-                <a:cs typeface="Arial Unicode MS" pitchFamily="34" charset="-128"/>
-              </a:rPr>
-              <a:t>app</a:t>
-            </a:r>
-            <a:r>
-              <a:rPr lang="de-DE" sz="1800" kern="0" dirty="0">
-                <a:ea typeface="Arial Unicode MS" pitchFamily="34" charset="-128"/>
-                <a:cs typeface="Arial Unicode MS" pitchFamily="34" charset="-128"/>
-              </a:rPr>
-              <a:t>: </a:t>
-            </a:r>
-            <a:r>
-              <a:rPr lang="de-DE" sz="1800" kern="0" dirty="0" err="1">
-                <a:ea typeface="Arial Unicode MS" pitchFamily="34" charset="-128"/>
-                <a:cs typeface="Arial Unicode MS" pitchFamily="34" charset="-128"/>
-              </a:rPr>
-              <a:t>nginx</a:t>
-            </a:r>
-            <a:endParaRPr kumimoji="0" lang="de-DE" sz="1800" b="0" i="0" u="none" strike="noStrike" kern="0" cap="none" spc="0" normalizeH="0" baseline="0" noProof="0" dirty="0">
-              <a:ln>
-                <a:noFill/>
-              </a:ln>
-              <a:effectLst/>
-              <a:uLnTx/>
-              <a:uFillTx/>
-              <a:ea typeface="Arial Unicode MS" pitchFamily="34" charset="-128"/>
-              <a:cs typeface="Arial Unicode MS" pitchFamily="34" charset="-128"/>
-            </a:endParaRPr>
-          </a:p>
-        </p:txBody>
-      </p:sp>
-      <p:sp>
-        <p:nvSpPr>
-          <p:cNvPr id="20" name="Flowchart: Document 19"/>
-          <p:cNvSpPr/>
-          <p:nvPr/>
-        </p:nvSpPr>
-        <p:spPr bwMode="gray">
-          <a:xfrm>
-            <a:off x="2108699" y="2116699"/>
-            <a:ext cx="1506583" cy="766354"/>
-          </a:xfrm>
-          <a:prstGeom prst="flowChartDocument">
-            <a:avLst/>
-          </a:prstGeom>
-          <a:ln>
-            <a:headEnd/>
-            <a:tailEnd/>
-          </a:ln>
-        </p:spPr>
-        <p:style>
-          <a:lnRef idx="2">
-            <a:schemeClr val="accent5"/>
-          </a:lnRef>
-          <a:fillRef idx="1">
-            <a:schemeClr val="lt1"/>
-          </a:fillRef>
-          <a:effectRef idx="0">
-            <a:schemeClr val="accent5"/>
-          </a:effectRef>
-          <a:fontRef idx="minor">
-            <a:schemeClr val="dk1"/>
-          </a:fontRef>
-        </p:style>
-        <p:txBody>
-          <a:bodyPr lIns="90000" tIns="72000" rIns="90000" bIns="72000" rtlCol="0" anchor="ctr"/>
-          <a:lstStyle/>
-          <a:p>
-            <a:pPr algn="ctr" defTabSz="914400" fontAlgn="base">
-              <a:spcBef>
-                <a:spcPct val="50000"/>
-              </a:spcBef>
-              <a:spcAft>
-                <a:spcPct val="0"/>
-              </a:spcAft>
-              <a:buClr>
-                <a:srgbClr val="F0AB00"/>
-              </a:buClr>
-              <a:buSzPct val="80000"/>
-            </a:pPr>
-            <a:r>
-              <a:rPr lang="en-US" sz="1800" kern="0" dirty="0">
-                <a:ea typeface="Arial Unicode MS" pitchFamily="34" charset="-128"/>
-                <a:cs typeface="Arial Unicode MS" pitchFamily="34" charset="-128"/>
-              </a:rPr>
-              <a:t>Selector: </a:t>
-            </a:r>
-            <a:r>
-              <a:rPr lang="en-US" sz="1800" kern="0" dirty="0" err="1">
-                <a:ea typeface="Arial Unicode MS" pitchFamily="34" charset="-128"/>
-                <a:cs typeface="Arial Unicode MS" pitchFamily="34" charset="-128"/>
-              </a:rPr>
-              <a:t>app:nginx</a:t>
-            </a:r>
-            <a:endParaRPr lang="en-US" sz="1800" kern="0" dirty="0">
-              <a:ea typeface="Arial Unicode MS" pitchFamily="34" charset="-128"/>
-              <a:cs typeface="Arial Unicode MS" pitchFamily="34" charset="-128"/>
-            </a:endParaRPr>
-          </a:p>
-        </p:txBody>
-      </p:sp>
-      <p:sp>
-        <p:nvSpPr>
-          <p:cNvPr id="21" name="Rectangle 20"/>
-          <p:cNvSpPr/>
-          <p:nvPr/>
-        </p:nvSpPr>
-        <p:spPr bwMode="gray">
-          <a:xfrm>
-            <a:off x="8479019" y="2112859"/>
-            <a:ext cx="1645920" cy="365760"/>
-          </a:xfrm>
-          <a:prstGeom prst="rect">
-            <a:avLst/>
-          </a:prstGeom>
-          <a:ln>
-            <a:headEnd/>
-            <a:tailEnd/>
-          </a:ln>
-        </p:spPr>
-        <p:style>
-          <a:lnRef idx="2">
-            <a:schemeClr val="accent2"/>
-          </a:lnRef>
-          <a:fillRef idx="1">
-            <a:schemeClr val="lt1"/>
-          </a:fillRef>
-          <a:effectRef idx="0">
-            <a:schemeClr val="accent2"/>
-          </a:effectRef>
-          <a:fontRef idx="minor">
-            <a:schemeClr val="dk1"/>
-          </a:fontRef>
-        </p:style>
-        <p:txBody>
-          <a:bodyPr lIns="90000" tIns="72000" rIns="90000" bIns="72000" rtlCol="0" anchor="ctr"/>
-          <a:lstStyle/>
-          <a:p>
-            <a:pPr marR="0" algn="ctr" defTabSz="914400" eaLnBrk="1" fontAlgn="base" latinLnBrk="0" hangingPunct="1">
-              <a:lnSpc>
-                <a:spcPct val="100000"/>
-              </a:lnSpc>
-              <a:spcBef>
-                <a:spcPct val="50000"/>
-              </a:spcBef>
-              <a:spcAft>
-                <a:spcPct val="0"/>
-              </a:spcAft>
-              <a:buClr>
-                <a:srgbClr val="F0AB00"/>
-              </a:buClr>
-              <a:buSzPct val="80000"/>
-              <a:tabLst/>
-            </a:pPr>
-            <a:r>
-              <a:rPr lang="de-DE" sz="1800" kern="0" dirty="0" err="1">
-                <a:ea typeface="Arial Unicode MS" pitchFamily="34" charset="-128"/>
-                <a:cs typeface="Arial Unicode MS" pitchFamily="34" charset="-128"/>
-              </a:rPr>
-              <a:t>app</a:t>
-            </a:r>
-            <a:r>
-              <a:rPr lang="de-DE" sz="1800" kern="0" dirty="0">
-                <a:ea typeface="Arial Unicode MS" pitchFamily="34" charset="-128"/>
-                <a:cs typeface="Arial Unicode MS" pitchFamily="34" charset="-128"/>
-              </a:rPr>
-              <a:t>: </a:t>
-            </a:r>
-            <a:r>
-              <a:rPr lang="de-DE" sz="1800" kern="0" dirty="0" err="1">
-                <a:ea typeface="Arial Unicode MS" pitchFamily="34" charset="-128"/>
-                <a:cs typeface="Arial Unicode MS" pitchFamily="34" charset="-128"/>
-              </a:rPr>
-              <a:t>nginx</a:t>
-            </a:r>
-            <a:endParaRPr kumimoji="0" lang="de-DE" sz="1800" b="0" i="0" u="none" strike="noStrike" kern="0" cap="none" spc="0" normalizeH="0" baseline="0" noProof="0" dirty="0">
-              <a:ln>
-                <a:noFill/>
-              </a:ln>
-              <a:effectLst/>
-              <a:uLnTx/>
-              <a:uFillTx/>
-              <a:ea typeface="Arial Unicode MS" pitchFamily="34" charset="-128"/>
-              <a:cs typeface="Arial Unicode MS" pitchFamily="34" charset="-128"/>
-            </a:endParaRPr>
-          </a:p>
-        </p:txBody>
-      </p:sp>
-    </p:spTree>
-    <p:extLst>
-      <p:ext uri="{BB962C8B-B14F-4D97-AF65-F5344CB8AC3E}">
-        <p14:creationId xmlns:p14="http://schemas.microsoft.com/office/powerpoint/2010/main" val="3012488707"/>
-      </p:ext>
-    </p:extLst>
-  </p:cSld>
-  <p:clrMapOvr>
-    <a:masterClrMapping/>
-  </p:clrMapOvr>
-</p:sld>
-</file>
-
-<file path=ppt/slides/slide11.xml><?xml version="1.0" encoding="utf-8"?>
-<p:sld xmlns:a="http://schemas.openxmlformats.org/drawingml/2006/main" xmlns:r="http://schemas.openxmlformats.org/officeDocument/2006/relationships" xmlns:p="http://schemas.openxmlformats.org/presentationml/2006/main">
-  <p:cSld>
-    <p:spTree>
-      <p:nvGrpSpPr>
-        <p:cNvPr id="1" name=""/>
-        <p:cNvGrpSpPr/>
-        <p:nvPr/>
-      </p:nvGrpSpPr>
-      <p:grpSpPr>
-        <a:xfrm>
-          <a:off x="0" y="0"/>
-          <a:ext cx="0" cy="0"/>
-          <a:chOff x="0" y="0"/>
-          <a:chExt cx="0" cy="0"/>
-        </a:xfrm>
-      </p:grpSpPr>
-      <p:pic>
-        <p:nvPicPr>
-          <p:cNvPr id="8" name="Picture 7">
-            <a:extLst>
-              <a:ext uri="{FF2B5EF4-FFF2-40B4-BE49-F238E27FC236}">
-                <a16:creationId xmlns:a16="http://schemas.microsoft.com/office/drawing/2014/main" id="{962A931E-4934-4B92-902B-4B22DC418132}"/>
-              </a:ext>
-            </a:extLst>
-          </p:cNvPr>
-          <p:cNvPicPr>
-            <a:picLocks noChangeAspect="1"/>
-          </p:cNvPicPr>
-          <p:nvPr/>
-        </p:nvPicPr>
-        <p:blipFill>
-          <a:blip r:embed="rId3"/>
-          <a:stretch>
-            <a:fillRect/>
-          </a:stretch>
-        </p:blipFill>
-        <p:spPr>
-          <a:xfrm>
-            <a:off x="7574616" y="651855"/>
-            <a:ext cx="3380968" cy="5673150"/>
-          </a:xfrm>
-          <a:prstGeom prst="rect">
-            <a:avLst/>
-          </a:prstGeom>
-          <a:ln>
-            <a:solidFill>
-              <a:schemeClr val="tx1"/>
-            </a:solidFill>
-          </a:ln>
-        </p:spPr>
-      </p:pic>
-      <p:sp>
-        <p:nvSpPr>
-          <p:cNvPr id="3" name="Text Placeholder 2"/>
-          <p:cNvSpPr>
-            <a:spLocks noGrp="1"/>
-          </p:cNvSpPr>
-          <p:nvPr>
-            <p:ph type="body" sz="quarter" idx="10"/>
-          </p:nvPr>
-        </p:nvSpPr>
-        <p:spPr>
-          <a:xfrm>
-            <a:off x="504001" y="1124700"/>
-            <a:ext cx="6506400" cy="4727460"/>
-          </a:xfrm>
-        </p:spPr>
-        <p:txBody>
-          <a:bodyPr/>
-          <a:lstStyle/>
-          <a:p>
-            <a:pPr lvl="1"/>
-            <a:r>
-              <a:rPr lang="en-US" dirty="0"/>
-              <a:t>Deployments are the default construct to run stateless applications in Kubernetes</a:t>
-            </a:r>
-          </a:p>
-          <a:p>
-            <a:pPr lvl="1"/>
-            <a:r>
-              <a:rPr lang="en-US" dirty="0"/>
-              <a:t>Create a deployment from a </a:t>
-            </a:r>
-            <a:r>
-              <a:rPr lang="en-US" dirty="0" err="1"/>
-              <a:t>yaml</a:t>
-            </a:r>
-            <a:r>
-              <a:rPr lang="en-US" dirty="0"/>
-              <a:t>/json file or by “</a:t>
-            </a:r>
-            <a:r>
-              <a:rPr lang="en-US" dirty="0" err="1"/>
-              <a:t>kubectl</a:t>
-            </a:r>
-            <a:r>
-              <a:rPr lang="en-US" dirty="0"/>
-              <a:t> create deployment &lt;name&gt; --image=&lt;image&gt;</a:t>
-            </a:r>
-          </a:p>
-          <a:p>
-            <a:pPr lvl="1"/>
-            <a:r>
-              <a:rPr lang="en-US" dirty="0"/>
-              <a:t>Deployments create </a:t>
-            </a:r>
-            <a:r>
-              <a:rPr lang="en-US" dirty="0" err="1"/>
-              <a:t>ReplicaSets</a:t>
-            </a:r>
-            <a:r>
-              <a:rPr lang="en-US" dirty="0"/>
-              <a:t>, which then create pods</a:t>
-            </a:r>
-          </a:p>
-          <a:p>
-            <a:pPr lvl="1"/>
-            <a:r>
-              <a:rPr lang="en-US" dirty="0"/>
-              <a:t>Resource type can scale</a:t>
-            </a:r>
-          </a:p>
-          <a:p>
-            <a:pPr lvl="1"/>
-            <a:r>
-              <a:rPr lang="en-US" dirty="0"/>
-              <a:t>Support of rolling updates, versioning and roll-backs</a:t>
-            </a:r>
-          </a:p>
-          <a:p>
-            <a:pPr lvl="1"/>
-            <a:r>
-              <a:rPr lang="en-US" dirty="0"/>
-              <a:t>All parts belonging to a deployment are identified by labels and corresponding </a:t>
-            </a:r>
-            <a:r>
-              <a:rPr lang="en-US" dirty="0" err="1"/>
-              <a:t>selctors</a:t>
-            </a:r>
-            <a:endParaRPr lang="en-US" dirty="0"/>
-          </a:p>
-          <a:p>
-            <a:pPr lvl="1"/>
-            <a:endParaRPr lang="en-US" dirty="0"/>
-          </a:p>
-        </p:txBody>
-      </p:sp>
-      <p:sp>
-        <p:nvSpPr>
-          <p:cNvPr id="2" name="Title 1"/>
-          <p:cNvSpPr>
-            <a:spLocks noGrp="1"/>
-          </p:cNvSpPr>
-          <p:nvPr>
-            <p:ph type="title"/>
-          </p:nvPr>
-        </p:nvSpPr>
-        <p:spPr/>
-        <p:txBody>
-          <a:bodyPr/>
-          <a:lstStyle/>
-          <a:p>
-            <a:r>
-              <a:rPr lang="en-US" dirty="0"/>
-              <a:t>Deployments</a:t>
-            </a:r>
-          </a:p>
-        </p:txBody>
-      </p:sp>
-      <p:cxnSp>
-        <p:nvCxnSpPr>
-          <p:cNvPr id="5" name="Straight Arrow Connector 4"/>
-          <p:cNvCxnSpPr/>
-          <p:nvPr/>
-        </p:nvCxnSpPr>
-        <p:spPr>
-          <a:xfrm flipH="1">
-            <a:off x="10146741" y="2111548"/>
-            <a:ext cx="1059180" cy="7620"/>
-          </a:xfrm>
-          <a:prstGeom prst="straightConnector1">
-            <a:avLst/>
-          </a:prstGeom>
-          <a:ln w="57150">
-            <a:solidFill>
-              <a:schemeClr val="accent4"/>
-            </a:solidFill>
-            <a:headEnd type="none" w="med" len="med"/>
-            <a:tailEnd type="triangle"/>
-          </a:ln>
-        </p:spPr>
-        <p:style>
-          <a:lnRef idx="1">
-            <a:schemeClr val="accent2"/>
-          </a:lnRef>
-          <a:fillRef idx="0">
-            <a:schemeClr val="accent2"/>
-          </a:fillRef>
-          <a:effectRef idx="0">
-            <a:schemeClr val="accent2"/>
-          </a:effectRef>
-          <a:fontRef idx="minor">
-            <a:schemeClr val="tx1"/>
-          </a:fontRef>
-        </p:style>
-      </p:cxnSp>
-      <p:cxnSp>
-        <p:nvCxnSpPr>
-          <p:cNvPr id="6" name="Straight Arrow Connector 5"/>
-          <p:cNvCxnSpPr/>
-          <p:nvPr/>
-        </p:nvCxnSpPr>
-        <p:spPr>
-          <a:xfrm flipH="1">
-            <a:off x="10146741" y="3488430"/>
-            <a:ext cx="1059180" cy="7620"/>
-          </a:xfrm>
-          <a:prstGeom prst="straightConnector1">
-            <a:avLst/>
-          </a:prstGeom>
-          <a:ln w="57150">
-            <a:solidFill>
-              <a:schemeClr val="accent5"/>
-            </a:solidFill>
-            <a:headEnd type="none" w="med" len="med"/>
-            <a:tailEnd type="triangle"/>
-          </a:ln>
-        </p:spPr>
-        <p:style>
-          <a:lnRef idx="1">
-            <a:schemeClr val="accent2"/>
-          </a:lnRef>
-          <a:fillRef idx="0">
-            <a:schemeClr val="accent2"/>
-          </a:fillRef>
-          <a:effectRef idx="0">
-            <a:schemeClr val="accent2"/>
-          </a:effectRef>
-          <a:fontRef idx="minor">
-            <a:schemeClr val="tx1"/>
-          </a:fontRef>
-        </p:style>
-      </p:cxnSp>
-      <p:cxnSp>
-        <p:nvCxnSpPr>
-          <p:cNvPr id="7" name="Straight Arrow Connector 6"/>
-          <p:cNvCxnSpPr/>
-          <p:nvPr/>
-        </p:nvCxnSpPr>
-        <p:spPr>
-          <a:xfrm flipH="1">
-            <a:off x="10146741" y="4597507"/>
-            <a:ext cx="1059180" cy="7620"/>
-          </a:xfrm>
-          <a:prstGeom prst="straightConnector1">
-            <a:avLst/>
-          </a:prstGeom>
-          <a:ln w="57150">
-            <a:solidFill>
-              <a:schemeClr val="accent5"/>
-            </a:solidFill>
-            <a:headEnd type="none" w="med" len="med"/>
-            <a:tailEnd type="triangle"/>
-          </a:ln>
-        </p:spPr>
-        <p:style>
-          <a:lnRef idx="1">
-            <a:schemeClr val="accent2"/>
-          </a:lnRef>
-          <a:fillRef idx="0">
-            <a:schemeClr val="accent2"/>
-          </a:fillRef>
-          <a:effectRef idx="0">
-            <a:schemeClr val="accent2"/>
-          </a:effectRef>
-          <a:fontRef idx="minor">
-            <a:schemeClr val="tx1"/>
-          </a:fontRef>
-        </p:style>
-      </p:cxnSp>
-    </p:spTree>
-    <p:extLst>
-      <p:ext uri="{BB962C8B-B14F-4D97-AF65-F5344CB8AC3E}">
-        <p14:creationId xmlns:p14="http://schemas.microsoft.com/office/powerpoint/2010/main" val="3249990004"/>
-      </p:ext>
-    </p:extLst>
-  </p:cSld>
-  <p:clrMapOvr>
-    <a:masterClrMapping/>
-  </p:clrMapOvr>
-</p:sld>
-</file>
-
-<file path=ppt/slides/slide12.xml><?xml version="1.0" encoding="utf-8"?>
-<p:sld xmlns:a="http://schemas.openxmlformats.org/drawingml/2006/main" xmlns:r="http://schemas.openxmlformats.org/officeDocument/2006/relationships" xmlns:p="http://schemas.openxmlformats.org/presentationml/2006/main">
-  <p:cSld>
-    <p:spTree>
-      <p:nvGrpSpPr>
-        <p:cNvPr id="1" name=""/>
-        <p:cNvGrpSpPr/>
-        <p:nvPr/>
-      </p:nvGrpSpPr>
-      <p:grpSpPr>
-        <a:xfrm>
-          <a:off x="0" y="0"/>
-          <a:ext cx="0" cy="0"/>
-          <a:chOff x="0" y="0"/>
-          <a:chExt cx="0" cy="0"/>
-        </a:xfrm>
-      </p:grpSpPr>
-      <p:sp>
-        <p:nvSpPr>
           <p:cNvPr id="3" name="Title 2"/>
           <p:cNvSpPr>
             <a:spLocks noGrp="1"/>
@@ -19914,7 +18286,7 @@
 </p:sld>
 </file>
 
-<file path=ppt/slides/slide13.xml><?xml version="1.0" encoding="utf-8"?>
+<file path=ppt/slides/slide11.xml><?xml version="1.0" encoding="utf-8"?>
 <p:sld xmlns:a="http://schemas.openxmlformats.org/drawingml/2006/main" xmlns:r="http://schemas.openxmlformats.org/officeDocument/2006/relationships" xmlns:p="http://schemas.openxmlformats.org/presentationml/2006/main">
   <p:cSld>
     <p:spTree>
@@ -20828,7 +19200,7 @@
 </p:sld>
 </file>
 
-<file path=ppt/slides/slide14.xml><?xml version="1.0" encoding="utf-8"?>
+<file path=ppt/slides/slide12.xml><?xml version="1.0" encoding="utf-8"?>
 <p:sld xmlns:a="http://schemas.openxmlformats.org/drawingml/2006/main" xmlns:r="http://schemas.openxmlformats.org/officeDocument/2006/relationships" xmlns:p="http://schemas.openxmlformats.org/presentationml/2006/main">
   <p:cSld>
     <p:spTree>
@@ -20886,7 +19258,7 @@
 </p:sld>
 </file>
 
-<file path=ppt/slides/slide15.xml><?xml version="1.0" encoding="utf-8"?>
+<file path=ppt/slides/slide13.xml><?xml version="1.0" encoding="utf-8"?>
 <p:sld xmlns:a="http://schemas.openxmlformats.org/drawingml/2006/main" xmlns:r="http://schemas.openxmlformats.org/officeDocument/2006/relationships" xmlns:p="http://schemas.openxmlformats.org/presentationml/2006/main">
   <p:cSld>
     <p:bg>
@@ -21835,7 +20207,7 @@
 </p:sld>
 </file>
 
-<file path=ppt/slides/slide16.xml><?xml version="1.0" encoding="utf-8"?>
+<file path=ppt/slides/slide14.xml><?xml version="1.0" encoding="utf-8"?>
 <p:sld xmlns:a="http://schemas.openxmlformats.org/drawingml/2006/main" xmlns:r="http://schemas.openxmlformats.org/officeDocument/2006/relationships" xmlns:p="http://schemas.openxmlformats.org/presentationml/2006/main">
   <p:cSld>
     <p:spTree>
@@ -23634,7 +22006,7 @@
 </p:sld>
 </file>
 
-<file path=ppt/slides/slide17.xml><?xml version="1.0" encoding="utf-8"?>
+<file path=ppt/slides/slide15.xml><?xml version="1.0" encoding="utf-8"?>
 <p:sld xmlns:a="http://schemas.openxmlformats.org/drawingml/2006/main" xmlns:r="http://schemas.openxmlformats.org/officeDocument/2006/relationships" xmlns:p="http://schemas.openxmlformats.org/presentationml/2006/main">
   <p:cSld>
     <p:spTree>
@@ -26865,7 +25237,7 @@
 </p:sld>
 </file>
 
-<file path=ppt/slides/slide18.xml><?xml version="1.0" encoding="utf-8"?>
+<file path=ppt/slides/slide16.xml><?xml version="1.0" encoding="utf-8"?>
 <p:sld xmlns:a="http://schemas.openxmlformats.org/drawingml/2006/main" xmlns:r="http://schemas.openxmlformats.org/officeDocument/2006/relationships" xmlns:p="http://schemas.openxmlformats.org/presentationml/2006/main" show="0">
   <p:cSld>
     <p:spTree>
@@ -28978,7 +27350,7 @@
 </file>
 
 <file path=ppt/slides/slide6.xml><?xml version="1.0" encoding="utf-8"?>
-<p:sld xmlns:a="http://schemas.openxmlformats.org/drawingml/2006/main" xmlns:r="http://schemas.openxmlformats.org/officeDocument/2006/relationships" xmlns:p="http://schemas.openxmlformats.org/presentationml/2006/main" show="0">
+<p:sld xmlns:a="http://schemas.openxmlformats.org/drawingml/2006/main" xmlns:r="http://schemas.openxmlformats.org/officeDocument/2006/relationships" xmlns:p="http://schemas.openxmlformats.org/presentationml/2006/main">
   <p:cSld>
     <p:spTree>
       <p:nvGrpSpPr>
@@ -29209,7 +27581,7 @@
           <a:bodyPr lIns="90000" tIns="72000" rIns="90000" bIns="72000" rtlCol="0" anchor="ctr"/>
           <a:lstStyle/>
           <a:p>
-            <a:pPr marR="0" algn="ctr" defTabSz="914400" eaLnBrk="1" fontAlgn="base" latinLnBrk="0" hangingPunct="1">
+            <a:pPr marL="0" marR="0" lvl="0" indent="0" algn="ctr" defTabSz="914400" rtl="0" eaLnBrk="1" fontAlgn="base" latinLnBrk="0" hangingPunct="1">
               <a:lnSpc>
                 <a:spcPct val="100000"/>
               </a:lnSpc>
@@ -29223,20 +27595,44 @@
                 <a:srgbClr val="F0AB00"/>
               </a:buClr>
               <a:buSzPct val="80000"/>
+              <a:buFontTx/>
+              <a:buNone/>
               <a:tabLst/>
+              <a:defRPr/>
             </a:pPr>
+            <a:r>
+              <a:rPr kumimoji="0" lang="en-US" sz="1800" b="1" i="0" u="none" strike="noStrike" kern="0" cap="none" spc="0" normalizeH="0" baseline="0" noProof="0" dirty="0">
+                <a:ln>
+                  <a:noFill/>
+                </a:ln>
+                <a:solidFill>
+                  <a:srgbClr val="000000"/>
+                </a:solidFill>
+                <a:effectLst/>
+                <a:uLnTx/>
+                <a:uFillTx/>
+                <a:latin typeface="Arial"/>
+                <a:ea typeface="Arial Unicode MS" pitchFamily="34" charset="-128"/>
+                <a:cs typeface="Arial Unicode MS" pitchFamily="34" charset="-128"/>
+              </a:rPr>
+              <a:t>Deployment</a:t>
+            </a:r>
             <a:r>
               <a:rPr kumimoji="0" lang="en-US" sz="1800" b="0" i="0" u="none" strike="noStrike" kern="0" cap="none" spc="0" normalizeH="0" baseline="0" noProof="0" dirty="0">
                 <a:ln>
                   <a:noFill/>
                 </a:ln>
+                <a:solidFill>
+                  <a:srgbClr val="000000"/>
+                </a:solidFill>
                 <a:effectLst/>
                 <a:uLnTx/>
                 <a:uFillTx/>
+                <a:latin typeface="Arial"/>
                 <a:ea typeface="Arial Unicode MS" pitchFamily="34" charset="-128"/>
                 <a:cs typeface="Arial Unicode MS" pitchFamily="34" charset="-128"/>
               </a:rPr>
-              <a:t>Deployment defines replica count, used image and more</a:t>
+              <a:t> defines replica count, used image and more</a:t>
             </a:r>
           </a:p>
         </p:txBody>
@@ -29301,1352 +27697,6 @@
               <a:schemeClr val="tx1"/>
             </a:solidFill>
           </a:ln>
-          <a:extLst/>
-        </p:spPr>
-      </p:pic>
-      <p:sp>
-        <p:nvSpPr>
-          <p:cNvPr id="21" name="Speech Bubble: Rectangle 20">
-            <a:extLst>
-              <a:ext uri="{FF2B5EF4-FFF2-40B4-BE49-F238E27FC236}">
-                <a16:creationId xmlns:a16="http://schemas.microsoft.com/office/drawing/2014/main" id="{8D950947-1484-4F2C-9273-94DF5C9FABD7}"/>
-              </a:ext>
-            </a:extLst>
-          </p:cNvPr>
-          <p:cNvSpPr/>
-          <p:nvPr/>
-        </p:nvSpPr>
-        <p:spPr bwMode="gray">
-          <a:xfrm>
-            <a:off x="8347029" y="3054348"/>
-            <a:ext cx="3326171" cy="1060037"/>
-          </a:xfrm>
-          <a:prstGeom prst="wedgeRectCallout">
-            <a:avLst>
-              <a:gd name="adj1" fmla="val -88305"/>
-              <a:gd name="adj2" fmla="val -3855"/>
-            </a:avLst>
-          </a:prstGeom>
-          <a:ln>
-            <a:headEnd/>
-            <a:tailEnd/>
-          </a:ln>
-        </p:spPr>
-        <p:style>
-          <a:lnRef idx="2">
-            <a:schemeClr val="accent5"/>
-          </a:lnRef>
-          <a:fillRef idx="1">
-            <a:schemeClr val="lt1"/>
-          </a:fillRef>
-          <a:effectRef idx="0">
-            <a:schemeClr val="accent5"/>
-          </a:effectRef>
-          <a:fontRef idx="minor">
-            <a:schemeClr val="dk1"/>
-          </a:fontRef>
-        </p:style>
-        <p:txBody>
-          <a:bodyPr lIns="90000" tIns="72000" rIns="90000" bIns="72000" rtlCol="0" anchor="ctr"/>
-          <a:lstStyle/>
-          <a:p>
-            <a:pPr marR="0" algn="ctr" defTabSz="914400" eaLnBrk="1" fontAlgn="base" latinLnBrk="0" hangingPunct="1">
-              <a:lnSpc>
-                <a:spcPct val="100000"/>
-              </a:lnSpc>
-              <a:spcBef>
-                <a:spcPct val="50000"/>
-              </a:spcBef>
-              <a:spcAft>
-                <a:spcPct val="0"/>
-              </a:spcAft>
-              <a:buClr>
-                <a:srgbClr val="F0AB00"/>
-              </a:buClr>
-              <a:buSzPct val="80000"/>
-              <a:tabLst/>
-            </a:pPr>
-            <a:r>
-              <a:rPr lang="en-US" sz="1800" kern="0" dirty="0" err="1">
-                <a:ea typeface="Arial Unicode MS" pitchFamily="34" charset="-128"/>
-                <a:cs typeface="Arial Unicode MS" pitchFamily="34" charset="-128"/>
-              </a:rPr>
-              <a:t>ReplicaSet</a:t>
-            </a:r>
-            <a:r>
-              <a:rPr lang="en-US" sz="1800" kern="0" dirty="0">
-                <a:ea typeface="Arial Unicode MS" pitchFamily="34" charset="-128"/>
-                <a:cs typeface="Arial Unicode MS" pitchFamily="34" charset="-128"/>
-              </a:rPr>
-              <a:t> spawns pods as defined in spec template &amp; adds a generation label</a:t>
-            </a:r>
-            <a:endParaRPr kumimoji="0" lang="en-US" sz="1800" b="0" i="0" u="none" strike="noStrike" kern="0" cap="none" spc="0" normalizeH="0" baseline="0" noProof="0" dirty="0">
-              <a:ln>
-                <a:noFill/>
-              </a:ln>
-              <a:effectLst/>
-              <a:uLnTx/>
-              <a:uFillTx/>
-              <a:ea typeface="Arial Unicode MS" pitchFamily="34" charset="-128"/>
-              <a:cs typeface="Arial Unicode MS" pitchFamily="34" charset="-128"/>
-            </a:endParaRPr>
-          </a:p>
-        </p:txBody>
-      </p:sp>
-      <p:sp>
-        <p:nvSpPr>
-          <p:cNvPr id="22" name="Speech Bubble: Rectangle 21">
-            <a:extLst>
-              <a:ext uri="{FF2B5EF4-FFF2-40B4-BE49-F238E27FC236}">
-                <a16:creationId xmlns:a16="http://schemas.microsoft.com/office/drawing/2014/main" id="{B378F0C9-0710-43E8-89C2-6CA44C5D12BF}"/>
-              </a:ext>
-            </a:extLst>
-          </p:cNvPr>
-          <p:cNvSpPr/>
-          <p:nvPr/>
-        </p:nvSpPr>
-        <p:spPr bwMode="gray">
-          <a:xfrm>
-            <a:off x="8347030" y="4539768"/>
-            <a:ext cx="3326171" cy="1239930"/>
-          </a:xfrm>
-          <a:prstGeom prst="wedgeRectCallout">
-            <a:avLst>
-              <a:gd name="adj1" fmla="val -78709"/>
-              <a:gd name="adj2" fmla="val -7178"/>
-            </a:avLst>
-          </a:prstGeom>
-          <a:ln>
-            <a:headEnd/>
-            <a:tailEnd/>
-          </a:ln>
-        </p:spPr>
-        <p:style>
-          <a:lnRef idx="2">
-            <a:schemeClr val="accent5"/>
-          </a:lnRef>
-          <a:fillRef idx="1">
-            <a:schemeClr val="lt1"/>
-          </a:fillRef>
-          <a:effectRef idx="0">
-            <a:schemeClr val="accent5"/>
-          </a:effectRef>
-          <a:fontRef idx="minor">
-            <a:schemeClr val="dk1"/>
-          </a:fontRef>
-        </p:style>
-        <p:txBody>
-          <a:bodyPr lIns="90000" tIns="72000" rIns="90000" bIns="72000" rtlCol="0" anchor="ctr"/>
-          <a:lstStyle/>
-          <a:p>
-            <a:pPr marR="0" algn="ctr" defTabSz="914400" eaLnBrk="1" fontAlgn="base" latinLnBrk="0" hangingPunct="1">
-              <a:lnSpc>
-                <a:spcPct val="100000"/>
-              </a:lnSpc>
-              <a:spcBef>
-                <a:spcPct val="50000"/>
-              </a:spcBef>
-              <a:spcAft>
-                <a:spcPct val="0"/>
-              </a:spcAft>
-              <a:buClr>
-                <a:srgbClr val="F0AB00"/>
-              </a:buClr>
-              <a:buSzPct val="80000"/>
-              <a:tabLst/>
-            </a:pPr>
-            <a:r>
-              <a:rPr lang="en-US" sz="1800" kern="0" dirty="0">
-                <a:ea typeface="Arial Unicode MS" pitchFamily="34" charset="-128"/>
-                <a:cs typeface="Arial Unicode MS" pitchFamily="34" charset="-128"/>
-              </a:rPr>
-              <a:t>Pods are identified by labels:</a:t>
-            </a:r>
-          </a:p>
-          <a:p>
-            <a:pPr marR="0" algn="ctr" defTabSz="914400" eaLnBrk="1" fontAlgn="base" latinLnBrk="0" hangingPunct="1">
-              <a:lnSpc>
-                <a:spcPct val="100000"/>
-              </a:lnSpc>
-              <a:spcBef>
-                <a:spcPct val="50000"/>
-              </a:spcBef>
-              <a:spcAft>
-                <a:spcPct val="0"/>
-              </a:spcAft>
-              <a:buClr>
-                <a:srgbClr val="F0AB00"/>
-              </a:buClr>
-              <a:buSzPct val="80000"/>
-              <a:tabLst/>
-            </a:pPr>
-            <a:r>
-              <a:rPr lang="en-US" sz="1800" kern="0" dirty="0">
-                <a:ea typeface="Arial Unicode MS" pitchFamily="34" charset="-128"/>
-                <a:cs typeface="Arial Unicode MS" pitchFamily="34" charset="-128"/>
-              </a:rPr>
-              <a:t>species=</a:t>
-            </a:r>
-            <a:r>
-              <a:rPr lang="en-US" sz="1800" kern="0" dirty="0" err="1">
-                <a:ea typeface="Arial Unicode MS" pitchFamily="34" charset="-128"/>
-                <a:cs typeface="Arial Unicode MS" pitchFamily="34" charset="-128"/>
-              </a:rPr>
-              <a:t>koopa</a:t>
-            </a:r>
-            <a:r>
-              <a:rPr lang="en-US" sz="1800" kern="0" dirty="0">
-                <a:ea typeface="Arial Unicode MS" pitchFamily="34" charset="-128"/>
-                <a:cs typeface="Arial Unicode MS" pitchFamily="34" charset="-128"/>
-              </a:rPr>
-              <a:t> generation=green-shell</a:t>
-            </a:r>
-          </a:p>
-        </p:txBody>
-      </p:sp>
-      <p:sp>
-        <p:nvSpPr>
-          <p:cNvPr id="20" name="Rectangle 19">
-            <a:extLst>
-              <a:ext uri="{FF2B5EF4-FFF2-40B4-BE49-F238E27FC236}">
-                <a16:creationId xmlns:a16="http://schemas.microsoft.com/office/drawing/2014/main" id="{DE598B18-824C-4BC2-B699-C449E02B418F}"/>
-              </a:ext>
-            </a:extLst>
-          </p:cNvPr>
-          <p:cNvSpPr/>
-          <p:nvPr/>
-        </p:nvSpPr>
-        <p:spPr bwMode="gray">
-          <a:xfrm>
-            <a:off x="1318615" y="2867183"/>
-            <a:ext cx="2015135" cy="527988"/>
-          </a:xfrm>
-          <a:prstGeom prst="rect">
-            <a:avLst/>
-          </a:prstGeom>
-          <a:ln>
-            <a:headEnd/>
-            <a:tailEnd/>
-          </a:ln>
-        </p:spPr>
-        <p:style>
-          <a:lnRef idx="2">
-            <a:schemeClr val="accent2"/>
-          </a:lnRef>
-          <a:fillRef idx="1">
-            <a:schemeClr val="lt1"/>
-          </a:fillRef>
-          <a:effectRef idx="0">
-            <a:schemeClr val="accent2"/>
-          </a:effectRef>
-          <a:fontRef idx="minor">
-            <a:schemeClr val="dk1"/>
-          </a:fontRef>
-        </p:style>
-        <p:txBody>
-          <a:bodyPr lIns="90000" tIns="72000" rIns="90000" bIns="72000" rtlCol="0" anchor="ctr"/>
-          <a:lstStyle/>
-          <a:p>
-            <a:pPr marR="0" algn="ctr" defTabSz="914400" eaLnBrk="1" fontAlgn="base" latinLnBrk="0" hangingPunct="1">
-              <a:lnSpc>
-                <a:spcPct val="100000"/>
-              </a:lnSpc>
-              <a:spcBef>
-                <a:spcPct val="50000"/>
-              </a:spcBef>
-              <a:spcAft>
-                <a:spcPct val="0"/>
-              </a:spcAft>
-              <a:buClr>
-                <a:srgbClr val="F0AB00"/>
-              </a:buClr>
-              <a:buSzPct val="80000"/>
-              <a:tabLst/>
-            </a:pPr>
-            <a:r>
-              <a:rPr lang="de-DE" sz="1800" kern="0" dirty="0" err="1">
-                <a:ea typeface="Arial Unicode MS" pitchFamily="34" charset="-128"/>
-                <a:cs typeface="Arial Unicode MS" pitchFamily="34" charset="-128"/>
-              </a:rPr>
-              <a:t>species</a:t>
-            </a:r>
-            <a:r>
-              <a:rPr lang="de-DE" sz="1800" kern="0" dirty="0">
-                <a:ea typeface="Arial Unicode MS" pitchFamily="34" charset="-128"/>
-                <a:cs typeface="Arial Unicode MS" pitchFamily="34" charset="-128"/>
-              </a:rPr>
-              <a:t> = </a:t>
-            </a:r>
-            <a:r>
-              <a:rPr lang="de-DE" sz="1800" kern="0" dirty="0" err="1">
-                <a:ea typeface="Arial Unicode MS" pitchFamily="34" charset="-128"/>
-                <a:cs typeface="Arial Unicode MS" pitchFamily="34" charset="-128"/>
-              </a:rPr>
-              <a:t>koopa</a:t>
-            </a:r>
-            <a:endParaRPr kumimoji="0" lang="de-DE" sz="1800" b="0" i="0" u="none" strike="noStrike" kern="0" cap="none" spc="0" normalizeH="0" baseline="0" noProof="0" dirty="0">
-              <a:ln>
-                <a:noFill/>
-              </a:ln>
-              <a:effectLst/>
-              <a:uLnTx/>
-              <a:uFillTx/>
-              <a:ea typeface="Arial Unicode MS" pitchFamily="34" charset="-128"/>
-              <a:cs typeface="Arial Unicode MS" pitchFamily="34" charset="-128"/>
-            </a:endParaRPr>
-          </a:p>
-        </p:txBody>
-      </p:sp>
-      <p:sp>
-        <p:nvSpPr>
-          <p:cNvPr id="24" name="Flowchart: Document 23">
-            <a:extLst>
-              <a:ext uri="{FF2B5EF4-FFF2-40B4-BE49-F238E27FC236}">
-                <a16:creationId xmlns:a16="http://schemas.microsoft.com/office/drawing/2014/main" id="{A5CA1BF9-ED37-4339-B739-1271C0123AC5}"/>
-              </a:ext>
-            </a:extLst>
-          </p:cNvPr>
-          <p:cNvSpPr/>
-          <p:nvPr/>
-        </p:nvSpPr>
-        <p:spPr bwMode="gray">
-          <a:xfrm>
-            <a:off x="736575" y="2279442"/>
-            <a:ext cx="1506583" cy="766354"/>
-          </a:xfrm>
-          <a:prstGeom prst="flowChartDocument">
-            <a:avLst/>
-          </a:prstGeom>
-          <a:ln>
-            <a:headEnd/>
-            <a:tailEnd/>
-          </a:ln>
-        </p:spPr>
-        <p:style>
-          <a:lnRef idx="2">
-            <a:schemeClr val="accent5"/>
-          </a:lnRef>
-          <a:fillRef idx="1">
-            <a:schemeClr val="lt1"/>
-          </a:fillRef>
-          <a:effectRef idx="0">
-            <a:schemeClr val="accent5"/>
-          </a:effectRef>
-          <a:fontRef idx="minor">
-            <a:schemeClr val="dk1"/>
-          </a:fontRef>
-        </p:style>
-        <p:txBody>
-          <a:bodyPr lIns="90000" tIns="72000" rIns="90000" bIns="72000" rtlCol="0" anchor="ctr"/>
-          <a:lstStyle/>
-          <a:p>
-            <a:pPr algn="ctr" defTabSz="914400" fontAlgn="base">
-              <a:spcBef>
-                <a:spcPct val="50000"/>
-              </a:spcBef>
-              <a:spcAft>
-                <a:spcPct val="0"/>
-              </a:spcAft>
-              <a:buClr>
-                <a:srgbClr val="F0AB00"/>
-              </a:buClr>
-              <a:buSzPct val="80000"/>
-            </a:pPr>
-            <a:r>
-              <a:rPr lang="en-US" sz="1800" kern="0" dirty="0">
-                <a:ea typeface="Arial Unicode MS" pitchFamily="34" charset="-128"/>
-                <a:cs typeface="Arial Unicode MS" pitchFamily="34" charset="-128"/>
-              </a:rPr>
-              <a:t>Selector</a:t>
-            </a:r>
-          </a:p>
-        </p:txBody>
-      </p:sp>
-      <p:cxnSp>
-        <p:nvCxnSpPr>
-          <p:cNvPr id="14" name="Connector: Elbow 13">
-            <a:extLst>
-              <a:ext uri="{FF2B5EF4-FFF2-40B4-BE49-F238E27FC236}">
-                <a16:creationId xmlns:a16="http://schemas.microsoft.com/office/drawing/2014/main" id="{948568E3-E30A-40FC-B829-9E1555E4FA76}"/>
-              </a:ext>
-            </a:extLst>
-          </p:cNvPr>
-          <p:cNvCxnSpPr>
-            <a:cxnSpLocks/>
-            <a:stCxn id="1032" idx="2"/>
-          </p:cNvCxnSpPr>
-          <p:nvPr/>
-        </p:nvCxnSpPr>
-        <p:spPr>
-          <a:xfrm rot="5400000">
-            <a:off x="5492429" y="2975294"/>
-            <a:ext cx="144793" cy="1"/>
-          </a:xfrm>
-          <a:prstGeom prst="bentConnector3">
-            <a:avLst>
-              <a:gd name="adj1" fmla="val 50000"/>
-            </a:avLst>
-          </a:prstGeom>
-          <a:ln w="57150">
-            <a:solidFill>
-              <a:schemeClr val="bg2">
-                <a:lumMod val="75000"/>
-              </a:schemeClr>
-            </a:solidFill>
-            <a:headEnd type="none" w="med" len="med"/>
-            <a:tailEnd type="none" w="med" len="med"/>
-          </a:ln>
-        </p:spPr>
-        <p:style>
-          <a:lnRef idx="1">
-            <a:schemeClr val="accent1"/>
-          </a:lnRef>
-          <a:fillRef idx="0">
-            <a:schemeClr val="accent1"/>
-          </a:fillRef>
-          <a:effectRef idx="0">
-            <a:schemeClr val="accent1"/>
-          </a:effectRef>
-          <a:fontRef idx="minor">
-            <a:schemeClr val="tx1"/>
-          </a:fontRef>
-        </p:style>
-      </p:cxnSp>
-      <p:sp>
-        <p:nvSpPr>
-          <p:cNvPr id="23" name="Rectangle 22">
-            <a:extLst>
-              <a:ext uri="{FF2B5EF4-FFF2-40B4-BE49-F238E27FC236}">
-                <a16:creationId xmlns:a16="http://schemas.microsoft.com/office/drawing/2014/main" id="{94DCD3A2-04F9-4ED8-8D59-B92D55221180}"/>
-              </a:ext>
-            </a:extLst>
-          </p:cNvPr>
-          <p:cNvSpPr/>
-          <p:nvPr/>
-        </p:nvSpPr>
-        <p:spPr bwMode="gray">
-          <a:xfrm>
-            <a:off x="488390" y="4862644"/>
-            <a:ext cx="2723817" cy="985220"/>
-          </a:xfrm>
-          <a:prstGeom prst="rect">
-            <a:avLst/>
-          </a:prstGeom>
-          <a:ln>
-            <a:headEnd/>
-            <a:tailEnd/>
-          </a:ln>
-        </p:spPr>
-        <p:style>
-          <a:lnRef idx="2">
-            <a:schemeClr val="accent2"/>
-          </a:lnRef>
-          <a:fillRef idx="1">
-            <a:schemeClr val="lt1"/>
-          </a:fillRef>
-          <a:effectRef idx="0">
-            <a:schemeClr val="accent2"/>
-          </a:effectRef>
-          <a:fontRef idx="minor">
-            <a:schemeClr val="dk1"/>
-          </a:fontRef>
-        </p:style>
-        <p:txBody>
-          <a:bodyPr lIns="90000" tIns="72000" rIns="90000" bIns="72000" rtlCol="0" anchor="ctr"/>
-          <a:lstStyle/>
-          <a:p>
-            <a:pPr marR="0" algn="ctr" defTabSz="914400" eaLnBrk="1" fontAlgn="base" latinLnBrk="0" hangingPunct="1">
-              <a:lnSpc>
-                <a:spcPct val="100000"/>
-              </a:lnSpc>
-              <a:spcBef>
-                <a:spcPct val="50000"/>
-              </a:spcBef>
-              <a:spcAft>
-                <a:spcPct val="0"/>
-              </a:spcAft>
-              <a:buClr>
-                <a:srgbClr val="F0AB00"/>
-              </a:buClr>
-              <a:buSzPct val="80000"/>
-              <a:tabLst/>
-            </a:pPr>
-            <a:r>
-              <a:rPr lang="de-DE" sz="1800" kern="0" dirty="0" err="1">
-                <a:ea typeface="Arial Unicode MS" pitchFamily="34" charset="-128"/>
-                <a:cs typeface="Arial Unicode MS" pitchFamily="34" charset="-128"/>
-              </a:rPr>
-              <a:t>species</a:t>
-            </a:r>
-            <a:r>
-              <a:rPr lang="de-DE" sz="1800" kern="0" dirty="0">
-                <a:ea typeface="Arial Unicode MS" pitchFamily="34" charset="-128"/>
-                <a:cs typeface="Arial Unicode MS" pitchFamily="34" charset="-128"/>
-              </a:rPr>
-              <a:t>=</a:t>
-            </a:r>
-            <a:r>
-              <a:rPr lang="de-DE" sz="1800" kern="0" dirty="0" err="1">
-                <a:ea typeface="Arial Unicode MS" pitchFamily="34" charset="-128"/>
-                <a:cs typeface="Arial Unicode MS" pitchFamily="34" charset="-128"/>
-              </a:rPr>
-              <a:t>koopa</a:t>
-            </a:r>
-            <a:r>
-              <a:rPr lang="de-DE" sz="1800" kern="0" dirty="0">
-                <a:ea typeface="Arial Unicode MS" pitchFamily="34" charset="-128"/>
-                <a:cs typeface="Arial Unicode MS" pitchFamily="34" charset="-128"/>
-              </a:rPr>
-              <a:t> </a:t>
-            </a:r>
-            <a:r>
-              <a:rPr kumimoji="0" lang="de-DE" sz="1800" b="0" i="0" u="none" strike="noStrike" kern="0" cap="none" spc="0" normalizeH="0" baseline="0" noProof="0" dirty="0" err="1">
-                <a:ln>
-                  <a:noFill/>
-                </a:ln>
-                <a:effectLst/>
-                <a:uLnTx/>
-                <a:uFillTx/>
-                <a:ea typeface="Arial Unicode MS" pitchFamily="34" charset="-128"/>
-                <a:cs typeface="Arial Unicode MS" pitchFamily="34" charset="-128"/>
-              </a:rPr>
-              <a:t>generation</a:t>
-            </a:r>
-            <a:r>
-              <a:rPr kumimoji="0" lang="de-DE" sz="1800" b="0" i="0" u="none" strike="noStrike" kern="0" cap="none" spc="0" normalizeH="0" baseline="0" noProof="0" dirty="0">
-                <a:ln>
-                  <a:noFill/>
-                </a:ln>
-                <a:effectLst/>
-                <a:uLnTx/>
-                <a:uFillTx/>
-                <a:ea typeface="Arial Unicode MS" pitchFamily="34" charset="-128"/>
-                <a:cs typeface="Arial Unicode MS" pitchFamily="34" charset="-128"/>
-              </a:rPr>
-              <a:t>=</a:t>
-            </a:r>
-            <a:r>
-              <a:rPr kumimoji="0" lang="de-DE" sz="1800" b="0" i="0" u="none" strike="noStrike" kern="0" cap="none" spc="0" normalizeH="0" baseline="0" noProof="0" dirty="0" err="1">
-                <a:ln>
-                  <a:noFill/>
-                </a:ln>
-                <a:effectLst/>
-                <a:uLnTx/>
-                <a:uFillTx/>
-                <a:ea typeface="Arial Unicode MS" pitchFamily="34" charset="-128"/>
-                <a:cs typeface="Arial Unicode MS" pitchFamily="34" charset="-128"/>
-              </a:rPr>
-              <a:t>green-shell</a:t>
-            </a:r>
-            <a:endParaRPr kumimoji="0" lang="de-DE" sz="1800" b="0" i="0" u="none" strike="noStrike" kern="0" cap="none" spc="0" normalizeH="0" baseline="0" noProof="0" dirty="0">
-              <a:ln>
-                <a:noFill/>
-              </a:ln>
-              <a:effectLst/>
-              <a:uLnTx/>
-              <a:uFillTx/>
-              <a:ea typeface="Arial Unicode MS" pitchFamily="34" charset="-128"/>
-              <a:cs typeface="Arial Unicode MS" pitchFamily="34" charset="-128"/>
-            </a:endParaRPr>
-          </a:p>
-        </p:txBody>
-      </p:sp>
-      <p:pic>
-        <p:nvPicPr>
-          <p:cNvPr id="2" name="Group 24">
-            <a:extLst>
-              <a:ext uri="{FF2B5EF4-FFF2-40B4-BE49-F238E27FC236}">
-                <a16:creationId xmlns:a16="http://schemas.microsoft.com/office/drawing/2014/main" id="{4A27418C-429B-46C2-B944-E9D1AEFE0D0B}"/>
-              </a:ext>
-            </a:extLst>
-          </p:cNvPr>
-          <p:cNvPicPr>
-            <a:picLocks noChangeArrowheads="1"/>
-          </p:cNvPicPr>
-          <p:nvPr/>
-        </p:nvPicPr>
-        <p:blipFill>
-          <a:blip r:embed="rId5">
-            <a:extLst>
-              <a:ext uri="{28A0092B-C50C-407E-A947-70E740481C1C}">
-                <a14:useLocalDpi xmlns:a14="http://schemas.microsoft.com/office/drawing/2010/main" val="0"/>
-              </a:ext>
-            </a:extLst>
-          </a:blip>
-          <a:srcRect/>
-          <a:stretch>
-            <a:fillRect/>
-          </a:stretch>
-        </p:blipFill>
-        <p:spPr bwMode="auto">
-          <a:xfrm>
-            <a:off x="4962785" y="3045796"/>
-            <a:ext cx="1204079" cy="1458012"/>
-          </a:xfrm>
-          <a:prstGeom prst="rect">
-            <a:avLst/>
-          </a:prstGeom>
-          <a:noFill/>
-          <a:extLst>
-            <a:ext uri="{909E8E84-426E-40DD-AFC4-6F175D3DCCD1}">
-              <a14:hiddenFill xmlns:a14="http://schemas.microsoft.com/office/drawing/2010/main">
-                <a:solidFill>
-                  <a:srgbClr val="FFFFFF"/>
-                </a:solidFill>
-              </a14:hiddenFill>
-            </a:ext>
-          </a:extLst>
-        </p:spPr>
-      </p:pic>
-      <p:sp>
-        <p:nvSpPr>
-          <p:cNvPr id="4" name="TextBox 3">
-            <a:extLst>
-              <a:ext uri="{FF2B5EF4-FFF2-40B4-BE49-F238E27FC236}">
-                <a16:creationId xmlns:a16="http://schemas.microsoft.com/office/drawing/2014/main" id="{EEB740AE-0D93-4CD5-9C03-836C0FBFC6BF}"/>
-              </a:ext>
-            </a:extLst>
-          </p:cNvPr>
-          <p:cNvSpPr txBox="1"/>
-          <p:nvPr/>
-        </p:nvSpPr>
-        <p:spPr>
-          <a:xfrm>
-            <a:off x="7977313" y="729494"/>
-            <a:ext cx="1532447" cy="492443"/>
-          </a:xfrm>
-          <a:prstGeom prst="rect">
-            <a:avLst/>
-          </a:prstGeom>
-          <a:solidFill>
-            <a:srgbClr val="FFC000"/>
-          </a:solidFill>
-        </p:spPr>
-        <p:txBody>
-          <a:bodyPr wrap="square" lIns="0" tIns="0" rIns="0" bIns="0" rtlCol="0">
-            <a:spAutoFit/>
-          </a:bodyPr>
-          <a:lstStyle/>
-          <a:p>
-            <a:pPr fontAlgn="base">
-              <a:spcBef>
-                <a:spcPct val="50000"/>
-              </a:spcBef>
-              <a:spcAft>
-                <a:spcPct val="0"/>
-              </a:spcAft>
-              <a:buClr>
-                <a:srgbClr val="F0AB00"/>
-              </a:buClr>
-              <a:buSzPct val="80000"/>
-            </a:pPr>
-            <a:r>
-              <a:rPr lang="de-DE" sz="3200" kern="0" dirty="0">
-                <a:ea typeface="Arial Unicode MS" pitchFamily="34" charset="-128"/>
-                <a:cs typeface="Arial Unicode MS" pitchFamily="34" charset="-128"/>
-              </a:rPr>
-              <a:t>Original</a:t>
-            </a:r>
-          </a:p>
-        </p:txBody>
-      </p:sp>
-    </p:spTree>
-    <p:extLst>
-      <p:ext uri="{BB962C8B-B14F-4D97-AF65-F5344CB8AC3E}">
-        <p14:creationId xmlns:p14="http://schemas.microsoft.com/office/powerpoint/2010/main" val="3550958239"/>
-      </p:ext>
-    </p:extLst>
-  </p:cSld>
-  <p:clrMapOvr>
-    <a:masterClrMapping/>
-  </p:clrMapOvr>
-  <p:timing>
-    <p:tnLst>
-      <p:par>
-        <p:cTn id="1" dur="indefinite" restart="never" nodeType="tmRoot">
-          <p:childTnLst>
-            <p:seq concurrent="1" nextAc="seek">
-              <p:cTn id="2" dur="indefinite" nodeType="mainSeq">
-                <p:childTnLst>
-                  <p:par>
-                    <p:cTn id="3" fill="hold">
-                      <p:stCondLst>
-                        <p:cond delay="indefinite"/>
-                      </p:stCondLst>
-                      <p:childTnLst>
-                        <p:par>
-                          <p:cTn id="4" fill="hold">
-                            <p:stCondLst>
-                              <p:cond delay="0"/>
-                            </p:stCondLst>
-                            <p:childTnLst>
-                              <p:par>
-                                <p:cTn id="5" presetID="1" presetClass="entr" presetSubtype="0" fill="hold" grpId="0" nodeType="clickEffect">
-                                  <p:stCondLst>
-                                    <p:cond delay="0"/>
-                                  </p:stCondLst>
-                                  <p:childTnLst>
-                                    <p:set>
-                                      <p:cBhvr>
-                                        <p:cTn id="6" dur="1" fill="hold">
-                                          <p:stCondLst>
-                                            <p:cond delay="0"/>
-                                          </p:stCondLst>
-                                        </p:cTn>
-                                        <p:tgtEl>
-                                          <p:spTgt spid="8"/>
-                                        </p:tgtEl>
-                                        <p:attrNameLst>
-                                          <p:attrName>style.visibility</p:attrName>
-                                        </p:attrNameLst>
-                                      </p:cBhvr>
-                                      <p:to>
-                                        <p:strVal val="visible"/>
-                                      </p:to>
-                                    </p:set>
-                                  </p:childTnLst>
-                                </p:cTn>
-                              </p:par>
-                              <p:par>
-                                <p:cTn id="7" presetID="1" presetClass="entr" presetSubtype="0" fill="hold" grpId="0" nodeType="withEffect">
-                                  <p:stCondLst>
-                                    <p:cond delay="0"/>
-                                  </p:stCondLst>
-                                  <p:childTnLst>
-                                    <p:set>
-                                      <p:cBhvr>
-                                        <p:cTn id="8" dur="1" fill="hold">
-                                          <p:stCondLst>
-                                            <p:cond delay="0"/>
-                                          </p:stCondLst>
-                                        </p:cTn>
-                                        <p:tgtEl>
-                                          <p:spTgt spid="20"/>
-                                        </p:tgtEl>
-                                        <p:attrNameLst>
-                                          <p:attrName>style.visibility</p:attrName>
-                                        </p:attrNameLst>
-                                      </p:cBhvr>
-                                      <p:to>
-                                        <p:strVal val="visible"/>
-                                      </p:to>
-                                    </p:set>
-                                  </p:childTnLst>
-                                </p:cTn>
-                              </p:par>
-                              <p:par>
-                                <p:cTn id="9" presetID="1" presetClass="entr" presetSubtype="0" fill="hold" grpId="0" nodeType="withEffect">
-                                  <p:stCondLst>
-                                    <p:cond delay="0"/>
-                                  </p:stCondLst>
-                                  <p:childTnLst>
-                                    <p:set>
-                                      <p:cBhvr>
-                                        <p:cTn id="10" dur="1" fill="hold">
-                                          <p:stCondLst>
-                                            <p:cond delay="0"/>
-                                          </p:stCondLst>
-                                        </p:cTn>
-                                        <p:tgtEl>
-                                          <p:spTgt spid="24"/>
-                                        </p:tgtEl>
-                                        <p:attrNameLst>
-                                          <p:attrName>style.visibility</p:attrName>
-                                        </p:attrNameLst>
-                                      </p:cBhvr>
-                                      <p:to>
-                                        <p:strVal val="visible"/>
-                                      </p:to>
-                                    </p:set>
-                                  </p:childTnLst>
-                                </p:cTn>
-                              </p:par>
-                            </p:childTnLst>
-                          </p:cTn>
-                        </p:par>
-                      </p:childTnLst>
-                    </p:cTn>
-                  </p:par>
-                  <p:par>
-                    <p:cTn id="11" fill="hold">
-                      <p:stCondLst>
-                        <p:cond delay="indefinite"/>
-                      </p:stCondLst>
-                      <p:childTnLst>
-                        <p:par>
-                          <p:cTn id="12" fill="hold">
-                            <p:stCondLst>
-                              <p:cond delay="0"/>
-                            </p:stCondLst>
-                            <p:childTnLst>
-                              <p:par>
-                                <p:cTn id="13" presetID="1" presetClass="entr" presetSubtype="0" fill="hold" grpId="0" nodeType="clickEffect">
-                                  <p:stCondLst>
-                                    <p:cond delay="0"/>
-                                  </p:stCondLst>
-                                  <p:childTnLst>
-                                    <p:set>
-                                      <p:cBhvr>
-                                        <p:cTn id="14" dur="1" fill="hold">
-                                          <p:stCondLst>
-                                            <p:cond delay="0"/>
-                                          </p:stCondLst>
-                                        </p:cTn>
-                                        <p:tgtEl>
-                                          <p:spTgt spid="21"/>
-                                        </p:tgtEl>
-                                        <p:attrNameLst>
-                                          <p:attrName>style.visibility</p:attrName>
-                                        </p:attrNameLst>
-                                      </p:cBhvr>
-                                      <p:to>
-                                        <p:strVal val="visible"/>
-                                      </p:to>
-                                    </p:set>
-                                  </p:childTnLst>
-                                </p:cTn>
-                              </p:par>
-                            </p:childTnLst>
-                          </p:cTn>
-                        </p:par>
-                      </p:childTnLst>
-                    </p:cTn>
-                  </p:par>
-                  <p:par>
-                    <p:cTn id="15" fill="hold">
-                      <p:stCondLst>
-                        <p:cond delay="indefinite"/>
-                      </p:stCondLst>
-                      <p:childTnLst>
-                        <p:par>
-                          <p:cTn id="16" fill="hold">
-                            <p:stCondLst>
-                              <p:cond delay="0"/>
-                            </p:stCondLst>
-                            <p:childTnLst>
-                              <p:par>
-                                <p:cTn id="17" presetID="1" presetClass="entr" presetSubtype="0" fill="hold" grpId="0" nodeType="clickEffect">
-                                  <p:stCondLst>
-                                    <p:cond delay="0"/>
-                                  </p:stCondLst>
-                                  <p:childTnLst>
-                                    <p:set>
-                                      <p:cBhvr>
-                                        <p:cTn id="18" dur="1" fill="hold">
-                                          <p:stCondLst>
-                                            <p:cond delay="0"/>
-                                          </p:stCondLst>
-                                        </p:cTn>
-                                        <p:tgtEl>
-                                          <p:spTgt spid="23"/>
-                                        </p:tgtEl>
-                                        <p:attrNameLst>
-                                          <p:attrName>style.visibility</p:attrName>
-                                        </p:attrNameLst>
-                                      </p:cBhvr>
-                                      <p:to>
-                                        <p:strVal val="visible"/>
-                                      </p:to>
-                                    </p:set>
-                                  </p:childTnLst>
-                                </p:cTn>
-                              </p:par>
-                              <p:par>
-                                <p:cTn id="19" presetID="1" presetClass="entr" presetSubtype="0" fill="hold" nodeType="withEffect">
-                                  <p:stCondLst>
-                                    <p:cond delay="0"/>
-                                  </p:stCondLst>
-                                  <p:childTnLst>
-                                    <p:set>
-                                      <p:cBhvr>
-                                        <p:cTn id="20" dur="1" fill="hold">
-                                          <p:stCondLst>
-                                            <p:cond delay="0"/>
-                                          </p:stCondLst>
-                                        </p:cTn>
-                                        <p:tgtEl>
-                                          <p:spTgt spid="6"/>
-                                        </p:tgtEl>
-                                        <p:attrNameLst>
-                                          <p:attrName>style.visibility</p:attrName>
-                                        </p:attrNameLst>
-                                      </p:cBhvr>
-                                      <p:to>
-                                        <p:strVal val="visible"/>
-                                      </p:to>
-                                    </p:set>
-                                  </p:childTnLst>
-                                </p:cTn>
-                              </p:par>
-                              <p:par>
-                                <p:cTn id="21" presetID="1" presetClass="entr" presetSubtype="0" fill="hold" nodeType="withEffect">
-                                  <p:stCondLst>
-                                    <p:cond delay="0"/>
-                                  </p:stCondLst>
-                                  <p:childTnLst>
-                                    <p:set>
-                                      <p:cBhvr>
-                                        <p:cTn id="22" dur="1" fill="hold">
-                                          <p:stCondLst>
-                                            <p:cond delay="0"/>
-                                          </p:stCondLst>
-                                        </p:cTn>
-                                        <p:tgtEl>
-                                          <p:spTgt spid="1026"/>
-                                        </p:tgtEl>
-                                        <p:attrNameLst>
-                                          <p:attrName>style.visibility</p:attrName>
-                                        </p:attrNameLst>
-                                      </p:cBhvr>
-                                      <p:to>
-                                        <p:strVal val="visible"/>
-                                      </p:to>
-                                    </p:set>
-                                  </p:childTnLst>
-                                </p:cTn>
-                              </p:par>
-                              <p:par>
-                                <p:cTn id="23" presetID="1" presetClass="entr" presetSubtype="0" fill="hold" nodeType="withEffect">
-                                  <p:stCondLst>
-                                    <p:cond delay="0"/>
-                                  </p:stCondLst>
-                                  <p:childTnLst>
-                                    <p:set>
-                                      <p:cBhvr>
-                                        <p:cTn id="24" dur="1" fill="hold">
-                                          <p:stCondLst>
-                                            <p:cond delay="0"/>
-                                          </p:stCondLst>
-                                        </p:cTn>
-                                        <p:tgtEl>
-                                          <p:spTgt spid="7"/>
-                                        </p:tgtEl>
-                                        <p:attrNameLst>
-                                          <p:attrName>style.visibility</p:attrName>
-                                        </p:attrNameLst>
-                                      </p:cBhvr>
-                                      <p:to>
-                                        <p:strVal val="visible"/>
-                                      </p:to>
-                                    </p:set>
-                                  </p:childTnLst>
-                                </p:cTn>
-                              </p:par>
-                              <p:par>
-                                <p:cTn id="25" presetID="1" presetClass="entr" presetSubtype="0" fill="hold" grpId="0" nodeType="withEffect">
-                                  <p:stCondLst>
-                                    <p:cond delay="0"/>
-                                  </p:stCondLst>
-                                  <p:childTnLst>
-                                    <p:set>
-                                      <p:cBhvr>
-                                        <p:cTn id="26" dur="1" fill="hold">
-                                          <p:stCondLst>
-                                            <p:cond delay="0"/>
-                                          </p:stCondLst>
-                                        </p:cTn>
-                                        <p:tgtEl>
-                                          <p:spTgt spid="22"/>
-                                        </p:tgtEl>
-                                        <p:attrNameLst>
-                                          <p:attrName>style.visibility</p:attrName>
-                                        </p:attrNameLst>
-                                      </p:cBhvr>
-                                      <p:to>
-                                        <p:strVal val="visible"/>
-                                      </p:to>
-                                    </p:set>
-                                  </p:childTnLst>
-                                </p:cTn>
-                              </p:par>
-                            </p:childTnLst>
-                          </p:cTn>
-                        </p:par>
-                      </p:childTnLst>
-                    </p:cTn>
-                  </p:par>
-                </p:childTnLst>
-              </p:cTn>
-              <p:prevCondLst>
-                <p:cond evt="onPrev" delay="0">
-                  <p:tgtEl>
-                    <p:sldTgt/>
-                  </p:tgtEl>
-                </p:cond>
-              </p:prevCondLst>
-              <p:nextCondLst>
-                <p:cond evt="onNext" delay="0">
-                  <p:tgtEl>
-                    <p:sldTgt/>
-                  </p:tgtEl>
-                </p:cond>
-              </p:nextCondLst>
-            </p:seq>
-          </p:childTnLst>
-        </p:cTn>
-      </p:par>
-    </p:tnLst>
-    <p:bldLst>
-      <p:bldP spid="8" grpId="0" animBg="1"/>
-      <p:bldP spid="21" grpId="0" animBg="1"/>
-      <p:bldP spid="22" grpId="0" animBg="1"/>
-      <p:bldP spid="20" grpId="0" animBg="1"/>
-      <p:bldP spid="24" grpId="0" animBg="1"/>
-      <p:bldP spid="23" grpId="0" animBg="1"/>
-    </p:bldLst>
-  </p:timing>
-</p:sld>
-</file>
-
-<file path=ppt/slides/slide7.xml><?xml version="1.0" encoding="utf-8"?>
-<p:sld xmlns:a="http://schemas.openxmlformats.org/drawingml/2006/main" xmlns:r="http://schemas.openxmlformats.org/officeDocument/2006/relationships" xmlns:p="http://schemas.openxmlformats.org/presentationml/2006/main">
-  <p:cSld>
-    <p:spTree>
-      <p:nvGrpSpPr>
-        <p:cNvPr id="1" name=""/>
-        <p:cNvGrpSpPr/>
-        <p:nvPr/>
-      </p:nvGrpSpPr>
-      <p:grpSpPr>
-        <a:xfrm>
-          <a:off x="0" y="0"/>
-          <a:ext cx="0" cy="0"/>
-          <a:chOff x="0" y="0"/>
-          <a:chExt cx="0" cy="0"/>
-        </a:xfrm>
-      </p:grpSpPr>
-      <p:sp>
-        <p:nvSpPr>
-          <p:cNvPr id="3" name="Title 2">
-            <a:extLst>
-              <a:ext uri="{FF2B5EF4-FFF2-40B4-BE49-F238E27FC236}">
-                <a16:creationId xmlns:a16="http://schemas.microsoft.com/office/drawing/2014/main" id="{759B34B4-C129-4847-964B-4D41E2982158}"/>
-              </a:ext>
-            </a:extLst>
-          </p:cNvPr>
-          <p:cNvSpPr>
-            <a:spLocks noGrp="1"/>
-          </p:cNvSpPr>
-          <p:nvPr>
-            <p:ph type="title"/>
-          </p:nvPr>
-        </p:nvSpPr>
-        <p:spPr/>
-        <p:txBody>
-          <a:bodyPr/>
-          <a:lstStyle/>
-          <a:p>
-            <a:r>
-              <a:rPr lang="en-US" dirty="0"/>
-              <a:t>Deployments</a:t>
-            </a:r>
-          </a:p>
-        </p:txBody>
-      </p:sp>
-      <p:pic>
-        <p:nvPicPr>
-          <p:cNvPr id="1026" name="Picture 2" descr="https://vignette.wikia.nocookie.net/nintendo/images/8/83/KoopaNSMB.png/revision/latest?cb=20110724132501&amp;path-prefix=en">
-            <a:extLst>
-              <a:ext uri="{FF2B5EF4-FFF2-40B4-BE49-F238E27FC236}">
-                <a16:creationId xmlns:a16="http://schemas.microsoft.com/office/drawing/2014/main" id="{DD6E3BCC-6AF7-43FC-8693-FDBFC61D5D1A}"/>
-              </a:ext>
-            </a:extLst>
-          </p:cNvPr>
-          <p:cNvPicPr>
-            <a:picLocks noChangeAspect="1" noChangeArrowheads="1"/>
-          </p:cNvPicPr>
-          <p:nvPr/>
-        </p:nvPicPr>
-        <p:blipFill>
-          <a:blip r:embed="rId3">
-            <a:extLst>
-              <a:ext uri="{28A0092B-C50C-407E-A947-70E740481C1C}">
-                <a14:useLocalDpi xmlns:a14="http://schemas.microsoft.com/office/drawing/2010/main" val="0"/>
-              </a:ext>
-            </a:extLst>
-          </a:blip>
-          <a:srcRect/>
-          <a:stretch>
-            <a:fillRect/>
-          </a:stretch>
-        </p:blipFill>
-        <p:spPr bwMode="auto">
-          <a:xfrm>
-            <a:off x="4972156" y="4558083"/>
-            <a:ext cx="1025020" cy="1630972"/>
-          </a:xfrm>
-          <a:prstGeom prst="rect">
-            <a:avLst/>
-          </a:prstGeom>
-          <a:noFill/>
-          <a:extLst>
-            <a:ext uri="{909E8E84-426E-40DD-AFC4-6F175D3DCCD1}">
-              <a14:hiddenFill xmlns:a14="http://schemas.microsoft.com/office/drawing/2010/main">
-                <a:solidFill>
-                  <a:srgbClr val="FFFFFF"/>
-                </a:solidFill>
-              </a14:hiddenFill>
-            </a:ext>
-          </a:extLst>
-        </p:spPr>
-      </p:pic>
-      <p:pic>
-        <p:nvPicPr>
-          <p:cNvPr id="6" name="Picture 2" descr="https://vignette.wikia.nocookie.net/nintendo/images/8/83/KoopaNSMB.png/revision/latest?cb=20110724132501&amp;path-prefix=en">
-            <a:extLst>
-              <a:ext uri="{FF2B5EF4-FFF2-40B4-BE49-F238E27FC236}">
-                <a16:creationId xmlns:a16="http://schemas.microsoft.com/office/drawing/2014/main" id="{44DF2202-C15C-4F6D-A36C-C7723B0C1E9F}"/>
-              </a:ext>
-            </a:extLst>
-          </p:cNvPr>
-          <p:cNvPicPr>
-            <a:picLocks noChangeAspect="1" noChangeArrowheads="1"/>
-          </p:cNvPicPr>
-          <p:nvPr/>
-        </p:nvPicPr>
-        <p:blipFill>
-          <a:blip r:embed="rId3">
-            <a:extLst>
-              <a:ext uri="{28A0092B-C50C-407E-A947-70E740481C1C}">
-                <a14:useLocalDpi xmlns:a14="http://schemas.microsoft.com/office/drawing/2010/main" val="0"/>
-              </a:ext>
-            </a:extLst>
-          </a:blip>
-          <a:srcRect/>
-          <a:stretch>
-            <a:fillRect/>
-          </a:stretch>
-        </p:blipFill>
-        <p:spPr bwMode="auto">
-          <a:xfrm>
-            <a:off x="3823294" y="4539768"/>
-            <a:ext cx="1025020" cy="1630972"/>
-          </a:xfrm>
-          <a:prstGeom prst="rect">
-            <a:avLst/>
-          </a:prstGeom>
-          <a:noFill/>
-          <a:extLst>
-            <a:ext uri="{909E8E84-426E-40DD-AFC4-6F175D3DCCD1}">
-              <a14:hiddenFill xmlns:a14="http://schemas.microsoft.com/office/drawing/2010/main">
-                <a:solidFill>
-                  <a:srgbClr val="FFFFFF"/>
-                </a:solidFill>
-              </a14:hiddenFill>
-            </a:ext>
-          </a:extLst>
-        </p:spPr>
-      </p:pic>
-      <p:pic>
-        <p:nvPicPr>
-          <p:cNvPr id="7" name="Picture 2" descr="https://vignette.wikia.nocookie.net/nintendo/images/8/83/KoopaNSMB.png/revision/latest?cb=20110724132501&amp;path-prefix=en">
-            <a:extLst>
-              <a:ext uri="{FF2B5EF4-FFF2-40B4-BE49-F238E27FC236}">
-                <a16:creationId xmlns:a16="http://schemas.microsoft.com/office/drawing/2014/main" id="{DBA2E3A6-4169-47A9-ABDE-8180C82525E4}"/>
-              </a:ext>
-            </a:extLst>
-          </p:cNvPr>
-          <p:cNvPicPr>
-            <a:picLocks noChangeAspect="1" noChangeArrowheads="1"/>
-          </p:cNvPicPr>
-          <p:nvPr/>
-        </p:nvPicPr>
-        <p:blipFill>
-          <a:blip r:embed="rId3">
-            <a:extLst>
-              <a:ext uri="{28A0092B-C50C-407E-A947-70E740481C1C}">
-                <a14:useLocalDpi xmlns:a14="http://schemas.microsoft.com/office/drawing/2010/main" val="0"/>
-              </a:ext>
-            </a:extLst>
-          </a:blip>
-          <a:srcRect/>
-          <a:stretch>
-            <a:fillRect/>
-          </a:stretch>
-        </p:blipFill>
-        <p:spPr bwMode="auto">
-          <a:xfrm>
-            <a:off x="6121018" y="4558083"/>
-            <a:ext cx="1025020" cy="1630972"/>
-          </a:xfrm>
-          <a:prstGeom prst="rect">
-            <a:avLst/>
-          </a:prstGeom>
-          <a:noFill/>
-          <a:extLst>
-            <a:ext uri="{909E8E84-426E-40DD-AFC4-6F175D3DCCD1}">
-              <a14:hiddenFill xmlns:a14="http://schemas.microsoft.com/office/drawing/2010/main">
-                <a:solidFill>
-                  <a:srgbClr val="FFFFFF"/>
-                </a:solidFill>
-              </a14:hiddenFill>
-            </a:ext>
-          </a:extLst>
-        </p:spPr>
-      </p:pic>
-      <p:sp>
-        <p:nvSpPr>
-          <p:cNvPr id="8" name="Speech Bubble: Rectangle 7">
-            <a:extLst>
-              <a:ext uri="{FF2B5EF4-FFF2-40B4-BE49-F238E27FC236}">
-                <a16:creationId xmlns:a16="http://schemas.microsoft.com/office/drawing/2014/main" id="{CA8F3B21-6614-422C-82D9-FAB987B9BE1E}"/>
-              </a:ext>
-            </a:extLst>
-          </p:cNvPr>
-          <p:cNvSpPr/>
-          <p:nvPr/>
-        </p:nvSpPr>
-        <p:spPr bwMode="gray">
-          <a:xfrm>
-            <a:off x="8347032" y="1551890"/>
-            <a:ext cx="3326171" cy="1072511"/>
-          </a:xfrm>
-          <a:prstGeom prst="wedgeRectCallout">
-            <a:avLst>
-              <a:gd name="adj1" fmla="val -88824"/>
-              <a:gd name="adj2" fmla="val -8534"/>
-            </a:avLst>
-          </a:prstGeom>
-          <a:ln>
-            <a:headEnd/>
-            <a:tailEnd/>
-          </a:ln>
-        </p:spPr>
-        <p:style>
-          <a:lnRef idx="2">
-            <a:schemeClr val="accent5"/>
-          </a:lnRef>
-          <a:fillRef idx="1">
-            <a:schemeClr val="lt1"/>
-          </a:fillRef>
-          <a:effectRef idx="0">
-            <a:schemeClr val="accent5"/>
-          </a:effectRef>
-          <a:fontRef idx="minor">
-            <a:schemeClr val="dk1"/>
-          </a:fontRef>
-        </p:style>
-        <p:txBody>
-          <a:bodyPr lIns="90000" tIns="72000" rIns="90000" bIns="72000" rtlCol="0" anchor="ctr"/>
-          <a:lstStyle/>
-          <a:p>
-            <a:pPr marL="0" marR="0" lvl="0" indent="0" algn="ctr" defTabSz="914400" rtl="0" eaLnBrk="1" fontAlgn="base" latinLnBrk="0" hangingPunct="1">
-              <a:lnSpc>
-                <a:spcPct val="100000"/>
-              </a:lnSpc>
-              <a:spcBef>
-                <a:spcPct val="50000"/>
-              </a:spcBef>
-              <a:spcAft>
-                <a:spcPct val="0"/>
-              </a:spcAft>
-              <a:buClr>
-                <a:srgbClr val="F0AB00"/>
-              </a:buClr>
-              <a:buSzPct val="80000"/>
-              <a:buFontTx/>
-              <a:buNone/>
-              <a:tabLst/>
-              <a:defRPr/>
-            </a:pPr>
-            <a:r>
-              <a:rPr kumimoji="0" lang="en-US" sz="1800" b="1" i="0" u="none" strike="noStrike" kern="0" cap="none" spc="0" normalizeH="0" baseline="0" noProof="0" dirty="0">
-                <a:ln>
-                  <a:noFill/>
-                </a:ln>
-                <a:solidFill>
-                  <a:srgbClr val="000000"/>
-                </a:solidFill>
-                <a:effectLst/>
-                <a:uLnTx/>
-                <a:uFillTx/>
-                <a:latin typeface="Arial"/>
-                <a:ea typeface="Arial Unicode MS" pitchFamily="34" charset="-128"/>
-                <a:cs typeface="Arial Unicode MS" pitchFamily="34" charset="-128"/>
-              </a:rPr>
-              <a:t>Deployment</a:t>
-            </a:r>
-            <a:r>
-              <a:rPr kumimoji="0" lang="en-US" sz="1800" b="0" i="0" u="none" strike="noStrike" kern="0" cap="none" spc="0" normalizeH="0" baseline="0" noProof="0" dirty="0">
-                <a:ln>
-                  <a:noFill/>
-                </a:ln>
-                <a:solidFill>
-                  <a:srgbClr val="000000"/>
-                </a:solidFill>
-                <a:effectLst/>
-                <a:uLnTx/>
-                <a:uFillTx/>
-                <a:latin typeface="Arial"/>
-                <a:ea typeface="Arial Unicode MS" pitchFamily="34" charset="-128"/>
-                <a:cs typeface="Arial Unicode MS" pitchFamily="34" charset="-128"/>
-              </a:rPr>
-              <a:t> defines replica count, used image and more</a:t>
-            </a:r>
-          </a:p>
-        </p:txBody>
-      </p:sp>
-      <p:pic>
-        <p:nvPicPr>
-          <p:cNvPr id="1032" name="Picture 8" descr="Related image">
-            <a:extLst>
-              <a:ext uri="{FF2B5EF4-FFF2-40B4-BE49-F238E27FC236}">
-                <a16:creationId xmlns:a16="http://schemas.microsoft.com/office/drawing/2014/main" id="{0274FF14-135E-47F9-872A-76CDB252063E}"/>
-              </a:ext>
-            </a:extLst>
-          </p:cNvPr>
-          <p:cNvPicPr>
-            <a:picLocks noChangeAspect="1" noChangeArrowheads="1"/>
-          </p:cNvPicPr>
-          <p:nvPr/>
-        </p:nvPicPr>
-        <p:blipFill>
-          <a:blip r:embed="rId4">
-            <a:extLst>
-              <a:ext uri="{28A0092B-C50C-407E-A947-70E740481C1C}">
-                <a14:useLocalDpi xmlns:a14="http://schemas.microsoft.com/office/drawing/2010/main" val="0"/>
-              </a:ext>
-            </a:extLst>
-          </a:blip>
-          <a:srcRect/>
-          <a:stretch>
-            <a:fillRect/>
-          </a:stretch>
-        </p:blipFill>
-        <p:spPr bwMode="auto">
-          <a:xfrm>
-            <a:off x="4240850" y="759773"/>
-            <a:ext cx="2647950" cy="2143125"/>
-          </a:xfrm>
-          <a:prstGeom prst="rect">
-            <a:avLst/>
-          </a:prstGeom>
-          <a:gradFill>
-            <a:gsLst>
-              <a:gs pos="0">
-                <a:schemeClr val="accent3">
-                  <a:lumMod val="20000"/>
-                  <a:lumOff val="80000"/>
-                </a:schemeClr>
-              </a:gs>
-              <a:gs pos="50000">
-                <a:schemeClr val="accent3">
-                  <a:lumMod val="20000"/>
-                  <a:lumOff val="80000"/>
-                </a:schemeClr>
-              </a:gs>
-              <a:gs pos="100000">
-                <a:schemeClr val="bg1"/>
-              </a:gs>
-            </a:gsLst>
-            <a:lin ang="5400000" scaled="1"/>
-          </a:gradFill>
-          <a:ln>
-            <a:solidFill>
-              <a:schemeClr val="tx1"/>
-            </a:solidFill>
-          </a:ln>
-          <a:extLst/>
         </p:spPr>
       </p:pic>
       <p:sp>
@@ -31836,8 +28886,8 @@
 </p:sld>
 </file>
 
-<file path=ppt/slides/slide8.xml><?xml version="1.0" encoding="utf-8"?>
-<p:sld xmlns:a="http://schemas.openxmlformats.org/drawingml/2006/main" xmlns:r="http://schemas.openxmlformats.org/officeDocument/2006/relationships" xmlns:p="http://schemas.openxmlformats.org/presentationml/2006/main" show="0">
+<file path=ppt/slides/slide7.xml><?xml version="1.0" encoding="utf-8"?>
+<p:sld xmlns:a="http://schemas.openxmlformats.org/drawingml/2006/main" xmlns:r="http://schemas.openxmlformats.org/officeDocument/2006/relationships" xmlns:p="http://schemas.openxmlformats.org/presentationml/2006/main">
   <p:cSld>
     <p:spTree>
       <p:nvGrpSpPr>
@@ -32087,1828 +29137,6 @@
               <a:schemeClr val="tx1"/>
             </a:solidFill>
           </a:ln>
-          <a:extLst/>
-        </p:spPr>
-      </p:pic>
-      <p:pic>
-        <p:nvPicPr>
-          <p:cNvPr id="1034" name="Picture 10" descr="Image result for nintendo koopa troopa">
-            <a:extLst>
-              <a:ext uri="{FF2B5EF4-FFF2-40B4-BE49-F238E27FC236}">
-                <a16:creationId xmlns:a16="http://schemas.microsoft.com/office/drawing/2014/main" id="{C7A9084B-CD19-42E8-80F8-1AB06EB70208}"/>
-              </a:ext>
-            </a:extLst>
-          </p:cNvPr>
-          <p:cNvPicPr>
-            <a:picLocks noChangeAspect="1" noChangeArrowheads="1"/>
-          </p:cNvPicPr>
-          <p:nvPr/>
-        </p:nvPicPr>
-        <p:blipFill>
-          <a:blip r:embed="rId5">
-            <a:extLst>
-              <a:ext uri="{28A0092B-C50C-407E-A947-70E740481C1C}">
-                <a14:useLocalDpi xmlns:a14="http://schemas.microsoft.com/office/drawing/2010/main" val="0"/>
-              </a:ext>
-            </a:extLst>
-          </a:blip>
-          <a:srcRect/>
-          <a:stretch>
-            <a:fillRect/>
-          </a:stretch>
-        </p:blipFill>
-        <p:spPr bwMode="auto">
-          <a:xfrm>
-            <a:off x="6008339" y="4558083"/>
-            <a:ext cx="1275990" cy="1629787"/>
-          </a:xfrm>
-          <a:prstGeom prst="rect">
-            <a:avLst/>
-          </a:prstGeom>
-          <a:noFill/>
-          <a:extLst>
-            <a:ext uri="{909E8E84-426E-40DD-AFC4-6F175D3DCCD1}">
-              <a14:hiddenFill xmlns:a14="http://schemas.microsoft.com/office/drawing/2010/main">
-                <a:solidFill>
-                  <a:srgbClr val="FFFFFF"/>
-                </a:solidFill>
-              </a14:hiddenFill>
-            </a:ext>
-          </a:extLst>
-        </p:spPr>
-      </p:pic>
-      <p:sp>
-        <p:nvSpPr>
-          <p:cNvPr id="23" name="Speech Bubble: Rectangle 22">
-            <a:extLst>
-              <a:ext uri="{FF2B5EF4-FFF2-40B4-BE49-F238E27FC236}">
-                <a16:creationId xmlns:a16="http://schemas.microsoft.com/office/drawing/2014/main" id="{CCFF3E12-3E2C-4608-A8F2-7D4BB6305DFA}"/>
-              </a:ext>
-            </a:extLst>
-          </p:cNvPr>
-          <p:cNvSpPr/>
-          <p:nvPr/>
-        </p:nvSpPr>
-        <p:spPr bwMode="gray">
-          <a:xfrm>
-            <a:off x="6962606" y="1432563"/>
-            <a:ext cx="3164604" cy="715415"/>
-          </a:xfrm>
-          <a:prstGeom prst="wedgeRectCallout">
-            <a:avLst>
-              <a:gd name="adj1" fmla="val -70151"/>
-              <a:gd name="adj2" fmla="val -3711"/>
-            </a:avLst>
-          </a:prstGeom>
-          <a:ln>
-            <a:headEnd/>
-            <a:tailEnd/>
-          </a:ln>
-        </p:spPr>
-        <p:style>
-          <a:lnRef idx="2">
-            <a:schemeClr val="accent5"/>
-          </a:lnRef>
-          <a:fillRef idx="1">
-            <a:schemeClr val="lt1"/>
-          </a:fillRef>
-          <a:effectRef idx="0">
-            <a:schemeClr val="accent5"/>
-          </a:effectRef>
-          <a:fontRef idx="minor">
-            <a:schemeClr val="dk1"/>
-          </a:fontRef>
-        </p:style>
-        <p:txBody>
-          <a:bodyPr lIns="90000" tIns="72000" rIns="90000" bIns="72000" rtlCol="0" anchor="ctr"/>
-          <a:lstStyle/>
-          <a:p>
-            <a:pPr marR="0" algn="ctr" defTabSz="914400" eaLnBrk="1" fontAlgn="base" latinLnBrk="0" hangingPunct="1">
-              <a:lnSpc>
-                <a:spcPct val="100000"/>
-              </a:lnSpc>
-              <a:spcBef>
-                <a:spcPct val="50000"/>
-              </a:spcBef>
-              <a:spcAft>
-                <a:spcPct val="0"/>
-              </a:spcAft>
-              <a:buClr>
-                <a:srgbClr val="F0AB00"/>
-              </a:buClr>
-              <a:buSzPct val="80000"/>
-              <a:tabLst/>
-            </a:pPr>
-            <a:r>
-              <a:rPr kumimoji="0" lang="en-US" sz="1800" b="0" i="0" u="none" strike="noStrike" kern="0" cap="none" spc="0" normalizeH="0" baseline="0" noProof="0" dirty="0">
-                <a:ln>
-                  <a:noFill/>
-                </a:ln>
-                <a:effectLst/>
-                <a:uLnTx/>
-                <a:uFillTx/>
-                <a:ea typeface="Arial Unicode MS" pitchFamily="34" charset="-128"/>
-                <a:cs typeface="Arial Unicode MS" pitchFamily="34" charset="-128"/>
-              </a:rPr>
-              <a:t>Deployment initiates update</a:t>
-            </a:r>
-          </a:p>
-        </p:txBody>
-      </p:sp>
-      <p:pic>
-        <p:nvPicPr>
-          <p:cNvPr id="29" name="Picture 10" descr="Image result for nintendo koopa troopa">
-            <a:extLst>
-              <a:ext uri="{FF2B5EF4-FFF2-40B4-BE49-F238E27FC236}">
-                <a16:creationId xmlns:a16="http://schemas.microsoft.com/office/drawing/2014/main" id="{14AB6E26-1E27-4397-AC7D-F683BD970F14}"/>
-              </a:ext>
-            </a:extLst>
-          </p:cNvPr>
-          <p:cNvPicPr>
-            <a:picLocks noChangeAspect="1" noChangeArrowheads="1"/>
-          </p:cNvPicPr>
-          <p:nvPr/>
-        </p:nvPicPr>
-        <p:blipFill>
-          <a:blip r:embed="rId5">
-            <a:extLst>
-              <a:ext uri="{28A0092B-C50C-407E-A947-70E740481C1C}">
-                <a14:useLocalDpi xmlns:a14="http://schemas.microsoft.com/office/drawing/2010/main" val="0"/>
-              </a:ext>
-            </a:extLst>
-          </a:blip>
-          <a:srcRect/>
-          <a:stretch>
-            <a:fillRect/>
-          </a:stretch>
-        </p:blipFill>
-        <p:spPr bwMode="auto">
-          <a:xfrm>
-            <a:off x="7268918" y="4539768"/>
-            <a:ext cx="1275990" cy="1629787"/>
-          </a:xfrm>
-          <a:prstGeom prst="rect">
-            <a:avLst/>
-          </a:prstGeom>
-          <a:noFill/>
-          <a:extLst>
-            <a:ext uri="{909E8E84-426E-40DD-AFC4-6F175D3DCCD1}">
-              <a14:hiddenFill xmlns:a14="http://schemas.microsoft.com/office/drawing/2010/main">
-                <a:solidFill>
-                  <a:srgbClr val="FFFFFF"/>
-                </a:solidFill>
-              </a14:hiddenFill>
-            </a:ext>
-          </a:extLst>
-        </p:spPr>
-      </p:pic>
-      <p:pic>
-        <p:nvPicPr>
-          <p:cNvPr id="30" name="Picture 10" descr="Image result for nintendo koopa troopa">
-            <a:extLst>
-              <a:ext uri="{FF2B5EF4-FFF2-40B4-BE49-F238E27FC236}">
-                <a16:creationId xmlns:a16="http://schemas.microsoft.com/office/drawing/2014/main" id="{8DABBEEF-1866-4329-8194-0A8140E36E1D}"/>
-              </a:ext>
-            </a:extLst>
-          </p:cNvPr>
-          <p:cNvPicPr>
-            <a:picLocks noChangeAspect="1" noChangeArrowheads="1"/>
-          </p:cNvPicPr>
-          <p:nvPr/>
-        </p:nvPicPr>
-        <p:blipFill>
-          <a:blip r:embed="rId5">
-            <a:extLst>
-              <a:ext uri="{28A0092B-C50C-407E-A947-70E740481C1C}">
-                <a14:useLocalDpi xmlns:a14="http://schemas.microsoft.com/office/drawing/2010/main" val="0"/>
-              </a:ext>
-            </a:extLst>
-          </a:blip>
-          <a:srcRect/>
-          <a:stretch>
-            <a:fillRect/>
-          </a:stretch>
-        </p:blipFill>
-        <p:spPr bwMode="auto">
-          <a:xfrm>
-            <a:off x="8529496" y="4521453"/>
-            <a:ext cx="1275990" cy="1629787"/>
-          </a:xfrm>
-          <a:prstGeom prst="rect">
-            <a:avLst/>
-          </a:prstGeom>
-          <a:noFill/>
-          <a:extLst>
-            <a:ext uri="{909E8E84-426E-40DD-AFC4-6F175D3DCCD1}">
-              <a14:hiddenFill xmlns:a14="http://schemas.microsoft.com/office/drawing/2010/main">
-                <a:solidFill>
-                  <a:srgbClr val="FFFFFF"/>
-                </a:solidFill>
-              </a14:hiddenFill>
-            </a:ext>
-          </a:extLst>
-        </p:spPr>
-      </p:pic>
-      <p:sp>
-        <p:nvSpPr>
-          <p:cNvPr id="31" name="Speech Bubble: Rectangle 30">
-            <a:extLst>
-              <a:ext uri="{FF2B5EF4-FFF2-40B4-BE49-F238E27FC236}">
-                <a16:creationId xmlns:a16="http://schemas.microsoft.com/office/drawing/2014/main" id="{59344EF8-5F99-4B90-9F98-B5B575A802E4}"/>
-              </a:ext>
-            </a:extLst>
-          </p:cNvPr>
-          <p:cNvSpPr/>
-          <p:nvPr/>
-        </p:nvSpPr>
-        <p:spPr bwMode="gray">
-          <a:xfrm>
-            <a:off x="9246990" y="2465483"/>
-            <a:ext cx="1718445" cy="715415"/>
-          </a:xfrm>
-          <a:prstGeom prst="wedgeRectCallout">
-            <a:avLst>
-              <a:gd name="adj1" fmla="val -70653"/>
-              <a:gd name="adj2" fmla="val 51755"/>
-            </a:avLst>
-          </a:prstGeom>
-          <a:ln>
-            <a:headEnd/>
-            <a:tailEnd/>
-          </a:ln>
-        </p:spPr>
-        <p:style>
-          <a:lnRef idx="2">
-            <a:schemeClr val="accent5"/>
-          </a:lnRef>
-          <a:fillRef idx="1">
-            <a:schemeClr val="lt1"/>
-          </a:fillRef>
-          <a:effectRef idx="0">
-            <a:schemeClr val="accent5"/>
-          </a:effectRef>
-          <a:fontRef idx="minor">
-            <a:schemeClr val="dk1"/>
-          </a:fontRef>
-        </p:style>
-        <p:txBody>
-          <a:bodyPr lIns="90000" tIns="72000" rIns="90000" bIns="72000" rtlCol="0" anchor="ctr"/>
-          <a:lstStyle/>
-          <a:p>
-            <a:pPr marR="0" algn="ctr" defTabSz="914400" eaLnBrk="1" fontAlgn="base" latinLnBrk="0" hangingPunct="1">
-              <a:lnSpc>
-                <a:spcPct val="100000"/>
-              </a:lnSpc>
-              <a:spcBef>
-                <a:spcPct val="50000"/>
-              </a:spcBef>
-              <a:spcAft>
-                <a:spcPct val="0"/>
-              </a:spcAft>
-              <a:buClr>
-                <a:srgbClr val="F0AB00"/>
-              </a:buClr>
-              <a:buSzPct val="80000"/>
-              <a:tabLst/>
-            </a:pPr>
-            <a:r>
-              <a:rPr kumimoji="0" lang="en-US" sz="1800" b="0" i="0" u="none" strike="noStrike" kern="0" cap="none" spc="0" normalizeH="0" baseline="0" noProof="0" dirty="0">
-                <a:ln>
-                  <a:noFill/>
-                </a:ln>
-                <a:effectLst/>
-                <a:uLnTx/>
-                <a:uFillTx/>
-                <a:ea typeface="Arial Unicode MS" pitchFamily="34" charset="-128"/>
-                <a:cs typeface="Arial Unicode MS" pitchFamily="34" charset="-128"/>
-              </a:rPr>
-              <a:t>New </a:t>
-            </a:r>
-            <a:r>
-              <a:rPr lang="en-US" sz="1800" kern="0" dirty="0">
-                <a:ea typeface="Arial Unicode MS" pitchFamily="34" charset="-128"/>
-                <a:cs typeface="Arial Unicode MS" pitchFamily="34" charset="-128"/>
-              </a:rPr>
-              <a:t>R</a:t>
-            </a:r>
-            <a:r>
-              <a:rPr kumimoji="0" lang="en-US" sz="1800" b="0" i="0" u="none" strike="noStrike" kern="0" cap="none" spc="0" normalizeH="0" baseline="0" noProof="0" dirty="0" err="1">
-                <a:ln>
-                  <a:noFill/>
-                </a:ln>
-                <a:effectLst/>
-                <a:uLnTx/>
-                <a:uFillTx/>
-                <a:ea typeface="Arial Unicode MS" pitchFamily="34" charset="-128"/>
-                <a:cs typeface="Arial Unicode MS" pitchFamily="34" charset="-128"/>
-              </a:rPr>
-              <a:t>eplicaSet</a:t>
-            </a:r>
-            <a:endParaRPr kumimoji="0" lang="en-US" sz="1800" b="0" i="0" u="none" strike="noStrike" kern="0" cap="none" spc="0" normalizeH="0" baseline="0" noProof="0" dirty="0">
-              <a:ln>
-                <a:noFill/>
-              </a:ln>
-              <a:effectLst/>
-              <a:uLnTx/>
-              <a:uFillTx/>
-              <a:ea typeface="Arial Unicode MS" pitchFamily="34" charset="-128"/>
-              <a:cs typeface="Arial Unicode MS" pitchFamily="34" charset="-128"/>
-            </a:endParaRPr>
-          </a:p>
-        </p:txBody>
-      </p:sp>
-      <p:sp>
-        <p:nvSpPr>
-          <p:cNvPr id="32" name="Speech Bubble: Rectangle 31">
-            <a:extLst>
-              <a:ext uri="{FF2B5EF4-FFF2-40B4-BE49-F238E27FC236}">
-                <a16:creationId xmlns:a16="http://schemas.microsoft.com/office/drawing/2014/main" id="{32E68E0E-C052-48B3-8A8D-C2DFFB8B4E6B}"/>
-              </a:ext>
-            </a:extLst>
-          </p:cNvPr>
-          <p:cNvSpPr/>
-          <p:nvPr/>
-        </p:nvSpPr>
-        <p:spPr bwMode="gray">
-          <a:xfrm>
-            <a:off x="301925" y="1777561"/>
-            <a:ext cx="2078815" cy="715415"/>
-          </a:xfrm>
-          <a:prstGeom prst="wedgeRectCallout">
-            <a:avLst>
-              <a:gd name="adj1" fmla="val 48318"/>
-              <a:gd name="adj2" fmla="val 101193"/>
-            </a:avLst>
-          </a:prstGeom>
-          <a:ln>
-            <a:headEnd/>
-            <a:tailEnd/>
-          </a:ln>
-        </p:spPr>
-        <p:style>
-          <a:lnRef idx="2">
-            <a:schemeClr val="accent5"/>
-          </a:lnRef>
-          <a:fillRef idx="1">
-            <a:schemeClr val="lt1"/>
-          </a:fillRef>
-          <a:effectRef idx="0">
-            <a:schemeClr val="accent5"/>
-          </a:effectRef>
-          <a:fontRef idx="minor">
-            <a:schemeClr val="dk1"/>
-          </a:fontRef>
-        </p:style>
-        <p:txBody>
-          <a:bodyPr lIns="90000" tIns="72000" rIns="90000" bIns="72000" rtlCol="0" anchor="ctr"/>
-          <a:lstStyle/>
-          <a:p>
-            <a:pPr marR="0" algn="ctr" defTabSz="914400" eaLnBrk="1" fontAlgn="base" latinLnBrk="0" hangingPunct="1">
-              <a:lnSpc>
-                <a:spcPct val="100000"/>
-              </a:lnSpc>
-              <a:spcBef>
-                <a:spcPct val="50000"/>
-              </a:spcBef>
-              <a:spcAft>
-                <a:spcPct val="0"/>
-              </a:spcAft>
-              <a:buClr>
-                <a:srgbClr val="F0AB00"/>
-              </a:buClr>
-              <a:buSzPct val="80000"/>
-              <a:tabLst/>
-            </a:pPr>
-            <a:r>
-              <a:rPr kumimoji="0" lang="en-US" sz="1800" b="0" i="0" u="none" strike="noStrike" kern="0" cap="none" spc="0" normalizeH="0" baseline="0" noProof="0" dirty="0">
-                <a:ln>
-                  <a:noFill/>
-                </a:ln>
-                <a:effectLst/>
-                <a:uLnTx/>
-                <a:uFillTx/>
-                <a:ea typeface="Arial Unicode MS" pitchFamily="34" charset="-128"/>
-                <a:cs typeface="Arial Unicode MS" pitchFamily="34" charset="-128"/>
-              </a:rPr>
-              <a:t>Scale down, but keep </a:t>
-            </a:r>
-            <a:r>
-              <a:rPr kumimoji="0" lang="en-US" sz="1800" b="0" i="0" u="none" strike="noStrike" kern="0" cap="none" spc="0" normalizeH="0" baseline="0" noProof="0" dirty="0" err="1">
-                <a:ln>
-                  <a:noFill/>
-                </a:ln>
-                <a:effectLst/>
-                <a:uLnTx/>
-                <a:uFillTx/>
-                <a:ea typeface="Arial Unicode MS" pitchFamily="34" charset="-128"/>
-                <a:cs typeface="Arial Unicode MS" pitchFamily="34" charset="-128"/>
-              </a:rPr>
-              <a:t>ReplicaSet</a:t>
-            </a:r>
-            <a:endParaRPr kumimoji="0" lang="en-US" sz="1800" b="0" i="0" u="none" strike="noStrike" kern="0" cap="none" spc="0" normalizeH="0" baseline="0" noProof="0" dirty="0">
-              <a:ln>
-                <a:noFill/>
-              </a:ln>
-              <a:effectLst/>
-              <a:uLnTx/>
-              <a:uFillTx/>
-              <a:ea typeface="Arial Unicode MS" pitchFamily="34" charset="-128"/>
-              <a:cs typeface="Arial Unicode MS" pitchFamily="34" charset="-128"/>
-            </a:endParaRPr>
-          </a:p>
-        </p:txBody>
-      </p:sp>
-      <p:sp>
-        <p:nvSpPr>
-          <p:cNvPr id="33" name="Speech Bubble: Rectangle 32">
-            <a:extLst>
-              <a:ext uri="{FF2B5EF4-FFF2-40B4-BE49-F238E27FC236}">
-                <a16:creationId xmlns:a16="http://schemas.microsoft.com/office/drawing/2014/main" id="{A2624BD2-1BD0-43B4-BC35-BA4EDC55D2D4}"/>
-              </a:ext>
-            </a:extLst>
-          </p:cNvPr>
-          <p:cNvSpPr/>
-          <p:nvPr/>
-        </p:nvSpPr>
-        <p:spPr bwMode="gray">
-          <a:xfrm>
-            <a:off x="9167491" y="3363783"/>
-            <a:ext cx="2743536" cy="974785"/>
-          </a:xfrm>
-          <a:prstGeom prst="wedgeRectCallout">
-            <a:avLst>
-              <a:gd name="adj1" fmla="val -39406"/>
-              <a:gd name="adj2" fmla="val 77778"/>
-            </a:avLst>
-          </a:prstGeom>
-          <a:ln>
-            <a:headEnd/>
-            <a:tailEnd/>
-          </a:ln>
-        </p:spPr>
-        <p:style>
-          <a:lnRef idx="2">
-            <a:schemeClr val="accent5"/>
-          </a:lnRef>
-          <a:fillRef idx="1">
-            <a:schemeClr val="lt1"/>
-          </a:fillRef>
-          <a:effectRef idx="0">
-            <a:schemeClr val="accent5"/>
-          </a:effectRef>
-          <a:fontRef idx="minor">
-            <a:schemeClr val="dk1"/>
-          </a:fontRef>
-        </p:style>
-        <p:txBody>
-          <a:bodyPr lIns="90000" tIns="72000" rIns="90000" bIns="72000" rtlCol="0" anchor="ctr"/>
-          <a:lstStyle/>
-          <a:p>
-            <a:pPr marR="0" algn="ctr" defTabSz="914400" eaLnBrk="1" fontAlgn="base" latinLnBrk="0" hangingPunct="1">
-              <a:lnSpc>
-                <a:spcPct val="100000"/>
-              </a:lnSpc>
-              <a:spcBef>
-                <a:spcPct val="50000"/>
-              </a:spcBef>
-              <a:spcAft>
-                <a:spcPct val="0"/>
-              </a:spcAft>
-              <a:buClr>
-                <a:srgbClr val="F0AB00"/>
-              </a:buClr>
-              <a:buSzPct val="80000"/>
-              <a:tabLst/>
-            </a:pPr>
-            <a:r>
-              <a:rPr lang="en-US" sz="1800" kern="0" dirty="0">
-                <a:ea typeface="Arial Unicode MS" pitchFamily="34" charset="-128"/>
-                <a:cs typeface="Arial Unicode MS" pitchFamily="34" charset="-128"/>
-              </a:rPr>
-              <a:t>New label set:</a:t>
-            </a:r>
-          </a:p>
-          <a:p>
-            <a:pPr marR="0" algn="ctr" defTabSz="914400" eaLnBrk="1" fontAlgn="base" latinLnBrk="0" hangingPunct="1">
-              <a:lnSpc>
-                <a:spcPct val="100000"/>
-              </a:lnSpc>
-              <a:spcBef>
-                <a:spcPct val="50000"/>
-              </a:spcBef>
-              <a:spcAft>
-                <a:spcPct val="0"/>
-              </a:spcAft>
-              <a:buClr>
-                <a:srgbClr val="F0AB00"/>
-              </a:buClr>
-              <a:buSzPct val="80000"/>
-              <a:tabLst/>
-            </a:pPr>
-            <a:r>
-              <a:rPr lang="en-US" sz="1800" kern="0" dirty="0">
-                <a:ea typeface="Arial Unicode MS" pitchFamily="34" charset="-128"/>
-                <a:cs typeface="Arial Unicode MS" pitchFamily="34" charset="-128"/>
-              </a:rPr>
-              <a:t>species=</a:t>
-            </a:r>
-            <a:r>
-              <a:rPr lang="en-US" sz="1800" kern="0" dirty="0" err="1">
-                <a:ea typeface="Arial Unicode MS" pitchFamily="34" charset="-128"/>
-                <a:cs typeface="Arial Unicode MS" pitchFamily="34" charset="-128"/>
-              </a:rPr>
-              <a:t>koopa</a:t>
-            </a:r>
-            <a:r>
-              <a:rPr lang="en-US" sz="1800" kern="0" dirty="0">
-                <a:ea typeface="Arial Unicode MS" pitchFamily="34" charset="-128"/>
-                <a:cs typeface="Arial Unicode MS" pitchFamily="34" charset="-128"/>
-              </a:rPr>
-              <a:t> generation=</a:t>
-            </a:r>
-            <a:r>
-              <a:rPr lang="en-US" sz="1800" b="1" kern="0" dirty="0">
-                <a:ea typeface="Arial Unicode MS" pitchFamily="34" charset="-128"/>
-                <a:cs typeface="Arial Unicode MS" pitchFamily="34" charset="-128"/>
-              </a:rPr>
-              <a:t>red-shell</a:t>
-            </a:r>
-          </a:p>
-        </p:txBody>
-      </p:sp>
-      <p:cxnSp>
-        <p:nvCxnSpPr>
-          <p:cNvPr id="4" name="Connector: Elbow 3">
-            <a:extLst>
-              <a:ext uri="{FF2B5EF4-FFF2-40B4-BE49-F238E27FC236}">
-                <a16:creationId xmlns:a16="http://schemas.microsoft.com/office/drawing/2014/main" id="{72ED5063-2E4E-4757-BB7B-1351A10DA280}"/>
-              </a:ext>
-            </a:extLst>
-          </p:cNvPr>
-          <p:cNvCxnSpPr>
-            <a:cxnSpLocks/>
-          </p:cNvCxnSpPr>
-          <p:nvPr/>
-        </p:nvCxnSpPr>
-        <p:spPr>
-          <a:xfrm rot="5400000">
-            <a:off x="3886834" y="2391727"/>
-            <a:ext cx="838172" cy="1998375"/>
-          </a:xfrm>
-          <a:prstGeom prst="bentConnector2">
-            <a:avLst/>
-          </a:prstGeom>
-          <a:ln w="57150">
-            <a:solidFill>
-              <a:schemeClr val="bg2">
-                <a:lumMod val="75000"/>
-              </a:schemeClr>
-            </a:solidFill>
-            <a:headEnd type="none" w="med" len="med"/>
-            <a:tailEnd type="none" w="med" len="med"/>
-          </a:ln>
-        </p:spPr>
-        <p:style>
-          <a:lnRef idx="1">
-            <a:schemeClr val="accent1"/>
-          </a:lnRef>
-          <a:fillRef idx="0">
-            <a:schemeClr val="accent1"/>
-          </a:fillRef>
-          <a:effectRef idx="0">
-            <a:schemeClr val="accent1"/>
-          </a:effectRef>
-          <a:fontRef idx="minor">
-            <a:schemeClr val="tx1"/>
-          </a:fontRef>
-        </p:style>
-      </p:cxnSp>
-      <p:cxnSp>
-        <p:nvCxnSpPr>
-          <p:cNvPr id="18" name="Connector: Elbow 17">
-            <a:extLst>
-              <a:ext uri="{FF2B5EF4-FFF2-40B4-BE49-F238E27FC236}">
-                <a16:creationId xmlns:a16="http://schemas.microsoft.com/office/drawing/2014/main" id="{92FCAAA5-9423-4184-AD0F-345B06EB86A8}"/>
-              </a:ext>
-            </a:extLst>
-          </p:cNvPr>
-          <p:cNvCxnSpPr>
-            <a:cxnSpLocks/>
-            <a:stCxn id="1032" idx="2"/>
-            <a:endCxn id="20" idx="1"/>
-          </p:cNvCxnSpPr>
-          <p:nvPr/>
-        </p:nvCxnSpPr>
-        <p:spPr>
-          <a:xfrm rot="16200000" flipH="1">
-            <a:off x="5875998" y="2381887"/>
-            <a:ext cx="857984" cy="1999766"/>
-          </a:xfrm>
-          <a:prstGeom prst="bentConnector2">
-            <a:avLst/>
-          </a:prstGeom>
-          <a:ln w="57150">
-            <a:solidFill>
-              <a:schemeClr val="bg2">
-                <a:lumMod val="75000"/>
-              </a:schemeClr>
-            </a:solidFill>
-            <a:headEnd type="none" w="med" len="med"/>
-            <a:tailEnd type="none" w="med" len="med"/>
-          </a:ln>
-        </p:spPr>
-        <p:style>
-          <a:lnRef idx="1">
-            <a:schemeClr val="accent1"/>
-          </a:lnRef>
-          <a:fillRef idx="0">
-            <a:schemeClr val="accent1"/>
-          </a:fillRef>
-          <a:effectRef idx="0">
-            <a:schemeClr val="accent1"/>
-          </a:effectRef>
-          <a:fontRef idx="minor">
-            <a:schemeClr val="tx1"/>
-          </a:fontRef>
-        </p:style>
-      </p:cxnSp>
-      <p:pic>
-        <p:nvPicPr>
-          <p:cNvPr id="19" name="Group 24">
-            <a:extLst>
-              <a:ext uri="{FF2B5EF4-FFF2-40B4-BE49-F238E27FC236}">
-                <a16:creationId xmlns:a16="http://schemas.microsoft.com/office/drawing/2014/main" id="{1CE2F06B-986D-44E7-9132-0090E7873369}"/>
-              </a:ext>
-            </a:extLst>
-          </p:cNvPr>
-          <p:cNvPicPr>
-            <a:picLocks noChangeArrowheads="1"/>
-          </p:cNvPicPr>
-          <p:nvPr/>
-        </p:nvPicPr>
-        <p:blipFill>
-          <a:blip r:embed="rId6">
-            <a:extLst>
-              <a:ext uri="{28A0092B-C50C-407E-A947-70E740481C1C}">
-                <a14:useLocalDpi xmlns:a14="http://schemas.microsoft.com/office/drawing/2010/main" val="0"/>
-              </a:ext>
-            </a:extLst>
-          </a:blip>
-          <a:srcRect/>
-          <a:stretch>
-            <a:fillRect/>
-          </a:stretch>
-        </p:blipFill>
-        <p:spPr bwMode="auto">
-          <a:xfrm>
-            <a:off x="2102653" y="3061944"/>
-            <a:ext cx="1204079" cy="1458012"/>
-          </a:xfrm>
-          <a:prstGeom prst="rect">
-            <a:avLst/>
-          </a:prstGeom>
-          <a:noFill/>
-          <a:extLst>
-            <a:ext uri="{909E8E84-426E-40DD-AFC4-6F175D3DCCD1}">
-              <a14:hiddenFill xmlns:a14="http://schemas.microsoft.com/office/drawing/2010/main">
-                <a:solidFill>
-                  <a:srgbClr val="FFFFFF"/>
-                </a:solidFill>
-              </a14:hiddenFill>
-            </a:ext>
-          </a:extLst>
-        </p:spPr>
-      </p:pic>
-      <p:pic>
-        <p:nvPicPr>
-          <p:cNvPr id="20" name="Group 24">
-            <a:extLst>
-              <a:ext uri="{FF2B5EF4-FFF2-40B4-BE49-F238E27FC236}">
-                <a16:creationId xmlns:a16="http://schemas.microsoft.com/office/drawing/2014/main" id="{D9D33B36-8E29-4762-99B6-63BF44E3277D}"/>
-              </a:ext>
-            </a:extLst>
-          </p:cNvPr>
-          <p:cNvPicPr>
-            <a:picLocks noChangeArrowheads="1"/>
-          </p:cNvPicPr>
-          <p:nvPr/>
-        </p:nvPicPr>
-        <p:blipFill>
-          <a:blip r:embed="rId6">
-            <a:duotone>
-              <a:prstClr val="black"/>
-              <a:schemeClr val="accent5">
-                <a:tint val="45000"/>
-                <a:satMod val="400000"/>
-              </a:schemeClr>
-            </a:duotone>
-            <a:extLst>
-              <a:ext uri="{28A0092B-C50C-407E-A947-70E740481C1C}">
-                <a14:useLocalDpi xmlns:a14="http://schemas.microsoft.com/office/drawing/2010/main" val="0"/>
-              </a:ext>
-            </a:extLst>
-          </a:blip>
-          <a:srcRect/>
-          <a:stretch>
-            <a:fillRect/>
-          </a:stretch>
-        </p:blipFill>
-        <p:spPr bwMode="auto">
-          <a:xfrm>
-            <a:off x="7304873" y="3081756"/>
-            <a:ext cx="1204079" cy="1458012"/>
-          </a:xfrm>
-          <a:prstGeom prst="rect">
-            <a:avLst/>
-          </a:prstGeom>
-          <a:noFill/>
-          <a:extLst>
-            <a:ext uri="{909E8E84-426E-40DD-AFC4-6F175D3DCCD1}">
-              <a14:hiddenFill xmlns:a14="http://schemas.microsoft.com/office/drawing/2010/main">
-                <a:solidFill>
-                  <a:srgbClr val="FFFFFF"/>
-                </a:solidFill>
-              </a14:hiddenFill>
-            </a:ext>
-          </a:extLst>
-        </p:spPr>
-      </p:pic>
-      <p:sp>
-        <p:nvSpPr>
-          <p:cNvPr id="21" name="TextBox 20">
-            <a:extLst>
-              <a:ext uri="{FF2B5EF4-FFF2-40B4-BE49-F238E27FC236}">
-                <a16:creationId xmlns:a16="http://schemas.microsoft.com/office/drawing/2014/main" id="{8FE26322-83D1-484F-96C8-3CFDB4B6141E}"/>
-              </a:ext>
-            </a:extLst>
-          </p:cNvPr>
-          <p:cNvSpPr txBox="1"/>
-          <p:nvPr/>
-        </p:nvSpPr>
-        <p:spPr>
-          <a:xfrm>
-            <a:off x="7977313" y="729494"/>
-            <a:ext cx="1532447" cy="492443"/>
-          </a:xfrm>
-          <a:prstGeom prst="rect">
-            <a:avLst/>
-          </a:prstGeom>
-          <a:solidFill>
-            <a:srgbClr val="FFC000"/>
-          </a:solidFill>
-        </p:spPr>
-        <p:txBody>
-          <a:bodyPr wrap="square" lIns="0" tIns="0" rIns="0" bIns="0" rtlCol="0">
-            <a:spAutoFit/>
-          </a:bodyPr>
-          <a:lstStyle/>
-          <a:p>
-            <a:pPr fontAlgn="base">
-              <a:spcBef>
-                <a:spcPct val="50000"/>
-              </a:spcBef>
-              <a:spcAft>
-                <a:spcPct val="0"/>
-              </a:spcAft>
-              <a:buClr>
-                <a:srgbClr val="F0AB00"/>
-              </a:buClr>
-              <a:buSzPct val="80000"/>
-            </a:pPr>
-            <a:r>
-              <a:rPr lang="de-DE" sz="3200" kern="0" dirty="0">
-                <a:ea typeface="Arial Unicode MS" pitchFamily="34" charset="-128"/>
-                <a:cs typeface="Arial Unicode MS" pitchFamily="34" charset="-128"/>
-              </a:rPr>
-              <a:t>Original</a:t>
-            </a:r>
-          </a:p>
-        </p:txBody>
-      </p:sp>
-    </p:spTree>
-    <p:extLst>
-      <p:ext uri="{BB962C8B-B14F-4D97-AF65-F5344CB8AC3E}">
-        <p14:creationId xmlns:p14="http://schemas.microsoft.com/office/powerpoint/2010/main" val="501259959"/>
-      </p:ext>
-    </p:extLst>
-  </p:cSld>
-  <p:clrMapOvr>
-    <a:masterClrMapping/>
-  </p:clrMapOvr>
-  <p:timing>
-    <p:tnLst>
-      <p:par>
-        <p:cTn id="1" dur="indefinite" restart="never" nodeType="tmRoot">
-          <p:childTnLst>
-            <p:seq concurrent="1" nextAc="seek">
-              <p:cTn id="2" dur="indefinite" nodeType="mainSeq">
-                <p:childTnLst>
-                  <p:par>
-                    <p:cTn id="3" fill="hold">
-                      <p:stCondLst>
-                        <p:cond delay="indefinite"/>
-                        <p:cond evt="onBegin" delay="0">
-                          <p:tn val="2"/>
-                        </p:cond>
-                      </p:stCondLst>
-                      <p:childTnLst>
-                        <p:par>
-                          <p:cTn id="4" fill="hold">
-                            <p:stCondLst>
-                              <p:cond delay="0"/>
-                            </p:stCondLst>
-                            <p:childTnLst>
-                              <p:par>
-                                <p:cTn id="5" presetID="1" presetClass="entr" presetSubtype="0" fill="hold" grpId="0" nodeType="withEffect">
-                                  <p:stCondLst>
-                                    <p:cond delay="0"/>
-                                  </p:stCondLst>
-                                  <p:childTnLst>
-                                    <p:set>
-                                      <p:cBhvr>
-                                        <p:cTn id="6" dur="1" fill="hold">
-                                          <p:stCondLst>
-                                            <p:cond delay="0"/>
-                                          </p:stCondLst>
-                                        </p:cTn>
-                                        <p:tgtEl>
-                                          <p:spTgt spid="31"/>
-                                        </p:tgtEl>
-                                        <p:attrNameLst>
-                                          <p:attrName>style.visibility</p:attrName>
-                                        </p:attrNameLst>
-                                      </p:cBhvr>
-                                      <p:to>
-                                        <p:strVal val="visible"/>
-                                      </p:to>
-                                    </p:set>
-                                  </p:childTnLst>
-                                </p:cTn>
-                              </p:par>
-                              <p:par>
-                                <p:cTn id="7" presetID="1" presetClass="entr" presetSubtype="0" fill="hold" nodeType="withEffect">
-                                  <p:stCondLst>
-                                    <p:cond delay="0"/>
-                                  </p:stCondLst>
-                                  <p:childTnLst>
-                                    <p:set>
-                                      <p:cBhvr>
-                                        <p:cTn id="8" dur="1" fill="hold">
-                                          <p:stCondLst>
-                                            <p:cond delay="0"/>
-                                          </p:stCondLst>
-                                        </p:cTn>
-                                        <p:tgtEl>
-                                          <p:spTgt spid="18"/>
-                                        </p:tgtEl>
-                                        <p:attrNameLst>
-                                          <p:attrName>style.visibility</p:attrName>
-                                        </p:attrNameLst>
-                                      </p:cBhvr>
-                                      <p:to>
-                                        <p:strVal val="visible"/>
-                                      </p:to>
-                                    </p:set>
-                                  </p:childTnLst>
-                                </p:cTn>
-                              </p:par>
-                            </p:childTnLst>
-                          </p:cTn>
-                        </p:par>
-                      </p:childTnLst>
-                    </p:cTn>
-                  </p:par>
-                  <p:par>
-                    <p:cTn id="9" fill="hold">
-                      <p:stCondLst>
-                        <p:cond delay="indefinite"/>
-                      </p:stCondLst>
-                      <p:childTnLst>
-                        <p:par>
-                          <p:cTn id="10" fill="hold">
-                            <p:stCondLst>
-                              <p:cond delay="0"/>
-                            </p:stCondLst>
-                            <p:childTnLst>
-                              <p:par>
-                                <p:cTn id="11" presetID="1" presetClass="entr" presetSubtype="0" fill="hold" nodeType="clickEffect">
-                                  <p:stCondLst>
-                                    <p:cond delay="0"/>
-                                  </p:stCondLst>
-                                  <p:childTnLst>
-                                    <p:set>
-                                      <p:cBhvr>
-                                        <p:cTn id="12" dur="1" fill="hold">
-                                          <p:stCondLst>
-                                            <p:cond delay="0"/>
-                                          </p:stCondLst>
-                                        </p:cTn>
-                                        <p:tgtEl>
-                                          <p:spTgt spid="20"/>
-                                        </p:tgtEl>
-                                        <p:attrNameLst>
-                                          <p:attrName>style.visibility</p:attrName>
-                                        </p:attrNameLst>
-                                      </p:cBhvr>
-                                      <p:to>
-                                        <p:strVal val="visible"/>
-                                      </p:to>
-                                    </p:set>
-                                  </p:childTnLst>
-                                </p:cTn>
-                              </p:par>
-                            </p:childTnLst>
-                          </p:cTn>
-                        </p:par>
-                      </p:childTnLst>
-                    </p:cTn>
-                  </p:par>
-                  <p:par>
-                    <p:cTn id="13" fill="hold">
-                      <p:stCondLst>
-                        <p:cond delay="indefinite"/>
-                      </p:stCondLst>
-                      <p:childTnLst>
-                        <p:par>
-                          <p:cTn id="14" fill="hold">
-                            <p:stCondLst>
-                              <p:cond delay="0"/>
-                            </p:stCondLst>
-                            <p:childTnLst>
-                              <p:par>
-                                <p:cTn id="15" presetID="1" presetClass="entr" presetSubtype="0" fill="hold" grpId="0" nodeType="clickEffect">
-                                  <p:stCondLst>
-                                    <p:cond delay="0"/>
-                                  </p:stCondLst>
-                                  <p:childTnLst>
-                                    <p:set>
-                                      <p:cBhvr>
-                                        <p:cTn id="16" dur="1" fill="hold">
-                                          <p:stCondLst>
-                                            <p:cond delay="0"/>
-                                          </p:stCondLst>
-                                        </p:cTn>
-                                        <p:tgtEl>
-                                          <p:spTgt spid="32"/>
-                                        </p:tgtEl>
-                                        <p:attrNameLst>
-                                          <p:attrName>style.visibility</p:attrName>
-                                        </p:attrNameLst>
-                                      </p:cBhvr>
-                                      <p:to>
-                                        <p:strVal val="visible"/>
-                                      </p:to>
-                                    </p:set>
-                                  </p:childTnLst>
-                                </p:cTn>
-                              </p:par>
-                            </p:childTnLst>
-                          </p:cTn>
-                        </p:par>
-                        <p:par>
-                          <p:cTn id="17" fill="hold">
-                            <p:stCondLst>
-                              <p:cond delay="0"/>
-                            </p:stCondLst>
-                            <p:childTnLst>
-                              <p:par>
-                                <p:cTn id="18" presetID="42" presetClass="exit" presetSubtype="0" fill="hold" nodeType="afterEffect">
-                                  <p:stCondLst>
-                                    <p:cond delay="0"/>
-                                  </p:stCondLst>
-                                  <p:childTnLst>
-                                    <p:animEffect transition="out" filter="fade">
-                                      <p:cBhvr>
-                                        <p:cTn id="19" dur="1000"/>
-                                        <p:tgtEl>
-                                          <p:spTgt spid="7"/>
-                                        </p:tgtEl>
-                                      </p:cBhvr>
-                                    </p:animEffect>
-                                    <p:anim calcmode="lin" valueType="num">
-                                      <p:cBhvr>
-                                        <p:cTn id="20" dur="1000"/>
-                                        <p:tgtEl>
-                                          <p:spTgt spid="7"/>
-                                        </p:tgtEl>
-                                        <p:attrNameLst>
-                                          <p:attrName>ppt_x</p:attrName>
-                                        </p:attrNameLst>
-                                      </p:cBhvr>
-                                      <p:tavLst>
-                                        <p:tav tm="0">
-                                          <p:val>
-                                            <p:strVal val="ppt_x"/>
-                                          </p:val>
-                                        </p:tav>
-                                        <p:tav tm="100000">
-                                          <p:val>
-                                            <p:strVal val="ppt_x"/>
-                                          </p:val>
-                                        </p:tav>
-                                      </p:tavLst>
-                                    </p:anim>
-                                    <p:anim calcmode="lin" valueType="num">
-                                      <p:cBhvr>
-                                        <p:cTn id="21" dur="1000"/>
-                                        <p:tgtEl>
-                                          <p:spTgt spid="7"/>
-                                        </p:tgtEl>
-                                        <p:attrNameLst>
-                                          <p:attrName>ppt_y</p:attrName>
-                                        </p:attrNameLst>
-                                      </p:cBhvr>
-                                      <p:tavLst>
-                                        <p:tav tm="0">
-                                          <p:val>
-                                            <p:strVal val="ppt_y"/>
-                                          </p:val>
-                                        </p:tav>
-                                        <p:tav tm="100000">
-                                          <p:val>
-                                            <p:strVal val="ppt_y+.1"/>
-                                          </p:val>
-                                        </p:tav>
-                                      </p:tavLst>
-                                    </p:anim>
-                                    <p:set>
-                                      <p:cBhvr>
-                                        <p:cTn id="22" dur="1" fill="hold">
-                                          <p:stCondLst>
-                                            <p:cond delay="999"/>
-                                          </p:stCondLst>
-                                        </p:cTn>
-                                        <p:tgtEl>
-                                          <p:spTgt spid="7"/>
-                                        </p:tgtEl>
-                                        <p:attrNameLst>
-                                          <p:attrName>style.visibility</p:attrName>
-                                        </p:attrNameLst>
-                                      </p:cBhvr>
-                                      <p:to>
-                                        <p:strVal val="hidden"/>
-                                      </p:to>
-                                    </p:set>
-                                  </p:childTnLst>
-                                </p:cTn>
-                              </p:par>
-                            </p:childTnLst>
-                          </p:cTn>
-                        </p:par>
-                        <p:par>
-                          <p:cTn id="23" fill="hold">
-                            <p:stCondLst>
-                              <p:cond delay="1000"/>
-                            </p:stCondLst>
-                            <p:childTnLst>
-                              <p:par>
-                                <p:cTn id="24" presetID="2" presetClass="entr" presetSubtype="4" fill="hold" nodeType="afterEffect">
-                                  <p:stCondLst>
-                                    <p:cond delay="0"/>
-                                  </p:stCondLst>
-                                  <p:childTnLst>
-                                    <p:set>
-                                      <p:cBhvr>
-                                        <p:cTn id="25" dur="1" fill="hold">
-                                          <p:stCondLst>
-                                            <p:cond delay="0"/>
-                                          </p:stCondLst>
-                                        </p:cTn>
-                                        <p:tgtEl>
-                                          <p:spTgt spid="1034"/>
-                                        </p:tgtEl>
-                                        <p:attrNameLst>
-                                          <p:attrName>style.visibility</p:attrName>
-                                        </p:attrNameLst>
-                                      </p:cBhvr>
-                                      <p:to>
-                                        <p:strVal val="visible"/>
-                                      </p:to>
-                                    </p:set>
-                                    <p:anim calcmode="lin" valueType="num">
-                                      <p:cBhvr additive="base">
-                                        <p:cTn id="26" dur="500" fill="hold"/>
-                                        <p:tgtEl>
-                                          <p:spTgt spid="1034"/>
-                                        </p:tgtEl>
-                                        <p:attrNameLst>
-                                          <p:attrName>ppt_x</p:attrName>
-                                        </p:attrNameLst>
-                                      </p:cBhvr>
-                                      <p:tavLst>
-                                        <p:tav tm="0">
-                                          <p:val>
-                                            <p:strVal val="#ppt_x"/>
-                                          </p:val>
-                                        </p:tav>
-                                        <p:tav tm="100000">
-                                          <p:val>
-                                            <p:strVal val="#ppt_x"/>
-                                          </p:val>
-                                        </p:tav>
-                                      </p:tavLst>
-                                    </p:anim>
-                                    <p:anim calcmode="lin" valueType="num">
-                                      <p:cBhvr additive="base">
-                                        <p:cTn id="27" dur="500" fill="hold"/>
-                                        <p:tgtEl>
-                                          <p:spTgt spid="1034"/>
-                                        </p:tgtEl>
-                                        <p:attrNameLst>
-                                          <p:attrName>ppt_y</p:attrName>
-                                        </p:attrNameLst>
-                                      </p:cBhvr>
-                                      <p:tavLst>
-                                        <p:tav tm="0">
-                                          <p:val>
-                                            <p:strVal val="1+#ppt_h/2"/>
-                                          </p:val>
-                                        </p:tav>
-                                        <p:tav tm="100000">
-                                          <p:val>
-                                            <p:strVal val="#ppt_y"/>
-                                          </p:val>
-                                        </p:tav>
-                                      </p:tavLst>
-                                    </p:anim>
-                                  </p:childTnLst>
-                                </p:cTn>
-                              </p:par>
-                            </p:childTnLst>
-                          </p:cTn>
-                        </p:par>
-                        <p:par>
-                          <p:cTn id="28" fill="hold">
-                            <p:stCondLst>
-                              <p:cond delay="1500"/>
-                            </p:stCondLst>
-                            <p:childTnLst>
-                              <p:par>
-                                <p:cTn id="29" presetID="42" presetClass="exit" presetSubtype="0" fill="hold" nodeType="afterEffect">
-                                  <p:stCondLst>
-                                    <p:cond delay="0"/>
-                                  </p:stCondLst>
-                                  <p:childTnLst>
-                                    <p:animEffect transition="out" filter="fade">
-                                      <p:cBhvr>
-                                        <p:cTn id="30" dur="1000"/>
-                                        <p:tgtEl>
-                                          <p:spTgt spid="1026"/>
-                                        </p:tgtEl>
-                                      </p:cBhvr>
-                                    </p:animEffect>
-                                    <p:anim calcmode="lin" valueType="num">
-                                      <p:cBhvr>
-                                        <p:cTn id="31" dur="1000"/>
-                                        <p:tgtEl>
-                                          <p:spTgt spid="1026"/>
-                                        </p:tgtEl>
-                                        <p:attrNameLst>
-                                          <p:attrName>ppt_x</p:attrName>
-                                        </p:attrNameLst>
-                                      </p:cBhvr>
-                                      <p:tavLst>
-                                        <p:tav tm="0">
-                                          <p:val>
-                                            <p:strVal val="ppt_x"/>
-                                          </p:val>
-                                        </p:tav>
-                                        <p:tav tm="100000">
-                                          <p:val>
-                                            <p:strVal val="ppt_x"/>
-                                          </p:val>
-                                        </p:tav>
-                                      </p:tavLst>
-                                    </p:anim>
-                                    <p:anim calcmode="lin" valueType="num">
-                                      <p:cBhvr>
-                                        <p:cTn id="32" dur="1000"/>
-                                        <p:tgtEl>
-                                          <p:spTgt spid="1026"/>
-                                        </p:tgtEl>
-                                        <p:attrNameLst>
-                                          <p:attrName>ppt_y</p:attrName>
-                                        </p:attrNameLst>
-                                      </p:cBhvr>
-                                      <p:tavLst>
-                                        <p:tav tm="0">
-                                          <p:val>
-                                            <p:strVal val="ppt_y"/>
-                                          </p:val>
-                                        </p:tav>
-                                        <p:tav tm="100000">
-                                          <p:val>
-                                            <p:strVal val="ppt_y+.1"/>
-                                          </p:val>
-                                        </p:tav>
-                                      </p:tavLst>
-                                    </p:anim>
-                                    <p:set>
-                                      <p:cBhvr>
-                                        <p:cTn id="33" dur="1" fill="hold">
-                                          <p:stCondLst>
-                                            <p:cond delay="999"/>
-                                          </p:stCondLst>
-                                        </p:cTn>
-                                        <p:tgtEl>
-                                          <p:spTgt spid="1026"/>
-                                        </p:tgtEl>
-                                        <p:attrNameLst>
-                                          <p:attrName>style.visibility</p:attrName>
-                                        </p:attrNameLst>
-                                      </p:cBhvr>
-                                      <p:to>
-                                        <p:strVal val="hidden"/>
-                                      </p:to>
-                                    </p:set>
-                                  </p:childTnLst>
-                                </p:cTn>
-                              </p:par>
-                            </p:childTnLst>
-                          </p:cTn>
-                        </p:par>
-                        <p:par>
-                          <p:cTn id="34" fill="hold">
-                            <p:stCondLst>
-                              <p:cond delay="2500"/>
-                            </p:stCondLst>
-                            <p:childTnLst>
-                              <p:par>
-                                <p:cTn id="35" presetID="42" presetClass="entr" presetSubtype="0" fill="hold" nodeType="afterEffect">
-                                  <p:stCondLst>
-                                    <p:cond delay="0"/>
-                                  </p:stCondLst>
-                                  <p:childTnLst>
-                                    <p:set>
-                                      <p:cBhvr>
-                                        <p:cTn id="36" dur="1" fill="hold">
-                                          <p:stCondLst>
-                                            <p:cond delay="0"/>
-                                          </p:stCondLst>
-                                        </p:cTn>
-                                        <p:tgtEl>
-                                          <p:spTgt spid="29"/>
-                                        </p:tgtEl>
-                                        <p:attrNameLst>
-                                          <p:attrName>style.visibility</p:attrName>
-                                        </p:attrNameLst>
-                                      </p:cBhvr>
-                                      <p:to>
-                                        <p:strVal val="visible"/>
-                                      </p:to>
-                                    </p:set>
-                                    <p:animEffect transition="in" filter="fade">
-                                      <p:cBhvr>
-                                        <p:cTn id="37" dur="1000"/>
-                                        <p:tgtEl>
-                                          <p:spTgt spid="29"/>
-                                        </p:tgtEl>
-                                      </p:cBhvr>
-                                    </p:animEffect>
-                                    <p:anim calcmode="lin" valueType="num">
-                                      <p:cBhvr>
-                                        <p:cTn id="38" dur="1000" fill="hold"/>
-                                        <p:tgtEl>
-                                          <p:spTgt spid="29"/>
-                                        </p:tgtEl>
-                                        <p:attrNameLst>
-                                          <p:attrName>ppt_x</p:attrName>
-                                        </p:attrNameLst>
-                                      </p:cBhvr>
-                                      <p:tavLst>
-                                        <p:tav tm="0">
-                                          <p:val>
-                                            <p:strVal val="#ppt_x"/>
-                                          </p:val>
-                                        </p:tav>
-                                        <p:tav tm="100000">
-                                          <p:val>
-                                            <p:strVal val="#ppt_x"/>
-                                          </p:val>
-                                        </p:tav>
-                                      </p:tavLst>
-                                    </p:anim>
-                                    <p:anim calcmode="lin" valueType="num">
-                                      <p:cBhvr>
-                                        <p:cTn id="39" dur="1000" fill="hold"/>
-                                        <p:tgtEl>
-                                          <p:spTgt spid="29"/>
-                                        </p:tgtEl>
-                                        <p:attrNameLst>
-                                          <p:attrName>ppt_y</p:attrName>
-                                        </p:attrNameLst>
-                                      </p:cBhvr>
-                                      <p:tavLst>
-                                        <p:tav tm="0">
-                                          <p:val>
-                                            <p:strVal val="#ppt_y+.1"/>
-                                          </p:val>
-                                        </p:tav>
-                                        <p:tav tm="100000">
-                                          <p:val>
-                                            <p:strVal val="#ppt_y"/>
-                                          </p:val>
-                                        </p:tav>
-                                      </p:tavLst>
-                                    </p:anim>
-                                  </p:childTnLst>
-                                </p:cTn>
-                              </p:par>
-                            </p:childTnLst>
-                          </p:cTn>
-                        </p:par>
-                        <p:par>
-                          <p:cTn id="40" fill="hold">
-                            <p:stCondLst>
-                              <p:cond delay="3500"/>
-                            </p:stCondLst>
-                            <p:childTnLst>
-                              <p:par>
-                                <p:cTn id="41" presetID="42" presetClass="exit" presetSubtype="0" fill="hold" nodeType="afterEffect">
-                                  <p:stCondLst>
-                                    <p:cond delay="0"/>
-                                  </p:stCondLst>
-                                  <p:childTnLst>
-                                    <p:animEffect transition="out" filter="fade">
-                                      <p:cBhvr>
-                                        <p:cTn id="42" dur="1000"/>
-                                        <p:tgtEl>
-                                          <p:spTgt spid="6"/>
-                                        </p:tgtEl>
-                                      </p:cBhvr>
-                                    </p:animEffect>
-                                    <p:anim calcmode="lin" valueType="num">
-                                      <p:cBhvr>
-                                        <p:cTn id="43" dur="1000"/>
-                                        <p:tgtEl>
-                                          <p:spTgt spid="6"/>
-                                        </p:tgtEl>
-                                        <p:attrNameLst>
-                                          <p:attrName>ppt_x</p:attrName>
-                                        </p:attrNameLst>
-                                      </p:cBhvr>
-                                      <p:tavLst>
-                                        <p:tav tm="0">
-                                          <p:val>
-                                            <p:strVal val="ppt_x"/>
-                                          </p:val>
-                                        </p:tav>
-                                        <p:tav tm="100000">
-                                          <p:val>
-                                            <p:strVal val="ppt_x"/>
-                                          </p:val>
-                                        </p:tav>
-                                      </p:tavLst>
-                                    </p:anim>
-                                    <p:anim calcmode="lin" valueType="num">
-                                      <p:cBhvr>
-                                        <p:cTn id="44" dur="1000"/>
-                                        <p:tgtEl>
-                                          <p:spTgt spid="6"/>
-                                        </p:tgtEl>
-                                        <p:attrNameLst>
-                                          <p:attrName>ppt_y</p:attrName>
-                                        </p:attrNameLst>
-                                      </p:cBhvr>
-                                      <p:tavLst>
-                                        <p:tav tm="0">
-                                          <p:val>
-                                            <p:strVal val="ppt_y"/>
-                                          </p:val>
-                                        </p:tav>
-                                        <p:tav tm="100000">
-                                          <p:val>
-                                            <p:strVal val="ppt_y+.1"/>
-                                          </p:val>
-                                        </p:tav>
-                                      </p:tavLst>
-                                    </p:anim>
-                                    <p:set>
-                                      <p:cBhvr>
-                                        <p:cTn id="45" dur="1" fill="hold">
-                                          <p:stCondLst>
-                                            <p:cond delay="999"/>
-                                          </p:stCondLst>
-                                        </p:cTn>
-                                        <p:tgtEl>
-                                          <p:spTgt spid="6"/>
-                                        </p:tgtEl>
-                                        <p:attrNameLst>
-                                          <p:attrName>style.visibility</p:attrName>
-                                        </p:attrNameLst>
-                                      </p:cBhvr>
-                                      <p:to>
-                                        <p:strVal val="hidden"/>
-                                      </p:to>
-                                    </p:set>
-                                  </p:childTnLst>
-                                </p:cTn>
-                              </p:par>
-                            </p:childTnLst>
-                          </p:cTn>
-                        </p:par>
-                        <p:par>
-                          <p:cTn id="46" fill="hold">
-                            <p:stCondLst>
-                              <p:cond delay="4500"/>
-                            </p:stCondLst>
-                            <p:childTnLst>
-                              <p:par>
-                                <p:cTn id="47" presetID="42" presetClass="entr" presetSubtype="0" fill="hold" nodeType="afterEffect">
-                                  <p:stCondLst>
-                                    <p:cond delay="0"/>
-                                  </p:stCondLst>
-                                  <p:childTnLst>
-                                    <p:set>
-                                      <p:cBhvr>
-                                        <p:cTn id="48" dur="1" fill="hold">
-                                          <p:stCondLst>
-                                            <p:cond delay="0"/>
-                                          </p:stCondLst>
-                                        </p:cTn>
-                                        <p:tgtEl>
-                                          <p:spTgt spid="30"/>
-                                        </p:tgtEl>
-                                        <p:attrNameLst>
-                                          <p:attrName>style.visibility</p:attrName>
-                                        </p:attrNameLst>
-                                      </p:cBhvr>
-                                      <p:to>
-                                        <p:strVal val="visible"/>
-                                      </p:to>
-                                    </p:set>
-                                    <p:animEffect transition="in" filter="fade">
-                                      <p:cBhvr>
-                                        <p:cTn id="49" dur="1000"/>
-                                        <p:tgtEl>
-                                          <p:spTgt spid="30"/>
-                                        </p:tgtEl>
-                                      </p:cBhvr>
-                                    </p:animEffect>
-                                    <p:anim calcmode="lin" valueType="num">
-                                      <p:cBhvr>
-                                        <p:cTn id="50" dur="1000" fill="hold"/>
-                                        <p:tgtEl>
-                                          <p:spTgt spid="30"/>
-                                        </p:tgtEl>
-                                        <p:attrNameLst>
-                                          <p:attrName>ppt_x</p:attrName>
-                                        </p:attrNameLst>
-                                      </p:cBhvr>
-                                      <p:tavLst>
-                                        <p:tav tm="0">
-                                          <p:val>
-                                            <p:strVal val="#ppt_x"/>
-                                          </p:val>
-                                        </p:tav>
-                                        <p:tav tm="100000">
-                                          <p:val>
-                                            <p:strVal val="#ppt_x"/>
-                                          </p:val>
-                                        </p:tav>
-                                      </p:tavLst>
-                                    </p:anim>
-                                    <p:anim calcmode="lin" valueType="num">
-                                      <p:cBhvr>
-                                        <p:cTn id="51" dur="1000" fill="hold"/>
-                                        <p:tgtEl>
-                                          <p:spTgt spid="30"/>
-                                        </p:tgtEl>
-                                        <p:attrNameLst>
-                                          <p:attrName>ppt_y</p:attrName>
-                                        </p:attrNameLst>
-                                      </p:cBhvr>
-                                      <p:tavLst>
-                                        <p:tav tm="0">
-                                          <p:val>
-                                            <p:strVal val="#ppt_y+.1"/>
-                                          </p:val>
-                                        </p:tav>
-                                        <p:tav tm="100000">
-                                          <p:val>
-                                            <p:strVal val="#ppt_y"/>
-                                          </p:val>
-                                        </p:tav>
-                                      </p:tavLst>
-                                    </p:anim>
-                                  </p:childTnLst>
-                                </p:cTn>
-                              </p:par>
-                              <p:par>
-                                <p:cTn id="52" presetID="1" presetClass="entr" presetSubtype="0" fill="hold" grpId="0" nodeType="withEffect">
-                                  <p:stCondLst>
-                                    <p:cond delay="0"/>
-                                  </p:stCondLst>
-                                  <p:childTnLst>
-                                    <p:set>
-                                      <p:cBhvr>
-                                        <p:cTn id="53" dur="1" fill="hold">
-                                          <p:stCondLst>
-                                            <p:cond delay="0"/>
-                                          </p:stCondLst>
-                                        </p:cTn>
-                                        <p:tgtEl>
-                                          <p:spTgt spid="33"/>
-                                        </p:tgtEl>
-                                        <p:attrNameLst>
-                                          <p:attrName>style.visibility</p:attrName>
-                                        </p:attrNameLst>
-                                      </p:cBhvr>
-                                      <p:to>
-                                        <p:strVal val="visible"/>
-                                      </p:to>
-                                    </p:set>
-                                  </p:childTnLst>
-                                </p:cTn>
-                              </p:par>
-                            </p:childTnLst>
-                          </p:cTn>
-                        </p:par>
-                      </p:childTnLst>
-                    </p:cTn>
-                  </p:par>
-                </p:childTnLst>
-              </p:cTn>
-              <p:prevCondLst>
-                <p:cond evt="onPrev" delay="0">
-                  <p:tgtEl>
-                    <p:sldTgt/>
-                  </p:tgtEl>
-                </p:cond>
-              </p:prevCondLst>
-              <p:nextCondLst>
-                <p:cond evt="onNext" delay="0">
-                  <p:tgtEl>
-                    <p:sldTgt/>
-                  </p:tgtEl>
-                </p:cond>
-              </p:nextCondLst>
-            </p:seq>
-          </p:childTnLst>
-        </p:cTn>
-      </p:par>
-    </p:tnLst>
-    <p:bldLst>
-      <p:bldP spid="31" grpId="0" animBg="1"/>
-      <p:bldP spid="32" grpId="0" animBg="1"/>
-      <p:bldP spid="33" grpId="0" animBg="1"/>
-    </p:bldLst>
-  </p:timing>
-</p:sld>
-</file>
-
-<file path=ppt/slides/slide9.xml><?xml version="1.0" encoding="utf-8"?>
-<p:sld xmlns:a="http://schemas.openxmlformats.org/drawingml/2006/main" xmlns:r="http://schemas.openxmlformats.org/officeDocument/2006/relationships" xmlns:p="http://schemas.openxmlformats.org/presentationml/2006/main">
-  <p:cSld>
-    <p:spTree>
-      <p:nvGrpSpPr>
-        <p:cNvPr id="1" name=""/>
-        <p:cNvGrpSpPr/>
-        <p:nvPr/>
-      </p:nvGrpSpPr>
-      <p:grpSpPr>
-        <a:xfrm>
-          <a:off x="0" y="0"/>
-          <a:ext cx="0" cy="0"/>
-          <a:chOff x="0" y="0"/>
-          <a:chExt cx="0" cy="0"/>
-        </a:xfrm>
-      </p:grpSpPr>
-      <p:sp>
-        <p:nvSpPr>
-          <p:cNvPr id="3" name="Title 2">
-            <a:extLst>
-              <a:ext uri="{FF2B5EF4-FFF2-40B4-BE49-F238E27FC236}">
-                <a16:creationId xmlns:a16="http://schemas.microsoft.com/office/drawing/2014/main" id="{759B34B4-C129-4847-964B-4D41E2982158}"/>
-              </a:ext>
-            </a:extLst>
-          </p:cNvPr>
-          <p:cNvSpPr>
-            <a:spLocks noGrp="1"/>
-          </p:cNvSpPr>
-          <p:nvPr>
-            <p:ph type="title"/>
-          </p:nvPr>
-        </p:nvSpPr>
-        <p:spPr>
-          <a:xfrm>
-            <a:off x="504001" y="504000"/>
-            <a:ext cx="11186476" cy="369332"/>
-          </a:xfrm>
-        </p:spPr>
-        <p:txBody>
-          <a:bodyPr/>
-          <a:lstStyle/>
-          <a:p>
-            <a:r>
-              <a:rPr lang="en-US" dirty="0"/>
-              <a:t>Updating Deployments</a:t>
-            </a:r>
-          </a:p>
-        </p:txBody>
-      </p:sp>
-      <p:pic>
-        <p:nvPicPr>
-          <p:cNvPr id="1026" name="Picture 2" descr="https://vignette.wikia.nocookie.net/nintendo/images/8/83/KoopaNSMB.png/revision/latest?cb=20110724132501&amp;path-prefix=en">
-            <a:extLst>
-              <a:ext uri="{FF2B5EF4-FFF2-40B4-BE49-F238E27FC236}">
-                <a16:creationId xmlns:a16="http://schemas.microsoft.com/office/drawing/2014/main" id="{DD6E3BCC-6AF7-43FC-8693-FDBFC61D5D1A}"/>
-              </a:ext>
-            </a:extLst>
-          </p:cNvPr>
-          <p:cNvPicPr>
-            <a:picLocks noChangeAspect="1" noChangeArrowheads="1"/>
-          </p:cNvPicPr>
-          <p:nvPr/>
-        </p:nvPicPr>
-        <p:blipFill>
-          <a:blip r:embed="rId3">
-            <a:extLst>
-              <a:ext uri="{28A0092B-C50C-407E-A947-70E740481C1C}">
-                <a14:useLocalDpi xmlns:a14="http://schemas.microsoft.com/office/drawing/2010/main" val="0"/>
-              </a:ext>
-            </a:extLst>
-          </a:blip>
-          <a:srcRect/>
-          <a:stretch>
-            <a:fillRect/>
-          </a:stretch>
-        </p:blipFill>
-        <p:spPr bwMode="auto">
-          <a:xfrm>
-            <a:off x="2157870" y="4558083"/>
-            <a:ext cx="1025020" cy="1630972"/>
-          </a:xfrm>
-          <a:prstGeom prst="rect">
-            <a:avLst/>
-          </a:prstGeom>
-          <a:noFill/>
-          <a:extLst>
-            <a:ext uri="{909E8E84-426E-40DD-AFC4-6F175D3DCCD1}">
-              <a14:hiddenFill xmlns:a14="http://schemas.microsoft.com/office/drawing/2010/main">
-                <a:solidFill>
-                  <a:srgbClr val="FFFFFF"/>
-                </a:solidFill>
-              </a14:hiddenFill>
-            </a:ext>
-          </a:extLst>
-        </p:spPr>
-      </p:pic>
-      <p:pic>
-        <p:nvPicPr>
-          <p:cNvPr id="6" name="Picture 2" descr="https://vignette.wikia.nocookie.net/nintendo/images/8/83/KoopaNSMB.png/revision/latest?cb=20110724132501&amp;path-prefix=en">
-            <a:extLst>
-              <a:ext uri="{FF2B5EF4-FFF2-40B4-BE49-F238E27FC236}">
-                <a16:creationId xmlns:a16="http://schemas.microsoft.com/office/drawing/2014/main" id="{44DF2202-C15C-4F6D-A36C-C7723B0C1E9F}"/>
-              </a:ext>
-            </a:extLst>
-          </p:cNvPr>
-          <p:cNvPicPr>
-            <a:picLocks noChangeAspect="1" noChangeArrowheads="1"/>
-          </p:cNvPicPr>
-          <p:nvPr/>
-        </p:nvPicPr>
-        <p:blipFill>
-          <a:blip r:embed="rId3">
-            <a:extLst>
-              <a:ext uri="{28A0092B-C50C-407E-A947-70E740481C1C}">
-                <a14:useLocalDpi xmlns:a14="http://schemas.microsoft.com/office/drawing/2010/main" val="0"/>
-              </a:ext>
-            </a:extLst>
-          </a:blip>
-          <a:srcRect/>
-          <a:stretch>
-            <a:fillRect/>
-          </a:stretch>
-        </p:blipFill>
-        <p:spPr bwMode="auto">
-          <a:xfrm>
-            <a:off x="1009008" y="4539768"/>
-            <a:ext cx="1025020" cy="1630972"/>
-          </a:xfrm>
-          <a:prstGeom prst="rect">
-            <a:avLst/>
-          </a:prstGeom>
-          <a:noFill/>
-          <a:extLst>
-            <a:ext uri="{909E8E84-426E-40DD-AFC4-6F175D3DCCD1}">
-              <a14:hiddenFill xmlns:a14="http://schemas.microsoft.com/office/drawing/2010/main">
-                <a:solidFill>
-                  <a:srgbClr val="FFFFFF"/>
-                </a:solidFill>
-              </a14:hiddenFill>
-            </a:ext>
-          </a:extLst>
-        </p:spPr>
-      </p:pic>
-      <p:pic>
-        <p:nvPicPr>
-          <p:cNvPr id="7" name="Picture 2" descr="https://vignette.wikia.nocookie.net/nintendo/images/8/83/KoopaNSMB.png/revision/latest?cb=20110724132501&amp;path-prefix=en">
-            <a:extLst>
-              <a:ext uri="{FF2B5EF4-FFF2-40B4-BE49-F238E27FC236}">
-                <a16:creationId xmlns:a16="http://schemas.microsoft.com/office/drawing/2014/main" id="{DBA2E3A6-4169-47A9-ABDE-8180C82525E4}"/>
-              </a:ext>
-            </a:extLst>
-          </p:cNvPr>
-          <p:cNvPicPr>
-            <a:picLocks noChangeAspect="1" noChangeArrowheads="1"/>
-          </p:cNvPicPr>
-          <p:nvPr/>
-        </p:nvPicPr>
-        <p:blipFill>
-          <a:blip r:embed="rId3">
-            <a:extLst>
-              <a:ext uri="{28A0092B-C50C-407E-A947-70E740481C1C}">
-                <a14:useLocalDpi xmlns:a14="http://schemas.microsoft.com/office/drawing/2010/main" val="0"/>
-              </a:ext>
-            </a:extLst>
-          </a:blip>
-          <a:srcRect/>
-          <a:stretch>
-            <a:fillRect/>
-          </a:stretch>
-        </p:blipFill>
-        <p:spPr bwMode="auto">
-          <a:xfrm>
-            <a:off x="3306732" y="4558083"/>
-            <a:ext cx="1025020" cy="1630972"/>
-          </a:xfrm>
-          <a:prstGeom prst="rect">
-            <a:avLst/>
-          </a:prstGeom>
-          <a:noFill/>
-          <a:extLst>
-            <a:ext uri="{909E8E84-426E-40DD-AFC4-6F175D3DCCD1}">
-              <a14:hiddenFill xmlns:a14="http://schemas.microsoft.com/office/drawing/2010/main">
-                <a:solidFill>
-                  <a:srgbClr val="FFFFFF"/>
-                </a:solidFill>
-              </a14:hiddenFill>
-            </a:ext>
-          </a:extLst>
-        </p:spPr>
-      </p:pic>
-      <p:pic>
-        <p:nvPicPr>
-          <p:cNvPr id="1032" name="Picture 8" descr="Related image">
-            <a:extLst>
-              <a:ext uri="{FF2B5EF4-FFF2-40B4-BE49-F238E27FC236}">
-                <a16:creationId xmlns:a16="http://schemas.microsoft.com/office/drawing/2014/main" id="{0274FF14-135E-47F9-872A-76CDB252063E}"/>
-              </a:ext>
-            </a:extLst>
-          </p:cNvPr>
-          <p:cNvPicPr>
-            <a:picLocks noChangeAspect="1" noChangeArrowheads="1"/>
-          </p:cNvPicPr>
-          <p:nvPr/>
-        </p:nvPicPr>
-        <p:blipFill>
-          <a:blip r:embed="rId4">
-            <a:extLst>
-              <a:ext uri="{28A0092B-C50C-407E-A947-70E740481C1C}">
-                <a14:useLocalDpi xmlns:a14="http://schemas.microsoft.com/office/drawing/2010/main" val="0"/>
-              </a:ext>
-            </a:extLst>
-          </a:blip>
-          <a:srcRect/>
-          <a:stretch>
-            <a:fillRect/>
-          </a:stretch>
-        </p:blipFill>
-        <p:spPr bwMode="auto">
-          <a:xfrm>
-            <a:off x="3981132" y="809653"/>
-            <a:ext cx="2647950" cy="2143125"/>
-          </a:xfrm>
-          <a:prstGeom prst="rect">
-            <a:avLst/>
-          </a:prstGeom>
-          <a:gradFill>
-            <a:gsLst>
-              <a:gs pos="0">
-                <a:schemeClr val="accent3">
-                  <a:lumMod val="20000"/>
-                  <a:lumOff val="80000"/>
-                </a:schemeClr>
-              </a:gs>
-              <a:gs pos="50000">
-                <a:schemeClr val="accent3">
-                  <a:lumMod val="20000"/>
-                  <a:lumOff val="80000"/>
-                </a:schemeClr>
-              </a:gs>
-              <a:gs pos="100000">
-                <a:schemeClr val="bg1"/>
-              </a:gs>
-            </a:gsLst>
-            <a:lin ang="5400000" scaled="1"/>
-          </a:gradFill>
-          <a:ln>
-            <a:solidFill>
-              <a:schemeClr val="tx1"/>
-            </a:solidFill>
-          </a:ln>
-          <a:extLst/>
         </p:spPr>
       </p:pic>
       <p:pic>
@@ -35509,6 +30737,1462 @@
       <p:bldP spid="33" grpId="0" animBg="1"/>
     </p:bldLst>
   </p:timing>
+</p:sld>
+</file>
+
+<file path=ppt/slides/slide8.xml><?xml version="1.0" encoding="utf-8"?>
+<p:sld xmlns:a="http://schemas.openxmlformats.org/drawingml/2006/main" xmlns:r="http://schemas.openxmlformats.org/officeDocument/2006/relationships" xmlns:p="http://schemas.openxmlformats.org/presentationml/2006/main">
+  <p:cSld>
+    <p:spTree>
+      <p:nvGrpSpPr>
+        <p:cNvPr id="1" name=""/>
+        <p:cNvGrpSpPr/>
+        <p:nvPr/>
+      </p:nvGrpSpPr>
+      <p:grpSpPr>
+        <a:xfrm>
+          <a:off x="0" y="0"/>
+          <a:ext cx="0" cy="0"/>
+          <a:chOff x="0" y="0"/>
+          <a:chExt cx="0" cy="0"/>
+        </a:xfrm>
+      </p:grpSpPr>
+      <p:sp>
+        <p:nvSpPr>
+          <p:cNvPr id="24" name="Title 23"/>
+          <p:cNvSpPr>
+            <a:spLocks noGrp="1"/>
+          </p:cNvSpPr>
+          <p:nvPr>
+            <p:ph type="title"/>
+          </p:nvPr>
+        </p:nvSpPr>
+        <p:spPr>
+          <a:xfrm>
+            <a:off x="504001" y="504000"/>
+            <a:ext cx="11186476" cy="369332"/>
+          </a:xfrm>
+        </p:spPr>
+        <p:txBody>
+          <a:bodyPr/>
+          <a:lstStyle/>
+          <a:p>
+            <a:r>
+              <a:rPr lang="en-US" dirty="0"/>
+              <a:t>Architecture overview – deployments</a:t>
+            </a:r>
+          </a:p>
+        </p:txBody>
+      </p:sp>
+      <p:sp>
+        <p:nvSpPr>
+          <p:cNvPr id="41" name="Rectangle 40"/>
+          <p:cNvSpPr/>
+          <p:nvPr/>
+        </p:nvSpPr>
+        <p:spPr bwMode="gray">
+          <a:xfrm>
+            <a:off x="504000" y="1470876"/>
+            <a:ext cx="11246039" cy="4781878"/>
+          </a:xfrm>
+          <a:prstGeom prst="rect">
+            <a:avLst/>
+          </a:prstGeom>
+          <a:solidFill>
+            <a:schemeClr val="accent1">
+              <a:lumMod val="40000"/>
+              <a:lumOff val="60000"/>
+            </a:schemeClr>
+          </a:solidFill>
+          <a:ln>
+            <a:headEnd/>
+            <a:tailEnd/>
+          </a:ln>
+        </p:spPr>
+        <p:style>
+          <a:lnRef idx="1">
+            <a:schemeClr val="accent1"/>
+          </a:lnRef>
+          <a:fillRef idx="2">
+            <a:schemeClr val="accent1"/>
+          </a:fillRef>
+          <a:effectRef idx="1">
+            <a:schemeClr val="accent1"/>
+          </a:effectRef>
+          <a:fontRef idx="minor">
+            <a:schemeClr val="dk1"/>
+          </a:fontRef>
+        </p:style>
+        <p:txBody>
+          <a:bodyPr lIns="90000" tIns="72000" rIns="90000" bIns="72000" rtlCol="0" anchor="b"/>
+          <a:lstStyle/>
+          <a:p>
+            <a:pPr marR="0" defTabSz="914400" eaLnBrk="1" fontAlgn="base" latinLnBrk="0" hangingPunct="1">
+              <a:lnSpc>
+                <a:spcPct val="100000"/>
+              </a:lnSpc>
+              <a:spcBef>
+                <a:spcPct val="50000"/>
+              </a:spcBef>
+              <a:spcAft>
+                <a:spcPct val="0"/>
+              </a:spcAft>
+              <a:buClr>
+                <a:srgbClr val="F0AB00"/>
+              </a:buClr>
+              <a:buSzPct val="80000"/>
+              <a:tabLst/>
+            </a:pPr>
+            <a:r>
+              <a:rPr lang="de-DE" sz="2000" b="1" kern="0" noProof="0" dirty="0">
+                <a:ea typeface="Arial Unicode MS" pitchFamily="34" charset="-128"/>
+                <a:cs typeface="Arial Unicode MS" pitchFamily="34" charset="-128"/>
+              </a:rPr>
+              <a:t>Namespace: </a:t>
+            </a:r>
+            <a:r>
+              <a:rPr lang="de-DE" sz="2000" b="1" kern="0" noProof="0" dirty="0" err="1">
+                <a:ea typeface="Arial Unicode MS" pitchFamily="34" charset="-128"/>
+                <a:cs typeface="Arial Unicode MS" pitchFamily="34" charset="-128"/>
+              </a:rPr>
+              <a:t>your</a:t>
+            </a:r>
+            <a:r>
+              <a:rPr lang="de-DE" sz="2000" b="1" kern="0" noProof="0" dirty="0">
+                <a:ea typeface="Arial Unicode MS" pitchFamily="34" charset="-128"/>
+                <a:cs typeface="Arial Unicode MS" pitchFamily="34" charset="-128"/>
+              </a:rPr>
+              <a:t>-namespace</a:t>
+            </a:r>
+            <a:endParaRPr kumimoji="0" lang="de-DE" sz="2400" b="1" i="0" strike="noStrike" kern="0" cap="none" spc="0" normalizeH="0" baseline="0" noProof="0" dirty="0">
+              <a:ln>
+                <a:noFill/>
+              </a:ln>
+              <a:effectLst/>
+              <a:uLnTx/>
+              <a:uFillTx/>
+              <a:ea typeface="Arial Unicode MS" pitchFamily="34" charset="-128"/>
+              <a:cs typeface="Arial Unicode MS" pitchFamily="34" charset="-128"/>
+            </a:endParaRPr>
+          </a:p>
+        </p:txBody>
+      </p:sp>
+      <p:sp>
+        <p:nvSpPr>
+          <p:cNvPr id="8" name="Rectangle: Rounded Corners 7"/>
+          <p:cNvSpPr/>
+          <p:nvPr/>
+        </p:nvSpPr>
+        <p:spPr bwMode="gray">
+          <a:xfrm>
+            <a:off x="1433799" y="1741715"/>
+            <a:ext cx="9326880" cy="4024766"/>
+          </a:xfrm>
+          <a:prstGeom prst="roundRect">
+            <a:avLst/>
+          </a:prstGeom>
+          <a:ln>
+            <a:headEnd/>
+            <a:tailEnd/>
+          </a:ln>
+        </p:spPr>
+        <p:style>
+          <a:lnRef idx="1">
+            <a:schemeClr val="dk1"/>
+          </a:lnRef>
+          <a:fillRef idx="2">
+            <a:schemeClr val="dk1"/>
+          </a:fillRef>
+          <a:effectRef idx="1">
+            <a:schemeClr val="dk1"/>
+          </a:effectRef>
+          <a:fontRef idx="minor">
+            <a:schemeClr val="dk1"/>
+          </a:fontRef>
+        </p:style>
+        <p:txBody>
+          <a:bodyPr lIns="90000" tIns="72000" rIns="90000" bIns="72000" rtlCol="0" anchor="t"/>
+          <a:lstStyle/>
+          <a:p>
+            <a:pPr marR="0" algn="ctr" defTabSz="914400" eaLnBrk="1" fontAlgn="base" latinLnBrk="0" hangingPunct="1">
+              <a:lnSpc>
+                <a:spcPct val="100000"/>
+              </a:lnSpc>
+              <a:spcBef>
+                <a:spcPct val="50000"/>
+              </a:spcBef>
+              <a:spcAft>
+                <a:spcPct val="0"/>
+              </a:spcAft>
+              <a:buClr>
+                <a:srgbClr val="F0AB00"/>
+              </a:buClr>
+              <a:buSzPct val="80000"/>
+              <a:tabLst/>
+            </a:pPr>
+            <a:r>
+              <a:rPr lang="en-US" sz="1800" b="1" kern="0" dirty="0">
+                <a:ea typeface="Arial Unicode MS" pitchFamily="34" charset="-128"/>
+                <a:cs typeface="Arial Unicode MS" pitchFamily="34" charset="-128"/>
+              </a:rPr>
+              <a:t>Deployment</a:t>
+            </a:r>
+            <a:endParaRPr kumimoji="0" lang="en-US" sz="1800" b="1" i="0" u="none" strike="noStrike" kern="0" cap="none" spc="0" normalizeH="0" baseline="0" noProof="0" dirty="0" err="1">
+              <a:ln>
+                <a:noFill/>
+              </a:ln>
+              <a:effectLst/>
+              <a:uLnTx/>
+              <a:uFillTx/>
+              <a:ea typeface="Arial Unicode MS" pitchFamily="34" charset="-128"/>
+              <a:cs typeface="Arial Unicode MS" pitchFamily="34" charset="-128"/>
+            </a:endParaRPr>
+          </a:p>
+        </p:txBody>
+      </p:sp>
+      <p:grpSp>
+        <p:nvGrpSpPr>
+          <p:cNvPr id="6" name="Group 5"/>
+          <p:cNvGrpSpPr/>
+          <p:nvPr/>
+        </p:nvGrpSpPr>
+        <p:grpSpPr>
+          <a:xfrm>
+            <a:off x="1959967" y="3135082"/>
+            <a:ext cx="8334103" cy="2360024"/>
+            <a:chOff x="1219200" y="3126373"/>
+            <a:chExt cx="8334103" cy="2360024"/>
+          </a:xfrm>
+        </p:grpSpPr>
+        <p:sp>
+          <p:nvSpPr>
+            <p:cNvPr id="3" name="Rectangle 2"/>
+            <p:cNvSpPr/>
+            <p:nvPr/>
+          </p:nvSpPr>
+          <p:spPr bwMode="gray">
+            <a:xfrm>
+              <a:off x="1219200" y="3126373"/>
+              <a:ext cx="8334103" cy="2360024"/>
+            </a:xfrm>
+            <a:prstGeom prst="rect">
+              <a:avLst/>
+            </a:prstGeom>
+            <a:ln>
+              <a:headEnd/>
+              <a:tailEnd/>
+            </a:ln>
+          </p:spPr>
+          <p:style>
+            <a:lnRef idx="2">
+              <a:schemeClr val="accent1"/>
+            </a:lnRef>
+            <a:fillRef idx="1">
+              <a:schemeClr val="lt1"/>
+            </a:fillRef>
+            <a:effectRef idx="0">
+              <a:schemeClr val="accent1"/>
+            </a:effectRef>
+            <a:fontRef idx="minor">
+              <a:schemeClr val="dk1"/>
+            </a:fontRef>
+          </p:style>
+          <p:txBody>
+            <a:bodyPr lIns="90000" tIns="72000" rIns="90000" bIns="72000" rtlCol="0" anchor="t"/>
+            <a:lstStyle/>
+            <a:p>
+              <a:pPr marR="0" algn="ctr" defTabSz="914400" eaLnBrk="1" fontAlgn="base" latinLnBrk="0" hangingPunct="1">
+                <a:lnSpc>
+                  <a:spcPct val="100000"/>
+                </a:lnSpc>
+                <a:spcBef>
+                  <a:spcPct val="50000"/>
+                </a:spcBef>
+                <a:spcAft>
+                  <a:spcPct val="0"/>
+                </a:spcAft>
+                <a:buClr>
+                  <a:srgbClr val="F0AB00"/>
+                </a:buClr>
+                <a:buSzPct val="80000"/>
+                <a:tabLst/>
+              </a:pPr>
+              <a:r>
+                <a:rPr kumimoji="0" lang="en-US" sz="1800" b="1" i="0" u="none" strike="noStrike" kern="0" cap="none" spc="0" normalizeH="0" baseline="0" noProof="0" dirty="0" err="1">
+                  <a:ln>
+                    <a:noFill/>
+                  </a:ln>
+                  <a:effectLst/>
+                  <a:uLnTx/>
+                  <a:uFillTx/>
+                  <a:ea typeface="Arial Unicode MS" pitchFamily="34" charset="-128"/>
+                  <a:cs typeface="Arial Unicode MS" pitchFamily="34" charset="-128"/>
+                </a:rPr>
+                <a:t>ReplicaSet</a:t>
+              </a:r>
+              <a:endParaRPr kumimoji="0" lang="en-US" sz="1800" b="1" i="0" u="none" strike="noStrike" kern="0" cap="none" spc="0" normalizeH="0" baseline="0" noProof="0" dirty="0">
+                <a:ln>
+                  <a:noFill/>
+                </a:ln>
+                <a:effectLst/>
+                <a:uLnTx/>
+                <a:uFillTx/>
+                <a:ea typeface="Arial Unicode MS" pitchFamily="34" charset="-128"/>
+                <a:cs typeface="Arial Unicode MS" pitchFamily="34" charset="-128"/>
+              </a:endParaRPr>
+            </a:p>
+          </p:txBody>
+        </p:sp>
+        <p:grpSp>
+          <p:nvGrpSpPr>
+            <p:cNvPr id="2" name="Group 1"/>
+            <p:cNvGrpSpPr/>
+            <p:nvPr/>
+          </p:nvGrpSpPr>
+          <p:grpSpPr>
+            <a:xfrm>
+              <a:off x="1367932" y="4305495"/>
+              <a:ext cx="2227644" cy="956786"/>
+              <a:chOff x="1367932" y="4305495"/>
+              <a:chExt cx="2227644" cy="956786"/>
+            </a:xfrm>
+          </p:grpSpPr>
+          <p:sp>
+            <p:nvSpPr>
+              <p:cNvPr id="42" name="Rectangle 41"/>
+              <p:cNvSpPr/>
+              <p:nvPr/>
+            </p:nvSpPr>
+            <p:spPr bwMode="gray">
+              <a:xfrm>
+                <a:off x="2386981" y="4488375"/>
+                <a:ext cx="1208595" cy="773906"/>
+              </a:xfrm>
+              <a:prstGeom prst="rect">
+                <a:avLst/>
+              </a:prstGeom>
+              <a:ln>
+                <a:headEnd/>
+                <a:tailEnd/>
+              </a:ln>
+            </p:spPr>
+            <p:style>
+              <a:lnRef idx="2">
+                <a:schemeClr val="accent2">
+                  <a:shade val="50000"/>
+                </a:schemeClr>
+              </a:lnRef>
+              <a:fillRef idx="1">
+                <a:schemeClr val="accent2"/>
+              </a:fillRef>
+              <a:effectRef idx="0">
+                <a:schemeClr val="accent2"/>
+              </a:effectRef>
+              <a:fontRef idx="minor">
+                <a:schemeClr val="lt1"/>
+              </a:fontRef>
+            </p:style>
+            <p:txBody>
+              <a:bodyPr lIns="90000" tIns="72000" rIns="90000" bIns="72000" rtlCol="0" anchor="ctr"/>
+              <a:lstStyle/>
+              <a:p>
+                <a:pPr marR="0" algn="ctr" defTabSz="914400" eaLnBrk="1" fontAlgn="base" latinLnBrk="0" hangingPunct="1">
+                  <a:lnSpc>
+                    <a:spcPct val="100000"/>
+                  </a:lnSpc>
+                  <a:spcBef>
+                    <a:spcPct val="50000"/>
+                  </a:spcBef>
+                  <a:spcAft>
+                    <a:spcPct val="0"/>
+                  </a:spcAft>
+                  <a:buClr>
+                    <a:srgbClr val="F0AB00"/>
+                  </a:buClr>
+                  <a:buSzPct val="80000"/>
+                  <a:tabLst/>
+                </a:pPr>
+                <a:r>
+                  <a:rPr lang="de-DE" sz="1600" b="1" kern="0" noProof="0" dirty="0" err="1">
+                    <a:ea typeface="Arial Unicode MS" pitchFamily="34" charset="-128"/>
+                    <a:cs typeface="Arial Unicode MS" pitchFamily="34" charset="-128"/>
+                  </a:rPr>
+                  <a:t>Pod</a:t>
+                </a:r>
+                <a:endParaRPr kumimoji="0" lang="de-DE" sz="1600" b="1" i="0" u="none" strike="noStrike" kern="0" cap="none" spc="0" normalizeH="0" baseline="0" noProof="0" dirty="0">
+                  <a:ln>
+                    <a:noFill/>
+                  </a:ln>
+                  <a:effectLst/>
+                  <a:uLnTx/>
+                  <a:uFillTx/>
+                  <a:ea typeface="Arial Unicode MS" pitchFamily="34" charset="-128"/>
+                  <a:cs typeface="Arial Unicode MS" pitchFamily="34" charset="-128"/>
+                </a:endParaRPr>
+              </a:p>
+            </p:txBody>
+          </p:sp>
+          <p:sp>
+            <p:nvSpPr>
+              <p:cNvPr id="14" name="Rectangle 13"/>
+              <p:cNvSpPr/>
+              <p:nvPr/>
+            </p:nvSpPr>
+            <p:spPr bwMode="gray">
+              <a:xfrm>
+                <a:off x="1367932" y="4305495"/>
+                <a:ext cx="1645920" cy="365760"/>
+              </a:xfrm>
+              <a:prstGeom prst="rect">
+                <a:avLst/>
+              </a:prstGeom>
+              <a:ln>
+                <a:headEnd/>
+                <a:tailEnd/>
+              </a:ln>
+            </p:spPr>
+            <p:style>
+              <a:lnRef idx="2">
+                <a:schemeClr val="accent2"/>
+              </a:lnRef>
+              <a:fillRef idx="1">
+                <a:schemeClr val="lt1"/>
+              </a:fillRef>
+              <a:effectRef idx="0">
+                <a:schemeClr val="accent2"/>
+              </a:effectRef>
+              <a:fontRef idx="minor">
+                <a:schemeClr val="dk1"/>
+              </a:fontRef>
+            </p:style>
+            <p:txBody>
+              <a:bodyPr lIns="90000" tIns="72000" rIns="90000" bIns="72000" rtlCol="0" anchor="ctr"/>
+              <a:lstStyle/>
+              <a:p>
+                <a:pPr marR="0" algn="ctr" defTabSz="914400" eaLnBrk="1" fontAlgn="base" latinLnBrk="0" hangingPunct="1">
+                  <a:lnSpc>
+                    <a:spcPct val="100000"/>
+                  </a:lnSpc>
+                  <a:spcBef>
+                    <a:spcPct val="50000"/>
+                  </a:spcBef>
+                  <a:spcAft>
+                    <a:spcPct val="0"/>
+                  </a:spcAft>
+                  <a:buClr>
+                    <a:srgbClr val="F0AB00"/>
+                  </a:buClr>
+                  <a:buSzPct val="80000"/>
+                  <a:tabLst/>
+                </a:pPr>
+                <a:r>
+                  <a:rPr lang="de-DE" sz="1800" kern="0" dirty="0" err="1">
+                    <a:ea typeface="Arial Unicode MS" pitchFamily="34" charset="-128"/>
+                    <a:cs typeface="Arial Unicode MS" pitchFamily="34" charset="-128"/>
+                  </a:rPr>
+                  <a:t>app</a:t>
+                </a:r>
+                <a:r>
+                  <a:rPr lang="de-DE" sz="1800" kern="0" dirty="0">
+                    <a:ea typeface="Arial Unicode MS" pitchFamily="34" charset="-128"/>
+                    <a:cs typeface="Arial Unicode MS" pitchFamily="34" charset="-128"/>
+                  </a:rPr>
+                  <a:t>: </a:t>
+                </a:r>
+                <a:r>
+                  <a:rPr lang="de-DE" sz="1800" kern="0" dirty="0" err="1">
+                    <a:ea typeface="Arial Unicode MS" pitchFamily="34" charset="-128"/>
+                    <a:cs typeface="Arial Unicode MS" pitchFamily="34" charset="-128"/>
+                  </a:rPr>
+                  <a:t>nginx</a:t>
+                </a:r>
+                <a:endParaRPr kumimoji="0" lang="de-DE" sz="1800" b="0" i="0" u="none" strike="noStrike" kern="0" cap="none" spc="0" normalizeH="0" baseline="0" noProof="0" dirty="0">
+                  <a:ln>
+                    <a:noFill/>
+                  </a:ln>
+                  <a:effectLst/>
+                  <a:uLnTx/>
+                  <a:uFillTx/>
+                  <a:ea typeface="Arial Unicode MS" pitchFamily="34" charset="-128"/>
+                  <a:cs typeface="Arial Unicode MS" pitchFamily="34" charset="-128"/>
+                </a:endParaRPr>
+              </a:p>
+            </p:txBody>
+          </p:sp>
+        </p:grpSp>
+        <p:grpSp>
+          <p:nvGrpSpPr>
+            <p:cNvPr id="10" name="Group 9"/>
+            <p:cNvGrpSpPr/>
+            <p:nvPr/>
+          </p:nvGrpSpPr>
+          <p:grpSpPr>
+            <a:xfrm>
+              <a:off x="3899375" y="4305495"/>
+              <a:ext cx="2227644" cy="956786"/>
+              <a:chOff x="1367932" y="4305495"/>
+              <a:chExt cx="2227644" cy="956786"/>
+            </a:xfrm>
+          </p:grpSpPr>
+          <p:sp>
+            <p:nvSpPr>
+              <p:cNvPr id="11" name="Rectangle 10"/>
+              <p:cNvSpPr/>
+              <p:nvPr/>
+            </p:nvSpPr>
+            <p:spPr bwMode="gray">
+              <a:xfrm>
+                <a:off x="2386981" y="4488375"/>
+                <a:ext cx="1208595" cy="773906"/>
+              </a:xfrm>
+              <a:prstGeom prst="rect">
+                <a:avLst/>
+              </a:prstGeom>
+              <a:ln>
+                <a:headEnd/>
+                <a:tailEnd/>
+              </a:ln>
+            </p:spPr>
+            <p:style>
+              <a:lnRef idx="2">
+                <a:schemeClr val="accent2">
+                  <a:shade val="50000"/>
+                </a:schemeClr>
+              </a:lnRef>
+              <a:fillRef idx="1">
+                <a:schemeClr val="accent2"/>
+              </a:fillRef>
+              <a:effectRef idx="0">
+                <a:schemeClr val="accent2"/>
+              </a:effectRef>
+              <a:fontRef idx="minor">
+                <a:schemeClr val="lt1"/>
+              </a:fontRef>
+            </p:style>
+            <p:txBody>
+              <a:bodyPr lIns="90000" tIns="72000" rIns="90000" bIns="72000" rtlCol="0" anchor="ctr"/>
+              <a:lstStyle/>
+              <a:p>
+                <a:pPr marR="0" algn="ctr" defTabSz="914400" eaLnBrk="1" fontAlgn="base" latinLnBrk="0" hangingPunct="1">
+                  <a:lnSpc>
+                    <a:spcPct val="100000"/>
+                  </a:lnSpc>
+                  <a:spcBef>
+                    <a:spcPct val="50000"/>
+                  </a:spcBef>
+                  <a:spcAft>
+                    <a:spcPct val="0"/>
+                  </a:spcAft>
+                  <a:buClr>
+                    <a:srgbClr val="F0AB00"/>
+                  </a:buClr>
+                  <a:buSzPct val="80000"/>
+                  <a:tabLst/>
+                </a:pPr>
+                <a:r>
+                  <a:rPr lang="de-DE" sz="1600" b="1" kern="0" noProof="0" dirty="0" err="1">
+                    <a:ea typeface="Arial Unicode MS" pitchFamily="34" charset="-128"/>
+                    <a:cs typeface="Arial Unicode MS" pitchFamily="34" charset="-128"/>
+                  </a:rPr>
+                  <a:t>Pod</a:t>
+                </a:r>
+                <a:endParaRPr kumimoji="0" lang="de-DE" sz="1600" b="1" i="0" u="none" strike="noStrike" kern="0" cap="none" spc="0" normalizeH="0" baseline="0" noProof="0" dirty="0">
+                  <a:ln>
+                    <a:noFill/>
+                  </a:ln>
+                  <a:effectLst/>
+                  <a:uLnTx/>
+                  <a:uFillTx/>
+                  <a:ea typeface="Arial Unicode MS" pitchFamily="34" charset="-128"/>
+                  <a:cs typeface="Arial Unicode MS" pitchFamily="34" charset="-128"/>
+                </a:endParaRPr>
+              </a:p>
+            </p:txBody>
+          </p:sp>
+          <p:sp>
+            <p:nvSpPr>
+              <p:cNvPr id="12" name="Rectangle 11"/>
+              <p:cNvSpPr/>
+              <p:nvPr/>
+            </p:nvSpPr>
+            <p:spPr bwMode="gray">
+              <a:xfrm>
+                <a:off x="1367932" y="4305495"/>
+                <a:ext cx="1645920" cy="365760"/>
+              </a:xfrm>
+              <a:prstGeom prst="rect">
+                <a:avLst/>
+              </a:prstGeom>
+              <a:ln>
+                <a:headEnd/>
+                <a:tailEnd/>
+              </a:ln>
+            </p:spPr>
+            <p:style>
+              <a:lnRef idx="2">
+                <a:schemeClr val="accent2"/>
+              </a:lnRef>
+              <a:fillRef idx="1">
+                <a:schemeClr val="lt1"/>
+              </a:fillRef>
+              <a:effectRef idx="0">
+                <a:schemeClr val="accent2"/>
+              </a:effectRef>
+              <a:fontRef idx="minor">
+                <a:schemeClr val="dk1"/>
+              </a:fontRef>
+            </p:style>
+            <p:txBody>
+              <a:bodyPr lIns="90000" tIns="72000" rIns="90000" bIns="72000" rtlCol="0" anchor="ctr"/>
+              <a:lstStyle/>
+              <a:p>
+                <a:pPr marR="0" algn="ctr" defTabSz="914400" eaLnBrk="1" fontAlgn="base" latinLnBrk="0" hangingPunct="1">
+                  <a:lnSpc>
+                    <a:spcPct val="100000"/>
+                  </a:lnSpc>
+                  <a:spcBef>
+                    <a:spcPct val="50000"/>
+                  </a:spcBef>
+                  <a:spcAft>
+                    <a:spcPct val="0"/>
+                  </a:spcAft>
+                  <a:buClr>
+                    <a:srgbClr val="F0AB00"/>
+                  </a:buClr>
+                  <a:buSzPct val="80000"/>
+                  <a:tabLst/>
+                </a:pPr>
+                <a:r>
+                  <a:rPr lang="de-DE" sz="1800" kern="0" dirty="0" err="1">
+                    <a:ea typeface="Arial Unicode MS" pitchFamily="34" charset="-128"/>
+                    <a:cs typeface="Arial Unicode MS" pitchFamily="34" charset="-128"/>
+                  </a:rPr>
+                  <a:t>app</a:t>
+                </a:r>
+                <a:r>
+                  <a:rPr lang="de-DE" sz="1800" kern="0" dirty="0">
+                    <a:ea typeface="Arial Unicode MS" pitchFamily="34" charset="-128"/>
+                    <a:cs typeface="Arial Unicode MS" pitchFamily="34" charset="-128"/>
+                  </a:rPr>
+                  <a:t>: </a:t>
+                </a:r>
+                <a:r>
+                  <a:rPr lang="de-DE" sz="1800" kern="0" dirty="0" err="1">
+                    <a:ea typeface="Arial Unicode MS" pitchFamily="34" charset="-128"/>
+                    <a:cs typeface="Arial Unicode MS" pitchFamily="34" charset="-128"/>
+                  </a:rPr>
+                  <a:t>nginx</a:t>
+                </a:r>
+                <a:endParaRPr kumimoji="0" lang="de-DE" sz="1800" b="0" i="0" u="none" strike="noStrike" kern="0" cap="none" spc="0" normalizeH="0" baseline="0" noProof="0" dirty="0">
+                  <a:ln>
+                    <a:noFill/>
+                  </a:ln>
+                  <a:effectLst/>
+                  <a:uLnTx/>
+                  <a:uFillTx/>
+                  <a:ea typeface="Arial Unicode MS" pitchFamily="34" charset="-128"/>
+                  <a:cs typeface="Arial Unicode MS" pitchFamily="34" charset="-128"/>
+                </a:endParaRPr>
+              </a:p>
+            </p:txBody>
+          </p:sp>
+        </p:grpSp>
+        <p:grpSp>
+          <p:nvGrpSpPr>
+            <p:cNvPr id="13" name="Group 12"/>
+            <p:cNvGrpSpPr/>
+            <p:nvPr/>
+          </p:nvGrpSpPr>
+          <p:grpSpPr>
+            <a:xfrm>
+              <a:off x="6430818" y="4305495"/>
+              <a:ext cx="2227644" cy="956786"/>
+              <a:chOff x="1367932" y="4305495"/>
+              <a:chExt cx="2227644" cy="956786"/>
+            </a:xfrm>
+          </p:grpSpPr>
+          <p:sp>
+            <p:nvSpPr>
+              <p:cNvPr id="15" name="Rectangle 14"/>
+              <p:cNvSpPr/>
+              <p:nvPr/>
+            </p:nvSpPr>
+            <p:spPr bwMode="gray">
+              <a:xfrm>
+                <a:off x="2386981" y="4488375"/>
+                <a:ext cx="1208595" cy="773906"/>
+              </a:xfrm>
+              <a:prstGeom prst="rect">
+                <a:avLst/>
+              </a:prstGeom>
+              <a:ln>
+                <a:headEnd/>
+                <a:tailEnd/>
+              </a:ln>
+            </p:spPr>
+            <p:style>
+              <a:lnRef idx="2">
+                <a:schemeClr val="accent2">
+                  <a:shade val="50000"/>
+                </a:schemeClr>
+              </a:lnRef>
+              <a:fillRef idx="1">
+                <a:schemeClr val="accent2"/>
+              </a:fillRef>
+              <a:effectRef idx="0">
+                <a:schemeClr val="accent2"/>
+              </a:effectRef>
+              <a:fontRef idx="minor">
+                <a:schemeClr val="lt1"/>
+              </a:fontRef>
+            </p:style>
+            <p:txBody>
+              <a:bodyPr lIns="90000" tIns="72000" rIns="90000" bIns="72000" rtlCol="0" anchor="ctr"/>
+              <a:lstStyle/>
+              <a:p>
+                <a:pPr marR="0" algn="ctr" defTabSz="914400" eaLnBrk="1" fontAlgn="base" latinLnBrk="0" hangingPunct="1">
+                  <a:lnSpc>
+                    <a:spcPct val="100000"/>
+                  </a:lnSpc>
+                  <a:spcBef>
+                    <a:spcPct val="50000"/>
+                  </a:spcBef>
+                  <a:spcAft>
+                    <a:spcPct val="0"/>
+                  </a:spcAft>
+                  <a:buClr>
+                    <a:srgbClr val="F0AB00"/>
+                  </a:buClr>
+                  <a:buSzPct val="80000"/>
+                  <a:tabLst/>
+                </a:pPr>
+                <a:r>
+                  <a:rPr lang="de-DE" sz="1600" b="1" kern="0" noProof="0" dirty="0" err="1">
+                    <a:ea typeface="Arial Unicode MS" pitchFamily="34" charset="-128"/>
+                    <a:cs typeface="Arial Unicode MS" pitchFamily="34" charset="-128"/>
+                  </a:rPr>
+                  <a:t>Pod</a:t>
+                </a:r>
+                <a:endParaRPr kumimoji="0" lang="de-DE" sz="1600" b="1" i="0" u="none" strike="noStrike" kern="0" cap="none" spc="0" normalizeH="0" baseline="0" noProof="0" dirty="0">
+                  <a:ln>
+                    <a:noFill/>
+                  </a:ln>
+                  <a:effectLst/>
+                  <a:uLnTx/>
+                  <a:uFillTx/>
+                  <a:ea typeface="Arial Unicode MS" pitchFamily="34" charset="-128"/>
+                  <a:cs typeface="Arial Unicode MS" pitchFamily="34" charset="-128"/>
+                </a:endParaRPr>
+              </a:p>
+            </p:txBody>
+          </p:sp>
+          <p:sp>
+            <p:nvSpPr>
+              <p:cNvPr id="16" name="Rectangle 15"/>
+              <p:cNvSpPr/>
+              <p:nvPr/>
+            </p:nvSpPr>
+            <p:spPr bwMode="gray">
+              <a:xfrm>
+                <a:off x="1367932" y="4305495"/>
+                <a:ext cx="1645920" cy="365760"/>
+              </a:xfrm>
+              <a:prstGeom prst="rect">
+                <a:avLst/>
+              </a:prstGeom>
+              <a:ln>
+                <a:headEnd/>
+                <a:tailEnd/>
+              </a:ln>
+            </p:spPr>
+            <p:style>
+              <a:lnRef idx="2">
+                <a:schemeClr val="accent2"/>
+              </a:lnRef>
+              <a:fillRef idx="1">
+                <a:schemeClr val="lt1"/>
+              </a:fillRef>
+              <a:effectRef idx="0">
+                <a:schemeClr val="accent2"/>
+              </a:effectRef>
+              <a:fontRef idx="minor">
+                <a:schemeClr val="dk1"/>
+              </a:fontRef>
+            </p:style>
+            <p:txBody>
+              <a:bodyPr lIns="90000" tIns="72000" rIns="90000" bIns="72000" rtlCol="0" anchor="ctr"/>
+              <a:lstStyle/>
+              <a:p>
+                <a:pPr marR="0" algn="ctr" defTabSz="914400" eaLnBrk="1" fontAlgn="base" latinLnBrk="0" hangingPunct="1">
+                  <a:lnSpc>
+                    <a:spcPct val="100000"/>
+                  </a:lnSpc>
+                  <a:spcBef>
+                    <a:spcPct val="50000"/>
+                  </a:spcBef>
+                  <a:spcAft>
+                    <a:spcPct val="0"/>
+                  </a:spcAft>
+                  <a:buClr>
+                    <a:srgbClr val="F0AB00"/>
+                  </a:buClr>
+                  <a:buSzPct val="80000"/>
+                  <a:tabLst/>
+                </a:pPr>
+                <a:r>
+                  <a:rPr lang="de-DE" sz="1800" kern="0" dirty="0" err="1">
+                    <a:ea typeface="Arial Unicode MS" pitchFamily="34" charset="-128"/>
+                    <a:cs typeface="Arial Unicode MS" pitchFamily="34" charset="-128"/>
+                  </a:rPr>
+                  <a:t>app</a:t>
+                </a:r>
+                <a:r>
+                  <a:rPr lang="de-DE" sz="1800" kern="0" dirty="0">
+                    <a:ea typeface="Arial Unicode MS" pitchFamily="34" charset="-128"/>
+                    <a:cs typeface="Arial Unicode MS" pitchFamily="34" charset="-128"/>
+                  </a:rPr>
+                  <a:t>: </a:t>
+                </a:r>
+                <a:r>
+                  <a:rPr lang="de-DE" sz="1800" kern="0" dirty="0" err="1">
+                    <a:ea typeface="Arial Unicode MS" pitchFamily="34" charset="-128"/>
+                    <a:cs typeface="Arial Unicode MS" pitchFamily="34" charset="-128"/>
+                  </a:rPr>
+                  <a:t>nginx</a:t>
+                </a:r>
+                <a:endParaRPr kumimoji="0" lang="de-DE" sz="1800" b="0" i="0" u="none" strike="noStrike" kern="0" cap="none" spc="0" normalizeH="0" baseline="0" noProof="0" dirty="0">
+                  <a:ln>
+                    <a:noFill/>
+                  </a:ln>
+                  <a:effectLst/>
+                  <a:uLnTx/>
+                  <a:uFillTx/>
+                  <a:ea typeface="Arial Unicode MS" pitchFamily="34" charset="-128"/>
+                  <a:cs typeface="Arial Unicode MS" pitchFamily="34" charset="-128"/>
+                </a:endParaRPr>
+              </a:p>
+            </p:txBody>
+          </p:sp>
+        </p:grpSp>
+        <p:sp>
+          <p:nvSpPr>
+            <p:cNvPr id="5" name="Flowchart: Document 4"/>
+            <p:cNvSpPr/>
+            <p:nvPr/>
+          </p:nvSpPr>
+          <p:spPr bwMode="gray">
+            <a:xfrm>
+              <a:off x="1367932" y="3306309"/>
+              <a:ext cx="1506583" cy="766354"/>
+            </a:xfrm>
+            <a:prstGeom prst="flowChartDocument">
+              <a:avLst/>
+            </a:prstGeom>
+            <a:ln>
+              <a:headEnd/>
+              <a:tailEnd/>
+            </a:ln>
+          </p:spPr>
+          <p:style>
+            <a:lnRef idx="2">
+              <a:schemeClr val="accent5"/>
+            </a:lnRef>
+            <a:fillRef idx="1">
+              <a:schemeClr val="lt1"/>
+            </a:fillRef>
+            <a:effectRef idx="0">
+              <a:schemeClr val="accent5"/>
+            </a:effectRef>
+            <a:fontRef idx="minor">
+              <a:schemeClr val="dk1"/>
+            </a:fontRef>
+          </p:style>
+          <p:txBody>
+            <a:bodyPr lIns="90000" tIns="72000" rIns="90000" bIns="72000" rtlCol="0" anchor="ctr"/>
+            <a:lstStyle/>
+            <a:p>
+              <a:pPr algn="ctr" defTabSz="914400" fontAlgn="base">
+                <a:spcBef>
+                  <a:spcPct val="50000"/>
+                </a:spcBef>
+                <a:spcAft>
+                  <a:spcPct val="0"/>
+                </a:spcAft>
+                <a:buClr>
+                  <a:srgbClr val="F0AB00"/>
+                </a:buClr>
+                <a:buSzPct val="80000"/>
+              </a:pPr>
+              <a:r>
+                <a:rPr lang="en-US" sz="1800" kern="0" dirty="0">
+                  <a:ea typeface="Arial Unicode MS" pitchFamily="34" charset="-128"/>
+                  <a:cs typeface="Arial Unicode MS" pitchFamily="34" charset="-128"/>
+                </a:rPr>
+                <a:t>Selector: </a:t>
+              </a:r>
+              <a:r>
+                <a:rPr lang="en-US" sz="1800" kern="0" dirty="0" err="1">
+                  <a:ea typeface="Arial Unicode MS" pitchFamily="34" charset="-128"/>
+                  <a:cs typeface="Arial Unicode MS" pitchFamily="34" charset="-128"/>
+                </a:rPr>
+                <a:t>app:nginx</a:t>
+              </a:r>
+              <a:endParaRPr lang="en-US" sz="1800" kern="0" dirty="0">
+                <a:ea typeface="Arial Unicode MS" pitchFamily="34" charset="-128"/>
+                <a:cs typeface="Arial Unicode MS" pitchFamily="34" charset="-128"/>
+              </a:endParaRPr>
+            </a:p>
+          </p:txBody>
+        </p:sp>
+      </p:grpSp>
+      <p:sp>
+        <p:nvSpPr>
+          <p:cNvPr id="17" name="Rectangle 16"/>
+          <p:cNvSpPr/>
+          <p:nvPr/>
+        </p:nvSpPr>
+        <p:spPr bwMode="gray">
+          <a:xfrm>
+            <a:off x="8479019" y="3311391"/>
+            <a:ext cx="1645920" cy="365760"/>
+          </a:xfrm>
+          <a:prstGeom prst="rect">
+            <a:avLst/>
+          </a:prstGeom>
+          <a:ln>
+            <a:headEnd/>
+            <a:tailEnd/>
+          </a:ln>
+        </p:spPr>
+        <p:style>
+          <a:lnRef idx="2">
+            <a:schemeClr val="accent2"/>
+          </a:lnRef>
+          <a:fillRef idx="1">
+            <a:schemeClr val="lt1"/>
+          </a:fillRef>
+          <a:effectRef idx="0">
+            <a:schemeClr val="accent2"/>
+          </a:effectRef>
+          <a:fontRef idx="minor">
+            <a:schemeClr val="dk1"/>
+          </a:fontRef>
+        </p:style>
+        <p:txBody>
+          <a:bodyPr lIns="90000" tIns="72000" rIns="90000" bIns="72000" rtlCol="0" anchor="ctr"/>
+          <a:lstStyle/>
+          <a:p>
+            <a:pPr marR="0" algn="ctr" defTabSz="914400" eaLnBrk="1" fontAlgn="base" latinLnBrk="0" hangingPunct="1">
+              <a:lnSpc>
+                <a:spcPct val="100000"/>
+              </a:lnSpc>
+              <a:spcBef>
+                <a:spcPct val="50000"/>
+              </a:spcBef>
+              <a:spcAft>
+                <a:spcPct val="0"/>
+              </a:spcAft>
+              <a:buClr>
+                <a:srgbClr val="F0AB00"/>
+              </a:buClr>
+              <a:buSzPct val="80000"/>
+              <a:tabLst/>
+            </a:pPr>
+            <a:r>
+              <a:rPr lang="de-DE" sz="1800" kern="0" dirty="0" err="1">
+                <a:ea typeface="Arial Unicode MS" pitchFamily="34" charset="-128"/>
+                <a:cs typeface="Arial Unicode MS" pitchFamily="34" charset="-128"/>
+              </a:rPr>
+              <a:t>app</a:t>
+            </a:r>
+            <a:r>
+              <a:rPr lang="de-DE" sz="1800" kern="0" dirty="0">
+                <a:ea typeface="Arial Unicode MS" pitchFamily="34" charset="-128"/>
+                <a:cs typeface="Arial Unicode MS" pitchFamily="34" charset="-128"/>
+              </a:rPr>
+              <a:t>: </a:t>
+            </a:r>
+            <a:r>
+              <a:rPr lang="de-DE" sz="1800" kern="0" dirty="0" err="1">
+                <a:ea typeface="Arial Unicode MS" pitchFamily="34" charset="-128"/>
+                <a:cs typeface="Arial Unicode MS" pitchFamily="34" charset="-128"/>
+              </a:rPr>
+              <a:t>nginx</a:t>
+            </a:r>
+            <a:endParaRPr kumimoji="0" lang="de-DE" sz="1800" b="0" i="0" u="none" strike="noStrike" kern="0" cap="none" spc="0" normalizeH="0" baseline="0" noProof="0" dirty="0">
+              <a:ln>
+                <a:noFill/>
+              </a:ln>
+              <a:effectLst/>
+              <a:uLnTx/>
+              <a:uFillTx/>
+              <a:ea typeface="Arial Unicode MS" pitchFamily="34" charset="-128"/>
+              <a:cs typeface="Arial Unicode MS" pitchFamily="34" charset="-128"/>
+            </a:endParaRPr>
+          </a:p>
+        </p:txBody>
+      </p:sp>
+      <p:sp>
+        <p:nvSpPr>
+          <p:cNvPr id="20" name="Flowchart: Document 19"/>
+          <p:cNvSpPr/>
+          <p:nvPr/>
+        </p:nvSpPr>
+        <p:spPr bwMode="gray">
+          <a:xfrm>
+            <a:off x="2108699" y="2116699"/>
+            <a:ext cx="1506583" cy="766354"/>
+          </a:xfrm>
+          <a:prstGeom prst="flowChartDocument">
+            <a:avLst/>
+          </a:prstGeom>
+          <a:ln>
+            <a:headEnd/>
+            <a:tailEnd/>
+          </a:ln>
+        </p:spPr>
+        <p:style>
+          <a:lnRef idx="2">
+            <a:schemeClr val="accent5"/>
+          </a:lnRef>
+          <a:fillRef idx="1">
+            <a:schemeClr val="lt1"/>
+          </a:fillRef>
+          <a:effectRef idx="0">
+            <a:schemeClr val="accent5"/>
+          </a:effectRef>
+          <a:fontRef idx="minor">
+            <a:schemeClr val="dk1"/>
+          </a:fontRef>
+        </p:style>
+        <p:txBody>
+          <a:bodyPr lIns="90000" tIns="72000" rIns="90000" bIns="72000" rtlCol="0" anchor="ctr"/>
+          <a:lstStyle/>
+          <a:p>
+            <a:pPr algn="ctr" defTabSz="914400" fontAlgn="base">
+              <a:spcBef>
+                <a:spcPct val="50000"/>
+              </a:spcBef>
+              <a:spcAft>
+                <a:spcPct val="0"/>
+              </a:spcAft>
+              <a:buClr>
+                <a:srgbClr val="F0AB00"/>
+              </a:buClr>
+              <a:buSzPct val="80000"/>
+            </a:pPr>
+            <a:r>
+              <a:rPr lang="en-US" sz="1800" kern="0" dirty="0">
+                <a:ea typeface="Arial Unicode MS" pitchFamily="34" charset="-128"/>
+                <a:cs typeface="Arial Unicode MS" pitchFamily="34" charset="-128"/>
+              </a:rPr>
+              <a:t>Selector: </a:t>
+            </a:r>
+            <a:r>
+              <a:rPr lang="en-US" sz="1800" kern="0" dirty="0" err="1">
+                <a:ea typeface="Arial Unicode MS" pitchFamily="34" charset="-128"/>
+                <a:cs typeface="Arial Unicode MS" pitchFamily="34" charset="-128"/>
+              </a:rPr>
+              <a:t>app:nginx</a:t>
+            </a:r>
+            <a:endParaRPr lang="en-US" sz="1800" kern="0" dirty="0">
+              <a:ea typeface="Arial Unicode MS" pitchFamily="34" charset="-128"/>
+              <a:cs typeface="Arial Unicode MS" pitchFamily="34" charset="-128"/>
+            </a:endParaRPr>
+          </a:p>
+        </p:txBody>
+      </p:sp>
+      <p:sp>
+        <p:nvSpPr>
+          <p:cNvPr id="21" name="Rectangle 20"/>
+          <p:cNvSpPr/>
+          <p:nvPr/>
+        </p:nvSpPr>
+        <p:spPr bwMode="gray">
+          <a:xfrm>
+            <a:off x="8479019" y="2112859"/>
+            <a:ext cx="1645920" cy="365760"/>
+          </a:xfrm>
+          <a:prstGeom prst="rect">
+            <a:avLst/>
+          </a:prstGeom>
+          <a:ln>
+            <a:headEnd/>
+            <a:tailEnd/>
+          </a:ln>
+        </p:spPr>
+        <p:style>
+          <a:lnRef idx="2">
+            <a:schemeClr val="accent2"/>
+          </a:lnRef>
+          <a:fillRef idx="1">
+            <a:schemeClr val="lt1"/>
+          </a:fillRef>
+          <a:effectRef idx="0">
+            <a:schemeClr val="accent2"/>
+          </a:effectRef>
+          <a:fontRef idx="minor">
+            <a:schemeClr val="dk1"/>
+          </a:fontRef>
+        </p:style>
+        <p:txBody>
+          <a:bodyPr lIns="90000" tIns="72000" rIns="90000" bIns="72000" rtlCol="0" anchor="ctr"/>
+          <a:lstStyle/>
+          <a:p>
+            <a:pPr marR="0" algn="ctr" defTabSz="914400" eaLnBrk="1" fontAlgn="base" latinLnBrk="0" hangingPunct="1">
+              <a:lnSpc>
+                <a:spcPct val="100000"/>
+              </a:lnSpc>
+              <a:spcBef>
+                <a:spcPct val="50000"/>
+              </a:spcBef>
+              <a:spcAft>
+                <a:spcPct val="0"/>
+              </a:spcAft>
+              <a:buClr>
+                <a:srgbClr val="F0AB00"/>
+              </a:buClr>
+              <a:buSzPct val="80000"/>
+              <a:tabLst/>
+            </a:pPr>
+            <a:r>
+              <a:rPr lang="de-DE" sz="1800" kern="0" dirty="0" err="1">
+                <a:ea typeface="Arial Unicode MS" pitchFamily="34" charset="-128"/>
+                <a:cs typeface="Arial Unicode MS" pitchFamily="34" charset="-128"/>
+              </a:rPr>
+              <a:t>app</a:t>
+            </a:r>
+            <a:r>
+              <a:rPr lang="de-DE" sz="1800" kern="0" dirty="0">
+                <a:ea typeface="Arial Unicode MS" pitchFamily="34" charset="-128"/>
+                <a:cs typeface="Arial Unicode MS" pitchFamily="34" charset="-128"/>
+              </a:rPr>
+              <a:t>: </a:t>
+            </a:r>
+            <a:r>
+              <a:rPr lang="de-DE" sz="1800" kern="0" dirty="0" err="1">
+                <a:ea typeface="Arial Unicode MS" pitchFamily="34" charset="-128"/>
+                <a:cs typeface="Arial Unicode MS" pitchFamily="34" charset="-128"/>
+              </a:rPr>
+              <a:t>nginx</a:t>
+            </a:r>
+            <a:endParaRPr kumimoji="0" lang="de-DE" sz="1800" b="0" i="0" u="none" strike="noStrike" kern="0" cap="none" spc="0" normalizeH="0" baseline="0" noProof="0" dirty="0">
+              <a:ln>
+                <a:noFill/>
+              </a:ln>
+              <a:effectLst/>
+              <a:uLnTx/>
+              <a:uFillTx/>
+              <a:ea typeface="Arial Unicode MS" pitchFamily="34" charset="-128"/>
+              <a:cs typeface="Arial Unicode MS" pitchFamily="34" charset="-128"/>
+            </a:endParaRPr>
+          </a:p>
+        </p:txBody>
+      </p:sp>
+    </p:spTree>
+    <p:extLst>
+      <p:ext uri="{BB962C8B-B14F-4D97-AF65-F5344CB8AC3E}">
+        <p14:creationId xmlns:p14="http://schemas.microsoft.com/office/powerpoint/2010/main" val="3012488707"/>
+      </p:ext>
+    </p:extLst>
+  </p:cSld>
+  <p:clrMapOvr>
+    <a:masterClrMapping/>
+  </p:clrMapOvr>
+</p:sld>
+</file>
+
+<file path=ppt/slides/slide9.xml><?xml version="1.0" encoding="utf-8"?>
+<p:sld xmlns:a="http://schemas.openxmlformats.org/drawingml/2006/main" xmlns:r="http://schemas.openxmlformats.org/officeDocument/2006/relationships" xmlns:p="http://schemas.openxmlformats.org/presentationml/2006/main">
+  <p:cSld>
+    <p:spTree>
+      <p:nvGrpSpPr>
+        <p:cNvPr id="1" name=""/>
+        <p:cNvGrpSpPr/>
+        <p:nvPr/>
+      </p:nvGrpSpPr>
+      <p:grpSpPr>
+        <a:xfrm>
+          <a:off x="0" y="0"/>
+          <a:ext cx="0" cy="0"/>
+          <a:chOff x="0" y="0"/>
+          <a:chExt cx="0" cy="0"/>
+        </a:xfrm>
+      </p:grpSpPr>
+      <p:pic>
+        <p:nvPicPr>
+          <p:cNvPr id="8" name="Picture 7">
+            <a:extLst>
+              <a:ext uri="{FF2B5EF4-FFF2-40B4-BE49-F238E27FC236}">
+                <a16:creationId xmlns:a16="http://schemas.microsoft.com/office/drawing/2014/main" id="{962A931E-4934-4B92-902B-4B22DC418132}"/>
+              </a:ext>
+            </a:extLst>
+          </p:cNvPr>
+          <p:cNvPicPr>
+            <a:picLocks noChangeAspect="1"/>
+          </p:cNvPicPr>
+          <p:nvPr/>
+        </p:nvPicPr>
+        <p:blipFill>
+          <a:blip r:embed="rId3"/>
+          <a:stretch>
+            <a:fillRect/>
+          </a:stretch>
+        </p:blipFill>
+        <p:spPr>
+          <a:xfrm>
+            <a:off x="7574616" y="651855"/>
+            <a:ext cx="3380968" cy="5673150"/>
+          </a:xfrm>
+          <a:prstGeom prst="rect">
+            <a:avLst/>
+          </a:prstGeom>
+          <a:ln>
+            <a:solidFill>
+              <a:schemeClr val="tx1"/>
+            </a:solidFill>
+          </a:ln>
+        </p:spPr>
+      </p:pic>
+      <p:sp>
+        <p:nvSpPr>
+          <p:cNvPr id="3" name="Text Placeholder 2"/>
+          <p:cNvSpPr>
+            <a:spLocks noGrp="1"/>
+          </p:cNvSpPr>
+          <p:nvPr>
+            <p:ph type="body" sz="quarter" idx="10"/>
+          </p:nvPr>
+        </p:nvSpPr>
+        <p:spPr>
+          <a:xfrm>
+            <a:off x="504001" y="1124700"/>
+            <a:ext cx="6506400" cy="4727460"/>
+          </a:xfrm>
+        </p:spPr>
+        <p:txBody>
+          <a:bodyPr/>
+          <a:lstStyle/>
+          <a:p>
+            <a:pPr lvl="1"/>
+            <a:r>
+              <a:rPr lang="en-US" dirty="0"/>
+              <a:t>Deployments are the default construct to run stateless applications in Kubernetes</a:t>
+            </a:r>
+          </a:p>
+          <a:p>
+            <a:pPr lvl="1"/>
+            <a:r>
+              <a:rPr lang="en-US" dirty="0"/>
+              <a:t>Create a deployment from a </a:t>
+            </a:r>
+            <a:r>
+              <a:rPr lang="en-US" dirty="0" err="1"/>
+              <a:t>yaml</a:t>
+            </a:r>
+            <a:r>
+              <a:rPr lang="en-US" dirty="0"/>
+              <a:t>/json file or by “</a:t>
+            </a:r>
+            <a:r>
+              <a:rPr lang="en-US" dirty="0" err="1"/>
+              <a:t>kubectl</a:t>
+            </a:r>
+            <a:r>
+              <a:rPr lang="en-US" dirty="0"/>
+              <a:t> create deployment &lt;name&gt; --image=&lt;image&gt;</a:t>
+            </a:r>
+          </a:p>
+          <a:p>
+            <a:pPr lvl="1"/>
+            <a:r>
+              <a:rPr lang="en-US" dirty="0"/>
+              <a:t>Deployments create </a:t>
+            </a:r>
+            <a:r>
+              <a:rPr lang="en-US" dirty="0" err="1"/>
+              <a:t>ReplicaSets</a:t>
+            </a:r>
+            <a:r>
+              <a:rPr lang="en-US" dirty="0"/>
+              <a:t>, which then create pods</a:t>
+            </a:r>
+          </a:p>
+          <a:p>
+            <a:pPr lvl="1"/>
+            <a:r>
+              <a:rPr lang="en-US" dirty="0"/>
+              <a:t>Resource type can scale</a:t>
+            </a:r>
+          </a:p>
+          <a:p>
+            <a:pPr lvl="1"/>
+            <a:r>
+              <a:rPr lang="en-US" dirty="0"/>
+              <a:t>Support of rolling updates, versioning and roll-backs</a:t>
+            </a:r>
+          </a:p>
+          <a:p>
+            <a:pPr lvl="1"/>
+            <a:r>
+              <a:rPr lang="en-US" dirty="0"/>
+              <a:t>All parts belonging to a deployment are identified by labels and corresponding </a:t>
+            </a:r>
+            <a:r>
+              <a:rPr lang="en-US" dirty="0" err="1"/>
+              <a:t>selctors</a:t>
+            </a:r>
+            <a:endParaRPr lang="en-US" dirty="0"/>
+          </a:p>
+          <a:p>
+            <a:pPr lvl="1"/>
+            <a:endParaRPr lang="en-US" dirty="0"/>
+          </a:p>
+        </p:txBody>
+      </p:sp>
+      <p:sp>
+        <p:nvSpPr>
+          <p:cNvPr id="2" name="Title 1"/>
+          <p:cNvSpPr>
+            <a:spLocks noGrp="1"/>
+          </p:cNvSpPr>
+          <p:nvPr>
+            <p:ph type="title"/>
+          </p:nvPr>
+        </p:nvSpPr>
+        <p:spPr/>
+        <p:txBody>
+          <a:bodyPr/>
+          <a:lstStyle/>
+          <a:p>
+            <a:r>
+              <a:rPr lang="en-US" dirty="0"/>
+              <a:t>Deployments</a:t>
+            </a:r>
+          </a:p>
+        </p:txBody>
+      </p:sp>
+      <p:cxnSp>
+        <p:nvCxnSpPr>
+          <p:cNvPr id="5" name="Straight Arrow Connector 4"/>
+          <p:cNvCxnSpPr/>
+          <p:nvPr/>
+        </p:nvCxnSpPr>
+        <p:spPr>
+          <a:xfrm flipH="1">
+            <a:off x="10146741" y="2111548"/>
+            <a:ext cx="1059180" cy="7620"/>
+          </a:xfrm>
+          <a:prstGeom prst="straightConnector1">
+            <a:avLst/>
+          </a:prstGeom>
+          <a:ln w="57150">
+            <a:solidFill>
+              <a:schemeClr val="accent4"/>
+            </a:solidFill>
+            <a:headEnd type="none" w="med" len="med"/>
+            <a:tailEnd type="triangle"/>
+          </a:ln>
+        </p:spPr>
+        <p:style>
+          <a:lnRef idx="1">
+            <a:schemeClr val="accent2"/>
+          </a:lnRef>
+          <a:fillRef idx="0">
+            <a:schemeClr val="accent2"/>
+          </a:fillRef>
+          <a:effectRef idx="0">
+            <a:schemeClr val="accent2"/>
+          </a:effectRef>
+          <a:fontRef idx="minor">
+            <a:schemeClr val="tx1"/>
+          </a:fontRef>
+        </p:style>
+      </p:cxnSp>
+      <p:cxnSp>
+        <p:nvCxnSpPr>
+          <p:cNvPr id="6" name="Straight Arrow Connector 5"/>
+          <p:cNvCxnSpPr/>
+          <p:nvPr/>
+        </p:nvCxnSpPr>
+        <p:spPr>
+          <a:xfrm flipH="1">
+            <a:off x="10146741" y="3488430"/>
+            <a:ext cx="1059180" cy="7620"/>
+          </a:xfrm>
+          <a:prstGeom prst="straightConnector1">
+            <a:avLst/>
+          </a:prstGeom>
+          <a:ln w="57150">
+            <a:solidFill>
+              <a:schemeClr val="accent5"/>
+            </a:solidFill>
+            <a:headEnd type="none" w="med" len="med"/>
+            <a:tailEnd type="triangle"/>
+          </a:ln>
+        </p:spPr>
+        <p:style>
+          <a:lnRef idx="1">
+            <a:schemeClr val="accent2"/>
+          </a:lnRef>
+          <a:fillRef idx="0">
+            <a:schemeClr val="accent2"/>
+          </a:fillRef>
+          <a:effectRef idx="0">
+            <a:schemeClr val="accent2"/>
+          </a:effectRef>
+          <a:fontRef idx="minor">
+            <a:schemeClr val="tx1"/>
+          </a:fontRef>
+        </p:style>
+      </p:cxnSp>
+      <p:cxnSp>
+        <p:nvCxnSpPr>
+          <p:cNvPr id="7" name="Straight Arrow Connector 6"/>
+          <p:cNvCxnSpPr/>
+          <p:nvPr/>
+        </p:nvCxnSpPr>
+        <p:spPr>
+          <a:xfrm flipH="1">
+            <a:off x="10146741" y="4597507"/>
+            <a:ext cx="1059180" cy="7620"/>
+          </a:xfrm>
+          <a:prstGeom prst="straightConnector1">
+            <a:avLst/>
+          </a:prstGeom>
+          <a:ln w="57150">
+            <a:solidFill>
+              <a:schemeClr val="accent5"/>
+            </a:solidFill>
+            <a:headEnd type="none" w="med" len="med"/>
+            <a:tailEnd type="triangle"/>
+          </a:ln>
+        </p:spPr>
+        <p:style>
+          <a:lnRef idx="1">
+            <a:schemeClr val="accent2"/>
+          </a:lnRef>
+          <a:fillRef idx="0">
+            <a:schemeClr val="accent2"/>
+          </a:fillRef>
+          <a:effectRef idx="0">
+            <a:schemeClr val="accent2"/>
+          </a:effectRef>
+          <a:fontRef idx="minor">
+            <a:schemeClr val="tx1"/>
+          </a:fontRef>
+        </p:style>
+      </p:cxnSp>
+    </p:spTree>
+    <p:extLst>
+      <p:ext uri="{BB962C8B-B14F-4D97-AF65-F5344CB8AC3E}">
+        <p14:creationId xmlns:p14="http://schemas.microsoft.com/office/powerpoint/2010/main" val="3249990004"/>
+      </p:ext>
+    </p:extLst>
+  </p:cSld>
+  <p:clrMapOvr>
+    <a:masterClrMapping/>
+  </p:clrMapOvr>
 </p:sld>
 </file>
 

--- a/kubernetes/03_labels_and_deployments.pptx
+++ b/kubernetes/03_labels_and_deployments.pptx
@@ -6,10 +6,10 @@
     <p:sldMasterId id="2147483777" r:id="rId2"/>
   </p:sldMasterIdLst>
   <p:notesMasterIdLst>
-    <p:notesMasterId r:id="rId19"/>
+    <p:notesMasterId r:id="rId20"/>
   </p:notesMasterIdLst>
   <p:handoutMasterIdLst>
-    <p:handoutMasterId r:id="rId20"/>
+    <p:handoutMasterId r:id="rId21"/>
   </p:handoutMasterIdLst>
   <p:sldIdLst>
     <p:sldId id="433" r:id="rId3"/>
@@ -21,13 +21,14 @@
     <p:sldId id="964" r:id="rId9"/>
     <p:sldId id="440" r:id="rId10"/>
     <p:sldId id="436" r:id="rId11"/>
-    <p:sldId id="449" r:id="rId12"/>
-    <p:sldId id="447" r:id="rId13"/>
-    <p:sldId id="961" r:id="rId14"/>
-    <p:sldId id="882" r:id="rId15"/>
-    <p:sldId id="904" r:id="rId16"/>
-    <p:sldId id="960" r:id="rId17"/>
-    <p:sldId id="265" r:id="rId18"/>
+    <p:sldId id="965" r:id="rId12"/>
+    <p:sldId id="449" r:id="rId13"/>
+    <p:sldId id="447" r:id="rId14"/>
+    <p:sldId id="961" r:id="rId15"/>
+    <p:sldId id="882" r:id="rId16"/>
+    <p:sldId id="904" r:id="rId17"/>
+    <p:sldId id="960" r:id="rId18"/>
+    <p:sldId id="265" r:id="rId19"/>
   </p:sldIdLst>
   <p:sldSz cx="12195175" cy="6858000"/>
   <p:notesSz cx="6858000" cy="9144000"/>
@@ -657,361 +658,66 @@
         </p:nvSpPr>
         <p:spPr/>
         <p:txBody>
-          <a:bodyPr>
-            <a:normAutofit fontScale="77500" lnSpcReduction="20000"/>
-          </a:bodyPr>
+          <a:bodyPr/>
           <a:lstStyle/>
           <a:p>
-            <a:pPr marL="0" indent="0">
-              <a:buFontTx/>
-              <a:buNone/>
-            </a:pPr>
             <a:r>
               <a:rPr lang="en-US" dirty="0"/>
-              <a:t>Explain deployments in a demo</a:t>
-            </a:r>
-          </a:p>
-          <a:p>
-            <a:pPr marL="285750" indent="-285750">
-              <a:buFontTx/>
-              <a:buChar char="-"/>
-            </a:pPr>
+              <a:t>The Horizontal Pod </a:t>
+            </a:r>
+            <a:r>
+              <a:rPr lang="en-US" dirty="0" err="1"/>
+              <a:t>Autoscaler</a:t>
+            </a:r>
             <a:r>
               <a:rPr lang="en-US" dirty="0"/>
-              <a:t>Use the “</a:t>
+              <a:t> (HPA) tries to keep the CPU utilization across all Pods in the Deployment at a defined level. The HPA in autoscaling/v2 can also work on other metrics like CPU or user defined metrics.</a:t>
+            </a:r>
+          </a:p>
+          <a:p>
+            <a:endParaRPr lang="en-US" dirty="0"/>
+          </a:p>
+          <a:p>
+            <a:r>
+              <a:rPr lang="en-US" dirty="0"/>
+              <a:t>Downscaling happens only 5 minutes after the last upscaling to prevent thrashing.</a:t>
+            </a:r>
+          </a:p>
+          <a:p>
+            <a:endParaRPr lang="en-US" dirty="0"/>
+          </a:p>
+          <a:p>
+            <a:r>
+              <a:rPr lang="en-US" dirty="0"/>
+              <a:t>There is also the Vertical Pod </a:t>
             </a:r>
             <a:r>
               <a:rPr lang="en-US" dirty="0" err="1"/>
-              <a:t>kubectl</a:t>
+              <a:t>Autoscaler</a:t>
             </a:r>
             <a:r>
               <a:rPr lang="en-US" dirty="0"/>
-              <a:t> create deployment &lt;name&gt; --image=&lt;image&gt;” command to create a deployment (note that “run” generators are deprecated for everything but pods)</a:t>
-            </a:r>
-          </a:p>
-          <a:p>
-            <a:pPr marL="285750" indent="-285750">
-              <a:buFontTx/>
-              <a:buChar char="-"/>
-            </a:pPr>
-            <a:r>
-              <a:rPr lang="en-US" dirty="0"/>
-              <a:t>Show the replica set with labels</a:t>
-            </a:r>
-          </a:p>
-          <a:p>
-            <a:pPr marL="285750" indent="-285750">
-              <a:buFontTx/>
-              <a:buChar char="-"/>
-            </a:pPr>
-            <a:r>
-              <a:rPr lang="en-US" dirty="0"/>
-              <a:t>Point out that the replica set is a “hidden” component used to manage pods &amp; generations. A user should not interact directly with a replica set</a:t>
-            </a:r>
-          </a:p>
-          <a:p>
-            <a:pPr marL="285750" indent="-285750">
-              <a:buFontTx/>
-              <a:buChar char="-"/>
-            </a:pPr>
-            <a:r>
-              <a:rPr lang="en-US" dirty="0"/>
-              <a:t>Scale up (</a:t>
-            </a:r>
-            <a:r>
-              <a:rPr lang="en-US" dirty="0" err="1"/>
-              <a:t>kubectl</a:t>
-            </a:r>
-            <a:r>
-              <a:rPr lang="en-US" dirty="0"/>
-              <a:t> scale </a:t>
-            </a:r>
-            <a:r>
-              <a:rPr lang="en-US" dirty="0" err="1"/>
-              <a:t>deployment|replicaset</a:t>
-            </a:r>
-            <a:r>
-              <a:rPr lang="en-US" dirty="0"/>
-              <a:t> &lt;name&gt; --replicas=5)</a:t>
-            </a:r>
-          </a:p>
-          <a:p>
-            <a:pPr marL="465750" lvl="1" indent="-285750">
-              <a:buFontTx/>
-              <a:buChar char="-"/>
-            </a:pPr>
-            <a:r>
-              <a:rPr lang="en-US" dirty="0"/>
-              <a:t>Scale up the replica set &amp; show pods -&gt; replica set is managed by deployment and thus overruled. </a:t>
-            </a:r>
-          </a:p>
-          <a:p>
-            <a:pPr marL="465750" lvl="1" indent="-285750">
-              <a:buFontTx/>
-              <a:buChar char="-"/>
-            </a:pPr>
-            <a:r>
-              <a:rPr lang="en-US" dirty="0"/>
-              <a:t>Scale up the deployment</a:t>
-            </a:r>
-          </a:p>
-          <a:p>
-            <a:pPr marL="285750" indent="-285750">
-              <a:buFontTx/>
-              <a:buChar char="-"/>
-            </a:pPr>
-            <a:r>
-              <a:rPr lang="en-US" dirty="0"/>
-              <a:t>Show the pods with labels</a:t>
-            </a:r>
-          </a:p>
-          <a:p>
-            <a:pPr marL="285750" indent="-285750">
-              <a:buFontTx/>
-              <a:buChar char="-"/>
-            </a:pPr>
-            <a:r>
-              <a:rPr lang="en-US" dirty="0"/>
-              <a:t>Delete a pod &amp; in parallel “watch </a:t>
-            </a:r>
-            <a:r>
-              <a:rPr lang="en-US" dirty="0" err="1"/>
-              <a:t>kubectl</a:t>
-            </a:r>
-            <a:r>
-              <a:rPr lang="en-US" dirty="0"/>
-              <a:t> get pods” to monitor the creation/deletion of pods</a:t>
-            </a:r>
-          </a:p>
-          <a:p>
-            <a:pPr marL="285750" indent="-285750">
-              <a:buFontTx/>
-              <a:buChar char="-"/>
-            </a:pPr>
-            <a:endParaRPr lang="en-US" dirty="0"/>
-          </a:p>
-          <a:p>
-            <a:pPr marL="0" indent="0">
-              <a:buFontTx/>
-              <a:buNone/>
-            </a:pPr>
-            <a:r>
-              <a:rPr lang="en-US" dirty="0"/>
-              <a:t>Don’t forget to mention that a deployment can be created also from </a:t>
-            </a:r>
-            <a:r>
-              <a:rPr lang="en-US" dirty="0" err="1"/>
-              <a:t>yaml</a:t>
-            </a:r>
-            <a:r>
-              <a:rPr lang="en-US" dirty="0"/>
-              <a:t> file (with way more options to customize -&gt; like the labels).</a:t>
-            </a:r>
-          </a:p>
-          <a:p>
-            <a:pPr marL="0" indent="0">
-              <a:buFontTx/>
-              <a:buNone/>
-            </a:pPr>
-            <a:endParaRPr lang="en-US" dirty="0"/>
-          </a:p>
-          <a:p>
-            <a:pPr marL="0" indent="0">
-              <a:buFontTx/>
-              <a:buNone/>
-            </a:pPr>
-            <a:r>
-              <a:rPr lang="en-US" dirty="0"/>
-              <a:t>Optional: do a demo for updating (assuming your deployment is called “</a:t>
-            </a:r>
-            <a:r>
-              <a:rPr lang="en-US" dirty="0" err="1"/>
-              <a:t>nginx</a:t>
-            </a:r>
-            <a:r>
-              <a:rPr lang="en-US" dirty="0"/>
-              <a:t>”)</a:t>
-            </a:r>
-          </a:p>
-          <a:p>
-            <a:pPr marL="285750" marR="0" lvl="0" indent="-285750" algn="l" defTabSz="1088776" rtl="0" eaLnBrk="1" fontAlgn="auto" latinLnBrk="0" hangingPunct="1">
-              <a:lnSpc>
-                <a:spcPct val="100000"/>
-              </a:lnSpc>
-              <a:spcBef>
-                <a:spcPts val="0"/>
-              </a:spcBef>
-              <a:spcAft>
-                <a:spcPts val="0"/>
-              </a:spcAft>
-              <a:buClrTx/>
-              <a:buSzTx/>
-              <a:buFontTx/>
-              <a:buChar char="-"/>
-              <a:tabLst/>
-              <a:defRPr/>
-            </a:pPr>
-            <a:r>
-              <a:rPr lang="en-US" dirty="0">
-                <a:sym typeface="Wingdings" panose="05000000000000000000" pitchFamily="2" charset="2"/>
-              </a:rPr>
-              <a:t>Run “</a:t>
-            </a:r>
-            <a:r>
-              <a:rPr lang="en-US" dirty="0" err="1">
-                <a:sym typeface="Wingdings" panose="05000000000000000000" pitchFamily="2" charset="2"/>
-              </a:rPr>
-              <a:t>kubectl</a:t>
-            </a:r>
-            <a:r>
-              <a:rPr lang="en-US" dirty="0">
-                <a:sym typeface="Wingdings" panose="05000000000000000000" pitchFamily="2" charset="2"/>
-              </a:rPr>
-              <a:t> rollout status deployment </a:t>
-            </a:r>
-            <a:r>
-              <a:rPr lang="en-US" dirty="0" err="1">
-                <a:sym typeface="Wingdings" panose="05000000000000000000" pitchFamily="2" charset="2"/>
-              </a:rPr>
-              <a:t>nginx</a:t>
-            </a:r>
-            <a:r>
-              <a:rPr lang="en-US" dirty="0">
-                <a:sym typeface="Wingdings" panose="05000000000000000000" pitchFamily="2" charset="2"/>
-              </a:rPr>
-              <a:t>” in a separate shell </a:t>
-            </a:r>
-          </a:p>
-          <a:p>
-            <a:pPr marL="285750" marR="0" lvl="0" indent="-285750" algn="l" defTabSz="1088776" rtl="0" eaLnBrk="1" fontAlgn="auto" latinLnBrk="0" hangingPunct="1">
-              <a:lnSpc>
-                <a:spcPct val="100000"/>
-              </a:lnSpc>
-              <a:spcBef>
-                <a:spcPts val="0"/>
-              </a:spcBef>
-              <a:spcAft>
-                <a:spcPts val="0"/>
-              </a:spcAft>
-              <a:buClrTx/>
-              <a:buSzTx/>
-              <a:buFontTx/>
-              <a:buChar char="-"/>
-              <a:tabLst/>
-              <a:defRPr/>
-            </a:pPr>
-            <a:r>
-              <a:rPr lang="en-US" dirty="0">
-                <a:sym typeface="Wingdings" panose="05000000000000000000" pitchFamily="2" charset="2"/>
-              </a:rPr>
-              <a:t>In parallel: </a:t>
-            </a:r>
-            <a:r>
-              <a:rPr lang="en-US" dirty="0"/>
-              <a:t>“</a:t>
-            </a:r>
-            <a:r>
-              <a:rPr lang="en-US" dirty="0" err="1"/>
-              <a:t>kubectl</a:t>
-            </a:r>
-            <a:r>
-              <a:rPr lang="en-US" dirty="0"/>
-              <a:t> set image deployment/</a:t>
-            </a:r>
-            <a:r>
-              <a:rPr lang="en-US" dirty="0" err="1"/>
-              <a:t>nginx</a:t>
-            </a:r>
-            <a:r>
-              <a:rPr lang="en-US" dirty="0"/>
-              <a:t> </a:t>
-            </a:r>
-            <a:r>
-              <a:rPr lang="en-US" dirty="0" err="1"/>
-              <a:t>nginx</a:t>
-            </a:r>
-            <a:r>
-              <a:rPr lang="en-US" dirty="0"/>
-              <a:t>=</a:t>
-            </a:r>
-            <a:r>
-              <a:rPr lang="en-US" dirty="0" err="1"/>
-              <a:t>nginx:mainline</a:t>
-            </a:r>
-            <a:r>
-              <a:rPr lang="en-US" dirty="0"/>
-              <a:t> --record” </a:t>
-            </a:r>
-            <a:r>
-              <a:rPr lang="en-US" dirty="0">
-                <a:sym typeface="Wingdings" panose="05000000000000000000" pitchFamily="2" charset="2"/>
-              </a:rPr>
-              <a:t> make sure to set an image tag that differs from your first revision</a:t>
-            </a:r>
-          </a:p>
-          <a:p>
-            <a:pPr marL="285750" indent="-285750">
-              <a:buFontTx/>
-              <a:buChar char="-"/>
-            </a:pPr>
-            <a:r>
-              <a:rPr lang="en-US" dirty="0">
-                <a:sym typeface="Wingdings" panose="05000000000000000000" pitchFamily="2" charset="2"/>
-              </a:rPr>
-              <a:t>Point out, that the “--record“ parameter will “ log” the command and write it to the deployment’s annotations</a:t>
-            </a:r>
-          </a:p>
-          <a:p>
-            <a:pPr marL="285750" marR="0" lvl="0" indent="-285750" algn="l" defTabSz="1088776" rtl="0" eaLnBrk="1" fontAlgn="auto" latinLnBrk="0" hangingPunct="1">
-              <a:lnSpc>
-                <a:spcPct val="100000"/>
-              </a:lnSpc>
-              <a:spcBef>
-                <a:spcPts val="0"/>
-              </a:spcBef>
-              <a:spcAft>
-                <a:spcPts val="0"/>
-              </a:spcAft>
-              <a:buClrTx/>
-              <a:buSzTx/>
-              <a:buFontTx/>
-              <a:buChar char="-"/>
-              <a:tabLst/>
-              <a:defRPr/>
-            </a:pPr>
-            <a:r>
-              <a:rPr lang="en-US" dirty="0">
-                <a:sym typeface="Wingdings" panose="05000000000000000000" pitchFamily="2" charset="2"/>
-              </a:rPr>
-              <a:t>“</a:t>
-            </a:r>
-            <a:r>
-              <a:rPr lang="en-US" dirty="0" err="1">
-                <a:sym typeface="Wingdings" panose="05000000000000000000" pitchFamily="2" charset="2"/>
-              </a:rPr>
-              <a:t>kubectl</a:t>
-            </a:r>
-            <a:r>
-              <a:rPr lang="en-US" dirty="0">
-                <a:sym typeface="Wingdings" panose="05000000000000000000" pitchFamily="2" charset="2"/>
-              </a:rPr>
-              <a:t> rollout history deployment </a:t>
-            </a:r>
-            <a:r>
-              <a:rPr lang="en-US" dirty="0" err="1">
-                <a:sym typeface="Wingdings" panose="05000000000000000000" pitchFamily="2" charset="2"/>
-              </a:rPr>
-              <a:t>nginx</a:t>
-            </a:r>
-            <a:r>
-              <a:rPr lang="en-US" dirty="0">
-                <a:sym typeface="Wingdings" panose="05000000000000000000" pitchFamily="2" charset="2"/>
-              </a:rPr>
-              <a:t>”  you should see 2 revisions incl. the “change-cause”</a:t>
-            </a:r>
-          </a:p>
-          <a:p>
-            <a:pPr marL="0" marR="0" lvl="0" indent="0" algn="l" defTabSz="1088776" rtl="0" eaLnBrk="1" fontAlgn="auto" latinLnBrk="0" hangingPunct="1">
+              <a:t> (VPA) which attempts to change the limits of a Pod based on workload demand. VPA is a separate project of a Kubernetes Special Interest Group (SIG) and not part of upstream Kubernetes.</a:t>
+            </a:r>
+          </a:p>
+        </p:txBody>
+      </p:sp>
+      <p:sp>
+        <p:nvSpPr>
+          <p:cNvPr id="4" name="Slide Number Placeholder 3"/>
+          <p:cNvSpPr>
+            <a:spLocks noGrp="1"/>
+          </p:cNvSpPr>
+          <p:nvPr>
+            <p:ph type="sldNum" sz="quarter" idx="10"/>
+          </p:nvPr>
+        </p:nvSpPr>
+        <p:spPr/>
+        <p:txBody>
+          <a:bodyPr/>
+          <a:lstStyle/>
+          <a:p>
+            <a:pPr marL="0" marR="0" lvl="0" indent="0" algn="ctr" defTabSz="1088776" rtl="0" eaLnBrk="1" fontAlgn="auto" latinLnBrk="0" hangingPunct="1">
               <a:lnSpc>
                 <a:spcPct val="100000"/>
               </a:lnSpc>
@@ -1028,253 +734,61 @@
               <a:tabLst/>
               <a:defRPr/>
             </a:pPr>
-            <a:r>
-              <a:rPr lang="en-US" dirty="0"/>
-              <a:t>Optional: do a demo for a rollback</a:t>
-            </a:r>
-            <a:endParaRPr lang="en-US" dirty="0">
-              <a:sym typeface="Wingdings" panose="05000000000000000000" pitchFamily="2" charset="2"/>
-            </a:endParaRPr>
-          </a:p>
-          <a:p>
-            <a:pPr marL="285750" marR="0" lvl="0" indent="-285750" algn="l" defTabSz="1088776" rtl="0" eaLnBrk="1" fontAlgn="auto" latinLnBrk="0" hangingPunct="1">
-              <a:lnSpc>
-                <a:spcPct val="100000"/>
-              </a:lnSpc>
-              <a:spcBef>
-                <a:spcPts val="0"/>
-              </a:spcBef>
-              <a:spcAft>
-                <a:spcPts val="0"/>
-              </a:spcAft>
-              <a:buClrTx/>
-              <a:buSzTx/>
-              <a:buFontTx/>
-              <a:buChar char="-"/>
-              <a:tabLst/>
-              <a:defRPr/>
-            </a:pPr>
-            <a:r>
-              <a:rPr lang="en-US" dirty="0"/>
-              <a:t>Re-run the “set image” command while using an invalid version tag (like “invalid” or something with a typo)</a:t>
-            </a:r>
-          </a:p>
-          <a:p>
-            <a:pPr marL="285750" marR="0" lvl="0" indent="-285750" algn="l" defTabSz="1088776" rtl="0" eaLnBrk="1" fontAlgn="auto" latinLnBrk="0" hangingPunct="1">
-              <a:lnSpc>
-                <a:spcPct val="100000"/>
-              </a:lnSpc>
-              <a:spcBef>
-                <a:spcPts val="0"/>
-              </a:spcBef>
-              <a:spcAft>
-                <a:spcPts val="0"/>
-              </a:spcAft>
-              <a:buClrTx/>
-              <a:buSzTx/>
-              <a:buFontTx/>
-              <a:buChar char="-"/>
-              <a:tabLst/>
-              <a:defRPr/>
-            </a:pPr>
-            <a:r>
-              <a:rPr lang="en-US" dirty="0"/>
-              <a:t>Check the rollout status </a:t>
-            </a:r>
-            <a:r>
-              <a:rPr lang="en-US" dirty="0">
-                <a:sym typeface="Wingdings" panose="05000000000000000000" pitchFamily="2" charset="2"/>
-              </a:rPr>
-              <a:t> there should be one pod with the new image version in an error status &amp; at least 2 pods of the previous revision up and running.</a:t>
-            </a:r>
-            <a:endParaRPr lang="en-US" dirty="0"/>
-          </a:p>
-          <a:p>
-            <a:pPr marL="285750" marR="0" lvl="0" indent="-285750" algn="l" defTabSz="1088776" rtl="0" eaLnBrk="1" fontAlgn="auto" latinLnBrk="0" hangingPunct="1">
-              <a:lnSpc>
-                <a:spcPct val="100000"/>
-              </a:lnSpc>
-              <a:spcBef>
-                <a:spcPts val="0"/>
-              </a:spcBef>
-              <a:spcAft>
-                <a:spcPts val="0"/>
-              </a:spcAft>
-              <a:buClrTx/>
-              <a:buSzTx/>
-              <a:buFontTx/>
-              <a:buChar char="-"/>
-              <a:tabLst/>
-              <a:defRPr/>
-            </a:pPr>
-            <a:r>
-              <a:rPr lang="en-US" dirty="0"/>
-              <a:t>Explain the rolling update strategy and why there is only one pod in status error </a:t>
-            </a:r>
-            <a:r>
-              <a:rPr lang="en-US" dirty="0">
-                <a:sym typeface="Wingdings" panose="05000000000000000000" pitchFamily="2" charset="2"/>
-              </a:rPr>
-              <a:t> </a:t>
-            </a:r>
-            <a:r>
-              <a:rPr lang="en-US" dirty="0" err="1">
-                <a:sym typeface="Wingdings" panose="05000000000000000000" pitchFamily="2" charset="2"/>
-              </a:rPr>
-              <a:t>maxUnavailable</a:t>
-            </a:r>
-            <a:r>
-              <a:rPr lang="en-US" dirty="0">
-                <a:sym typeface="Wingdings" panose="05000000000000000000" pitchFamily="2" charset="2"/>
-              </a:rPr>
-              <a:t> (</a:t>
-            </a:r>
-            <a:r>
-              <a:rPr lang="de-DE" sz="1400" b="0" kern="1200" dirty="0" err="1">
-                <a:solidFill>
-                  <a:schemeClr val="tx1"/>
+            <a:fld id="{7D8C2C35-2B8A-446E-BEC0-FD36716C29AC}" type="slidenum">
+              <a:rPr kumimoji="0" lang="de-DE" sz="800" b="0" i="0" u="none" strike="noStrike" kern="1200" cap="none" spc="0" normalizeH="0" baseline="0" noProof="0" smtClean="0">
+                <a:ln>
+                  <a:noFill/>
+                </a:ln>
+                <a:solidFill>
+                  <a:srgbClr val="000000"/>
                 </a:solidFill>
                 <a:effectLst/>
-                <a:latin typeface="+mn-lt"/>
+                <a:uLnTx/>
+                <a:uFillTx/>
+                <a:latin typeface="Arial"/>
                 <a:ea typeface="+mn-ea"/>
                 <a:cs typeface="+mn-cs"/>
               </a:rPr>
-              <a:t>kubectl</a:t>
-            </a:r>
-            <a:r>
-              <a:rPr lang="de-DE" sz="1400" b="0" kern="1200" dirty="0">
-                <a:solidFill>
-                  <a:schemeClr val="tx1"/>
-                </a:solidFill>
-                <a:effectLst/>
-                <a:latin typeface="+mn-lt"/>
-                <a:ea typeface="+mn-ea"/>
-                <a:cs typeface="+mn-cs"/>
-              </a:rPr>
-              <a:t> </a:t>
-            </a:r>
-            <a:r>
-              <a:rPr lang="de-DE" sz="1400" b="0" kern="1200" dirty="0" err="1">
-                <a:solidFill>
-                  <a:schemeClr val="tx1"/>
-                </a:solidFill>
-                <a:effectLst/>
-                <a:latin typeface="+mn-lt"/>
-                <a:ea typeface="+mn-ea"/>
-                <a:cs typeface="+mn-cs"/>
-              </a:rPr>
-              <a:t>explain</a:t>
-            </a:r>
-            <a:r>
-              <a:rPr lang="de-DE" sz="1400" b="0" kern="1200" dirty="0">
-                <a:solidFill>
-                  <a:schemeClr val="tx1"/>
-                </a:solidFill>
-                <a:effectLst/>
-                <a:latin typeface="+mn-lt"/>
-                <a:ea typeface="+mn-ea"/>
-                <a:cs typeface="+mn-cs"/>
-              </a:rPr>
-              <a:t> </a:t>
-            </a:r>
-            <a:r>
-              <a:rPr lang="de-DE" sz="1400" b="0" kern="1200" dirty="0" err="1">
-                <a:solidFill>
-                  <a:schemeClr val="tx1"/>
-                </a:solidFill>
-                <a:effectLst/>
-                <a:latin typeface="+mn-lt"/>
-                <a:ea typeface="+mn-ea"/>
-                <a:cs typeface="+mn-cs"/>
-              </a:rPr>
-              <a:t>deployment.spec.strategy.rollingUpdate</a:t>
-            </a:r>
-            <a:r>
-              <a:rPr lang="de-DE" sz="1400" b="0" kern="1200" dirty="0">
-                <a:solidFill>
-                  <a:schemeClr val="tx1"/>
-                </a:solidFill>
-                <a:effectLst/>
-                <a:latin typeface="+mn-lt"/>
-                <a:ea typeface="+mn-ea"/>
-                <a:cs typeface="+mn-cs"/>
-              </a:rPr>
-              <a:t>)</a:t>
-            </a:r>
-          </a:p>
-          <a:p>
-            <a:pPr marL="285750" marR="0" lvl="0" indent="-285750" algn="l" defTabSz="1088776" rtl="0" eaLnBrk="1" fontAlgn="auto" latinLnBrk="0" hangingPunct="1">
-              <a:lnSpc>
-                <a:spcPct val="100000"/>
-              </a:lnSpc>
-              <a:spcBef>
-                <a:spcPts val="0"/>
-              </a:spcBef>
-              <a:spcAft>
-                <a:spcPts val="0"/>
-              </a:spcAft>
-              <a:buClrTx/>
-              <a:buSzTx/>
-              <a:buFontTx/>
-              <a:buChar char="-"/>
-              <a:tabLst/>
-              <a:defRPr/>
-            </a:pPr>
-            <a:r>
-              <a:rPr lang="en-US" dirty="0"/>
-              <a:t> Do the rollback: </a:t>
-            </a:r>
-            <a:r>
-              <a:rPr lang="en-US" dirty="0" err="1"/>
-              <a:t>kubectl</a:t>
-            </a:r>
-            <a:r>
-              <a:rPr lang="en-US" dirty="0"/>
-              <a:t> rollout undo deployment </a:t>
-            </a:r>
-            <a:r>
-              <a:rPr lang="en-US" dirty="0" err="1"/>
-              <a:t>nginx</a:t>
-            </a:r>
-            <a:endParaRPr lang="en-US" dirty="0"/>
-          </a:p>
-          <a:p>
-            <a:pPr marL="285750" indent="-285750">
-              <a:buFontTx/>
-              <a:buChar char="-"/>
-            </a:pPr>
-            <a:endParaRPr lang="en-US" dirty="0"/>
-          </a:p>
-        </p:txBody>
-      </p:sp>
-      <p:sp>
-        <p:nvSpPr>
-          <p:cNvPr id="4" name="Slide Number Placeholder 3"/>
-          <p:cNvSpPr>
-            <a:spLocks noGrp="1"/>
-          </p:cNvSpPr>
-          <p:nvPr>
-            <p:ph type="sldNum" sz="quarter" idx="10"/>
-          </p:nvPr>
-        </p:nvSpPr>
-        <p:spPr/>
-        <p:txBody>
-          <a:bodyPr/>
-          <a:lstStyle/>
-          <a:p>
-            <a:fld id="{7D8C2C35-2B8A-446E-BEC0-FD36716C29AC}" type="slidenum">
-              <a:rPr lang="de-DE" smtClean="0"/>
-              <a:pPr/>
+              <a:pPr marL="0" marR="0" lvl="0" indent="0" algn="ctr" defTabSz="1088776" rtl="0" eaLnBrk="1" fontAlgn="auto" latinLnBrk="0" hangingPunct="1">
+                <a:lnSpc>
+                  <a:spcPct val="100000"/>
+                </a:lnSpc>
+                <a:spcBef>
+                  <a:spcPts val="0"/>
+                </a:spcBef>
+                <a:spcAft>
+                  <a:spcPts val="0"/>
+                </a:spcAft>
+                <a:buClrTx/>
+                <a:buSzTx/>
+                <a:buFontTx/>
+                <a:buNone/>
+                <a:tabLst/>
+                <a:defRPr/>
+              </a:pPr>
               <a:t>10</a:t>
             </a:fld>
-            <a:endParaRPr lang="de-DE" dirty="0"/>
+            <a:endParaRPr kumimoji="0" lang="de-DE" sz="800" b="0" i="0" u="none" strike="noStrike" kern="1200" cap="none" spc="0" normalizeH="0" baseline="0" noProof="0" dirty="0">
+              <a:ln>
+                <a:noFill/>
+              </a:ln>
+              <a:solidFill>
+                <a:srgbClr val="000000"/>
+              </a:solidFill>
+              <a:effectLst/>
+              <a:uLnTx/>
+              <a:uFillTx/>
+              <a:latin typeface="Arial"/>
+              <a:ea typeface="+mn-ea"/>
+              <a:cs typeface="+mn-cs"/>
+            </a:endParaRPr>
           </a:p>
         </p:txBody>
       </p:sp>
     </p:spTree>
     <p:extLst>
       <p:ext uri="{BB962C8B-B14F-4D97-AF65-F5344CB8AC3E}">
-        <p14:creationId xmlns:p14="http://schemas.microsoft.com/office/powerpoint/2010/main" val="3805946316"/>
+        <p14:creationId xmlns:p14="http://schemas.microsoft.com/office/powerpoint/2010/main" val="2581245305"/>
       </p:ext>
     </p:extLst>
   </p:cSld>
@@ -1325,9 +839,592 @@
         </p:nvSpPr>
         <p:spPr/>
         <p:txBody>
-          <a:bodyPr/>
+          <a:bodyPr>
+            <a:normAutofit fontScale="77500" lnSpcReduction="20000"/>
+          </a:bodyPr>
           <a:lstStyle/>
           <a:p>
+            <a:pPr marL="0" indent="0">
+              <a:buFontTx/>
+              <a:buNone/>
+            </a:pPr>
+            <a:r>
+              <a:rPr lang="en-US" dirty="0"/>
+              <a:t>Explain deployments in a demo</a:t>
+            </a:r>
+          </a:p>
+          <a:p>
+            <a:pPr marL="285750" indent="-285750">
+              <a:buFontTx/>
+              <a:buChar char="-"/>
+            </a:pPr>
+            <a:r>
+              <a:rPr lang="en-US" dirty="0"/>
+              <a:t>Use the “</a:t>
+            </a:r>
+            <a:r>
+              <a:rPr lang="en-US" dirty="0" err="1"/>
+              <a:t>kubectl</a:t>
+            </a:r>
+            <a:r>
+              <a:rPr lang="en-US" dirty="0"/>
+              <a:t> create deployment &lt;name&gt; --image=&lt;image&gt;” command to create a deployment (note that “run” generators are deprecated for everything but pods)</a:t>
+            </a:r>
+          </a:p>
+          <a:p>
+            <a:pPr marL="285750" indent="-285750">
+              <a:buFontTx/>
+              <a:buChar char="-"/>
+            </a:pPr>
+            <a:r>
+              <a:rPr lang="en-US" dirty="0"/>
+              <a:t>Show the replica set with labels</a:t>
+            </a:r>
+          </a:p>
+          <a:p>
+            <a:pPr marL="285750" indent="-285750">
+              <a:buFontTx/>
+              <a:buChar char="-"/>
+            </a:pPr>
+            <a:r>
+              <a:rPr lang="en-US" dirty="0"/>
+              <a:t>Point out that the replica set is a “hidden” component used to manage pods &amp; generations. A user should not interact directly with a replica set</a:t>
+            </a:r>
+          </a:p>
+          <a:p>
+            <a:pPr marL="285750" indent="-285750">
+              <a:buFontTx/>
+              <a:buChar char="-"/>
+            </a:pPr>
+            <a:r>
+              <a:rPr lang="en-US" dirty="0"/>
+              <a:t>Scale up (</a:t>
+            </a:r>
+            <a:r>
+              <a:rPr lang="en-US" dirty="0" err="1"/>
+              <a:t>kubectl</a:t>
+            </a:r>
+            <a:r>
+              <a:rPr lang="en-US" dirty="0"/>
+              <a:t> scale </a:t>
+            </a:r>
+            <a:r>
+              <a:rPr lang="en-US" dirty="0" err="1"/>
+              <a:t>deployment|replicaset</a:t>
+            </a:r>
+            <a:r>
+              <a:rPr lang="en-US" dirty="0"/>
+              <a:t> &lt;name&gt; --replicas=5)</a:t>
+            </a:r>
+          </a:p>
+          <a:p>
+            <a:pPr marL="465750" lvl="1" indent="-285750">
+              <a:buFontTx/>
+              <a:buChar char="-"/>
+            </a:pPr>
+            <a:r>
+              <a:rPr lang="en-US" dirty="0"/>
+              <a:t>Scale up the replica set &amp; show pods -&gt; replica set is managed by deployment and thus overruled. </a:t>
+            </a:r>
+          </a:p>
+          <a:p>
+            <a:pPr marL="465750" lvl="1" indent="-285750">
+              <a:buFontTx/>
+              <a:buChar char="-"/>
+            </a:pPr>
+            <a:r>
+              <a:rPr lang="en-US" dirty="0"/>
+              <a:t>Scale up the deployment</a:t>
+            </a:r>
+          </a:p>
+          <a:p>
+            <a:pPr marL="285750" indent="-285750">
+              <a:buFontTx/>
+              <a:buChar char="-"/>
+            </a:pPr>
+            <a:r>
+              <a:rPr lang="en-US" dirty="0"/>
+              <a:t>Show the pods with labels</a:t>
+            </a:r>
+          </a:p>
+          <a:p>
+            <a:pPr marL="285750" indent="-285750">
+              <a:buFontTx/>
+              <a:buChar char="-"/>
+            </a:pPr>
+            <a:r>
+              <a:rPr lang="en-US" dirty="0"/>
+              <a:t>Delete a pod &amp; in parallel “watch </a:t>
+            </a:r>
+            <a:r>
+              <a:rPr lang="en-US" dirty="0" err="1"/>
+              <a:t>kubectl</a:t>
+            </a:r>
+            <a:r>
+              <a:rPr lang="en-US" dirty="0"/>
+              <a:t> get pods” to monitor the creation/deletion of pods</a:t>
+            </a:r>
+          </a:p>
+          <a:p>
+            <a:pPr marL="285750" indent="-285750">
+              <a:buFontTx/>
+              <a:buChar char="-"/>
+            </a:pPr>
+            <a:endParaRPr lang="en-US" dirty="0"/>
+          </a:p>
+          <a:p>
+            <a:pPr marL="0" indent="0">
+              <a:buFontTx/>
+              <a:buNone/>
+            </a:pPr>
+            <a:r>
+              <a:rPr lang="en-US" dirty="0"/>
+              <a:t>Don’t forget to mention that a deployment can be created also from </a:t>
+            </a:r>
+            <a:r>
+              <a:rPr lang="en-US" dirty="0" err="1"/>
+              <a:t>yaml</a:t>
+            </a:r>
+            <a:r>
+              <a:rPr lang="en-US" dirty="0"/>
+              <a:t> file (with way more options to customize -&gt; like the labels).</a:t>
+            </a:r>
+          </a:p>
+          <a:p>
+            <a:pPr marL="0" indent="0">
+              <a:buFontTx/>
+              <a:buNone/>
+            </a:pPr>
+            <a:endParaRPr lang="en-US" dirty="0"/>
+          </a:p>
+          <a:p>
+            <a:pPr marL="0" indent="0">
+              <a:buFontTx/>
+              <a:buNone/>
+            </a:pPr>
+            <a:r>
+              <a:rPr lang="en-US" dirty="0"/>
+              <a:t>Optional: do a demo for updating (assuming your deployment is called “</a:t>
+            </a:r>
+            <a:r>
+              <a:rPr lang="en-US" dirty="0" err="1"/>
+              <a:t>nginx</a:t>
+            </a:r>
+            <a:r>
+              <a:rPr lang="en-US" dirty="0"/>
+              <a:t>”)</a:t>
+            </a:r>
+          </a:p>
+          <a:p>
+            <a:pPr marL="285750" marR="0" lvl="0" indent="-285750" algn="l" defTabSz="1088776" rtl="0" eaLnBrk="1" fontAlgn="auto" latinLnBrk="0" hangingPunct="1">
+              <a:lnSpc>
+                <a:spcPct val="100000"/>
+              </a:lnSpc>
+              <a:spcBef>
+                <a:spcPts val="0"/>
+              </a:spcBef>
+              <a:spcAft>
+                <a:spcPts val="0"/>
+              </a:spcAft>
+              <a:buClrTx/>
+              <a:buSzTx/>
+              <a:buFontTx/>
+              <a:buChar char="-"/>
+              <a:tabLst/>
+              <a:defRPr/>
+            </a:pPr>
+            <a:r>
+              <a:rPr lang="en-US" dirty="0">
+                <a:sym typeface="Wingdings" panose="05000000000000000000" pitchFamily="2" charset="2"/>
+              </a:rPr>
+              <a:t>Run “</a:t>
+            </a:r>
+            <a:r>
+              <a:rPr lang="en-US" dirty="0" err="1">
+                <a:sym typeface="Wingdings" panose="05000000000000000000" pitchFamily="2" charset="2"/>
+              </a:rPr>
+              <a:t>kubectl</a:t>
+            </a:r>
+            <a:r>
+              <a:rPr lang="en-US" dirty="0">
+                <a:sym typeface="Wingdings" panose="05000000000000000000" pitchFamily="2" charset="2"/>
+              </a:rPr>
+              <a:t> rollout status deployment </a:t>
+            </a:r>
+            <a:r>
+              <a:rPr lang="en-US" dirty="0" err="1">
+                <a:sym typeface="Wingdings" panose="05000000000000000000" pitchFamily="2" charset="2"/>
+              </a:rPr>
+              <a:t>nginx</a:t>
+            </a:r>
+            <a:r>
+              <a:rPr lang="en-US" dirty="0">
+                <a:sym typeface="Wingdings" panose="05000000000000000000" pitchFamily="2" charset="2"/>
+              </a:rPr>
+              <a:t>” in a separate shell </a:t>
+            </a:r>
+          </a:p>
+          <a:p>
+            <a:pPr marL="285750" marR="0" lvl="0" indent="-285750" algn="l" defTabSz="1088776" rtl="0" eaLnBrk="1" fontAlgn="auto" latinLnBrk="0" hangingPunct="1">
+              <a:lnSpc>
+                <a:spcPct val="100000"/>
+              </a:lnSpc>
+              <a:spcBef>
+                <a:spcPts val="0"/>
+              </a:spcBef>
+              <a:spcAft>
+                <a:spcPts val="0"/>
+              </a:spcAft>
+              <a:buClrTx/>
+              <a:buSzTx/>
+              <a:buFontTx/>
+              <a:buChar char="-"/>
+              <a:tabLst/>
+              <a:defRPr/>
+            </a:pPr>
+            <a:r>
+              <a:rPr lang="en-US" dirty="0">
+                <a:sym typeface="Wingdings" panose="05000000000000000000" pitchFamily="2" charset="2"/>
+              </a:rPr>
+              <a:t>In parallel: </a:t>
+            </a:r>
+            <a:r>
+              <a:rPr lang="en-US" dirty="0"/>
+              <a:t>“</a:t>
+            </a:r>
+            <a:r>
+              <a:rPr lang="en-US" dirty="0" err="1"/>
+              <a:t>kubectl</a:t>
+            </a:r>
+            <a:r>
+              <a:rPr lang="en-US" dirty="0"/>
+              <a:t> set image deployment/</a:t>
+            </a:r>
+            <a:r>
+              <a:rPr lang="en-US" dirty="0" err="1"/>
+              <a:t>nginx</a:t>
+            </a:r>
+            <a:r>
+              <a:rPr lang="en-US" dirty="0"/>
+              <a:t> </a:t>
+            </a:r>
+            <a:r>
+              <a:rPr lang="en-US" dirty="0" err="1"/>
+              <a:t>nginx</a:t>
+            </a:r>
+            <a:r>
+              <a:rPr lang="en-US" dirty="0"/>
+              <a:t>=</a:t>
+            </a:r>
+            <a:r>
+              <a:rPr lang="en-US" dirty="0" err="1"/>
+              <a:t>nginx:mainline</a:t>
+            </a:r>
+            <a:r>
+              <a:rPr lang="en-US" dirty="0"/>
+              <a:t> --record” </a:t>
+            </a:r>
+            <a:r>
+              <a:rPr lang="en-US" dirty="0">
+                <a:sym typeface="Wingdings" panose="05000000000000000000" pitchFamily="2" charset="2"/>
+              </a:rPr>
+              <a:t> make sure to set an image tag that differs from your first revision</a:t>
+            </a:r>
+          </a:p>
+          <a:p>
+            <a:pPr marL="285750" indent="-285750">
+              <a:buFontTx/>
+              <a:buChar char="-"/>
+            </a:pPr>
+            <a:r>
+              <a:rPr lang="en-US" dirty="0">
+                <a:sym typeface="Wingdings" panose="05000000000000000000" pitchFamily="2" charset="2"/>
+              </a:rPr>
+              <a:t>Point out, that the “--record“ parameter will “ log” the command and write it to the deployment’s annotations</a:t>
+            </a:r>
+          </a:p>
+          <a:p>
+            <a:pPr marL="285750" marR="0" lvl="0" indent="-285750" algn="l" defTabSz="1088776" rtl="0" eaLnBrk="1" fontAlgn="auto" latinLnBrk="0" hangingPunct="1">
+              <a:lnSpc>
+                <a:spcPct val="100000"/>
+              </a:lnSpc>
+              <a:spcBef>
+                <a:spcPts val="0"/>
+              </a:spcBef>
+              <a:spcAft>
+                <a:spcPts val="0"/>
+              </a:spcAft>
+              <a:buClrTx/>
+              <a:buSzTx/>
+              <a:buFontTx/>
+              <a:buChar char="-"/>
+              <a:tabLst/>
+              <a:defRPr/>
+            </a:pPr>
+            <a:r>
+              <a:rPr lang="en-US" dirty="0">
+                <a:sym typeface="Wingdings" panose="05000000000000000000" pitchFamily="2" charset="2"/>
+              </a:rPr>
+              <a:t>“</a:t>
+            </a:r>
+            <a:r>
+              <a:rPr lang="en-US" dirty="0" err="1">
+                <a:sym typeface="Wingdings" panose="05000000000000000000" pitchFamily="2" charset="2"/>
+              </a:rPr>
+              <a:t>kubectl</a:t>
+            </a:r>
+            <a:r>
+              <a:rPr lang="en-US" dirty="0">
+                <a:sym typeface="Wingdings" panose="05000000000000000000" pitchFamily="2" charset="2"/>
+              </a:rPr>
+              <a:t> rollout history deployment </a:t>
+            </a:r>
+            <a:r>
+              <a:rPr lang="en-US" dirty="0" err="1">
+                <a:sym typeface="Wingdings" panose="05000000000000000000" pitchFamily="2" charset="2"/>
+              </a:rPr>
+              <a:t>nginx</a:t>
+            </a:r>
+            <a:r>
+              <a:rPr lang="en-US" dirty="0">
+                <a:sym typeface="Wingdings" panose="05000000000000000000" pitchFamily="2" charset="2"/>
+              </a:rPr>
+              <a:t>”  you should see 2 revisions incl. the “change-cause”</a:t>
+            </a:r>
+          </a:p>
+          <a:p>
+            <a:pPr marL="0" marR="0" lvl="0" indent="0" algn="l" defTabSz="1088776" rtl="0" eaLnBrk="1" fontAlgn="auto" latinLnBrk="0" hangingPunct="1">
+              <a:lnSpc>
+                <a:spcPct val="100000"/>
+              </a:lnSpc>
+              <a:spcBef>
+                <a:spcPts val="0"/>
+              </a:spcBef>
+              <a:spcAft>
+                <a:spcPts val="0"/>
+              </a:spcAft>
+              <a:buClrTx/>
+              <a:buSzTx/>
+              <a:buFontTx/>
+              <a:buNone/>
+              <a:tabLst/>
+              <a:defRPr/>
+            </a:pPr>
+            <a:r>
+              <a:rPr lang="en-US" dirty="0"/>
+              <a:t>Optional: do a demo for a rollback</a:t>
+            </a:r>
+            <a:endParaRPr lang="en-US" dirty="0">
+              <a:sym typeface="Wingdings" panose="05000000000000000000" pitchFamily="2" charset="2"/>
+            </a:endParaRPr>
+          </a:p>
+          <a:p>
+            <a:pPr marL="285750" marR="0" lvl="0" indent="-285750" algn="l" defTabSz="1088776" rtl="0" eaLnBrk="1" fontAlgn="auto" latinLnBrk="0" hangingPunct="1">
+              <a:lnSpc>
+                <a:spcPct val="100000"/>
+              </a:lnSpc>
+              <a:spcBef>
+                <a:spcPts val="0"/>
+              </a:spcBef>
+              <a:spcAft>
+                <a:spcPts val="0"/>
+              </a:spcAft>
+              <a:buClrTx/>
+              <a:buSzTx/>
+              <a:buFontTx/>
+              <a:buChar char="-"/>
+              <a:tabLst/>
+              <a:defRPr/>
+            </a:pPr>
+            <a:r>
+              <a:rPr lang="en-US" dirty="0"/>
+              <a:t>Re-run the “set image” command while using an invalid version tag (like “invalid” or something with a typo)</a:t>
+            </a:r>
+          </a:p>
+          <a:p>
+            <a:pPr marL="285750" marR="0" lvl="0" indent="-285750" algn="l" defTabSz="1088776" rtl="0" eaLnBrk="1" fontAlgn="auto" latinLnBrk="0" hangingPunct="1">
+              <a:lnSpc>
+                <a:spcPct val="100000"/>
+              </a:lnSpc>
+              <a:spcBef>
+                <a:spcPts val="0"/>
+              </a:spcBef>
+              <a:spcAft>
+                <a:spcPts val="0"/>
+              </a:spcAft>
+              <a:buClrTx/>
+              <a:buSzTx/>
+              <a:buFontTx/>
+              <a:buChar char="-"/>
+              <a:tabLst/>
+              <a:defRPr/>
+            </a:pPr>
+            <a:r>
+              <a:rPr lang="en-US" dirty="0"/>
+              <a:t>Check the rollout status </a:t>
+            </a:r>
+            <a:r>
+              <a:rPr lang="en-US" dirty="0">
+                <a:sym typeface="Wingdings" panose="05000000000000000000" pitchFamily="2" charset="2"/>
+              </a:rPr>
+              <a:t> there should be one pod with the new image version in an error status &amp; at least 2 pods of the previous revision up and running.</a:t>
+            </a:r>
+            <a:endParaRPr lang="en-US" dirty="0"/>
+          </a:p>
+          <a:p>
+            <a:pPr marL="285750" marR="0" lvl="0" indent="-285750" algn="l" defTabSz="1088776" rtl="0" eaLnBrk="1" fontAlgn="auto" latinLnBrk="0" hangingPunct="1">
+              <a:lnSpc>
+                <a:spcPct val="100000"/>
+              </a:lnSpc>
+              <a:spcBef>
+                <a:spcPts val="0"/>
+              </a:spcBef>
+              <a:spcAft>
+                <a:spcPts val="0"/>
+              </a:spcAft>
+              <a:buClrTx/>
+              <a:buSzTx/>
+              <a:buFontTx/>
+              <a:buChar char="-"/>
+              <a:tabLst/>
+              <a:defRPr/>
+            </a:pPr>
+            <a:r>
+              <a:rPr lang="en-US" dirty="0"/>
+              <a:t>Explain the rolling update strategy and why there is only one pod in status error </a:t>
+            </a:r>
+            <a:r>
+              <a:rPr lang="en-US" dirty="0">
+                <a:sym typeface="Wingdings" panose="05000000000000000000" pitchFamily="2" charset="2"/>
+              </a:rPr>
+              <a:t> </a:t>
+            </a:r>
+            <a:r>
+              <a:rPr lang="en-US" dirty="0" err="1">
+                <a:sym typeface="Wingdings" panose="05000000000000000000" pitchFamily="2" charset="2"/>
+              </a:rPr>
+              <a:t>maxUnavailable</a:t>
+            </a:r>
+            <a:r>
+              <a:rPr lang="en-US" dirty="0">
+                <a:sym typeface="Wingdings" panose="05000000000000000000" pitchFamily="2" charset="2"/>
+              </a:rPr>
+              <a:t> (</a:t>
+            </a:r>
+            <a:r>
+              <a:rPr lang="de-DE" sz="1400" b="0" kern="1200" dirty="0" err="1">
+                <a:solidFill>
+                  <a:schemeClr val="tx1"/>
+                </a:solidFill>
+                <a:effectLst/>
+                <a:latin typeface="+mn-lt"/>
+                <a:ea typeface="+mn-ea"/>
+                <a:cs typeface="+mn-cs"/>
+              </a:rPr>
+              <a:t>kubectl</a:t>
+            </a:r>
+            <a:r>
+              <a:rPr lang="de-DE" sz="1400" b="0" kern="1200" dirty="0">
+                <a:solidFill>
+                  <a:schemeClr val="tx1"/>
+                </a:solidFill>
+                <a:effectLst/>
+                <a:latin typeface="+mn-lt"/>
+                <a:ea typeface="+mn-ea"/>
+                <a:cs typeface="+mn-cs"/>
+              </a:rPr>
+              <a:t> </a:t>
+            </a:r>
+            <a:r>
+              <a:rPr lang="de-DE" sz="1400" b="0" kern="1200" dirty="0" err="1">
+                <a:solidFill>
+                  <a:schemeClr val="tx1"/>
+                </a:solidFill>
+                <a:effectLst/>
+                <a:latin typeface="+mn-lt"/>
+                <a:ea typeface="+mn-ea"/>
+                <a:cs typeface="+mn-cs"/>
+              </a:rPr>
+              <a:t>explain</a:t>
+            </a:r>
+            <a:r>
+              <a:rPr lang="de-DE" sz="1400" b="0" kern="1200" dirty="0">
+                <a:solidFill>
+                  <a:schemeClr val="tx1"/>
+                </a:solidFill>
+                <a:effectLst/>
+                <a:latin typeface="+mn-lt"/>
+                <a:ea typeface="+mn-ea"/>
+                <a:cs typeface="+mn-cs"/>
+              </a:rPr>
+              <a:t> </a:t>
+            </a:r>
+            <a:r>
+              <a:rPr lang="de-DE" sz="1400" b="0" kern="1200" dirty="0" err="1">
+                <a:solidFill>
+                  <a:schemeClr val="tx1"/>
+                </a:solidFill>
+                <a:effectLst/>
+                <a:latin typeface="+mn-lt"/>
+                <a:ea typeface="+mn-ea"/>
+                <a:cs typeface="+mn-cs"/>
+              </a:rPr>
+              <a:t>deployment.spec.strategy.rollingUpdate</a:t>
+            </a:r>
+            <a:r>
+              <a:rPr lang="de-DE" sz="1400" b="0" kern="1200" dirty="0">
+                <a:solidFill>
+                  <a:schemeClr val="tx1"/>
+                </a:solidFill>
+                <a:effectLst/>
+                <a:latin typeface="+mn-lt"/>
+                <a:ea typeface="+mn-ea"/>
+                <a:cs typeface="+mn-cs"/>
+              </a:rPr>
+              <a:t>)</a:t>
+            </a:r>
+          </a:p>
+          <a:p>
+            <a:pPr marL="285750" marR="0" lvl="0" indent="-285750" algn="l" defTabSz="1088776" rtl="0" eaLnBrk="1" fontAlgn="auto" latinLnBrk="0" hangingPunct="1">
+              <a:lnSpc>
+                <a:spcPct val="100000"/>
+              </a:lnSpc>
+              <a:spcBef>
+                <a:spcPts val="0"/>
+              </a:spcBef>
+              <a:spcAft>
+                <a:spcPts val="0"/>
+              </a:spcAft>
+              <a:buClrTx/>
+              <a:buSzTx/>
+              <a:buFontTx/>
+              <a:buChar char="-"/>
+              <a:tabLst/>
+              <a:defRPr/>
+            </a:pPr>
+            <a:r>
+              <a:rPr lang="en-US" dirty="0"/>
+              <a:t> Do the rollback: </a:t>
+            </a:r>
+            <a:r>
+              <a:rPr lang="en-US" dirty="0" err="1"/>
+              <a:t>kubectl</a:t>
+            </a:r>
+            <a:r>
+              <a:rPr lang="en-US" dirty="0"/>
+              <a:t> rollout undo deployment </a:t>
+            </a:r>
+            <a:r>
+              <a:rPr lang="en-US" dirty="0" err="1"/>
+              <a:t>nginx</a:t>
+            </a:r>
+            <a:endParaRPr lang="en-US" dirty="0"/>
+          </a:p>
+          <a:p>
+            <a:pPr marL="285750" indent="-285750">
+              <a:buFontTx/>
+              <a:buChar char="-"/>
+            </a:pPr>
             <a:endParaRPr lang="en-US" dirty="0"/>
           </a:p>
         </p:txBody>
@@ -1347,78 +1444,19 @@
           <a:bodyPr/>
           <a:lstStyle/>
           <a:p>
-            <a:pPr marL="0" marR="0" lvl="0" indent="0" algn="ctr" defTabSz="3255485" rtl="0" eaLnBrk="1" fontAlgn="auto" latinLnBrk="0" hangingPunct="1">
-              <a:lnSpc>
-                <a:spcPct val="100000"/>
-              </a:lnSpc>
-              <a:spcBef>
-                <a:spcPts val="0"/>
-              </a:spcBef>
-              <a:spcAft>
-                <a:spcPts val="0"/>
-              </a:spcAft>
-              <a:buClrTx/>
-              <a:buSzTx/>
-              <a:buFontTx/>
-              <a:buNone/>
-              <a:tabLst/>
-              <a:defRPr/>
-            </a:pPr>
             <a:fld id="{7D8C2C35-2B8A-446E-BEC0-FD36716C29AC}" type="slidenum">
-              <a:rPr kumimoji="0" lang="de-DE" sz="2400" b="0" i="0" u="none" strike="noStrike" kern="1200" cap="none" spc="0" normalizeH="0" baseline="0" noProof="0">
-                <a:ln>
-                  <a:noFill/>
-                </a:ln>
-                <a:solidFill>
-                  <a:srgbClr val="000000"/>
-                </a:solidFill>
-                <a:effectLst/>
-                <a:uLnTx/>
-                <a:uFillTx/>
-                <a:latin typeface="Arial"/>
-                <a:ea typeface="+mn-ea"/>
-                <a:cs typeface="+mn-cs"/>
-              </a:rPr>
-              <a:pPr marL="0" marR="0" lvl="0" indent="0" algn="ctr" defTabSz="3255485" rtl="0" eaLnBrk="1" fontAlgn="auto" latinLnBrk="0" hangingPunct="1">
-                <a:lnSpc>
-                  <a:spcPct val="100000"/>
-                </a:lnSpc>
-                <a:spcBef>
-                  <a:spcPts val="0"/>
-                </a:spcBef>
-                <a:spcAft>
-                  <a:spcPts val="0"/>
-                </a:spcAft>
-                <a:buClrTx/>
-                <a:buSzTx/>
-                <a:buFontTx/>
-                <a:buNone/>
-                <a:tabLst/>
-                <a:defRPr/>
-              </a:pPr>
-              <a:t>13</a:t>
+              <a:rPr lang="de-DE" smtClean="0"/>
+              <a:pPr/>
+              <a:t>11</a:t>
             </a:fld>
-            <a:endParaRPr kumimoji="0" lang="de-DE" sz="2400" b="0" i="0" u="none" strike="noStrike" kern="1200" cap="none" spc="0" normalizeH="0" baseline="0" noProof="0" dirty="0">
-              <a:ln>
-                <a:noFill/>
-              </a:ln>
-              <a:solidFill>
-                <a:srgbClr val="000000"/>
-              </a:solidFill>
-              <a:effectLst/>
-              <a:uLnTx/>
-              <a:uFillTx/>
-              <a:latin typeface="Arial"/>
-              <a:ea typeface="+mn-ea"/>
-              <a:cs typeface="+mn-cs"/>
-            </a:endParaRPr>
+            <a:endParaRPr lang="de-DE" dirty="0"/>
           </a:p>
         </p:txBody>
       </p:sp>
     </p:spTree>
     <p:extLst>
       <p:ext uri="{BB962C8B-B14F-4D97-AF65-F5344CB8AC3E}">
-        <p14:creationId xmlns:p14="http://schemas.microsoft.com/office/powerpoint/2010/main" val="1269890851"/>
+        <p14:creationId xmlns:p14="http://schemas.microsoft.com/office/powerpoint/2010/main" val="3805946316"/>
       </p:ext>
     </p:extLst>
   </p:cSld>
@@ -1562,7 +1600,7 @@
     </p:spTree>
     <p:extLst>
       <p:ext uri="{BB962C8B-B14F-4D97-AF65-F5344CB8AC3E}">
-        <p14:creationId xmlns:p14="http://schemas.microsoft.com/office/powerpoint/2010/main" val="1342489642"/>
+        <p14:creationId xmlns:p14="http://schemas.microsoft.com/office/powerpoint/2010/main" val="1269890851"/>
       </p:ext>
     </p:extLst>
   </p:cSld>
@@ -1706,6 +1744,150 @@
     </p:spTree>
     <p:extLst>
       <p:ext uri="{BB962C8B-B14F-4D97-AF65-F5344CB8AC3E}">
+        <p14:creationId xmlns:p14="http://schemas.microsoft.com/office/powerpoint/2010/main" val="1342489642"/>
+      </p:ext>
+    </p:extLst>
+  </p:cSld>
+  <p:clrMapOvr>
+    <a:masterClrMapping/>
+  </p:clrMapOvr>
+</p:notes>
+</file>
+
+<file path=ppt/notesSlides/notesSlide14.xml><?xml version="1.0" encoding="utf-8"?>
+<p:notes xmlns:a="http://schemas.openxmlformats.org/drawingml/2006/main" xmlns:r="http://schemas.openxmlformats.org/officeDocument/2006/relationships" xmlns:p="http://schemas.openxmlformats.org/presentationml/2006/main">
+  <p:cSld>
+    <p:spTree>
+      <p:nvGrpSpPr>
+        <p:cNvPr id="1" name=""/>
+        <p:cNvGrpSpPr/>
+        <p:nvPr/>
+      </p:nvGrpSpPr>
+      <p:grpSpPr>
+        <a:xfrm>
+          <a:off x="0" y="0"/>
+          <a:ext cx="0" cy="0"/>
+          <a:chOff x="0" y="0"/>
+          <a:chExt cx="0" cy="0"/>
+        </a:xfrm>
+      </p:grpSpPr>
+      <p:sp>
+        <p:nvSpPr>
+          <p:cNvPr id="2" name="Slide Image Placeholder 1"/>
+          <p:cNvSpPr>
+            <a:spLocks noGrp="1" noRot="1" noChangeAspect="1"/>
+          </p:cNvSpPr>
+          <p:nvPr>
+            <p:ph type="sldImg"/>
+          </p:nvPr>
+        </p:nvSpPr>
+        <p:spPr/>
+      </p:sp>
+      <p:sp>
+        <p:nvSpPr>
+          <p:cNvPr id="3" name="Notes Placeholder 2"/>
+          <p:cNvSpPr>
+            <a:spLocks noGrp="1"/>
+          </p:cNvSpPr>
+          <p:nvPr>
+            <p:ph type="body" idx="1"/>
+          </p:nvPr>
+        </p:nvSpPr>
+        <p:spPr/>
+        <p:txBody>
+          <a:bodyPr/>
+          <a:lstStyle/>
+          <a:p>
+            <a:endParaRPr lang="en-US" dirty="0"/>
+          </a:p>
+        </p:txBody>
+      </p:sp>
+      <p:sp>
+        <p:nvSpPr>
+          <p:cNvPr id="4" name="Slide Number Placeholder 3"/>
+          <p:cNvSpPr>
+            <a:spLocks noGrp="1"/>
+          </p:cNvSpPr>
+          <p:nvPr>
+            <p:ph type="sldNum" sz="quarter" idx="10"/>
+          </p:nvPr>
+        </p:nvSpPr>
+        <p:spPr/>
+        <p:txBody>
+          <a:bodyPr/>
+          <a:lstStyle/>
+          <a:p>
+            <a:pPr marL="0" marR="0" lvl="0" indent="0" algn="ctr" defTabSz="3255485" rtl="0" eaLnBrk="1" fontAlgn="auto" latinLnBrk="0" hangingPunct="1">
+              <a:lnSpc>
+                <a:spcPct val="100000"/>
+              </a:lnSpc>
+              <a:spcBef>
+                <a:spcPts val="0"/>
+              </a:spcBef>
+              <a:spcAft>
+                <a:spcPts val="0"/>
+              </a:spcAft>
+              <a:buClrTx/>
+              <a:buSzTx/>
+              <a:buFontTx/>
+              <a:buNone/>
+              <a:tabLst/>
+              <a:defRPr/>
+            </a:pPr>
+            <a:fld id="{7D8C2C35-2B8A-446E-BEC0-FD36716C29AC}" type="slidenum">
+              <a:rPr kumimoji="0" lang="de-DE" sz="2400" b="0" i="0" u="none" strike="noStrike" kern="1200" cap="none" spc="0" normalizeH="0" baseline="0" noProof="0">
+                <a:ln>
+                  <a:noFill/>
+                </a:ln>
+                <a:solidFill>
+                  <a:srgbClr val="000000"/>
+                </a:solidFill>
+                <a:effectLst/>
+                <a:uLnTx/>
+                <a:uFillTx/>
+                <a:latin typeface="Arial"/>
+                <a:ea typeface="+mn-ea"/>
+                <a:cs typeface="+mn-cs"/>
+              </a:rPr>
+              <a:pPr marL="0" marR="0" lvl="0" indent="0" algn="ctr" defTabSz="3255485" rtl="0" eaLnBrk="1" fontAlgn="auto" latinLnBrk="0" hangingPunct="1">
+                <a:lnSpc>
+                  <a:spcPct val="100000"/>
+                </a:lnSpc>
+                <a:spcBef>
+                  <a:spcPts val="0"/>
+                </a:spcBef>
+                <a:spcAft>
+                  <a:spcPts val="0"/>
+                </a:spcAft>
+                <a:buClrTx/>
+                <a:buSzTx/>
+                <a:buFontTx/>
+                <a:buNone/>
+                <a:tabLst/>
+                <a:defRPr/>
+              </a:pPr>
+              <a:t>16</a:t>
+            </a:fld>
+            <a:endParaRPr kumimoji="0" lang="de-DE" sz="2400" b="0" i="0" u="none" strike="noStrike" kern="1200" cap="none" spc="0" normalizeH="0" baseline="0" noProof="0" dirty="0">
+              <a:ln>
+                <a:noFill/>
+              </a:ln>
+              <a:solidFill>
+                <a:srgbClr val="000000"/>
+              </a:solidFill>
+              <a:effectLst/>
+              <a:uLnTx/>
+              <a:uFillTx/>
+              <a:latin typeface="Arial"/>
+              <a:ea typeface="+mn-ea"/>
+              <a:cs typeface="+mn-cs"/>
+            </a:endParaRPr>
+          </a:p>
+        </p:txBody>
+      </p:sp>
+    </p:spTree>
+    <p:extLst>
+      <p:ext uri="{BB962C8B-B14F-4D97-AF65-F5344CB8AC3E}">
         <p14:creationId xmlns:p14="http://schemas.microsoft.com/office/powerpoint/2010/main" val="861195006"/>
       </p:ext>
     </p:extLst>
@@ -1716,7 +1898,7 @@
 </p:notes>
 </file>
 
-<file path=ppt/notesSlides/notesSlide14.xml><?xml version="1.0" encoding="utf-8"?>
+<file path=ppt/notesSlides/notesSlide15.xml><?xml version="1.0" encoding="utf-8"?>
 <p:notes xmlns:a="http://schemas.openxmlformats.org/drawingml/2006/main" xmlns:r="http://schemas.openxmlformats.org/officeDocument/2006/relationships" xmlns:p="http://schemas.openxmlformats.org/presentationml/2006/main">
   <p:cSld>
     <p:spTree>
@@ -1751,7 +1933,7 @@
             <a:fld id="{7D8C2C35-2B8A-446E-BEC0-FD36716C29AC}" type="slidenum">
               <a:rPr lang="de-DE" smtClean="0"/>
               <a:pPr/>
-              <a:t>16</a:t>
+              <a:t>17</a:t>
             </a:fld>
             <a:endParaRPr lang="de-DE" dirty="0"/>
           </a:p>
@@ -18223,6 +18405,1523 @@
       </p:grpSpPr>
       <p:sp>
         <p:nvSpPr>
+          <p:cNvPr id="3" name="Title 2">
+            <a:extLst>
+              <a:ext uri="{FF2B5EF4-FFF2-40B4-BE49-F238E27FC236}">
+                <a16:creationId xmlns:a16="http://schemas.microsoft.com/office/drawing/2014/main" id="{759B34B4-C129-4847-964B-4D41E2982158}"/>
+              </a:ext>
+            </a:extLst>
+          </p:cNvPr>
+          <p:cNvSpPr>
+            <a:spLocks noGrp="1"/>
+          </p:cNvSpPr>
+          <p:nvPr>
+            <p:ph type="title"/>
+          </p:nvPr>
+        </p:nvSpPr>
+        <p:spPr>
+          <a:xfrm>
+            <a:off x="504001" y="504000"/>
+            <a:ext cx="11186476" cy="369332"/>
+          </a:xfrm>
+        </p:spPr>
+        <p:txBody>
+          <a:bodyPr/>
+          <a:lstStyle/>
+          <a:p>
+            <a:r>
+              <a:rPr lang="en-US" dirty="0"/>
+              <a:t>Automatic Scaling</a:t>
+            </a:r>
+          </a:p>
+        </p:txBody>
+      </p:sp>
+      <p:pic>
+        <p:nvPicPr>
+          <p:cNvPr id="1032" name="Picture 8" descr="Related image">
+            <a:extLst>
+              <a:ext uri="{FF2B5EF4-FFF2-40B4-BE49-F238E27FC236}">
+                <a16:creationId xmlns:a16="http://schemas.microsoft.com/office/drawing/2014/main" id="{0274FF14-135E-47F9-872A-76CDB252063E}"/>
+              </a:ext>
+            </a:extLst>
+          </p:cNvPr>
+          <p:cNvPicPr>
+            <a:picLocks noChangeAspect="1" noChangeArrowheads="1"/>
+          </p:cNvPicPr>
+          <p:nvPr/>
+        </p:nvPicPr>
+        <p:blipFill>
+          <a:blip r:embed="rId3">
+            <a:extLst>
+              <a:ext uri="{28A0092B-C50C-407E-A947-70E740481C1C}">
+                <a14:useLocalDpi xmlns:a14="http://schemas.microsoft.com/office/drawing/2010/main" val="0"/>
+              </a:ext>
+            </a:extLst>
+          </a:blip>
+          <a:srcRect/>
+          <a:stretch>
+            <a:fillRect/>
+          </a:stretch>
+        </p:blipFill>
+        <p:spPr bwMode="auto">
+          <a:xfrm>
+            <a:off x="1892420" y="1058944"/>
+            <a:ext cx="1555920" cy="1259288"/>
+          </a:xfrm>
+          <a:prstGeom prst="rect">
+            <a:avLst/>
+          </a:prstGeom>
+          <a:gradFill>
+            <a:gsLst>
+              <a:gs pos="0">
+                <a:schemeClr val="accent3">
+                  <a:lumMod val="20000"/>
+                  <a:lumOff val="80000"/>
+                </a:schemeClr>
+              </a:gs>
+              <a:gs pos="50000">
+                <a:schemeClr val="accent3">
+                  <a:lumMod val="20000"/>
+                  <a:lumOff val="80000"/>
+                </a:schemeClr>
+              </a:gs>
+              <a:gs pos="100000">
+                <a:schemeClr val="bg1"/>
+              </a:gs>
+            </a:gsLst>
+            <a:lin ang="5400000" scaled="1"/>
+          </a:gradFill>
+          <a:ln>
+            <a:solidFill>
+              <a:schemeClr val="tx1"/>
+            </a:solidFill>
+          </a:ln>
+        </p:spPr>
+      </p:pic>
+      <p:pic>
+        <p:nvPicPr>
+          <p:cNvPr id="19" name="Group 24">
+            <a:extLst>
+              <a:ext uri="{FF2B5EF4-FFF2-40B4-BE49-F238E27FC236}">
+                <a16:creationId xmlns:a16="http://schemas.microsoft.com/office/drawing/2014/main" id="{1CE2F06B-986D-44E7-9132-0090E7873369}"/>
+              </a:ext>
+            </a:extLst>
+          </p:cNvPr>
+          <p:cNvPicPr>
+            <a:picLocks noChangeArrowheads="1"/>
+          </p:cNvPicPr>
+          <p:nvPr/>
+        </p:nvPicPr>
+        <p:blipFill>
+          <a:blip r:embed="rId4">
+            <a:extLst>
+              <a:ext uri="{28A0092B-C50C-407E-A947-70E740481C1C}">
+                <a14:useLocalDpi xmlns:a14="http://schemas.microsoft.com/office/drawing/2010/main" val="0"/>
+              </a:ext>
+            </a:extLst>
+          </a:blip>
+          <a:srcRect/>
+          <a:stretch>
+            <a:fillRect/>
+          </a:stretch>
+        </p:blipFill>
+        <p:spPr bwMode="auto">
+          <a:xfrm>
+            <a:off x="2196241" y="2765630"/>
+            <a:ext cx="948278" cy="1148264"/>
+          </a:xfrm>
+          <a:prstGeom prst="rect">
+            <a:avLst/>
+          </a:prstGeom>
+          <a:noFill/>
+          <a:extLst>
+            <a:ext uri="{909E8E84-426E-40DD-AFC4-6F175D3DCCD1}">
+              <a14:hiddenFill xmlns:a14="http://schemas.microsoft.com/office/drawing/2010/main">
+                <a:solidFill>
+                  <a:srgbClr val="FFFFFF"/>
+                </a:solidFill>
+              </a14:hiddenFill>
+            </a:ext>
+          </a:extLst>
+        </p:spPr>
+      </p:pic>
+      <p:pic>
+        <p:nvPicPr>
+          <p:cNvPr id="24" name="Picture 2" descr="https://vignette.wikia.nocookie.net/nintendo/images/8/83/KoopaNSMB.png/revision/latest?cb=20110724132501&amp;path-prefix=en">
+            <a:extLst>
+              <a:ext uri="{FF2B5EF4-FFF2-40B4-BE49-F238E27FC236}">
+                <a16:creationId xmlns:a16="http://schemas.microsoft.com/office/drawing/2014/main" id="{9F8E4E4A-6D61-4E40-A861-09235628CA4A}"/>
+              </a:ext>
+            </a:extLst>
+          </p:cNvPr>
+          <p:cNvPicPr>
+            <a:picLocks noChangeAspect="1" noChangeArrowheads="1"/>
+          </p:cNvPicPr>
+          <p:nvPr/>
+        </p:nvPicPr>
+        <p:blipFill>
+          <a:blip r:embed="rId5">
+            <a:extLst>
+              <a:ext uri="{28A0092B-C50C-407E-A947-70E740481C1C}">
+                <a14:useLocalDpi xmlns:a14="http://schemas.microsoft.com/office/drawing/2010/main" val="0"/>
+              </a:ext>
+            </a:extLst>
+          </a:blip>
+          <a:srcRect/>
+          <a:stretch>
+            <a:fillRect/>
+          </a:stretch>
+        </p:blipFill>
+        <p:spPr bwMode="auto">
+          <a:xfrm>
+            <a:off x="4355406" y="4760882"/>
+            <a:ext cx="770113" cy="1225374"/>
+          </a:xfrm>
+          <a:prstGeom prst="rect">
+            <a:avLst/>
+          </a:prstGeom>
+          <a:noFill/>
+          <a:extLst>
+            <a:ext uri="{909E8E84-426E-40DD-AFC4-6F175D3DCCD1}">
+              <a14:hiddenFill xmlns:a14="http://schemas.microsoft.com/office/drawing/2010/main">
+                <a:solidFill>
+                  <a:srgbClr val="FFFFFF"/>
+                </a:solidFill>
+              </a14:hiddenFill>
+            </a:ext>
+          </a:extLst>
+        </p:spPr>
+      </p:pic>
+      <p:pic>
+        <p:nvPicPr>
+          <p:cNvPr id="25" name="Picture 2" descr="https://vignette.wikia.nocookie.net/nintendo/images/8/83/KoopaNSMB.png/revision/latest?cb=20110724132501&amp;path-prefix=en">
+            <a:extLst>
+              <a:ext uri="{FF2B5EF4-FFF2-40B4-BE49-F238E27FC236}">
+                <a16:creationId xmlns:a16="http://schemas.microsoft.com/office/drawing/2014/main" id="{51D6EAF4-A063-4BAE-ADC9-7A9BB74CB684}"/>
+              </a:ext>
+            </a:extLst>
+          </p:cNvPr>
+          <p:cNvPicPr>
+            <a:picLocks noChangeAspect="1" noChangeArrowheads="1"/>
+          </p:cNvPicPr>
+          <p:nvPr/>
+        </p:nvPicPr>
+        <p:blipFill>
+          <a:blip r:embed="rId5">
+            <a:extLst>
+              <a:ext uri="{28A0092B-C50C-407E-A947-70E740481C1C}">
+                <a14:useLocalDpi xmlns:a14="http://schemas.microsoft.com/office/drawing/2010/main" val="0"/>
+              </a:ext>
+            </a:extLst>
+          </a:blip>
+          <a:srcRect/>
+          <a:stretch>
+            <a:fillRect/>
+          </a:stretch>
+        </p:blipFill>
+        <p:spPr bwMode="auto">
+          <a:xfrm>
+            <a:off x="210889" y="4748223"/>
+            <a:ext cx="770113" cy="1225374"/>
+          </a:xfrm>
+          <a:prstGeom prst="rect">
+            <a:avLst/>
+          </a:prstGeom>
+          <a:noFill/>
+          <a:extLst>
+            <a:ext uri="{909E8E84-426E-40DD-AFC4-6F175D3DCCD1}">
+              <a14:hiddenFill xmlns:a14="http://schemas.microsoft.com/office/drawing/2010/main">
+                <a:solidFill>
+                  <a:srgbClr val="FFFFFF"/>
+                </a:solidFill>
+              </a14:hiddenFill>
+            </a:ext>
+          </a:extLst>
+        </p:spPr>
+      </p:pic>
+      <p:pic>
+        <p:nvPicPr>
+          <p:cNvPr id="9" name="Picture 8">
+            <a:extLst>
+              <a:ext uri="{FF2B5EF4-FFF2-40B4-BE49-F238E27FC236}">
+                <a16:creationId xmlns:a16="http://schemas.microsoft.com/office/drawing/2014/main" id="{3F0B92B0-4033-4E1F-93D0-9C8F6375D10F}"/>
+              </a:ext>
+            </a:extLst>
+          </p:cNvPr>
+          <p:cNvPicPr>
+            <a:picLocks noChangeAspect="1"/>
+          </p:cNvPicPr>
+          <p:nvPr/>
+        </p:nvPicPr>
+        <p:blipFill>
+          <a:blip r:embed="rId6"/>
+          <a:stretch>
+            <a:fillRect/>
+          </a:stretch>
+        </p:blipFill>
+        <p:spPr>
+          <a:xfrm>
+            <a:off x="7772699" y="1133789"/>
+            <a:ext cx="3289047" cy="4590422"/>
+          </a:xfrm>
+          <a:prstGeom prst="rect">
+            <a:avLst/>
+          </a:prstGeom>
+          <a:ln w="12700">
+            <a:solidFill>
+              <a:schemeClr val="tx1"/>
+            </a:solidFill>
+          </a:ln>
+        </p:spPr>
+      </p:pic>
+      <p:sp>
+        <p:nvSpPr>
+          <p:cNvPr id="11" name="Oval 10">
+            <a:extLst>
+              <a:ext uri="{FF2B5EF4-FFF2-40B4-BE49-F238E27FC236}">
+                <a16:creationId xmlns:a16="http://schemas.microsoft.com/office/drawing/2014/main" id="{633288C2-9400-4935-9EE4-25CAC2AA9E8D}"/>
+              </a:ext>
+            </a:extLst>
+          </p:cNvPr>
+          <p:cNvSpPr/>
+          <p:nvPr/>
+        </p:nvSpPr>
+        <p:spPr bwMode="gray">
+          <a:xfrm>
+            <a:off x="2408540" y="2816083"/>
+            <a:ext cx="523679" cy="523679"/>
+          </a:xfrm>
+          <a:prstGeom prst="ellipse">
+            <a:avLst/>
+          </a:prstGeom>
+          <a:solidFill>
+            <a:schemeClr val="bg1"/>
+          </a:solidFill>
+          <a:ln w="25400" algn="ctr">
+            <a:solidFill>
+              <a:srgbClr val="FF0000"/>
+            </a:solidFill>
+            <a:miter lim="800000"/>
+            <a:headEnd/>
+            <a:tailEnd/>
+          </a:ln>
+        </p:spPr>
+        <p:txBody>
+          <a:bodyPr lIns="90000" tIns="72000" rIns="90000" bIns="72000" rtlCol="0" anchor="ctr"/>
+          <a:lstStyle/>
+          <a:p>
+            <a:pPr marR="0" algn="ctr" defTabSz="914400" eaLnBrk="1" fontAlgn="base" latinLnBrk="0" hangingPunct="1">
+              <a:lnSpc>
+                <a:spcPct val="100000"/>
+              </a:lnSpc>
+              <a:spcBef>
+                <a:spcPct val="50000"/>
+              </a:spcBef>
+              <a:spcAft>
+                <a:spcPct val="0"/>
+              </a:spcAft>
+              <a:buClr>
+                <a:srgbClr val="F0AB00"/>
+              </a:buClr>
+              <a:buSzPct val="80000"/>
+              <a:tabLst/>
+            </a:pPr>
+            <a:r>
+              <a:rPr kumimoji="0" lang="en-US" sz="2800" b="1" i="0" u="none" strike="noStrike" kern="0" cap="none" spc="0" normalizeH="0" baseline="0" noProof="0" dirty="0">
+                <a:ln>
+                  <a:noFill/>
+                </a:ln>
+                <a:effectLst/>
+                <a:uLnTx/>
+                <a:uFillTx/>
+                <a:ea typeface="Arial Unicode MS" pitchFamily="34" charset="-128"/>
+                <a:cs typeface="Arial Unicode MS" pitchFamily="34" charset="-128"/>
+              </a:rPr>
+              <a:t>3</a:t>
+            </a:r>
+            <a:endParaRPr kumimoji="0" lang="en-DE" sz="2800" b="1" i="0" u="none" strike="noStrike" kern="0" cap="none" spc="0" normalizeH="0" baseline="0" noProof="0" dirty="0" err="1">
+              <a:ln>
+                <a:noFill/>
+              </a:ln>
+              <a:effectLst/>
+              <a:uLnTx/>
+              <a:uFillTx/>
+              <a:ea typeface="Arial Unicode MS" pitchFamily="34" charset="-128"/>
+              <a:cs typeface="Arial Unicode MS" pitchFamily="34" charset="-128"/>
+            </a:endParaRPr>
+          </a:p>
+        </p:txBody>
+      </p:sp>
+      <p:cxnSp>
+        <p:nvCxnSpPr>
+          <p:cNvPr id="13" name="Straight Arrow Connector 12">
+            <a:extLst>
+              <a:ext uri="{FF2B5EF4-FFF2-40B4-BE49-F238E27FC236}">
+                <a16:creationId xmlns:a16="http://schemas.microsoft.com/office/drawing/2014/main" id="{16FEA55D-B262-474C-8295-B0DE47737754}"/>
+              </a:ext>
+            </a:extLst>
+          </p:cNvPr>
+          <p:cNvCxnSpPr>
+            <a:cxnSpLocks/>
+            <a:stCxn id="44" idx="1"/>
+            <a:endCxn id="11" idx="6"/>
+          </p:cNvCxnSpPr>
+          <p:nvPr/>
+        </p:nvCxnSpPr>
+        <p:spPr>
+          <a:xfrm flipH="1">
+            <a:off x="2932219" y="3077921"/>
+            <a:ext cx="1791787" cy="2"/>
+          </a:xfrm>
+          <a:prstGeom prst="straightConnector1">
+            <a:avLst/>
+          </a:prstGeom>
+          <a:ln w="79375">
+            <a:solidFill>
+              <a:schemeClr val="tx1"/>
+            </a:solidFill>
+            <a:headEnd type="none" w="med" len="med"/>
+            <a:tailEnd type="triangle"/>
+          </a:ln>
+        </p:spPr>
+        <p:style>
+          <a:lnRef idx="1">
+            <a:schemeClr val="accent1"/>
+          </a:lnRef>
+          <a:fillRef idx="0">
+            <a:schemeClr val="accent1"/>
+          </a:fillRef>
+          <a:effectRef idx="0">
+            <a:schemeClr val="accent1"/>
+          </a:effectRef>
+          <a:fontRef idx="minor">
+            <a:schemeClr val="tx1"/>
+          </a:fontRef>
+        </p:style>
+      </p:cxnSp>
+      <p:sp>
+        <p:nvSpPr>
+          <p:cNvPr id="34" name="Oval 33">
+            <a:extLst>
+              <a:ext uri="{FF2B5EF4-FFF2-40B4-BE49-F238E27FC236}">
+                <a16:creationId xmlns:a16="http://schemas.microsoft.com/office/drawing/2014/main" id="{BA722EA3-E317-42CC-9279-3F6FE003FB04}"/>
+              </a:ext>
+            </a:extLst>
+          </p:cNvPr>
+          <p:cNvSpPr/>
+          <p:nvPr/>
+        </p:nvSpPr>
+        <p:spPr bwMode="gray">
+          <a:xfrm>
+            <a:off x="2404593" y="2816082"/>
+            <a:ext cx="523679" cy="523679"/>
+          </a:xfrm>
+          <a:prstGeom prst="ellipse">
+            <a:avLst/>
+          </a:prstGeom>
+          <a:solidFill>
+            <a:schemeClr val="bg1"/>
+          </a:solidFill>
+          <a:ln w="25400" algn="ctr">
+            <a:solidFill>
+              <a:srgbClr val="FF0000"/>
+            </a:solidFill>
+            <a:miter lim="800000"/>
+            <a:headEnd/>
+            <a:tailEnd/>
+          </a:ln>
+        </p:spPr>
+        <p:txBody>
+          <a:bodyPr lIns="90000" tIns="72000" rIns="90000" bIns="72000" rtlCol="0" anchor="ctr"/>
+          <a:lstStyle/>
+          <a:p>
+            <a:pPr marR="0" algn="ctr" defTabSz="914400" eaLnBrk="1" fontAlgn="base" latinLnBrk="0" hangingPunct="1">
+              <a:lnSpc>
+                <a:spcPct val="100000"/>
+              </a:lnSpc>
+              <a:spcBef>
+                <a:spcPct val="50000"/>
+              </a:spcBef>
+              <a:spcAft>
+                <a:spcPct val="0"/>
+              </a:spcAft>
+              <a:buClr>
+                <a:srgbClr val="F0AB00"/>
+              </a:buClr>
+              <a:buSzPct val="80000"/>
+              <a:tabLst/>
+            </a:pPr>
+            <a:r>
+              <a:rPr kumimoji="0" lang="en-US" sz="2800" b="1" i="0" u="none" strike="noStrike" kern="0" cap="none" spc="0" normalizeH="0" baseline="0" noProof="0" dirty="0">
+                <a:ln>
+                  <a:noFill/>
+                </a:ln>
+                <a:effectLst/>
+                <a:uLnTx/>
+                <a:uFillTx/>
+                <a:ea typeface="Arial Unicode MS" pitchFamily="34" charset="-128"/>
+                <a:cs typeface="Arial Unicode MS" pitchFamily="34" charset="-128"/>
+              </a:rPr>
+              <a:t>5</a:t>
+            </a:r>
+            <a:endParaRPr kumimoji="0" lang="en-DE" sz="2800" b="1" i="0" u="none" strike="noStrike" kern="0" cap="none" spc="0" normalizeH="0" baseline="0" noProof="0" dirty="0" err="1">
+              <a:ln>
+                <a:noFill/>
+              </a:ln>
+              <a:effectLst/>
+              <a:uLnTx/>
+              <a:uFillTx/>
+              <a:ea typeface="Arial Unicode MS" pitchFamily="34" charset="-128"/>
+              <a:cs typeface="Arial Unicode MS" pitchFamily="34" charset="-128"/>
+            </a:endParaRPr>
+          </a:p>
+        </p:txBody>
+      </p:sp>
+      <p:cxnSp>
+        <p:nvCxnSpPr>
+          <p:cNvPr id="15" name="Straight Connector 14">
+            <a:extLst>
+              <a:ext uri="{FF2B5EF4-FFF2-40B4-BE49-F238E27FC236}">
+                <a16:creationId xmlns:a16="http://schemas.microsoft.com/office/drawing/2014/main" id="{CF107E9E-C6FE-4BA7-92D9-C815E3616BA0}"/>
+              </a:ext>
+            </a:extLst>
+          </p:cNvPr>
+          <p:cNvCxnSpPr>
+            <a:stCxn id="1032" idx="2"/>
+            <a:endCxn id="19" idx="0"/>
+          </p:cNvCxnSpPr>
+          <p:nvPr/>
+        </p:nvCxnSpPr>
+        <p:spPr>
+          <a:xfrm>
+            <a:off x="2670380" y="2318232"/>
+            <a:ext cx="0" cy="447398"/>
+          </a:xfrm>
+          <a:prstGeom prst="line">
+            <a:avLst/>
+          </a:prstGeom>
+          <a:ln w="9525">
+            <a:solidFill>
+              <a:schemeClr val="tx1"/>
+            </a:solidFill>
+            <a:headEnd type="none" w="med" len="med"/>
+            <a:tailEnd type="none" w="med" len="med"/>
+          </a:ln>
+        </p:spPr>
+        <p:style>
+          <a:lnRef idx="1">
+            <a:schemeClr val="accent1"/>
+          </a:lnRef>
+          <a:fillRef idx="0">
+            <a:schemeClr val="accent1"/>
+          </a:fillRef>
+          <a:effectRef idx="0">
+            <a:schemeClr val="accent1"/>
+          </a:effectRef>
+          <a:fontRef idx="minor">
+            <a:schemeClr val="tx1"/>
+          </a:fontRef>
+        </p:style>
+      </p:cxnSp>
+      <p:cxnSp>
+        <p:nvCxnSpPr>
+          <p:cNvPr id="17" name="Connector: Elbow 16">
+            <a:extLst>
+              <a:ext uri="{FF2B5EF4-FFF2-40B4-BE49-F238E27FC236}">
+                <a16:creationId xmlns:a16="http://schemas.microsoft.com/office/drawing/2014/main" id="{A3779464-7CCB-42A3-977A-AC6B0AECE2CB}"/>
+              </a:ext>
+            </a:extLst>
+          </p:cNvPr>
+          <p:cNvCxnSpPr>
+            <a:stCxn id="22" idx="0"/>
+            <a:endCxn id="21" idx="0"/>
+          </p:cNvCxnSpPr>
+          <p:nvPr/>
+        </p:nvCxnSpPr>
+        <p:spPr>
+          <a:xfrm rot="5400000" flipH="1" flipV="1">
+            <a:off x="2670380" y="3901687"/>
+            <a:ext cx="12700" cy="1718391"/>
+          </a:xfrm>
+          <a:prstGeom prst="bentConnector3">
+            <a:avLst>
+              <a:gd name="adj1" fmla="val 3669236"/>
+            </a:avLst>
+          </a:prstGeom>
+          <a:ln w="9525">
+            <a:solidFill>
+              <a:schemeClr val="tx1"/>
+            </a:solidFill>
+            <a:headEnd type="none" w="med" len="med"/>
+            <a:tailEnd type="none" w="med" len="med"/>
+          </a:ln>
+        </p:spPr>
+        <p:style>
+          <a:lnRef idx="1">
+            <a:schemeClr val="accent1"/>
+          </a:lnRef>
+          <a:fillRef idx="0">
+            <a:schemeClr val="accent1"/>
+          </a:fillRef>
+          <a:effectRef idx="0">
+            <a:schemeClr val="accent1"/>
+          </a:effectRef>
+          <a:fontRef idx="minor">
+            <a:schemeClr val="tx1"/>
+          </a:fontRef>
+        </p:style>
+      </p:cxnSp>
+      <p:cxnSp>
+        <p:nvCxnSpPr>
+          <p:cNvPr id="28" name="Straight Connector 27">
+            <a:extLst>
+              <a:ext uri="{FF2B5EF4-FFF2-40B4-BE49-F238E27FC236}">
+                <a16:creationId xmlns:a16="http://schemas.microsoft.com/office/drawing/2014/main" id="{894DACAE-8812-41C6-AB92-A47D450FA4C3}"/>
+              </a:ext>
+            </a:extLst>
+          </p:cNvPr>
+          <p:cNvCxnSpPr>
+            <a:stCxn id="19" idx="2"/>
+            <a:endCxn id="1026" idx="0"/>
+          </p:cNvCxnSpPr>
+          <p:nvPr/>
+        </p:nvCxnSpPr>
+        <p:spPr>
+          <a:xfrm>
+            <a:off x="2670380" y="3913894"/>
+            <a:ext cx="1" cy="846988"/>
+          </a:xfrm>
+          <a:prstGeom prst="line">
+            <a:avLst/>
+          </a:prstGeom>
+          <a:ln w="9525">
+            <a:solidFill>
+              <a:schemeClr val="tx1"/>
+            </a:solidFill>
+            <a:headEnd type="none" w="med" len="med"/>
+            <a:tailEnd type="none" w="med" len="med"/>
+          </a:ln>
+        </p:spPr>
+        <p:style>
+          <a:lnRef idx="1">
+            <a:schemeClr val="accent1"/>
+          </a:lnRef>
+          <a:fillRef idx="0">
+            <a:schemeClr val="accent1"/>
+          </a:fillRef>
+          <a:effectRef idx="0">
+            <a:schemeClr val="accent1"/>
+          </a:effectRef>
+          <a:fontRef idx="minor">
+            <a:schemeClr val="tx1"/>
+          </a:fontRef>
+        </p:style>
+      </p:cxnSp>
+      <p:cxnSp>
+        <p:nvCxnSpPr>
+          <p:cNvPr id="36" name="Connector: Elbow 35">
+            <a:extLst>
+              <a:ext uri="{FF2B5EF4-FFF2-40B4-BE49-F238E27FC236}">
+                <a16:creationId xmlns:a16="http://schemas.microsoft.com/office/drawing/2014/main" id="{829872FC-12B6-4E46-A00F-8912967A3DCB}"/>
+              </a:ext>
+            </a:extLst>
+          </p:cNvPr>
+          <p:cNvCxnSpPr>
+            <a:stCxn id="25" idx="0"/>
+            <a:endCxn id="24" idx="0"/>
+          </p:cNvCxnSpPr>
+          <p:nvPr/>
+        </p:nvCxnSpPr>
+        <p:spPr>
+          <a:xfrm rot="16200000" flipH="1">
+            <a:off x="2661874" y="2682294"/>
+            <a:ext cx="12659" cy="4144517"/>
+          </a:xfrm>
+          <a:prstGeom prst="bentConnector3">
+            <a:avLst>
+              <a:gd name="adj1" fmla="val -3523398"/>
+            </a:avLst>
+          </a:prstGeom>
+          <a:ln w="9525">
+            <a:solidFill>
+              <a:schemeClr val="tx1"/>
+            </a:solidFill>
+            <a:headEnd type="none" w="med" len="med"/>
+            <a:tailEnd type="none" w="med" len="med"/>
+          </a:ln>
+        </p:spPr>
+        <p:style>
+          <a:lnRef idx="1">
+            <a:schemeClr val="accent1"/>
+          </a:lnRef>
+          <a:fillRef idx="0">
+            <a:schemeClr val="accent1"/>
+          </a:fillRef>
+          <a:effectRef idx="0">
+            <a:schemeClr val="accent1"/>
+          </a:effectRef>
+          <a:fontRef idx="minor">
+            <a:schemeClr val="tx1"/>
+          </a:fontRef>
+        </p:style>
+      </p:cxnSp>
+      <p:pic>
+        <p:nvPicPr>
+          <p:cNvPr id="1026" name="Picture 2" descr="https://vignette.wikia.nocookie.net/nintendo/images/8/83/KoopaNSMB.png/revision/latest?cb=20110724132501&amp;path-prefix=en">
+            <a:extLst>
+              <a:ext uri="{FF2B5EF4-FFF2-40B4-BE49-F238E27FC236}">
+                <a16:creationId xmlns:a16="http://schemas.microsoft.com/office/drawing/2014/main" id="{DD6E3BCC-6AF7-43FC-8693-FDBFC61D5D1A}"/>
+              </a:ext>
+            </a:extLst>
+          </p:cNvPr>
+          <p:cNvPicPr>
+            <a:picLocks noChangeAspect="1" noChangeArrowheads="1"/>
+          </p:cNvPicPr>
+          <p:nvPr/>
+        </p:nvPicPr>
+        <p:blipFill>
+          <a:blip r:embed="rId5">
+            <a:extLst>
+              <a:ext uri="{28A0092B-C50C-407E-A947-70E740481C1C}">
+                <a14:useLocalDpi xmlns:a14="http://schemas.microsoft.com/office/drawing/2010/main" val="0"/>
+              </a:ext>
+            </a:extLst>
+          </a:blip>
+          <a:srcRect/>
+          <a:stretch>
+            <a:fillRect/>
+          </a:stretch>
+        </p:blipFill>
+        <p:spPr bwMode="auto">
+          <a:xfrm>
+            <a:off x="2285324" y="4760882"/>
+            <a:ext cx="770113" cy="1225374"/>
+          </a:xfrm>
+          <a:prstGeom prst="rect">
+            <a:avLst/>
+          </a:prstGeom>
+          <a:noFill/>
+          <a:extLst>
+            <a:ext uri="{909E8E84-426E-40DD-AFC4-6F175D3DCCD1}">
+              <a14:hiddenFill xmlns:a14="http://schemas.microsoft.com/office/drawing/2010/main">
+                <a:solidFill>
+                  <a:srgbClr val="FFFFFF"/>
+                </a:solidFill>
+              </a14:hiddenFill>
+            </a:ext>
+          </a:extLst>
+        </p:spPr>
+      </p:pic>
+      <p:pic>
+        <p:nvPicPr>
+          <p:cNvPr id="21" name="Picture 2" descr="https://vignette.wikia.nocookie.net/nintendo/images/8/83/KoopaNSMB.png/revision/latest?cb=20110724132501&amp;path-prefix=en">
+            <a:extLst>
+              <a:ext uri="{FF2B5EF4-FFF2-40B4-BE49-F238E27FC236}">
+                <a16:creationId xmlns:a16="http://schemas.microsoft.com/office/drawing/2014/main" id="{8841EF5E-EF2A-4681-B4EC-703BFCAC0310}"/>
+              </a:ext>
+            </a:extLst>
+          </p:cNvPr>
+          <p:cNvPicPr>
+            <a:picLocks noChangeAspect="1" noChangeArrowheads="1"/>
+          </p:cNvPicPr>
+          <p:nvPr/>
+        </p:nvPicPr>
+        <p:blipFill>
+          <a:blip r:embed="rId5">
+            <a:extLst>
+              <a:ext uri="{28A0092B-C50C-407E-A947-70E740481C1C}">
+                <a14:useLocalDpi xmlns:a14="http://schemas.microsoft.com/office/drawing/2010/main" val="0"/>
+              </a:ext>
+            </a:extLst>
+          </a:blip>
+          <a:srcRect/>
+          <a:stretch>
+            <a:fillRect/>
+          </a:stretch>
+        </p:blipFill>
+        <p:spPr bwMode="auto">
+          <a:xfrm>
+            <a:off x="3144519" y="4760882"/>
+            <a:ext cx="770113" cy="1225374"/>
+          </a:xfrm>
+          <a:prstGeom prst="rect">
+            <a:avLst/>
+          </a:prstGeom>
+          <a:noFill/>
+          <a:extLst>
+            <a:ext uri="{909E8E84-426E-40DD-AFC4-6F175D3DCCD1}">
+              <a14:hiddenFill xmlns:a14="http://schemas.microsoft.com/office/drawing/2010/main">
+                <a:solidFill>
+                  <a:srgbClr val="FFFFFF"/>
+                </a:solidFill>
+              </a14:hiddenFill>
+            </a:ext>
+          </a:extLst>
+        </p:spPr>
+      </p:pic>
+      <p:pic>
+        <p:nvPicPr>
+          <p:cNvPr id="22" name="Picture 2" descr="https://vignette.wikia.nocookie.net/nintendo/images/8/83/KoopaNSMB.png/revision/latest?cb=20110724132501&amp;path-prefix=en">
+            <a:extLst>
+              <a:ext uri="{FF2B5EF4-FFF2-40B4-BE49-F238E27FC236}">
+                <a16:creationId xmlns:a16="http://schemas.microsoft.com/office/drawing/2014/main" id="{B58730FA-E81E-44BB-ADA2-AB07C1DB30EF}"/>
+              </a:ext>
+            </a:extLst>
+          </p:cNvPr>
+          <p:cNvPicPr>
+            <a:picLocks noChangeAspect="1" noChangeArrowheads="1"/>
+          </p:cNvPicPr>
+          <p:nvPr/>
+        </p:nvPicPr>
+        <p:blipFill>
+          <a:blip r:embed="rId5">
+            <a:extLst>
+              <a:ext uri="{28A0092B-C50C-407E-A947-70E740481C1C}">
+                <a14:useLocalDpi xmlns:a14="http://schemas.microsoft.com/office/drawing/2010/main" val="0"/>
+              </a:ext>
+            </a:extLst>
+          </a:blip>
+          <a:srcRect/>
+          <a:stretch>
+            <a:fillRect/>
+          </a:stretch>
+        </p:blipFill>
+        <p:spPr bwMode="auto">
+          <a:xfrm>
+            <a:off x="1426128" y="4760882"/>
+            <a:ext cx="770113" cy="1225374"/>
+          </a:xfrm>
+          <a:prstGeom prst="rect">
+            <a:avLst/>
+          </a:prstGeom>
+          <a:noFill/>
+          <a:extLst>
+            <a:ext uri="{909E8E84-426E-40DD-AFC4-6F175D3DCCD1}">
+              <a14:hiddenFill xmlns:a14="http://schemas.microsoft.com/office/drawing/2010/main">
+                <a:solidFill>
+                  <a:srgbClr val="FFFFFF"/>
+                </a:solidFill>
+              </a14:hiddenFill>
+            </a:ext>
+          </a:extLst>
+        </p:spPr>
+      </p:pic>
+      <p:pic>
+        <p:nvPicPr>
+          <p:cNvPr id="44" name="Picture 43">
+            <a:extLst>
+              <a:ext uri="{FF2B5EF4-FFF2-40B4-BE49-F238E27FC236}">
+                <a16:creationId xmlns:a16="http://schemas.microsoft.com/office/drawing/2014/main" id="{64F51F5E-8492-472F-9873-D9FA491F3BC1}"/>
+              </a:ext>
+            </a:extLst>
+          </p:cNvPr>
+          <p:cNvPicPr>
+            <a:picLocks noChangeAspect="1"/>
+          </p:cNvPicPr>
+          <p:nvPr/>
+        </p:nvPicPr>
+        <p:blipFill>
+          <a:blip r:embed="rId7"/>
+          <a:stretch>
+            <a:fillRect/>
+          </a:stretch>
+        </p:blipFill>
+        <p:spPr>
+          <a:xfrm>
+            <a:off x="4724006" y="2362081"/>
+            <a:ext cx="1734735" cy="1431679"/>
+          </a:xfrm>
+          <a:prstGeom prst="rect">
+            <a:avLst/>
+          </a:prstGeom>
+        </p:spPr>
+      </p:pic>
+      <p:sp>
+        <p:nvSpPr>
+          <p:cNvPr id="46" name="Speech Bubble: Rectangle 45">
+            <a:extLst>
+              <a:ext uri="{FF2B5EF4-FFF2-40B4-BE49-F238E27FC236}">
+                <a16:creationId xmlns:a16="http://schemas.microsoft.com/office/drawing/2014/main" id="{0E60D679-5B28-40FF-B255-C6404868D6C6}"/>
+              </a:ext>
+            </a:extLst>
+          </p:cNvPr>
+          <p:cNvSpPr/>
+          <p:nvPr/>
+        </p:nvSpPr>
+        <p:spPr bwMode="gray">
+          <a:xfrm>
+            <a:off x="4542109" y="1061603"/>
+            <a:ext cx="2414903" cy="584641"/>
+          </a:xfrm>
+          <a:prstGeom prst="wedgeRectCallout">
+            <a:avLst>
+              <a:gd name="adj1" fmla="val -17464"/>
+              <a:gd name="adj2" fmla="val 186971"/>
+            </a:avLst>
+          </a:prstGeom>
+          <a:ln>
+            <a:headEnd/>
+            <a:tailEnd/>
+          </a:ln>
+        </p:spPr>
+        <p:style>
+          <a:lnRef idx="2">
+            <a:schemeClr val="accent5"/>
+          </a:lnRef>
+          <a:fillRef idx="1">
+            <a:schemeClr val="lt1"/>
+          </a:fillRef>
+          <a:effectRef idx="0">
+            <a:schemeClr val="accent5"/>
+          </a:effectRef>
+          <a:fontRef idx="minor">
+            <a:schemeClr val="dk1"/>
+          </a:fontRef>
+        </p:style>
+        <p:txBody>
+          <a:bodyPr lIns="90000" tIns="72000" rIns="90000" bIns="72000" rtlCol="0" anchor="ctr"/>
+          <a:lstStyle/>
+          <a:p>
+            <a:pPr marL="0" marR="0" lvl="0" indent="0" algn="ctr" defTabSz="914400" rtl="0" eaLnBrk="1" fontAlgn="base" latinLnBrk="0" hangingPunct="1">
+              <a:lnSpc>
+                <a:spcPct val="100000"/>
+              </a:lnSpc>
+              <a:spcBef>
+                <a:spcPct val="50000"/>
+              </a:spcBef>
+              <a:spcAft>
+                <a:spcPct val="0"/>
+              </a:spcAft>
+              <a:buClr>
+                <a:srgbClr val="F0AB00"/>
+              </a:buClr>
+              <a:buSzPct val="80000"/>
+              <a:buFontTx/>
+              <a:buNone/>
+              <a:tabLst/>
+              <a:defRPr/>
+            </a:pPr>
+            <a:r>
+              <a:rPr kumimoji="0" lang="en-US" sz="1800" b="1" i="0" u="none" strike="noStrike" kern="0" cap="none" spc="0" normalizeH="0" baseline="0" noProof="0" dirty="0">
+                <a:ln>
+                  <a:noFill/>
+                </a:ln>
+                <a:solidFill>
+                  <a:srgbClr val="000000"/>
+                </a:solidFill>
+                <a:effectLst/>
+                <a:uLnTx/>
+                <a:uFillTx/>
+                <a:latin typeface="Arial"/>
+                <a:ea typeface="Arial Unicode MS" pitchFamily="34" charset="-128"/>
+                <a:cs typeface="Arial Unicode MS" pitchFamily="34" charset="-128"/>
+              </a:rPr>
+              <a:t>Horizontal Pod </a:t>
+            </a:r>
+            <a:r>
+              <a:rPr kumimoji="0" lang="en-US" sz="1800" b="1" i="0" u="none" strike="noStrike" kern="0" cap="none" spc="0" normalizeH="0" baseline="0" noProof="0" dirty="0" err="1">
+                <a:ln>
+                  <a:noFill/>
+                </a:ln>
+                <a:solidFill>
+                  <a:srgbClr val="000000"/>
+                </a:solidFill>
+                <a:effectLst/>
+                <a:uLnTx/>
+                <a:uFillTx/>
+                <a:latin typeface="Arial"/>
+                <a:ea typeface="Arial Unicode MS" pitchFamily="34" charset="-128"/>
+                <a:cs typeface="Arial Unicode MS" pitchFamily="34" charset="-128"/>
+              </a:rPr>
+              <a:t>Autoscaler</a:t>
+            </a:r>
+            <a:r>
+              <a:rPr kumimoji="0" lang="en-US" sz="1800" b="1" i="0" u="none" strike="noStrike" kern="0" cap="none" spc="0" normalizeH="0" baseline="0" noProof="0" dirty="0">
+                <a:ln>
+                  <a:noFill/>
+                </a:ln>
+                <a:solidFill>
+                  <a:srgbClr val="000000"/>
+                </a:solidFill>
+                <a:effectLst/>
+                <a:uLnTx/>
+                <a:uFillTx/>
+                <a:latin typeface="Arial"/>
+                <a:ea typeface="Arial Unicode MS" pitchFamily="34" charset="-128"/>
+                <a:cs typeface="Arial Unicode MS" pitchFamily="34" charset="-128"/>
+              </a:rPr>
+              <a:t> (HPA)</a:t>
+            </a:r>
+            <a:endParaRPr kumimoji="0" lang="en-US" sz="1800" b="0" i="0" u="none" strike="noStrike" kern="0" cap="none" spc="0" normalizeH="0" baseline="0" noProof="0" dirty="0">
+              <a:ln>
+                <a:noFill/>
+              </a:ln>
+              <a:solidFill>
+                <a:srgbClr val="000000"/>
+              </a:solidFill>
+              <a:effectLst/>
+              <a:uLnTx/>
+              <a:uFillTx/>
+              <a:latin typeface="Arial"/>
+              <a:ea typeface="Arial Unicode MS" pitchFamily="34" charset="-128"/>
+              <a:cs typeface="Arial Unicode MS" pitchFamily="34" charset="-128"/>
+            </a:endParaRPr>
+          </a:p>
+        </p:txBody>
+      </p:sp>
+    </p:spTree>
+    <p:extLst>
+      <p:ext uri="{BB962C8B-B14F-4D97-AF65-F5344CB8AC3E}">
+        <p14:creationId xmlns:p14="http://schemas.microsoft.com/office/powerpoint/2010/main" val="1154447808"/>
+      </p:ext>
+    </p:extLst>
+  </p:cSld>
+  <p:clrMapOvr>
+    <a:masterClrMapping/>
+  </p:clrMapOvr>
+  <p:timing>
+    <p:tnLst>
+      <p:par>
+        <p:cTn id="1" dur="indefinite" restart="never" nodeType="tmRoot">
+          <p:childTnLst>
+            <p:seq concurrent="1" nextAc="seek">
+              <p:cTn id="2" dur="indefinite" nodeType="mainSeq">
+                <p:childTnLst>
+                  <p:par>
+                    <p:cTn id="3" fill="hold">
+                      <p:stCondLst>
+                        <p:cond delay="indefinite"/>
+                      </p:stCondLst>
+                      <p:childTnLst>
+                        <p:par>
+                          <p:cTn id="4" fill="hold">
+                            <p:stCondLst>
+                              <p:cond delay="0"/>
+                            </p:stCondLst>
+                            <p:childTnLst>
+                              <p:par>
+                                <p:cTn id="5" presetID="6" presetClass="emph" presetSubtype="0" fill="hold" nodeType="clickEffect">
+                                  <p:stCondLst>
+                                    <p:cond delay="0"/>
+                                  </p:stCondLst>
+                                  <p:childTnLst>
+                                    <p:animScale>
+                                      <p:cBhvr>
+                                        <p:cTn id="6" dur="2000" fill="hold"/>
+                                        <p:tgtEl>
+                                          <p:spTgt spid="1026"/>
+                                        </p:tgtEl>
+                                      </p:cBhvr>
+                                      <p:by x="150000" y="150000"/>
+                                    </p:animScale>
+                                  </p:childTnLst>
+                                </p:cTn>
+                              </p:par>
+                              <p:par>
+                                <p:cTn id="7" presetID="6" presetClass="emph" presetSubtype="0" fill="hold" nodeType="withEffect">
+                                  <p:stCondLst>
+                                    <p:cond delay="0"/>
+                                  </p:stCondLst>
+                                  <p:childTnLst>
+                                    <p:animScale>
+                                      <p:cBhvr>
+                                        <p:cTn id="8" dur="2000" fill="hold"/>
+                                        <p:tgtEl>
+                                          <p:spTgt spid="21"/>
+                                        </p:tgtEl>
+                                      </p:cBhvr>
+                                      <p:by x="150000" y="150000"/>
+                                    </p:animScale>
+                                  </p:childTnLst>
+                                </p:cTn>
+                              </p:par>
+                              <p:par>
+                                <p:cTn id="9" presetID="6" presetClass="emph" presetSubtype="0" fill="hold" nodeType="withEffect">
+                                  <p:stCondLst>
+                                    <p:cond delay="0"/>
+                                  </p:stCondLst>
+                                  <p:childTnLst>
+                                    <p:animScale>
+                                      <p:cBhvr>
+                                        <p:cTn id="10" dur="2000" fill="hold"/>
+                                        <p:tgtEl>
+                                          <p:spTgt spid="22"/>
+                                        </p:tgtEl>
+                                      </p:cBhvr>
+                                      <p:by x="150000" y="150000"/>
+                                    </p:animScale>
+                                  </p:childTnLst>
+                                </p:cTn>
+                              </p:par>
+                            </p:childTnLst>
+                          </p:cTn>
+                        </p:par>
+                      </p:childTnLst>
+                    </p:cTn>
+                  </p:par>
+                  <p:par>
+                    <p:cTn id="11" fill="hold">
+                      <p:stCondLst>
+                        <p:cond delay="indefinite"/>
+                      </p:stCondLst>
+                      <p:childTnLst>
+                        <p:par>
+                          <p:cTn id="12" fill="hold">
+                            <p:stCondLst>
+                              <p:cond delay="0"/>
+                            </p:stCondLst>
+                            <p:childTnLst>
+                              <p:par>
+                                <p:cTn id="13" presetID="1" presetClass="entr" presetSubtype="0" fill="hold" nodeType="clickEffect">
+                                  <p:stCondLst>
+                                    <p:cond delay="0"/>
+                                  </p:stCondLst>
+                                  <p:childTnLst>
+                                    <p:set>
+                                      <p:cBhvr>
+                                        <p:cTn id="14" dur="1" fill="hold">
+                                          <p:stCondLst>
+                                            <p:cond delay="0"/>
+                                          </p:stCondLst>
+                                        </p:cTn>
+                                        <p:tgtEl>
+                                          <p:spTgt spid="44"/>
+                                        </p:tgtEl>
+                                        <p:attrNameLst>
+                                          <p:attrName>style.visibility</p:attrName>
+                                        </p:attrNameLst>
+                                      </p:cBhvr>
+                                      <p:to>
+                                        <p:strVal val="visible"/>
+                                      </p:to>
+                                    </p:set>
+                                  </p:childTnLst>
+                                </p:cTn>
+                              </p:par>
+                              <p:par>
+                                <p:cTn id="15" presetID="1" presetClass="entr" presetSubtype="0" fill="hold" grpId="0" nodeType="withEffect">
+                                  <p:stCondLst>
+                                    <p:cond delay="0"/>
+                                  </p:stCondLst>
+                                  <p:childTnLst>
+                                    <p:set>
+                                      <p:cBhvr>
+                                        <p:cTn id="16" dur="1" fill="hold">
+                                          <p:stCondLst>
+                                            <p:cond delay="0"/>
+                                          </p:stCondLst>
+                                        </p:cTn>
+                                        <p:tgtEl>
+                                          <p:spTgt spid="46"/>
+                                        </p:tgtEl>
+                                        <p:attrNameLst>
+                                          <p:attrName>style.visibility</p:attrName>
+                                        </p:attrNameLst>
+                                      </p:cBhvr>
+                                      <p:to>
+                                        <p:strVal val="visible"/>
+                                      </p:to>
+                                    </p:set>
+                                  </p:childTnLst>
+                                </p:cTn>
+                              </p:par>
+                              <p:par>
+                                <p:cTn id="17" presetID="1" presetClass="entr" presetSubtype="0" fill="hold" nodeType="withEffect">
+                                  <p:stCondLst>
+                                    <p:cond delay="0"/>
+                                  </p:stCondLst>
+                                  <p:childTnLst>
+                                    <p:set>
+                                      <p:cBhvr>
+                                        <p:cTn id="18" dur="1" fill="hold">
+                                          <p:stCondLst>
+                                            <p:cond delay="0"/>
+                                          </p:stCondLst>
+                                        </p:cTn>
+                                        <p:tgtEl>
+                                          <p:spTgt spid="13"/>
+                                        </p:tgtEl>
+                                        <p:attrNameLst>
+                                          <p:attrName>style.visibility</p:attrName>
+                                        </p:attrNameLst>
+                                      </p:cBhvr>
+                                      <p:to>
+                                        <p:strVal val="visible"/>
+                                      </p:to>
+                                    </p:set>
+                                  </p:childTnLst>
+                                </p:cTn>
+                              </p:par>
+                            </p:childTnLst>
+                          </p:cTn>
+                        </p:par>
+                      </p:childTnLst>
+                    </p:cTn>
+                  </p:par>
+                  <p:par>
+                    <p:cTn id="19" fill="hold">
+                      <p:stCondLst>
+                        <p:cond delay="indefinite"/>
+                      </p:stCondLst>
+                      <p:childTnLst>
+                        <p:par>
+                          <p:cTn id="20" fill="hold">
+                            <p:stCondLst>
+                              <p:cond delay="0"/>
+                            </p:stCondLst>
+                            <p:childTnLst>
+                              <p:par>
+                                <p:cTn id="21" presetID="22" presetClass="entr" presetSubtype="4" fill="hold" grpId="0" nodeType="clickEffect">
+                                  <p:stCondLst>
+                                    <p:cond delay="0"/>
+                                  </p:stCondLst>
+                                  <p:childTnLst>
+                                    <p:set>
+                                      <p:cBhvr>
+                                        <p:cTn id="22" dur="1" fill="hold">
+                                          <p:stCondLst>
+                                            <p:cond delay="0"/>
+                                          </p:stCondLst>
+                                        </p:cTn>
+                                        <p:tgtEl>
+                                          <p:spTgt spid="34"/>
+                                        </p:tgtEl>
+                                        <p:attrNameLst>
+                                          <p:attrName>style.visibility</p:attrName>
+                                        </p:attrNameLst>
+                                      </p:cBhvr>
+                                      <p:to>
+                                        <p:strVal val="visible"/>
+                                      </p:to>
+                                    </p:set>
+                                    <p:animEffect transition="in" filter="wipe(down)">
+                                      <p:cBhvr>
+                                        <p:cTn id="23" dur="500"/>
+                                        <p:tgtEl>
+                                          <p:spTgt spid="34"/>
+                                        </p:tgtEl>
+                                      </p:cBhvr>
+                                    </p:animEffect>
+                                  </p:childTnLst>
+                                </p:cTn>
+                              </p:par>
+                            </p:childTnLst>
+                          </p:cTn>
+                        </p:par>
+                      </p:childTnLst>
+                    </p:cTn>
+                  </p:par>
+                  <p:par>
+                    <p:cTn id="24" fill="hold">
+                      <p:stCondLst>
+                        <p:cond delay="indefinite"/>
+                      </p:stCondLst>
+                      <p:childTnLst>
+                        <p:par>
+                          <p:cTn id="25" fill="hold">
+                            <p:stCondLst>
+                              <p:cond delay="0"/>
+                            </p:stCondLst>
+                            <p:childTnLst>
+                              <p:par>
+                                <p:cTn id="26" presetID="2" presetClass="entr" presetSubtype="4" fill="hold" nodeType="clickEffect">
+                                  <p:stCondLst>
+                                    <p:cond delay="0"/>
+                                  </p:stCondLst>
+                                  <p:childTnLst>
+                                    <p:set>
+                                      <p:cBhvr>
+                                        <p:cTn id="27" dur="1" fill="hold">
+                                          <p:stCondLst>
+                                            <p:cond delay="0"/>
+                                          </p:stCondLst>
+                                        </p:cTn>
+                                        <p:tgtEl>
+                                          <p:spTgt spid="24"/>
+                                        </p:tgtEl>
+                                        <p:attrNameLst>
+                                          <p:attrName>style.visibility</p:attrName>
+                                        </p:attrNameLst>
+                                      </p:cBhvr>
+                                      <p:to>
+                                        <p:strVal val="visible"/>
+                                      </p:to>
+                                    </p:set>
+                                    <p:anim calcmode="lin" valueType="num">
+                                      <p:cBhvr additive="base">
+                                        <p:cTn id="28" dur="500" fill="hold"/>
+                                        <p:tgtEl>
+                                          <p:spTgt spid="24"/>
+                                        </p:tgtEl>
+                                        <p:attrNameLst>
+                                          <p:attrName>ppt_x</p:attrName>
+                                        </p:attrNameLst>
+                                      </p:cBhvr>
+                                      <p:tavLst>
+                                        <p:tav tm="0">
+                                          <p:val>
+                                            <p:strVal val="#ppt_x"/>
+                                          </p:val>
+                                        </p:tav>
+                                        <p:tav tm="100000">
+                                          <p:val>
+                                            <p:strVal val="#ppt_x"/>
+                                          </p:val>
+                                        </p:tav>
+                                      </p:tavLst>
+                                    </p:anim>
+                                    <p:anim calcmode="lin" valueType="num">
+                                      <p:cBhvr additive="base">
+                                        <p:cTn id="29" dur="500" fill="hold"/>
+                                        <p:tgtEl>
+                                          <p:spTgt spid="24"/>
+                                        </p:tgtEl>
+                                        <p:attrNameLst>
+                                          <p:attrName>ppt_y</p:attrName>
+                                        </p:attrNameLst>
+                                      </p:cBhvr>
+                                      <p:tavLst>
+                                        <p:tav tm="0">
+                                          <p:val>
+                                            <p:strVal val="1+#ppt_h/2"/>
+                                          </p:val>
+                                        </p:tav>
+                                        <p:tav tm="100000">
+                                          <p:val>
+                                            <p:strVal val="#ppt_y"/>
+                                          </p:val>
+                                        </p:tav>
+                                      </p:tavLst>
+                                    </p:anim>
+                                  </p:childTnLst>
+                                </p:cTn>
+                              </p:par>
+                              <p:par>
+                                <p:cTn id="30" presetID="2" presetClass="entr" presetSubtype="4" fill="hold" nodeType="withEffect">
+                                  <p:stCondLst>
+                                    <p:cond delay="0"/>
+                                  </p:stCondLst>
+                                  <p:childTnLst>
+                                    <p:set>
+                                      <p:cBhvr>
+                                        <p:cTn id="31" dur="1" fill="hold">
+                                          <p:stCondLst>
+                                            <p:cond delay="0"/>
+                                          </p:stCondLst>
+                                        </p:cTn>
+                                        <p:tgtEl>
+                                          <p:spTgt spid="25"/>
+                                        </p:tgtEl>
+                                        <p:attrNameLst>
+                                          <p:attrName>style.visibility</p:attrName>
+                                        </p:attrNameLst>
+                                      </p:cBhvr>
+                                      <p:to>
+                                        <p:strVal val="visible"/>
+                                      </p:to>
+                                    </p:set>
+                                    <p:anim calcmode="lin" valueType="num">
+                                      <p:cBhvr additive="base">
+                                        <p:cTn id="32" dur="500" fill="hold"/>
+                                        <p:tgtEl>
+                                          <p:spTgt spid="25"/>
+                                        </p:tgtEl>
+                                        <p:attrNameLst>
+                                          <p:attrName>ppt_x</p:attrName>
+                                        </p:attrNameLst>
+                                      </p:cBhvr>
+                                      <p:tavLst>
+                                        <p:tav tm="0">
+                                          <p:val>
+                                            <p:strVal val="#ppt_x"/>
+                                          </p:val>
+                                        </p:tav>
+                                        <p:tav tm="100000">
+                                          <p:val>
+                                            <p:strVal val="#ppt_x"/>
+                                          </p:val>
+                                        </p:tav>
+                                      </p:tavLst>
+                                    </p:anim>
+                                    <p:anim calcmode="lin" valueType="num">
+                                      <p:cBhvr additive="base">
+                                        <p:cTn id="33" dur="500" fill="hold"/>
+                                        <p:tgtEl>
+                                          <p:spTgt spid="25"/>
+                                        </p:tgtEl>
+                                        <p:attrNameLst>
+                                          <p:attrName>ppt_y</p:attrName>
+                                        </p:attrNameLst>
+                                      </p:cBhvr>
+                                      <p:tavLst>
+                                        <p:tav tm="0">
+                                          <p:val>
+                                            <p:strVal val="1+#ppt_h/2"/>
+                                          </p:val>
+                                        </p:tav>
+                                        <p:tav tm="100000">
+                                          <p:val>
+                                            <p:strVal val="#ppt_y"/>
+                                          </p:val>
+                                        </p:tav>
+                                      </p:tavLst>
+                                    </p:anim>
+                                  </p:childTnLst>
+                                </p:cTn>
+                              </p:par>
+                            </p:childTnLst>
+                          </p:cTn>
+                        </p:par>
+                        <p:par>
+                          <p:cTn id="34" fill="hold">
+                            <p:stCondLst>
+                              <p:cond delay="500"/>
+                            </p:stCondLst>
+                            <p:childTnLst>
+                              <p:par>
+                                <p:cTn id="35" presetID="1" presetClass="entr" presetSubtype="0" fill="hold" nodeType="afterEffect">
+                                  <p:stCondLst>
+                                    <p:cond delay="0"/>
+                                  </p:stCondLst>
+                                  <p:childTnLst>
+                                    <p:set>
+                                      <p:cBhvr>
+                                        <p:cTn id="36" dur="1" fill="hold">
+                                          <p:stCondLst>
+                                            <p:cond delay="0"/>
+                                          </p:stCondLst>
+                                        </p:cTn>
+                                        <p:tgtEl>
+                                          <p:spTgt spid="36"/>
+                                        </p:tgtEl>
+                                        <p:attrNameLst>
+                                          <p:attrName>style.visibility</p:attrName>
+                                        </p:attrNameLst>
+                                      </p:cBhvr>
+                                      <p:to>
+                                        <p:strVal val="visible"/>
+                                      </p:to>
+                                    </p:set>
+                                  </p:childTnLst>
+                                </p:cTn>
+                              </p:par>
+                              <p:par>
+                                <p:cTn id="37" presetID="6" presetClass="emph" presetSubtype="0" fill="hold" nodeType="withEffect">
+                                  <p:stCondLst>
+                                    <p:cond delay="0"/>
+                                  </p:stCondLst>
+                                  <p:childTnLst>
+                                    <p:animScale>
+                                      <p:cBhvr>
+                                        <p:cTn id="38" dur="2000" fill="hold"/>
+                                        <p:tgtEl>
+                                          <p:spTgt spid="21"/>
+                                        </p:tgtEl>
+                                      </p:cBhvr>
+                                      <p:by x="100000" y="100000"/>
+                                    </p:animScale>
+                                  </p:childTnLst>
+                                </p:cTn>
+                              </p:par>
+                            </p:childTnLst>
+                          </p:cTn>
+                        </p:par>
+                      </p:childTnLst>
+                    </p:cTn>
+                  </p:par>
+                  <p:par>
+                    <p:cTn id="39" fill="hold">
+                      <p:stCondLst>
+                        <p:cond delay="indefinite"/>
+                      </p:stCondLst>
+                      <p:childTnLst>
+                        <p:par>
+                          <p:cTn id="40" fill="hold">
+                            <p:stCondLst>
+                              <p:cond delay="0"/>
+                            </p:stCondLst>
+                            <p:childTnLst>
+                              <p:par>
+                                <p:cTn id="41" presetID="1" presetClass="entr" presetSubtype="0" fill="hold" nodeType="clickEffect">
+                                  <p:stCondLst>
+                                    <p:cond delay="0"/>
+                                  </p:stCondLst>
+                                  <p:childTnLst>
+                                    <p:set>
+                                      <p:cBhvr>
+                                        <p:cTn id="42" dur="1" fill="hold">
+                                          <p:stCondLst>
+                                            <p:cond delay="0"/>
+                                          </p:stCondLst>
+                                        </p:cTn>
+                                        <p:tgtEl>
+                                          <p:spTgt spid="9"/>
+                                        </p:tgtEl>
+                                        <p:attrNameLst>
+                                          <p:attrName>style.visibility</p:attrName>
+                                        </p:attrNameLst>
+                                      </p:cBhvr>
+                                      <p:to>
+                                        <p:strVal val="visible"/>
+                                      </p:to>
+                                    </p:set>
+                                  </p:childTnLst>
+                                </p:cTn>
+                              </p:par>
+                            </p:childTnLst>
+                          </p:cTn>
+                        </p:par>
+                      </p:childTnLst>
+                    </p:cTn>
+                  </p:par>
+                </p:childTnLst>
+              </p:cTn>
+              <p:prevCondLst>
+                <p:cond evt="onPrev" delay="0">
+                  <p:tgtEl>
+                    <p:sldTgt/>
+                  </p:tgtEl>
+                </p:cond>
+              </p:prevCondLst>
+              <p:nextCondLst>
+                <p:cond evt="onNext" delay="0">
+                  <p:tgtEl>
+                    <p:sldTgt/>
+                  </p:tgtEl>
+                </p:cond>
+              </p:nextCondLst>
+            </p:seq>
+          </p:childTnLst>
+        </p:cTn>
+      </p:par>
+    </p:tnLst>
+    <p:bldLst>
+      <p:bldP spid="34" grpId="0" animBg="1"/>
+      <p:bldP spid="46" grpId="0" animBg="1"/>
+    </p:bldLst>
+  </p:timing>
+</p:sld>
+</file>
+
+<file path=ppt/slides/slide11.xml><?xml version="1.0" encoding="utf-8"?>
+<p:sld xmlns:a="http://schemas.openxmlformats.org/drawingml/2006/main" xmlns:r="http://schemas.openxmlformats.org/officeDocument/2006/relationships" xmlns:p="http://schemas.openxmlformats.org/presentationml/2006/main">
+  <p:cSld>
+    <p:spTree>
+      <p:nvGrpSpPr>
+        <p:cNvPr id="1" name=""/>
+        <p:cNvGrpSpPr/>
+        <p:nvPr/>
+      </p:nvGrpSpPr>
+      <p:grpSpPr>
+        <a:xfrm>
+          <a:off x="0" y="0"/>
+          <a:ext cx="0" cy="0"/>
+          <a:chOff x="0" y="0"/>
+          <a:chExt cx="0" cy="0"/>
+        </a:xfrm>
+      </p:grpSpPr>
+      <p:sp>
+        <p:nvSpPr>
           <p:cNvPr id="3" name="Title 2"/>
           <p:cNvSpPr>
             <a:spLocks noGrp="1"/>
@@ -18286,7 +19985,7 @@
 </p:sld>
 </file>
 
-<file path=ppt/slides/slide11.xml><?xml version="1.0" encoding="utf-8"?>
+<file path=ppt/slides/slide12.xml><?xml version="1.0" encoding="utf-8"?>
 <p:sld xmlns:a="http://schemas.openxmlformats.org/drawingml/2006/main" xmlns:r="http://schemas.openxmlformats.org/officeDocument/2006/relationships" xmlns:p="http://schemas.openxmlformats.org/presentationml/2006/main">
   <p:cSld>
     <p:spTree>
@@ -19200,7 +20899,7 @@
 </p:sld>
 </file>
 
-<file path=ppt/slides/slide12.xml><?xml version="1.0" encoding="utf-8"?>
+<file path=ppt/slides/slide13.xml><?xml version="1.0" encoding="utf-8"?>
 <p:sld xmlns:a="http://schemas.openxmlformats.org/drawingml/2006/main" xmlns:r="http://schemas.openxmlformats.org/officeDocument/2006/relationships" xmlns:p="http://schemas.openxmlformats.org/presentationml/2006/main">
   <p:cSld>
     <p:spTree>
@@ -19258,7 +20957,7 @@
 </p:sld>
 </file>
 
-<file path=ppt/slides/slide13.xml><?xml version="1.0" encoding="utf-8"?>
+<file path=ppt/slides/slide14.xml><?xml version="1.0" encoding="utf-8"?>
 <p:sld xmlns:a="http://schemas.openxmlformats.org/drawingml/2006/main" xmlns:r="http://schemas.openxmlformats.org/officeDocument/2006/relationships" xmlns:p="http://schemas.openxmlformats.org/presentationml/2006/main">
   <p:cSld>
     <p:bg>
@@ -20207,7 +21906,7 @@
 </p:sld>
 </file>
 
-<file path=ppt/slides/slide14.xml><?xml version="1.0" encoding="utf-8"?>
+<file path=ppt/slides/slide15.xml><?xml version="1.0" encoding="utf-8"?>
 <p:sld xmlns:a="http://schemas.openxmlformats.org/drawingml/2006/main" xmlns:r="http://schemas.openxmlformats.org/officeDocument/2006/relationships" xmlns:p="http://schemas.openxmlformats.org/presentationml/2006/main">
   <p:cSld>
     <p:spTree>
@@ -22006,7 +23705,7 @@
 </p:sld>
 </file>
 
-<file path=ppt/slides/slide15.xml><?xml version="1.0" encoding="utf-8"?>
+<file path=ppt/slides/slide16.xml><?xml version="1.0" encoding="utf-8"?>
 <p:sld xmlns:a="http://schemas.openxmlformats.org/drawingml/2006/main" xmlns:r="http://schemas.openxmlformats.org/officeDocument/2006/relationships" xmlns:p="http://schemas.openxmlformats.org/presentationml/2006/main">
   <p:cSld>
     <p:spTree>
@@ -25237,7 +26936,7 @@
 </p:sld>
 </file>
 
-<file path=ppt/slides/slide16.xml><?xml version="1.0" encoding="utf-8"?>
+<file path=ppt/slides/slide17.xml><?xml version="1.0" encoding="utf-8"?>
 <p:sld xmlns:a="http://schemas.openxmlformats.org/drawingml/2006/main" xmlns:r="http://schemas.openxmlformats.org/officeDocument/2006/relationships" xmlns:p="http://schemas.openxmlformats.org/presentationml/2006/main" show="0">
   <p:cSld>
     <p:spTree>
